--- a/Science_Teesside/Teaching_Packs/GROW/lessons/W4A/GROW_Science_Autumn1_W4A_Mechanisms.pptx
+++ b/Science_Teesside/Teaching_Packs/GROW/lessons/W4A/GROW_Science_Autumn1_W4A_Mechanisms.pptx
@@ -2,26 +2,26 @@
 <file path=ppt/presentation.xml><?xml version="1.0" encoding="utf-8"?>
 <p:presentation xmlns:p="http://schemas.openxmlformats.org/presentationml/2006/main">
   <p:sldMasterIdLst>
-    <p:sldMasterId xmlns:r="http://schemas.openxmlformats.org/officeDocument/2006/relationships" id="2147483648" r:id="R42aa32b064a44f69"/>
+    <p:sldMasterId xmlns:r="http://schemas.openxmlformats.org/officeDocument/2006/relationships" id="2147483648" r:id="R8c43d9b982c24880"/>
   </p:sldMasterIdLst>
   <p:notesMasterIdLst>
-    <p:notesMasterId xmlns:r="http://schemas.openxmlformats.org/officeDocument/2006/relationships" r:id="Rda639e25ef4344f8"/>
+    <p:notesMasterId xmlns:r="http://schemas.openxmlformats.org/officeDocument/2006/relationships" r:id="Rae870930b519470e"/>
   </p:notesMasterIdLst>
   <p:sldIdLst>
-    <p:sldId xmlns:r="http://schemas.openxmlformats.org/officeDocument/2006/relationships" id="256" r:id="R8ccf1c2d6f9a4308"/>
-    <p:sldId xmlns:r="http://schemas.openxmlformats.org/officeDocument/2006/relationships" id="257" r:id="Raf32b8a773d04f8d"/>
-    <p:sldId xmlns:r="http://schemas.openxmlformats.org/officeDocument/2006/relationships" id="258" r:id="R6f82a3075a1b482e"/>
-    <p:sldId xmlns:r="http://schemas.openxmlformats.org/officeDocument/2006/relationships" id="259" r:id="R2714b766e46a4ff1"/>
-    <p:sldId xmlns:r="http://schemas.openxmlformats.org/officeDocument/2006/relationships" id="260" r:id="R4e207cad8a7f49e7"/>
-    <p:sldId xmlns:r="http://schemas.openxmlformats.org/officeDocument/2006/relationships" id="261" r:id="R7478bd2deac3403c"/>
-    <p:sldId xmlns:r="http://schemas.openxmlformats.org/officeDocument/2006/relationships" id="262" r:id="Re98f59c8dfdc41b0"/>
-    <p:sldId xmlns:r="http://schemas.openxmlformats.org/officeDocument/2006/relationships" id="263" r:id="Rd114d6fdf1a34870"/>
-    <p:sldId xmlns:r="http://schemas.openxmlformats.org/officeDocument/2006/relationships" id="264" r:id="R8c183c9f10ff4061"/>
-    <p:sldId xmlns:r="http://schemas.openxmlformats.org/officeDocument/2006/relationships" id="265" r:id="R3e86a9f4c1944fc0"/>
-    <p:sldId xmlns:r="http://schemas.openxmlformats.org/officeDocument/2006/relationships" id="266" r:id="R742b30e56645480e"/>
-    <p:sldId xmlns:r="http://schemas.openxmlformats.org/officeDocument/2006/relationships" id="267" r:id="Rf8802f6c3c1b4c4d"/>
-    <p:sldId xmlns:r="http://schemas.openxmlformats.org/officeDocument/2006/relationships" id="268" r:id="R34c64fe1171c4f83"/>
-    <p:sldId xmlns:r="http://schemas.openxmlformats.org/officeDocument/2006/relationships" id="269" r:id="Rb9f4fcedb0c34b18"/>
+    <p:sldId xmlns:r="http://schemas.openxmlformats.org/officeDocument/2006/relationships" id="256" r:id="R1d52c89ee2ad4072"/>
+    <p:sldId xmlns:r="http://schemas.openxmlformats.org/officeDocument/2006/relationships" id="257" r:id="R28d4b7babc724734"/>
+    <p:sldId xmlns:r="http://schemas.openxmlformats.org/officeDocument/2006/relationships" id="258" r:id="R983b821d4ef9441e"/>
+    <p:sldId xmlns:r="http://schemas.openxmlformats.org/officeDocument/2006/relationships" id="259" r:id="R9943d547f86344d2"/>
+    <p:sldId xmlns:r="http://schemas.openxmlformats.org/officeDocument/2006/relationships" id="260" r:id="R5125401373f24e2d"/>
+    <p:sldId xmlns:r="http://schemas.openxmlformats.org/officeDocument/2006/relationships" id="261" r:id="R33de08af91204fdf"/>
+    <p:sldId xmlns:r="http://schemas.openxmlformats.org/officeDocument/2006/relationships" id="262" r:id="R47ea9ca9d9214190"/>
+    <p:sldId xmlns:r="http://schemas.openxmlformats.org/officeDocument/2006/relationships" id="263" r:id="R86949276c5b6419c"/>
+    <p:sldId xmlns:r="http://schemas.openxmlformats.org/officeDocument/2006/relationships" id="264" r:id="R9b00bb41defe4693"/>
+    <p:sldId xmlns:r="http://schemas.openxmlformats.org/officeDocument/2006/relationships" id="265" r:id="Re7991938bd664003"/>
+    <p:sldId xmlns:r="http://schemas.openxmlformats.org/officeDocument/2006/relationships" id="266" r:id="R7e6a73cc154c4823"/>
+    <p:sldId xmlns:r="http://schemas.openxmlformats.org/officeDocument/2006/relationships" id="267" r:id="Ra96c3c26348c4160"/>
+    <p:sldId xmlns:r="http://schemas.openxmlformats.org/officeDocument/2006/relationships" id="268" r:id="R70b537668eae4c45"/>
+    <p:sldId xmlns:r="http://schemas.openxmlformats.org/officeDocument/2006/relationships" id="269" r:id="R6646c541614e459f"/>
   </p:sldIdLst>
   <p:sldSz cx="12192000" cy="6858000"/>
   <p:notesSz cx="6858000" cy="9144000"/>
@@ -493,6 +493,14 @@
               <a:t>[/Sources]</a:t>
             </a:r>
           </a:p>
+          <a:p xmlns:a="http://schemas.openxmlformats.org/drawingml/2006/main">
+            <a:r>
+              <a:t>
+[Sources]
+Generated contextual illustration for this visual edition; not measured or recorded experimental evidence.
+[/Sources]</a:t>
+            </a:r>
+          </a:p>
         </p:txBody>
       </p:sp>
       <p:sp>
@@ -1923,7 +1931,7 @@
   </p:cSld>
   <p:clrMap bg1="lt1" tx1="dk1" bg2="lt2" tx2="dk2" accent1="accent1" accent2="accent2" accent3="accent3" accent4="accent4" accent5="accent5" accent6="accent6" hlink="hlink" folHlink="folHlink"/>
   <p:sldLayoutIdLst>
-    <p:sldLayoutId xmlns:r="http://schemas.openxmlformats.org/officeDocument/2006/relationships" id="2147483649" r:id="Ra96d35a9781a43e1"/>
+    <p:sldLayoutId xmlns:r="http://schemas.openxmlformats.org/officeDocument/2006/relationships" id="2147483649" r:id="R522a7f63e7f44e06"/>
   </p:sldLayoutIdLst>
   <p:txStyles>
     <p:titleStyle>
@@ -2456,7 +2464,7 @@
     <p:bg>
       <p:bgPr>
         <a:solidFill xmlns:a="http://schemas.openxmlformats.org/drawingml/2006/main">
-          <a:srgbClr val="F5F1E8"/>
+          <a:srgbClr val="FAF9F5"/>
         </a:solidFill>
       </p:bgPr>
     </p:bg>
@@ -2485,8 +2493,8 @@
         </p:nvSpPr>
         <p:spPr>
           <a:xfrm xmlns:a="http://schemas.openxmlformats.org/drawingml/2006/main">
-            <a:off x="609600" y="552450"/>
-            <a:ext cx="781050" cy="57150"/>
+            <a:off x="609600" y="733425"/>
+            <a:ext cx="781050" cy="38100"/>
           </a:xfrm>
           <a:prstGeom xmlns:a="http://schemas.openxmlformats.org/drawingml/2006/main" prst="rect">
             <a:avLst/>
@@ -2516,34 +2524,43 @@
         </p:nvSpPr>
         <p:spPr>
           <a:xfrm xmlns:a="http://schemas.openxmlformats.org/drawingml/2006/main">
-            <a:off x="609600" y="762000"/>
-            <a:ext cx="8572500" cy="285750"/>
-          </a:xfrm>
-          <a:prstGeom xmlns:a="http://schemas.openxmlformats.org/drawingml/2006/main" prst="rect">
-            <a:avLst/>
-          </a:prstGeom>
-          <a:noFill xmlns:a="http://schemas.openxmlformats.org/drawingml/2006/main"/>
-          <a:ln xmlns:a="http://schemas.openxmlformats.org/drawingml/2006/main" w="0">
-            <a:noFill/>
-            <a:prstDash val="solid"/>
-          </a:ln>
-        </p:spPr>
-        <p:txBody>
-          <a:bodyPr xmlns:a="http://schemas.openxmlformats.org/drawingml/2006/main" lIns="0" tIns="0" rIns="0" bIns="0" anchor="ctr"/>
-          <a:lstStyle xmlns:a="http://schemas.openxmlformats.org/drawingml/2006/main"/>
-          <a:p xmlns:a="http://schemas.openxmlformats.org/drawingml/2006/main">
-            <a:pPr>
-              <a:defRPr sz="1500" b="1">
+            <a:off x="609600" y="342900"/>
+            <a:ext cx="9334500" cy="304800"/>
+          </a:xfrm>
+          <a:prstGeom xmlns:a="http://schemas.openxmlformats.org/drawingml/2006/main" prst="rect">
+            <a:avLst/>
+          </a:prstGeom>
+          <a:noFill xmlns:a="http://schemas.openxmlformats.org/drawingml/2006/main"/>
+          <a:ln xmlns:a="http://schemas.openxmlformats.org/drawingml/2006/main" w="0">
+            <a:noFill/>
+            <a:prstDash val="solid"/>
+          </a:ln>
+        </p:spPr>
+        <p:txBody>
+          <a:bodyPr xmlns:a="http://schemas.openxmlformats.org/drawingml/2006/main" lIns="0" tIns="0" rIns="0" bIns="0" anchor="ctr">
+            <a:noAutofit/>
+          </a:bodyPr>
+          <a:lstStyle xmlns:a="http://schemas.openxmlformats.org/drawingml/2006/main"/>
+          <a:p xmlns:a="http://schemas.openxmlformats.org/drawingml/2006/main">
+            <a:pPr algn="l">
+              <a:buNone/>
+              <a:defRPr sz="1350" b="1">
                 <a:solidFill>
                   <a:srgbClr val="28685E"/>
                 </a:solidFill>
-              </a:defRPr>
-            </a:pPr>
-            <a:r>
-              <a:rPr sz="1500" b="1">
+                <a:latin typeface="Calibri"/>
+                <a:ea typeface="Calibri"/>
+                <a:cs typeface="Calibri"/>
+              </a:defRPr>
+            </a:pPr>
+            <a:r>
+              <a:rPr sz="1350" b="1">
                 <a:solidFill>
                   <a:srgbClr val="28685E"/>
                 </a:solidFill>
+                <a:latin typeface="Calibri"/>
+                <a:ea typeface="Calibri"/>
+                <a:cs typeface="Calibri"/>
               </a:rPr>
               <a:t>MADE BY MATT  /  GROW SCIENCE</a:t>
             </a:r>
@@ -2566,34 +2583,43 @@
         </p:nvSpPr>
         <p:spPr>
           <a:xfrm xmlns:a="http://schemas.openxmlformats.org/drawingml/2006/main">
-            <a:off x="609600" y="1352550"/>
-            <a:ext cx="10972800" cy="952500"/>
-          </a:xfrm>
-          <a:prstGeom xmlns:a="http://schemas.openxmlformats.org/drawingml/2006/main" prst="rect">
-            <a:avLst/>
-          </a:prstGeom>
-          <a:noFill xmlns:a="http://schemas.openxmlformats.org/drawingml/2006/main"/>
-          <a:ln xmlns:a="http://schemas.openxmlformats.org/drawingml/2006/main" w="0">
-            <a:noFill/>
-            <a:prstDash val="solid"/>
-          </a:ln>
-        </p:spPr>
-        <p:txBody>
-          <a:bodyPr xmlns:a="http://schemas.openxmlformats.org/drawingml/2006/main" lIns="0" tIns="0" rIns="0" bIns="0" anchor="ctr"/>
-          <a:lstStyle xmlns:a="http://schemas.openxmlformats.org/drawingml/2006/main"/>
-          <a:p xmlns:a="http://schemas.openxmlformats.org/drawingml/2006/main">
-            <a:pPr>
-              <a:defRPr sz="3750" b="1">
+            <a:off x="609600" y="990600"/>
+            <a:ext cx="10972800" cy="1000125"/>
+          </a:xfrm>
+          <a:prstGeom xmlns:a="http://schemas.openxmlformats.org/drawingml/2006/main" prst="rect">
+            <a:avLst/>
+          </a:prstGeom>
+          <a:noFill xmlns:a="http://schemas.openxmlformats.org/drawingml/2006/main"/>
+          <a:ln xmlns:a="http://schemas.openxmlformats.org/drawingml/2006/main" w="0">
+            <a:noFill/>
+            <a:prstDash val="solid"/>
+          </a:ln>
+        </p:spPr>
+        <p:txBody>
+          <a:bodyPr xmlns:a="http://schemas.openxmlformats.org/drawingml/2006/main" lIns="0" tIns="0" rIns="0" bIns="0" anchor="ctr">
+            <a:noAutofit/>
+          </a:bodyPr>
+          <a:lstStyle xmlns:a="http://schemas.openxmlformats.org/drawingml/2006/main"/>
+          <a:p xmlns:a="http://schemas.openxmlformats.org/drawingml/2006/main">
+            <a:pPr algn="l">
+              <a:buNone/>
+              <a:defRPr sz="3675" b="1">
                 <a:solidFill>
                   <a:srgbClr val="152B3A"/>
                 </a:solidFill>
-              </a:defRPr>
-            </a:pPr>
-            <a:r>
-              <a:rPr sz="3750" b="1">
+                <a:latin typeface="Calibri"/>
+                <a:ea typeface="Calibri"/>
+                <a:cs typeface="Calibri"/>
+              </a:defRPr>
+            </a:pPr>
+            <a:r>
+              <a:rPr sz="3675" b="1">
                 <a:solidFill>
                   <a:srgbClr val="152B3A"/>
                 </a:solidFill>
+                <a:latin typeface="Calibri"/>
+                <a:ea typeface="Calibri"/>
+                <a:cs typeface="Calibri"/>
               </a:rPr>
               <a:t>Levers, pulleys and gears</a:t>
             </a:r>
@@ -2616,14 +2642,14 @@
         </p:nvSpPr>
         <p:spPr>
           <a:xfrm xmlns:a="http://schemas.openxmlformats.org/drawingml/2006/main">
-            <a:off x="609600" y="6219825"/>
+            <a:off x="609600" y="6191250"/>
             <a:ext cx="10972800" cy="9525"/>
           </a:xfrm>
           <a:prstGeom xmlns:a="http://schemas.openxmlformats.org/drawingml/2006/main" prst="rect">
             <a:avLst/>
           </a:prstGeom>
           <a:solidFill xmlns:a="http://schemas.openxmlformats.org/drawingml/2006/main">
-            <a:srgbClr val="DCE7DD"/>
+            <a:srgbClr val="CEDBD3"/>
           </a:solidFill>
           <a:ln xmlns:a="http://schemas.openxmlformats.org/drawingml/2006/main" w="0">
             <a:noFill/>
@@ -2647,34 +2673,43 @@
         </p:nvSpPr>
         <p:spPr>
           <a:xfrm xmlns:a="http://schemas.openxmlformats.org/drawingml/2006/main">
-            <a:off x="609600" y="6381750"/>
-            <a:ext cx="9906000" cy="228600"/>
-          </a:xfrm>
-          <a:prstGeom xmlns:a="http://schemas.openxmlformats.org/drawingml/2006/main" prst="rect">
-            <a:avLst/>
-          </a:prstGeom>
-          <a:noFill xmlns:a="http://schemas.openxmlformats.org/drawingml/2006/main"/>
-          <a:ln xmlns:a="http://schemas.openxmlformats.org/drawingml/2006/main" w="0">
-            <a:noFill/>
-            <a:prstDash val="solid"/>
-          </a:ln>
-        </p:spPr>
-        <p:txBody>
-          <a:bodyPr xmlns:a="http://schemas.openxmlformats.org/drawingml/2006/main" lIns="0" tIns="0" rIns="0" bIns="0" anchor="ctr"/>
-          <a:lstStyle xmlns:a="http://schemas.openxmlformats.org/drawingml/2006/main"/>
-          <a:p xmlns:a="http://schemas.openxmlformats.org/drawingml/2006/main">
-            <a:pPr>
-              <a:defRPr sz="1275" b="0">
+            <a:off x="609600" y="6419850"/>
+            <a:ext cx="9525000" cy="219075"/>
+          </a:xfrm>
+          <a:prstGeom xmlns:a="http://schemas.openxmlformats.org/drawingml/2006/main" prst="rect">
+            <a:avLst/>
+          </a:prstGeom>
+          <a:noFill xmlns:a="http://schemas.openxmlformats.org/drawingml/2006/main"/>
+          <a:ln xmlns:a="http://schemas.openxmlformats.org/drawingml/2006/main" w="0">
+            <a:noFill/>
+            <a:prstDash val="solid"/>
+          </a:ln>
+        </p:spPr>
+        <p:txBody>
+          <a:bodyPr xmlns:a="http://schemas.openxmlformats.org/drawingml/2006/main" lIns="0" tIns="0" rIns="0" bIns="0" anchor="ctr">
+            <a:noAutofit/>
+          </a:bodyPr>
+          <a:lstStyle xmlns:a="http://schemas.openxmlformats.org/drawingml/2006/main"/>
+          <a:p xmlns:a="http://schemas.openxmlformats.org/drawingml/2006/main">
+            <a:pPr algn="l">
+              <a:buNone/>
+              <a:defRPr sz="1200" b="0">
                 <a:solidFill>
                   <a:srgbClr val="50616B"/>
                 </a:solidFill>
-              </a:defRPr>
-            </a:pPr>
-            <a:r>
-              <a:rPr sz="1275" b="0">
+                <a:latin typeface="Calibri"/>
+                <a:ea typeface="Calibri"/>
+                <a:cs typeface="Calibri"/>
+              </a:defRPr>
+            </a:pPr>
+            <a:r>
+              <a:rPr sz="1200" b="0">
                 <a:solidFill>
                   <a:srgbClr val="50616B"/>
                 </a:solidFill>
+                <a:latin typeface="Calibri"/>
+                <a:ea typeface="Calibri"/>
+                <a:cs typeface="Calibri"/>
               </a:rPr>
               <a:t>AUTUMN 1  ·  WEEK 4  ·  LESSON A</a:t>
             </a:r>
@@ -2697,27 +2732,33 @@
         </p:nvSpPr>
         <p:spPr>
           <a:xfrm xmlns:a="http://schemas.openxmlformats.org/drawingml/2006/main">
-            <a:off x="11106150" y="6362700"/>
-            <a:ext cx="476250" cy="238125"/>
-          </a:xfrm>
-          <a:prstGeom xmlns:a="http://schemas.openxmlformats.org/drawingml/2006/main" prst="rect">
-            <a:avLst/>
-          </a:prstGeom>
-          <a:noFill xmlns:a="http://schemas.openxmlformats.org/drawingml/2006/main"/>
-          <a:ln xmlns:a="http://schemas.openxmlformats.org/drawingml/2006/main" w="0">
-            <a:noFill/>
-            <a:prstDash val="solid"/>
-          </a:ln>
-        </p:spPr>
-        <p:txBody>
-          <a:bodyPr xmlns:a="http://schemas.openxmlformats.org/drawingml/2006/main" lIns="0" tIns="0" rIns="0" bIns="0" anchor="ctr"/>
-          <a:lstStyle xmlns:a="http://schemas.openxmlformats.org/drawingml/2006/main"/>
-          <a:p xmlns:a="http://schemas.openxmlformats.org/drawingml/2006/main">
-            <a:pPr>
+            <a:off x="11106150" y="6400800"/>
+            <a:ext cx="476250" cy="247650"/>
+          </a:xfrm>
+          <a:prstGeom xmlns:a="http://schemas.openxmlformats.org/drawingml/2006/main" prst="rect">
+            <a:avLst/>
+          </a:prstGeom>
+          <a:noFill xmlns:a="http://schemas.openxmlformats.org/drawingml/2006/main"/>
+          <a:ln xmlns:a="http://schemas.openxmlformats.org/drawingml/2006/main" w="0">
+            <a:noFill/>
+            <a:prstDash val="solid"/>
+          </a:ln>
+        </p:spPr>
+        <p:txBody>
+          <a:bodyPr xmlns:a="http://schemas.openxmlformats.org/drawingml/2006/main" lIns="0" tIns="0" rIns="0" bIns="0" anchor="ctr">
+            <a:noAutofit/>
+          </a:bodyPr>
+          <a:lstStyle xmlns:a="http://schemas.openxmlformats.org/drawingml/2006/main"/>
+          <a:p xmlns:a="http://schemas.openxmlformats.org/drawingml/2006/main">
+            <a:pPr algn="l">
+              <a:buNone/>
               <a:defRPr sz="1350" b="1">
                 <a:solidFill>
                   <a:srgbClr val="28685E"/>
                 </a:solidFill>
+                <a:latin typeface="Calibri"/>
+                <a:ea typeface="Calibri"/>
+                <a:cs typeface="Calibri"/>
               </a:defRPr>
             </a:pPr>
             <a:r>
@@ -2725,6 +2766,9 @@
                 <a:solidFill>
                   <a:srgbClr val="28685E"/>
                 </a:solidFill>
+                <a:latin typeface="Calibri"/>
+                <a:ea typeface="Calibri"/>
+                <a:cs typeface="Calibri"/>
               </a:rPr>
               <a:t>01</a:t>
             </a:r>
@@ -2747,36 +2791,69 @@
         </p:nvSpPr>
         <p:spPr>
           <a:xfrm xmlns:a="http://schemas.openxmlformats.org/drawingml/2006/main">
-            <a:off x="609600" y="2809875"/>
-            <a:ext cx="10668000" cy="1000125"/>
-          </a:xfrm>
-          <a:prstGeom xmlns:a="http://schemas.openxmlformats.org/drawingml/2006/main" prst="rect">
-            <a:avLst/>
-          </a:prstGeom>
-          <a:noFill xmlns:a="http://schemas.openxmlformats.org/drawingml/2006/main"/>
-          <a:ln xmlns:a="http://schemas.openxmlformats.org/drawingml/2006/main" w="0">
-            <a:noFill/>
-            <a:prstDash val="solid"/>
-          </a:ln>
-        </p:spPr>
-        <p:txBody>
-          <a:bodyPr xmlns:a="http://schemas.openxmlformats.org/drawingml/2006/main" lIns="0" tIns="0" rIns="0" bIns="0" anchor="ctr"/>
-          <a:lstStyle xmlns:a="http://schemas.openxmlformats.org/drawingml/2006/main"/>
-          <a:p xmlns:a="http://schemas.openxmlformats.org/drawingml/2006/main">
-            <a:pPr>
-              <a:defRPr sz="3900" b="1">
+            <a:off x="609600" y="2447925"/>
+            <a:ext cx="5429250" cy="1638300"/>
+          </a:xfrm>
+          <a:prstGeom xmlns:a="http://schemas.openxmlformats.org/drawingml/2006/main" prst="rect">
+            <a:avLst/>
+          </a:prstGeom>
+          <a:noFill xmlns:a="http://schemas.openxmlformats.org/drawingml/2006/main"/>
+          <a:ln xmlns:a="http://schemas.openxmlformats.org/drawingml/2006/main" w="0">
+            <a:noFill/>
+            <a:prstDash val="solid"/>
+          </a:ln>
+        </p:spPr>
+        <p:txBody>
+          <a:bodyPr xmlns:a="http://schemas.openxmlformats.org/drawingml/2006/main" lIns="0" tIns="0" rIns="0" bIns="0" anchor="ctr">
+            <a:noAutofit/>
+          </a:bodyPr>
+          <a:lstStyle xmlns:a="http://schemas.openxmlformats.org/drawingml/2006/main"/>
+          <a:p xmlns:a="http://schemas.openxmlformats.org/drawingml/2006/main">
+            <a:pPr algn="l">
+              <a:buNone/>
+              <a:defRPr sz="3600" b="1">
                 <a:solidFill>
                   <a:srgbClr val="28685E"/>
                 </a:solidFill>
-              </a:defRPr>
-            </a:pPr>
-            <a:r>
-              <a:rPr sz="3900" b="1">
+                <a:latin typeface="Calibri"/>
+                <a:ea typeface="Calibri"/>
+                <a:cs typeface="Calibri"/>
+              </a:defRPr>
+            </a:pPr>
+            <a:r>
+              <a:rPr sz="3600" b="1">
                 <a:solidFill>
                   <a:srgbClr val="28685E"/>
                 </a:solidFill>
-              </a:rPr>
-              <a:t>Change the force. Notice the trade-off.</a:t>
+                <a:latin typeface="Calibri"/>
+                <a:ea typeface="Calibri"/>
+                <a:cs typeface="Calibri"/>
+              </a:rPr>
+              <a:t>Change the force.</a:t>
+            </a:r>
+          </a:p>
+          <a:p xmlns:a="http://schemas.openxmlformats.org/drawingml/2006/main">
+            <a:pPr algn="l">
+              <a:buNone/>
+              <a:defRPr sz="3600" b="1">
+                <a:solidFill>
+                  <a:srgbClr val="28685E"/>
+                </a:solidFill>
+                <a:latin typeface="Calibri"/>
+                <a:ea typeface="Calibri"/>
+                <a:cs typeface="Calibri"/>
+              </a:defRPr>
+            </a:pPr>
+            <a:r>
+              <a:rPr sz="3600" b="1">
+                <a:solidFill>
+                  <a:srgbClr val="28685E"/>
+                </a:solidFill>
+                <a:latin typeface="Calibri"/>
+                <a:ea typeface="Calibri"/>
+                <a:cs typeface="Calibri"/>
+              </a:rPr>
+              <a:t>Notice the trade-off.</a:t>
             </a:r>
           </a:p>
         </p:txBody>
@@ -2797,40 +2874,74 @@
         </p:nvSpPr>
         <p:spPr>
           <a:xfrm xmlns:a="http://schemas.openxmlformats.org/drawingml/2006/main">
-            <a:off x="609600" y="4143375"/>
-            <a:ext cx="10668000" cy="1143000"/>
-          </a:xfrm>
-          <a:prstGeom xmlns:a="http://schemas.openxmlformats.org/drawingml/2006/main" prst="rect">
-            <a:avLst/>
-          </a:prstGeom>
-          <a:noFill xmlns:a="http://schemas.openxmlformats.org/drawingml/2006/main"/>
-          <a:ln xmlns:a="http://schemas.openxmlformats.org/drawingml/2006/main" w="0">
-            <a:noFill/>
-            <a:prstDash val="solid"/>
-          </a:ln>
-        </p:spPr>
-        <p:txBody>
-          <a:bodyPr xmlns:a="http://schemas.openxmlformats.org/drawingml/2006/main" lIns="0" tIns="0" rIns="0" bIns="0" anchor="ctr"/>
-          <a:lstStyle xmlns:a="http://schemas.openxmlformats.org/drawingml/2006/main"/>
-          <a:p xmlns:a="http://schemas.openxmlformats.org/drawingml/2006/main">
-            <a:pPr>
-              <a:defRPr sz="2550" b="0">
+            <a:off x="609600" y="4286250"/>
+            <a:ext cx="5314950" cy="1466850"/>
+          </a:xfrm>
+          <a:prstGeom xmlns:a="http://schemas.openxmlformats.org/drawingml/2006/main" prst="rect">
+            <a:avLst/>
+          </a:prstGeom>
+          <a:noFill xmlns:a="http://schemas.openxmlformats.org/drawingml/2006/main"/>
+          <a:ln xmlns:a="http://schemas.openxmlformats.org/drawingml/2006/main" w="0">
+            <a:noFill/>
+            <a:prstDash val="solid"/>
+          </a:ln>
+        </p:spPr>
+        <p:txBody>
+          <a:bodyPr xmlns:a="http://schemas.openxmlformats.org/drawingml/2006/main" lIns="0" tIns="0" rIns="0" bIns="0" anchor="ctr">
+            <a:noAutofit/>
+          </a:bodyPr>
+          <a:lstStyle xmlns:a="http://schemas.openxmlformats.org/drawingml/2006/main"/>
+          <a:p xmlns:a="http://schemas.openxmlformats.org/drawingml/2006/main">
+            <a:pPr algn="l">
+              <a:buNone/>
+              <a:defRPr sz="2400" b="0">
                 <a:solidFill>
                   <a:srgbClr val="152B3A"/>
                 </a:solidFill>
-              </a:defRPr>
-            </a:pPr>
-            <a:r>
-              <a:rPr sz="2550" b="0">
+                <a:latin typeface="Calibri"/>
+                <a:ea typeface="Calibri"/>
+                <a:cs typeface="Calibri"/>
+              </a:defRPr>
+            </a:pPr>
+            <a:r>
+              <a:rPr sz="2400" b="0">
                 <a:solidFill>
                   <a:srgbClr val="152B3A"/>
                 </a:solidFill>
+                <a:latin typeface="Calibri"/>
+                <a:ea typeface="Calibri"/>
+                <a:cs typeface="Calibri"/>
               </a:rPr>
               <a:t>Name mechanisms, find a pivot and explain a gain and a cost.</a:t>
             </a:r>
           </a:p>
         </p:txBody>
       </p:sp>
+      <p:pic>
+        <p:nvPicPr>
+          <p:cNvPr id="19" name=""/>
+          <p:cNvPicPr>
+            <a:picLocks xmlns:a="http://schemas.openxmlformats.org/drawingml/2006/main" noChangeAspect="1"/>
+          </p:cNvPicPr>
+          <p:nvPr/>
+        </p:nvPicPr>
+        <p:blipFill>
+          <a:blip xmlns:r="http://schemas.openxmlformats.org/officeDocument/2006/relationships" xmlns:a="http://schemas.openxmlformats.org/drawingml/2006/main" r:embed="R88f77ef294cc494a"/>
+          <a:srcRect xmlns:a="http://schemas.openxmlformats.org/drawingml/2006/main" l="0" t="14154" r="0" b="14154"/>
+          <a:stretch xmlns:a="http://schemas.openxmlformats.org/drawingml/2006/main">
+            <a:fillRect l="0" t="0" r="0" b="0"/>
+          </a:stretch>
+        </p:blipFill>
+        <p:spPr>
+          <a:xfrm xmlns:a="http://schemas.openxmlformats.org/drawingml/2006/main">
+            <a:off x="6400800" y="2200275"/>
+            <a:ext cx="5181600" cy="3714750"/>
+          </a:xfrm>
+          <a:prstGeom xmlns:a="http://schemas.openxmlformats.org/drawingml/2006/main" prst="rect">
+            <a:avLst/>
+          </a:prstGeom>
+        </p:spPr>
+      </p:pic>
     </p:spTree>
     <p:extLst>
       <p:ext uri="{BB962C8B-B14F-4D97-AF65-F5344CB8AC3E}">
@@ -2847,7 +2958,7 @@
     <p:bg>
       <p:bgPr>
         <a:solidFill xmlns:a="http://schemas.openxmlformats.org/drawingml/2006/main">
-          <a:srgbClr val="F5F1E8"/>
+          <a:srgbClr val="FAF9F5"/>
         </a:solidFill>
       </p:bgPr>
     </p:bg>
@@ -2876,8 +2987,8 @@
         </p:nvSpPr>
         <p:spPr>
           <a:xfrm xmlns:a="http://schemas.openxmlformats.org/drawingml/2006/main">
-            <a:off x="609600" y="552450"/>
-            <a:ext cx="781050" cy="57150"/>
+            <a:off x="609600" y="733425"/>
+            <a:ext cx="781050" cy="38100"/>
           </a:xfrm>
           <a:prstGeom xmlns:a="http://schemas.openxmlformats.org/drawingml/2006/main" prst="rect">
             <a:avLst/>
@@ -2907,34 +3018,43 @@
         </p:nvSpPr>
         <p:spPr>
           <a:xfrm xmlns:a="http://schemas.openxmlformats.org/drawingml/2006/main">
-            <a:off x="609600" y="762000"/>
-            <a:ext cx="8572500" cy="285750"/>
-          </a:xfrm>
-          <a:prstGeom xmlns:a="http://schemas.openxmlformats.org/drawingml/2006/main" prst="rect">
-            <a:avLst/>
-          </a:prstGeom>
-          <a:noFill xmlns:a="http://schemas.openxmlformats.org/drawingml/2006/main"/>
-          <a:ln xmlns:a="http://schemas.openxmlformats.org/drawingml/2006/main" w="0">
-            <a:noFill/>
-            <a:prstDash val="solid"/>
-          </a:ln>
-        </p:spPr>
-        <p:txBody>
-          <a:bodyPr xmlns:a="http://schemas.openxmlformats.org/drawingml/2006/main" lIns="0" tIns="0" rIns="0" bIns="0" anchor="ctr"/>
-          <a:lstStyle xmlns:a="http://schemas.openxmlformats.org/drawingml/2006/main"/>
-          <a:p xmlns:a="http://schemas.openxmlformats.org/drawingml/2006/main">
-            <a:pPr>
-              <a:defRPr sz="1500" b="1">
+            <a:off x="609600" y="342900"/>
+            <a:ext cx="9334500" cy="304800"/>
+          </a:xfrm>
+          <a:prstGeom xmlns:a="http://schemas.openxmlformats.org/drawingml/2006/main" prst="rect">
+            <a:avLst/>
+          </a:prstGeom>
+          <a:noFill xmlns:a="http://schemas.openxmlformats.org/drawingml/2006/main"/>
+          <a:ln xmlns:a="http://schemas.openxmlformats.org/drawingml/2006/main" w="0">
+            <a:noFill/>
+            <a:prstDash val="solid"/>
+          </a:ln>
+        </p:spPr>
+        <p:txBody>
+          <a:bodyPr xmlns:a="http://schemas.openxmlformats.org/drawingml/2006/main" lIns="0" tIns="0" rIns="0" bIns="0" anchor="ctr">
+            <a:noAutofit/>
+          </a:bodyPr>
+          <a:lstStyle xmlns:a="http://schemas.openxmlformats.org/drawingml/2006/main"/>
+          <a:p xmlns:a="http://schemas.openxmlformats.org/drawingml/2006/main">
+            <a:pPr algn="l">
+              <a:buNone/>
+              <a:defRPr sz="1350" b="1">
                 <a:solidFill>
                   <a:srgbClr val="28685E"/>
                 </a:solidFill>
-              </a:defRPr>
-            </a:pPr>
-            <a:r>
-              <a:rPr sz="1500" b="1">
+                <a:latin typeface="Calibri"/>
+                <a:ea typeface="Calibri"/>
+                <a:cs typeface="Calibri"/>
+              </a:defRPr>
+            </a:pPr>
+            <a:r>
+              <a:rPr sz="1350" b="1">
                 <a:solidFill>
                   <a:srgbClr val="28685E"/>
                 </a:solidFill>
+                <a:latin typeface="Calibri"/>
+                <a:ea typeface="Calibri"/>
+                <a:cs typeface="Calibri"/>
               </a:rPr>
               <a:t>MADE BY MATT  /  GROW SCIENCE</a:t>
             </a:r>
@@ -2957,34 +3077,43 @@
         </p:nvSpPr>
         <p:spPr>
           <a:xfrm xmlns:a="http://schemas.openxmlformats.org/drawingml/2006/main">
-            <a:off x="609600" y="1352550"/>
-            <a:ext cx="10972800" cy="952500"/>
-          </a:xfrm>
-          <a:prstGeom xmlns:a="http://schemas.openxmlformats.org/drawingml/2006/main" prst="rect">
-            <a:avLst/>
-          </a:prstGeom>
-          <a:noFill xmlns:a="http://schemas.openxmlformats.org/drawingml/2006/main"/>
-          <a:ln xmlns:a="http://schemas.openxmlformats.org/drawingml/2006/main" w="0">
-            <a:noFill/>
-            <a:prstDash val="solid"/>
-          </a:ln>
-        </p:spPr>
-        <p:txBody>
-          <a:bodyPr xmlns:a="http://schemas.openxmlformats.org/drawingml/2006/main" lIns="0" tIns="0" rIns="0" bIns="0" anchor="ctr"/>
-          <a:lstStyle xmlns:a="http://schemas.openxmlformats.org/drawingml/2006/main"/>
-          <a:p xmlns:a="http://schemas.openxmlformats.org/drawingml/2006/main">
-            <a:pPr>
-              <a:defRPr sz="3750" b="1">
+            <a:off x="609600" y="990600"/>
+            <a:ext cx="10972800" cy="1000125"/>
+          </a:xfrm>
+          <a:prstGeom xmlns:a="http://schemas.openxmlformats.org/drawingml/2006/main" prst="rect">
+            <a:avLst/>
+          </a:prstGeom>
+          <a:noFill xmlns:a="http://schemas.openxmlformats.org/drawingml/2006/main"/>
+          <a:ln xmlns:a="http://schemas.openxmlformats.org/drawingml/2006/main" w="0">
+            <a:noFill/>
+            <a:prstDash val="solid"/>
+          </a:ln>
+        </p:spPr>
+        <p:txBody>
+          <a:bodyPr xmlns:a="http://schemas.openxmlformats.org/drawingml/2006/main" lIns="0" tIns="0" rIns="0" bIns="0" anchor="ctr">
+            <a:noAutofit/>
+          </a:bodyPr>
+          <a:lstStyle xmlns:a="http://schemas.openxmlformats.org/drawingml/2006/main"/>
+          <a:p xmlns:a="http://schemas.openxmlformats.org/drawingml/2006/main">
+            <a:pPr algn="l">
+              <a:buNone/>
+              <a:defRPr sz="3675" b="1">
                 <a:solidFill>
                   <a:srgbClr val="152B3A"/>
                 </a:solidFill>
-              </a:defRPr>
-            </a:pPr>
-            <a:r>
-              <a:rPr sz="3750" b="1">
+                <a:latin typeface="Calibri"/>
+                <a:ea typeface="Calibri"/>
+                <a:cs typeface="Calibri"/>
+              </a:defRPr>
+            </a:pPr>
+            <a:r>
+              <a:rPr sz="3675" b="1">
                 <a:solidFill>
                   <a:srgbClr val="152B3A"/>
                 </a:solidFill>
+                <a:latin typeface="Calibri"/>
+                <a:ea typeface="Calibri"/>
+                <a:cs typeface="Calibri"/>
               </a:rPr>
               <a:t>Check the mechanism and its job</a:t>
             </a:r>
@@ -3007,14 +3136,14 @@
         </p:nvSpPr>
         <p:spPr>
           <a:xfrm xmlns:a="http://schemas.openxmlformats.org/drawingml/2006/main">
-            <a:off x="609600" y="6219825"/>
+            <a:off x="609600" y="6191250"/>
             <a:ext cx="10972800" cy="9525"/>
           </a:xfrm>
           <a:prstGeom xmlns:a="http://schemas.openxmlformats.org/drawingml/2006/main" prst="rect">
             <a:avLst/>
           </a:prstGeom>
           <a:solidFill xmlns:a="http://schemas.openxmlformats.org/drawingml/2006/main">
-            <a:srgbClr val="DCE7DD"/>
+            <a:srgbClr val="CEDBD3"/>
           </a:solidFill>
           <a:ln xmlns:a="http://schemas.openxmlformats.org/drawingml/2006/main" w="0">
             <a:noFill/>
@@ -3038,34 +3167,43 @@
         </p:nvSpPr>
         <p:spPr>
           <a:xfrm xmlns:a="http://schemas.openxmlformats.org/drawingml/2006/main">
-            <a:off x="609600" y="6381750"/>
-            <a:ext cx="9906000" cy="228600"/>
-          </a:xfrm>
-          <a:prstGeom xmlns:a="http://schemas.openxmlformats.org/drawingml/2006/main" prst="rect">
-            <a:avLst/>
-          </a:prstGeom>
-          <a:noFill xmlns:a="http://schemas.openxmlformats.org/drawingml/2006/main"/>
-          <a:ln xmlns:a="http://schemas.openxmlformats.org/drawingml/2006/main" w="0">
-            <a:noFill/>
-            <a:prstDash val="solid"/>
-          </a:ln>
-        </p:spPr>
-        <p:txBody>
-          <a:bodyPr xmlns:a="http://schemas.openxmlformats.org/drawingml/2006/main" lIns="0" tIns="0" rIns="0" bIns="0" anchor="ctr"/>
-          <a:lstStyle xmlns:a="http://schemas.openxmlformats.org/drawingml/2006/main"/>
-          <a:p xmlns:a="http://schemas.openxmlformats.org/drawingml/2006/main">
-            <a:pPr>
-              <a:defRPr sz="1275" b="0">
+            <a:off x="609600" y="6419850"/>
+            <a:ext cx="9525000" cy="219075"/>
+          </a:xfrm>
+          <a:prstGeom xmlns:a="http://schemas.openxmlformats.org/drawingml/2006/main" prst="rect">
+            <a:avLst/>
+          </a:prstGeom>
+          <a:noFill xmlns:a="http://schemas.openxmlformats.org/drawingml/2006/main"/>
+          <a:ln xmlns:a="http://schemas.openxmlformats.org/drawingml/2006/main" w="0">
+            <a:noFill/>
+            <a:prstDash val="solid"/>
+          </a:ln>
+        </p:spPr>
+        <p:txBody>
+          <a:bodyPr xmlns:a="http://schemas.openxmlformats.org/drawingml/2006/main" lIns="0" tIns="0" rIns="0" bIns="0" anchor="ctr">
+            <a:noAutofit/>
+          </a:bodyPr>
+          <a:lstStyle xmlns:a="http://schemas.openxmlformats.org/drawingml/2006/main"/>
+          <a:p xmlns:a="http://schemas.openxmlformats.org/drawingml/2006/main">
+            <a:pPr algn="l">
+              <a:buNone/>
+              <a:defRPr sz="1200" b="0">
                 <a:solidFill>
                   <a:srgbClr val="50616B"/>
                 </a:solidFill>
-              </a:defRPr>
-            </a:pPr>
-            <a:r>
-              <a:rPr sz="1275" b="0">
+                <a:latin typeface="Calibri"/>
+                <a:ea typeface="Calibri"/>
+                <a:cs typeface="Calibri"/>
+              </a:defRPr>
+            </a:pPr>
+            <a:r>
+              <a:rPr sz="1200" b="0">
                 <a:solidFill>
                   <a:srgbClr val="50616B"/>
                 </a:solidFill>
+                <a:latin typeface="Calibri"/>
+                <a:ea typeface="Calibri"/>
+                <a:cs typeface="Calibri"/>
               </a:rPr>
               <a:t>AUTUMN 1  ·  WEEK 4  ·  LESSON A</a:t>
             </a:r>
@@ -3088,27 +3226,33 @@
         </p:nvSpPr>
         <p:spPr>
           <a:xfrm xmlns:a="http://schemas.openxmlformats.org/drawingml/2006/main">
-            <a:off x="11106150" y="6362700"/>
-            <a:ext cx="476250" cy="238125"/>
-          </a:xfrm>
-          <a:prstGeom xmlns:a="http://schemas.openxmlformats.org/drawingml/2006/main" prst="rect">
-            <a:avLst/>
-          </a:prstGeom>
-          <a:noFill xmlns:a="http://schemas.openxmlformats.org/drawingml/2006/main"/>
-          <a:ln xmlns:a="http://schemas.openxmlformats.org/drawingml/2006/main" w="0">
-            <a:noFill/>
-            <a:prstDash val="solid"/>
-          </a:ln>
-        </p:spPr>
-        <p:txBody>
-          <a:bodyPr xmlns:a="http://schemas.openxmlformats.org/drawingml/2006/main" lIns="0" tIns="0" rIns="0" bIns="0" anchor="ctr"/>
-          <a:lstStyle xmlns:a="http://schemas.openxmlformats.org/drawingml/2006/main"/>
-          <a:p xmlns:a="http://schemas.openxmlformats.org/drawingml/2006/main">
-            <a:pPr>
+            <a:off x="11106150" y="6400800"/>
+            <a:ext cx="476250" cy="247650"/>
+          </a:xfrm>
+          <a:prstGeom xmlns:a="http://schemas.openxmlformats.org/drawingml/2006/main" prst="rect">
+            <a:avLst/>
+          </a:prstGeom>
+          <a:noFill xmlns:a="http://schemas.openxmlformats.org/drawingml/2006/main"/>
+          <a:ln xmlns:a="http://schemas.openxmlformats.org/drawingml/2006/main" w="0">
+            <a:noFill/>
+            <a:prstDash val="solid"/>
+          </a:ln>
+        </p:spPr>
+        <p:txBody>
+          <a:bodyPr xmlns:a="http://schemas.openxmlformats.org/drawingml/2006/main" lIns="0" tIns="0" rIns="0" bIns="0" anchor="ctr">
+            <a:noAutofit/>
+          </a:bodyPr>
+          <a:lstStyle xmlns:a="http://schemas.openxmlformats.org/drawingml/2006/main"/>
+          <a:p xmlns:a="http://schemas.openxmlformats.org/drawingml/2006/main">
+            <a:pPr algn="l">
+              <a:buNone/>
               <a:defRPr sz="1350" b="1">
                 <a:solidFill>
                   <a:srgbClr val="28685E"/>
                 </a:solidFill>
+                <a:latin typeface="Calibri"/>
+                <a:ea typeface="Calibri"/>
+                <a:cs typeface="Calibri"/>
               </a:defRPr>
             </a:pPr>
             <a:r>
@@ -3116,6 +3260,9 @@
                 <a:solidFill>
                   <a:srgbClr val="28685E"/>
                 </a:solidFill>
+                <a:latin typeface="Calibri"/>
+                <a:ea typeface="Calibri"/>
+                <a:cs typeface="Calibri"/>
               </a:rPr>
               <a:t>10</a:t>
             </a:r>
@@ -3138,34 +3285,45 @@
         </p:nvSpPr>
         <p:spPr>
           <a:xfrm xmlns:a="http://schemas.openxmlformats.org/drawingml/2006/main">
-            <a:off x="609600" y="2619375"/>
-            <a:ext cx="4953000" cy="428625"/>
-          </a:xfrm>
-          <a:prstGeom xmlns:a="http://schemas.openxmlformats.org/drawingml/2006/main" prst="rect">
-            <a:avLst/>
-          </a:prstGeom>
-          <a:noFill xmlns:a="http://schemas.openxmlformats.org/drawingml/2006/main"/>
-          <a:ln xmlns:a="http://schemas.openxmlformats.org/drawingml/2006/main" w="0">
-            <a:noFill/>
-            <a:prstDash val="solid"/>
-          </a:ln>
-        </p:spPr>
-        <p:txBody>
-          <a:bodyPr xmlns:a="http://schemas.openxmlformats.org/drawingml/2006/main" lIns="0" tIns="0" rIns="0" bIns="0" anchor="ctr"/>
-          <a:lstStyle xmlns:a="http://schemas.openxmlformats.org/drawingml/2006/main"/>
-          <a:p xmlns:a="http://schemas.openxmlformats.org/drawingml/2006/main">
-            <a:pPr>
-              <a:defRPr sz="2025" b="1">
+            <a:off x="609600" y="2219325"/>
+            <a:ext cx="5257800" cy="762000"/>
+          </a:xfrm>
+          <a:prstGeom xmlns:a="http://schemas.openxmlformats.org/drawingml/2006/main" prst="rect">
+            <a:avLst/>
+          </a:prstGeom>
+          <a:solidFill xmlns:a="http://schemas.openxmlformats.org/drawingml/2006/main">
+            <a:srgbClr val="E7EFE9"/>
+          </a:solidFill>
+          <a:ln xmlns:a="http://schemas.openxmlformats.org/drawingml/2006/main" w="0">
+            <a:noFill/>
+            <a:prstDash val="solid"/>
+          </a:ln>
+        </p:spPr>
+        <p:txBody>
+          <a:bodyPr xmlns:a="http://schemas.openxmlformats.org/drawingml/2006/main" lIns="228600" tIns="114300" rIns="228600" bIns="114300" anchor="ctr">
+            <a:noAutofit/>
+          </a:bodyPr>
+          <a:lstStyle xmlns:a="http://schemas.openxmlformats.org/drawingml/2006/main"/>
+          <a:p xmlns:a="http://schemas.openxmlformats.org/drawingml/2006/main">
+            <a:pPr algn="l">
+              <a:buNone/>
+              <a:defRPr sz="1875" b="1">
                 <a:solidFill>
                   <a:srgbClr val="28685E"/>
                 </a:solidFill>
-              </a:defRPr>
-            </a:pPr>
-            <a:r>
-              <a:rPr sz="2025" b="1">
+                <a:latin typeface="Calibri"/>
+                <a:ea typeface="Calibri"/>
+                <a:cs typeface="Calibri"/>
+              </a:defRPr>
+            </a:pPr>
+            <a:r>
+              <a:rPr sz="1875" b="1">
                 <a:solidFill>
                   <a:srgbClr val="28685E"/>
                 </a:solidFill>
+                <a:latin typeface="Calibri"/>
+                <a:ea typeface="Calibri"/>
+                <a:cs typeface="Calibri"/>
               </a:rPr>
               <a:t>MECHANISM</a:t>
             </a:r>
@@ -3188,34 +3346,45 @@
         </p:nvSpPr>
         <p:spPr>
           <a:xfrm xmlns:a="http://schemas.openxmlformats.org/drawingml/2006/main">
-            <a:off x="6572250" y="2619375"/>
-            <a:ext cx="4953000" cy="428625"/>
-          </a:xfrm>
-          <a:prstGeom xmlns:a="http://schemas.openxmlformats.org/drawingml/2006/main" prst="rect">
-            <a:avLst/>
-          </a:prstGeom>
-          <a:noFill xmlns:a="http://schemas.openxmlformats.org/drawingml/2006/main"/>
-          <a:ln xmlns:a="http://schemas.openxmlformats.org/drawingml/2006/main" w="0">
-            <a:noFill/>
-            <a:prstDash val="solid"/>
-          </a:ln>
-        </p:spPr>
-        <p:txBody>
-          <a:bodyPr xmlns:a="http://schemas.openxmlformats.org/drawingml/2006/main" lIns="0" tIns="0" rIns="0" bIns="0" anchor="ctr"/>
-          <a:lstStyle xmlns:a="http://schemas.openxmlformats.org/drawingml/2006/main"/>
-          <a:p xmlns:a="http://schemas.openxmlformats.org/drawingml/2006/main">
-            <a:pPr>
-              <a:defRPr sz="2025" b="1">
-                <a:solidFill>
-                  <a:srgbClr val="A65D25"/>
-                </a:solidFill>
-              </a:defRPr>
-            </a:pPr>
-            <a:r>
-              <a:rPr sz="2025" b="1">
-                <a:solidFill>
-                  <a:srgbClr val="A65D25"/>
-                </a:solidFill>
+            <a:off x="6381750" y="2219325"/>
+            <a:ext cx="5200650" cy="762000"/>
+          </a:xfrm>
+          <a:prstGeom xmlns:a="http://schemas.openxmlformats.org/drawingml/2006/main" prst="rect">
+            <a:avLst/>
+          </a:prstGeom>
+          <a:solidFill xmlns:a="http://schemas.openxmlformats.org/drawingml/2006/main">
+            <a:srgbClr val="F0EBE3"/>
+          </a:solidFill>
+          <a:ln xmlns:a="http://schemas.openxmlformats.org/drawingml/2006/main" w="0">
+            <a:noFill/>
+            <a:prstDash val="solid"/>
+          </a:ln>
+        </p:spPr>
+        <p:txBody>
+          <a:bodyPr xmlns:a="http://schemas.openxmlformats.org/drawingml/2006/main" lIns="228600" tIns="114300" rIns="228600" bIns="114300" anchor="ctr">
+            <a:noAutofit/>
+          </a:bodyPr>
+          <a:lstStyle xmlns:a="http://schemas.openxmlformats.org/drawingml/2006/main"/>
+          <a:p xmlns:a="http://schemas.openxmlformats.org/drawingml/2006/main">
+            <a:pPr algn="l">
+              <a:buNone/>
+              <a:defRPr sz="1875" b="1">
+                <a:solidFill>
+                  <a:srgbClr val="A95D21"/>
+                </a:solidFill>
+                <a:latin typeface="Calibri"/>
+                <a:ea typeface="Calibri"/>
+                <a:cs typeface="Calibri"/>
+              </a:defRPr>
+            </a:pPr>
+            <a:r>
+              <a:rPr sz="1875" b="1">
+                <a:solidFill>
+                  <a:srgbClr val="A95D21"/>
+                </a:solidFill>
+                <a:latin typeface="Calibri"/>
+                <a:ea typeface="Calibri"/>
+                <a:cs typeface="Calibri"/>
               </a:rPr>
               <a:t>EVERYDAY EXAMPLE</a:t>
             </a:r>
@@ -3238,27 +3407,35 @@
         </p:nvSpPr>
         <p:spPr>
           <a:xfrm xmlns:a="http://schemas.openxmlformats.org/drawingml/2006/main">
-            <a:off x="609600" y="3333750"/>
-            <a:ext cx="4953000" cy="2524125"/>
-          </a:xfrm>
-          <a:prstGeom xmlns:a="http://schemas.openxmlformats.org/drawingml/2006/main" prst="rect">
-            <a:avLst/>
-          </a:prstGeom>
-          <a:noFill xmlns:a="http://schemas.openxmlformats.org/drawingml/2006/main"/>
-          <a:ln xmlns:a="http://schemas.openxmlformats.org/drawingml/2006/main" w="0">
-            <a:noFill/>
-            <a:prstDash val="solid"/>
-          </a:ln>
-        </p:spPr>
-        <p:txBody>
-          <a:bodyPr xmlns:a="http://schemas.openxmlformats.org/drawingml/2006/main" lIns="0" tIns="0" rIns="0" bIns="0" anchor="ctr"/>
-          <a:lstStyle xmlns:a="http://schemas.openxmlformats.org/drawingml/2006/main"/>
-          <a:p xmlns:a="http://schemas.openxmlformats.org/drawingml/2006/main">
-            <a:pPr>
+            <a:off x="609600" y="2981325"/>
+            <a:ext cx="5257800" cy="2714625"/>
+          </a:xfrm>
+          <a:prstGeom xmlns:a="http://schemas.openxmlformats.org/drawingml/2006/main" prst="rect">
+            <a:avLst/>
+          </a:prstGeom>
+          <a:solidFill xmlns:a="http://schemas.openxmlformats.org/drawingml/2006/main">
+            <a:srgbClr val="E7EFE9"/>
+          </a:solidFill>
+          <a:ln xmlns:a="http://schemas.openxmlformats.org/drawingml/2006/main" w="0">
+            <a:noFill/>
+            <a:prstDash val="solid"/>
+          </a:ln>
+        </p:spPr>
+        <p:txBody>
+          <a:bodyPr xmlns:a="http://schemas.openxmlformats.org/drawingml/2006/main" lIns="228600" tIns="114300" rIns="228600" bIns="114300" anchor="ctr">
+            <a:noAutofit/>
+          </a:bodyPr>
+          <a:lstStyle xmlns:a="http://schemas.openxmlformats.org/drawingml/2006/main"/>
+          <a:p xmlns:a="http://schemas.openxmlformats.org/drawingml/2006/main">
+            <a:pPr algn="l">
+              <a:buNone/>
               <a:defRPr sz="2400" b="0">
                 <a:solidFill>
                   <a:srgbClr val="152B3A"/>
                 </a:solidFill>
+                <a:latin typeface="Calibri"/>
+                <a:ea typeface="Calibri"/>
+                <a:cs typeface="Calibri"/>
               </a:defRPr>
             </a:pPr>
             <a:r>
@@ -3266,16 +3443,23 @@
                 <a:solidFill>
                   <a:srgbClr val="152B3A"/>
                 </a:solidFill>
+                <a:latin typeface="Calibri"/>
+                <a:ea typeface="Calibri"/>
+                <a:cs typeface="Calibri"/>
               </a:rPr>
               <a:t>Lever</a:t>
             </a:r>
           </a:p>
           <a:p xmlns:a="http://schemas.openxmlformats.org/drawingml/2006/main">
-            <a:pPr>
+            <a:pPr algn="l">
+              <a:buNone/>
               <a:defRPr sz="2400" b="0">
                 <a:solidFill>
                   <a:srgbClr val="152B3A"/>
                 </a:solidFill>
+                <a:latin typeface="Calibri"/>
+                <a:ea typeface="Calibri"/>
+                <a:cs typeface="Calibri"/>
               </a:defRPr>
             </a:pPr>
             <a:r>
@@ -3283,16 +3467,23 @@
                 <a:solidFill>
                   <a:srgbClr val="152B3A"/>
                 </a:solidFill>
+                <a:latin typeface="Calibri"/>
+                <a:ea typeface="Calibri"/>
+                <a:cs typeface="Calibri"/>
               </a:rPr>
               <a:t>Fixed pulley</a:t>
             </a:r>
           </a:p>
           <a:p xmlns:a="http://schemas.openxmlformats.org/drawingml/2006/main">
-            <a:pPr>
+            <a:pPr algn="l">
+              <a:buNone/>
               <a:defRPr sz="2400" b="0">
                 <a:solidFill>
                   <a:srgbClr val="152B3A"/>
                 </a:solidFill>
+                <a:latin typeface="Calibri"/>
+                <a:ea typeface="Calibri"/>
+                <a:cs typeface="Calibri"/>
               </a:defRPr>
             </a:pPr>
             <a:r>
@@ -3300,6 +3491,9 @@
                 <a:solidFill>
                   <a:srgbClr val="152B3A"/>
                 </a:solidFill>
+                <a:latin typeface="Calibri"/>
+                <a:ea typeface="Calibri"/>
+                <a:cs typeface="Calibri"/>
               </a:rPr>
               <a:t>Geared chain drive</a:t>
             </a:r>
@@ -3322,27 +3516,35 @@
         </p:nvSpPr>
         <p:spPr>
           <a:xfrm xmlns:a="http://schemas.openxmlformats.org/drawingml/2006/main">
-            <a:off x="6572250" y="3333750"/>
-            <a:ext cx="4857750" cy="2524125"/>
-          </a:xfrm>
-          <a:prstGeom xmlns:a="http://schemas.openxmlformats.org/drawingml/2006/main" prst="rect">
-            <a:avLst/>
-          </a:prstGeom>
-          <a:noFill xmlns:a="http://schemas.openxmlformats.org/drawingml/2006/main"/>
-          <a:ln xmlns:a="http://schemas.openxmlformats.org/drawingml/2006/main" w="0">
-            <a:noFill/>
-            <a:prstDash val="solid"/>
-          </a:ln>
-        </p:spPr>
-        <p:txBody>
-          <a:bodyPr xmlns:a="http://schemas.openxmlformats.org/drawingml/2006/main" lIns="0" tIns="0" rIns="0" bIns="0" anchor="ctr"/>
-          <a:lstStyle xmlns:a="http://schemas.openxmlformats.org/drawingml/2006/main"/>
-          <a:p xmlns:a="http://schemas.openxmlformats.org/drawingml/2006/main">
-            <a:pPr>
+            <a:off x="6381750" y="2981325"/>
+            <a:ext cx="5200650" cy="2714625"/>
+          </a:xfrm>
+          <a:prstGeom xmlns:a="http://schemas.openxmlformats.org/drawingml/2006/main" prst="rect">
+            <a:avLst/>
+          </a:prstGeom>
+          <a:solidFill xmlns:a="http://schemas.openxmlformats.org/drawingml/2006/main">
+            <a:srgbClr val="F0EBE3"/>
+          </a:solidFill>
+          <a:ln xmlns:a="http://schemas.openxmlformats.org/drawingml/2006/main" w="0">
+            <a:noFill/>
+            <a:prstDash val="solid"/>
+          </a:ln>
+        </p:spPr>
+        <p:txBody>
+          <a:bodyPr xmlns:a="http://schemas.openxmlformats.org/drawingml/2006/main" lIns="228600" tIns="114300" rIns="228600" bIns="114300" anchor="ctr">
+            <a:noAutofit/>
+          </a:bodyPr>
+          <a:lstStyle xmlns:a="http://schemas.openxmlformats.org/drawingml/2006/main"/>
+          <a:p xmlns:a="http://schemas.openxmlformats.org/drawingml/2006/main">
+            <a:pPr algn="l">
+              <a:buNone/>
               <a:defRPr sz="2400" b="0">
                 <a:solidFill>
                   <a:srgbClr val="152B3A"/>
                 </a:solidFill>
+                <a:latin typeface="Calibri"/>
+                <a:ea typeface="Calibri"/>
+                <a:cs typeface="Calibri"/>
               </a:defRPr>
             </a:pPr>
             <a:r>
@@ -3350,16 +3552,23 @@
                 <a:solidFill>
                   <a:srgbClr val="152B3A"/>
                 </a:solidFill>
+                <a:latin typeface="Calibri"/>
+                <a:ea typeface="Calibri"/>
+                <a:cs typeface="Calibri"/>
               </a:rPr>
               <a:t>Scissors, wheelbarrow, spanner</a:t>
             </a:r>
           </a:p>
           <a:p xmlns:a="http://schemas.openxmlformats.org/drawingml/2006/main">
-            <a:pPr>
+            <a:pPr algn="l">
+              <a:buNone/>
               <a:defRPr sz="2400" b="0">
                 <a:solidFill>
                   <a:srgbClr val="152B3A"/>
                 </a:solidFill>
+                <a:latin typeface="Calibri"/>
+                <a:ea typeface="Calibri"/>
+                <a:cs typeface="Calibri"/>
               </a:defRPr>
             </a:pPr>
             <a:r>
@@ -3367,16 +3576,23 @@
                 <a:solidFill>
                   <a:srgbClr val="152B3A"/>
                 </a:solidFill>
+                <a:latin typeface="Calibri"/>
+                <a:ea typeface="Calibri"/>
+                <a:cs typeface="Calibri"/>
               </a:rPr>
               <a:t>Flagpole rope over top wheel</a:t>
             </a:r>
           </a:p>
           <a:p xmlns:a="http://schemas.openxmlformats.org/drawingml/2006/main">
-            <a:pPr>
+            <a:pPr algn="l">
+              <a:buNone/>
               <a:defRPr sz="2400" b="0">
                 <a:solidFill>
                   <a:srgbClr val="152B3A"/>
                 </a:solidFill>
+                <a:latin typeface="Calibri"/>
+                <a:ea typeface="Calibri"/>
+                <a:cs typeface="Calibri"/>
               </a:defRPr>
             </a:pPr>
             <a:r>
@@ -3384,6 +3600,9 @@
                 <a:solidFill>
                   <a:srgbClr val="152B3A"/>
                 </a:solidFill>
+                <a:latin typeface="Calibri"/>
+                <a:ea typeface="Calibri"/>
+                <a:cs typeface="Calibri"/>
               </a:rPr>
               <a:t>Bicycle chain and cogs</a:t>
             </a:r>
@@ -3406,7 +3625,7 @@
     <p:bg>
       <p:bgPr>
         <a:solidFill xmlns:a="http://schemas.openxmlformats.org/drawingml/2006/main">
-          <a:srgbClr val="F5F1E8"/>
+          <a:srgbClr val="FAF9F5"/>
         </a:solidFill>
       </p:bgPr>
     </p:bg>
@@ -3435,8 +3654,8 @@
         </p:nvSpPr>
         <p:spPr>
           <a:xfrm xmlns:a="http://schemas.openxmlformats.org/drawingml/2006/main">
-            <a:off x="609600" y="552450"/>
-            <a:ext cx="781050" cy="57150"/>
+            <a:off x="609600" y="733425"/>
+            <a:ext cx="781050" cy="38100"/>
           </a:xfrm>
           <a:prstGeom xmlns:a="http://schemas.openxmlformats.org/drawingml/2006/main" prst="rect">
             <a:avLst/>
@@ -3466,34 +3685,43 @@
         </p:nvSpPr>
         <p:spPr>
           <a:xfrm xmlns:a="http://schemas.openxmlformats.org/drawingml/2006/main">
-            <a:off x="609600" y="762000"/>
-            <a:ext cx="8572500" cy="285750"/>
-          </a:xfrm>
-          <a:prstGeom xmlns:a="http://schemas.openxmlformats.org/drawingml/2006/main" prst="rect">
-            <a:avLst/>
-          </a:prstGeom>
-          <a:noFill xmlns:a="http://schemas.openxmlformats.org/drawingml/2006/main"/>
-          <a:ln xmlns:a="http://schemas.openxmlformats.org/drawingml/2006/main" w="0">
-            <a:noFill/>
-            <a:prstDash val="solid"/>
-          </a:ln>
-        </p:spPr>
-        <p:txBody>
-          <a:bodyPr xmlns:a="http://schemas.openxmlformats.org/drawingml/2006/main" lIns="0" tIns="0" rIns="0" bIns="0" anchor="ctr"/>
-          <a:lstStyle xmlns:a="http://schemas.openxmlformats.org/drawingml/2006/main"/>
-          <a:p xmlns:a="http://schemas.openxmlformats.org/drawingml/2006/main">
-            <a:pPr>
-              <a:defRPr sz="1500" b="1">
+            <a:off x="609600" y="342900"/>
+            <a:ext cx="9334500" cy="304800"/>
+          </a:xfrm>
+          <a:prstGeom xmlns:a="http://schemas.openxmlformats.org/drawingml/2006/main" prst="rect">
+            <a:avLst/>
+          </a:prstGeom>
+          <a:noFill xmlns:a="http://schemas.openxmlformats.org/drawingml/2006/main"/>
+          <a:ln xmlns:a="http://schemas.openxmlformats.org/drawingml/2006/main" w="0">
+            <a:noFill/>
+            <a:prstDash val="solid"/>
+          </a:ln>
+        </p:spPr>
+        <p:txBody>
+          <a:bodyPr xmlns:a="http://schemas.openxmlformats.org/drawingml/2006/main" lIns="0" tIns="0" rIns="0" bIns="0" anchor="ctr">
+            <a:noAutofit/>
+          </a:bodyPr>
+          <a:lstStyle xmlns:a="http://schemas.openxmlformats.org/drawingml/2006/main"/>
+          <a:p xmlns:a="http://schemas.openxmlformats.org/drawingml/2006/main">
+            <a:pPr algn="l">
+              <a:buNone/>
+              <a:defRPr sz="1350" b="1">
                 <a:solidFill>
                   <a:srgbClr val="28685E"/>
                 </a:solidFill>
-              </a:defRPr>
-            </a:pPr>
-            <a:r>
-              <a:rPr sz="1500" b="1">
+                <a:latin typeface="Calibri"/>
+                <a:ea typeface="Calibri"/>
+                <a:cs typeface="Calibri"/>
+              </a:defRPr>
+            </a:pPr>
+            <a:r>
+              <a:rPr sz="1350" b="1">
                 <a:solidFill>
                   <a:srgbClr val="28685E"/>
                 </a:solidFill>
+                <a:latin typeface="Calibri"/>
+                <a:ea typeface="Calibri"/>
+                <a:cs typeface="Calibri"/>
               </a:rPr>
               <a:t>MADE BY MATT  /  GROW SCIENCE</a:t>
             </a:r>
@@ -3516,34 +3744,43 @@
         </p:nvSpPr>
         <p:spPr>
           <a:xfrm xmlns:a="http://schemas.openxmlformats.org/drawingml/2006/main">
-            <a:off x="609600" y="1352550"/>
-            <a:ext cx="10972800" cy="952500"/>
-          </a:xfrm>
-          <a:prstGeom xmlns:a="http://schemas.openxmlformats.org/drawingml/2006/main" prst="rect">
-            <a:avLst/>
-          </a:prstGeom>
-          <a:noFill xmlns:a="http://schemas.openxmlformats.org/drawingml/2006/main"/>
-          <a:ln xmlns:a="http://schemas.openxmlformats.org/drawingml/2006/main" w="0">
-            <a:noFill/>
-            <a:prstDash val="solid"/>
-          </a:ln>
-        </p:spPr>
-        <p:txBody>
-          <a:bodyPr xmlns:a="http://schemas.openxmlformats.org/drawingml/2006/main" lIns="0" tIns="0" rIns="0" bIns="0" anchor="ctr"/>
-          <a:lstStyle xmlns:a="http://schemas.openxmlformats.org/drawingml/2006/main"/>
-          <a:p xmlns:a="http://schemas.openxmlformats.org/drawingml/2006/main">
-            <a:pPr>
-              <a:defRPr sz="3750" b="1">
+            <a:off x="609600" y="990600"/>
+            <a:ext cx="10972800" cy="1000125"/>
+          </a:xfrm>
+          <a:prstGeom xmlns:a="http://schemas.openxmlformats.org/drawingml/2006/main" prst="rect">
+            <a:avLst/>
+          </a:prstGeom>
+          <a:noFill xmlns:a="http://schemas.openxmlformats.org/drawingml/2006/main"/>
+          <a:ln xmlns:a="http://schemas.openxmlformats.org/drawingml/2006/main" w="0">
+            <a:noFill/>
+            <a:prstDash val="solid"/>
+          </a:ln>
+        </p:spPr>
+        <p:txBody>
+          <a:bodyPr xmlns:a="http://schemas.openxmlformats.org/drawingml/2006/main" lIns="0" tIns="0" rIns="0" bIns="0" anchor="ctr">
+            <a:noAutofit/>
+          </a:bodyPr>
+          <a:lstStyle xmlns:a="http://schemas.openxmlformats.org/drawingml/2006/main"/>
+          <a:p xmlns:a="http://schemas.openxmlformats.org/drawingml/2006/main">
+            <a:pPr algn="l">
+              <a:buNone/>
+              <a:defRPr sz="3675" b="1">
                 <a:solidFill>
                   <a:srgbClr val="152B3A"/>
                 </a:solidFill>
-              </a:defRPr>
-            </a:pPr>
-            <a:r>
-              <a:rPr sz="3750" b="1">
+                <a:latin typeface="Calibri"/>
+                <a:ea typeface="Calibri"/>
+                <a:cs typeface="Calibri"/>
+              </a:defRPr>
+            </a:pPr>
+            <a:r>
+              <a:rPr sz="3675" b="1">
                 <a:solidFill>
                   <a:srgbClr val="152B3A"/>
                 </a:solidFill>
+                <a:latin typeface="Calibri"/>
+                <a:ea typeface="Calibri"/>
+                <a:cs typeface="Calibri"/>
               </a:rPr>
               <a:t>Explain the gain and the cost</a:t>
             </a:r>
@@ -3566,14 +3803,14 @@
         </p:nvSpPr>
         <p:spPr>
           <a:xfrm xmlns:a="http://schemas.openxmlformats.org/drawingml/2006/main">
-            <a:off x="609600" y="6219825"/>
+            <a:off x="609600" y="6191250"/>
             <a:ext cx="10972800" cy="9525"/>
           </a:xfrm>
           <a:prstGeom xmlns:a="http://schemas.openxmlformats.org/drawingml/2006/main" prst="rect">
             <a:avLst/>
           </a:prstGeom>
           <a:solidFill xmlns:a="http://schemas.openxmlformats.org/drawingml/2006/main">
-            <a:srgbClr val="DCE7DD"/>
+            <a:srgbClr val="CEDBD3"/>
           </a:solidFill>
           <a:ln xmlns:a="http://schemas.openxmlformats.org/drawingml/2006/main" w="0">
             <a:noFill/>
@@ -3597,34 +3834,43 @@
         </p:nvSpPr>
         <p:spPr>
           <a:xfrm xmlns:a="http://schemas.openxmlformats.org/drawingml/2006/main">
-            <a:off x="609600" y="6381750"/>
-            <a:ext cx="9906000" cy="228600"/>
-          </a:xfrm>
-          <a:prstGeom xmlns:a="http://schemas.openxmlformats.org/drawingml/2006/main" prst="rect">
-            <a:avLst/>
-          </a:prstGeom>
-          <a:noFill xmlns:a="http://schemas.openxmlformats.org/drawingml/2006/main"/>
-          <a:ln xmlns:a="http://schemas.openxmlformats.org/drawingml/2006/main" w="0">
-            <a:noFill/>
-            <a:prstDash val="solid"/>
-          </a:ln>
-        </p:spPr>
-        <p:txBody>
-          <a:bodyPr xmlns:a="http://schemas.openxmlformats.org/drawingml/2006/main" lIns="0" tIns="0" rIns="0" bIns="0" anchor="ctr"/>
-          <a:lstStyle xmlns:a="http://schemas.openxmlformats.org/drawingml/2006/main"/>
-          <a:p xmlns:a="http://schemas.openxmlformats.org/drawingml/2006/main">
-            <a:pPr>
-              <a:defRPr sz="1275" b="0">
+            <a:off x="609600" y="6419850"/>
+            <a:ext cx="9525000" cy="219075"/>
+          </a:xfrm>
+          <a:prstGeom xmlns:a="http://schemas.openxmlformats.org/drawingml/2006/main" prst="rect">
+            <a:avLst/>
+          </a:prstGeom>
+          <a:noFill xmlns:a="http://schemas.openxmlformats.org/drawingml/2006/main"/>
+          <a:ln xmlns:a="http://schemas.openxmlformats.org/drawingml/2006/main" w="0">
+            <a:noFill/>
+            <a:prstDash val="solid"/>
+          </a:ln>
+        </p:spPr>
+        <p:txBody>
+          <a:bodyPr xmlns:a="http://schemas.openxmlformats.org/drawingml/2006/main" lIns="0" tIns="0" rIns="0" bIns="0" anchor="ctr">
+            <a:noAutofit/>
+          </a:bodyPr>
+          <a:lstStyle xmlns:a="http://schemas.openxmlformats.org/drawingml/2006/main"/>
+          <a:p xmlns:a="http://schemas.openxmlformats.org/drawingml/2006/main">
+            <a:pPr algn="l">
+              <a:buNone/>
+              <a:defRPr sz="1200" b="0">
                 <a:solidFill>
                   <a:srgbClr val="50616B"/>
                 </a:solidFill>
-              </a:defRPr>
-            </a:pPr>
-            <a:r>
-              <a:rPr sz="1275" b="0">
+                <a:latin typeface="Calibri"/>
+                <a:ea typeface="Calibri"/>
+                <a:cs typeface="Calibri"/>
+              </a:defRPr>
+            </a:pPr>
+            <a:r>
+              <a:rPr sz="1200" b="0">
                 <a:solidFill>
                   <a:srgbClr val="50616B"/>
                 </a:solidFill>
+                <a:latin typeface="Calibri"/>
+                <a:ea typeface="Calibri"/>
+                <a:cs typeface="Calibri"/>
               </a:rPr>
               <a:t>AUTUMN 1  ·  WEEK 4  ·  LESSON A</a:t>
             </a:r>
@@ -3647,27 +3893,33 @@
         </p:nvSpPr>
         <p:spPr>
           <a:xfrm xmlns:a="http://schemas.openxmlformats.org/drawingml/2006/main">
-            <a:off x="11106150" y="6362700"/>
-            <a:ext cx="476250" cy="238125"/>
-          </a:xfrm>
-          <a:prstGeom xmlns:a="http://schemas.openxmlformats.org/drawingml/2006/main" prst="rect">
-            <a:avLst/>
-          </a:prstGeom>
-          <a:noFill xmlns:a="http://schemas.openxmlformats.org/drawingml/2006/main"/>
-          <a:ln xmlns:a="http://schemas.openxmlformats.org/drawingml/2006/main" w="0">
-            <a:noFill/>
-            <a:prstDash val="solid"/>
-          </a:ln>
-        </p:spPr>
-        <p:txBody>
-          <a:bodyPr xmlns:a="http://schemas.openxmlformats.org/drawingml/2006/main" lIns="0" tIns="0" rIns="0" bIns="0" anchor="ctr"/>
-          <a:lstStyle xmlns:a="http://schemas.openxmlformats.org/drawingml/2006/main"/>
-          <a:p xmlns:a="http://schemas.openxmlformats.org/drawingml/2006/main">
-            <a:pPr>
+            <a:off x="11106150" y="6400800"/>
+            <a:ext cx="476250" cy="247650"/>
+          </a:xfrm>
+          <a:prstGeom xmlns:a="http://schemas.openxmlformats.org/drawingml/2006/main" prst="rect">
+            <a:avLst/>
+          </a:prstGeom>
+          <a:noFill xmlns:a="http://schemas.openxmlformats.org/drawingml/2006/main"/>
+          <a:ln xmlns:a="http://schemas.openxmlformats.org/drawingml/2006/main" w="0">
+            <a:noFill/>
+            <a:prstDash val="solid"/>
+          </a:ln>
+        </p:spPr>
+        <p:txBody>
+          <a:bodyPr xmlns:a="http://schemas.openxmlformats.org/drawingml/2006/main" lIns="0" tIns="0" rIns="0" bIns="0" anchor="ctr">
+            <a:noAutofit/>
+          </a:bodyPr>
+          <a:lstStyle xmlns:a="http://schemas.openxmlformats.org/drawingml/2006/main"/>
+          <a:p xmlns:a="http://schemas.openxmlformats.org/drawingml/2006/main">
+            <a:pPr algn="l">
+              <a:buNone/>
               <a:defRPr sz="1350" b="1">
                 <a:solidFill>
                   <a:srgbClr val="28685E"/>
                 </a:solidFill>
+                <a:latin typeface="Calibri"/>
+                <a:ea typeface="Calibri"/>
+                <a:cs typeface="Calibri"/>
               </a:defRPr>
             </a:pPr>
             <a:r>
@@ -3675,6 +3927,9 @@
                 <a:solidFill>
                   <a:srgbClr val="28685E"/>
                 </a:solidFill>
+                <a:latin typeface="Calibri"/>
+                <a:ea typeface="Calibri"/>
+                <a:cs typeface="Calibri"/>
               </a:rPr>
               <a:t>11</a:t>
             </a:r>
@@ -3697,34 +3952,45 @@
         </p:nvSpPr>
         <p:spPr>
           <a:xfrm xmlns:a="http://schemas.openxmlformats.org/drawingml/2006/main">
-            <a:off x="609600" y="2686050"/>
-            <a:ext cx="10858500" cy="1524000"/>
-          </a:xfrm>
-          <a:prstGeom xmlns:a="http://schemas.openxmlformats.org/drawingml/2006/main" prst="rect">
-            <a:avLst/>
-          </a:prstGeom>
-          <a:noFill xmlns:a="http://schemas.openxmlformats.org/drawingml/2006/main"/>
-          <a:ln xmlns:a="http://schemas.openxmlformats.org/drawingml/2006/main" w="0">
-            <a:noFill/>
-            <a:prstDash val="solid"/>
-          </a:ln>
-        </p:spPr>
-        <p:txBody>
-          <a:bodyPr xmlns:a="http://schemas.openxmlformats.org/drawingml/2006/main" lIns="0" tIns="0" rIns="0" bIns="0" anchor="ctr"/>
-          <a:lstStyle xmlns:a="http://schemas.openxmlformats.org/drawingml/2006/main"/>
-          <a:p xmlns:a="http://schemas.openxmlformats.org/drawingml/2006/main">
-            <a:pPr>
-              <a:defRPr sz="2925" b="1">
+            <a:off x="457200" y="2190750"/>
+            <a:ext cx="11277600" cy="2143125"/>
+          </a:xfrm>
+          <a:prstGeom xmlns:a="http://schemas.openxmlformats.org/drawingml/2006/main" prst="rect">
+            <a:avLst/>
+          </a:prstGeom>
+          <a:solidFill xmlns:a="http://schemas.openxmlformats.org/drawingml/2006/main">
+            <a:srgbClr val="E7EFE9"/>
+          </a:solidFill>
+          <a:ln xmlns:a="http://schemas.openxmlformats.org/drawingml/2006/main" w="0">
+            <a:noFill/>
+            <a:prstDash val="solid"/>
+          </a:ln>
+        </p:spPr>
+        <p:txBody>
+          <a:bodyPr xmlns:a="http://schemas.openxmlformats.org/drawingml/2006/main" lIns="152400" tIns="114300" rIns="152400" bIns="114300" anchor="ctr">
+            <a:noAutofit/>
+          </a:bodyPr>
+          <a:lstStyle xmlns:a="http://schemas.openxmlformats.org/drawingml/2006/main"/>
+          <a:p xmlns:a="http://schemas.openxmlformats.org/drawingml/2006/main">
+            <a:pPr algn="l">
+              <a:buNone/>
+              <a:defRPr sz="2850" b="1">
                 <a:solidFill>
                   <a:srgbClr val="28685E"/>
                 </a:solidFill>
-              </a:defRPr>
-            </a:pPr>
-            <a:r>
-              <a:rPr sz="2925" b="1">
+                <a:latin typeface="Calibri"/>
+                <a:ea typeface="Calibri"/>
+                <a:cs typeface="Calibri"/>
+              </a:defRPr>
+            </a:pPr>
+            <a:r>
+              <a:rPr sz="2850" b="1">
                 <a:solidFill>
                   <a:srgbClr val="28685E"/>
                 </a:solidFill>
+                <a:latin typeface="Calibri"/>
+                <a:ea typeface="Calibri"/>
+                <a:cs typeface="Calibri"/>
               </a:rPr>
               <a:t>This is a ___ because ___. It helps by ___, but you have to ___.</a:t>
             </a:r>
@@ -3747,34 +4013,43 @@
         </p:nvSpPr>
         <p:spPr>
           <a:xfrm xmlns:a="http://schemas.openxmlformats.org/drawingml/2006/main">
-            <a:off x="609600" y="4552950"/>
-            <a:ext cx="10858500" cy="1285875"/>
-          </a:xfrm>
-          <a:prstGeom xmlns:a="http://schemas.openxmlformats.org/drawingml/2006/main" prst="rect">
-            <a:avLst/>
-          </a:prstGeom>
-          <a:noFill xmlns:a="http://schemas.openxmlformats.org/drawingml/2006/main"/>
-          <a:ln xmlns:a="http://schemas.openxmlformats.org/drawingml/2006/main" w="0">
-            <a:noFill/>
-            <a:prstDash val="solid"/>
-          </a:ln>
-        </p:spPr>
-        <p:txBody>
-          <a:bodyPr xmlns:a="http://schemas.openxmlformats.org/drawingml/2006/main" lIns="0" tIns="0" rIns="0" bIns="0" anchor="ctr"/>
-          <a:lstStyle xmlns:a="http://schemas.openxmlformats.org/drawingml/2006/main"/>
-          <a:p xmlns:a="http://schemas.openxmlformats.org/drawingml/2006/main">
-            <a:pPr>
-              <a:defRPr sz="2700" b="0">
+            <a:off x="609600" y="4438650"/>
+            <a:ext cx="10972800" cy="1257300"/>
+          </a:xfrm>
+          <a:prstGeom xmlns:a="http://schemas.openxmlformats.org/drawingml/2006/main" prst="rect">
+            <a:avLst/>
+          </a:prstGeom>
+          <a:noFill xmlns:a="http://schemas.openxmlformats.org/drawingml/2006/main"/>
+          <a:ln xmlns:a="http://schemas.openxmlformats.org/drawingml/2006/main" w="0">
+            <a:noFill/>
+            <a:prstDash val="solid"/>
+          </a:ln>
+        </p:spPr>
+        <p:txBody>
+          <a:bodyPr xmlns:a="http://schemas.openxmlformats.org/drawingml/2006/main" lIns="0" tIns="0" rIns="0" bIns="0" anchor="ctr">
+            <a:noAutofit/>
+          </a:bodyPr>
+          <a:lstStyle xmlns:a="http://schemas.openxmlformats.org/drawingml/2006/main"/>
+          <a:p xmlns:a="http://schemas.openxmlformats.org/drawingml/2006/main">
+            <a:pPr algn="l">
+              <a:buNone/>
+              <a:defRPr sz="2550" b="0">
                 <a:solidFill>
                   <a:srgbClr val="152B3A"/>
                 </a:solidFill>
-              </a:defRPr>
-            </a:pPr>
-            <a:r>
-              <a:rPr sz="2700" b="0">
+                <a:latin typeface="Calibri"/>
+                <a:ea typeface="Calibri"/>
+                <a:cs typeface="Calibri"/>
+              </a:defRPr>
+            </a:pPr>
+            <a:r>
+              <a:rPr sz="2550" b="0">
                 <a:solidFill>
                   <a:srgbClr val="152B3A"/>
                 </a:solidFill>
+                <a:latin typeface="Calibri"/>
+                <a:ea typeface="Calibri"/>
+                <a:cs typeface="Calibri"/>
               </a:rPr>
               <a:t>Name the mechanism, its job and the trade-off.</a:t>
             </a:r>
@@ -3797,7 +4072,7 @@
     <p:bg>
       <p:bgPr>
         <a:solidFill xmlns:a="http://schemas.openxmlformats.org/drawingml/2006/main">
-          <a:srgbClr val="F5F1E8"/>
+          <a:srgbClr val="FAF9F5"/>
         </a:solidFill>
       </p:bgPr>
     </p:bg>
@@ -3826,8 +4101,8 @@
         </p:nvSpPr>
         <p:spPr>
           <a:xfrm xmlns:a="http://schemas.openxmlformats.org/drawingml/2006/main">
-            <a:off x="609600" y="552450"/>
-            <a:ext cx="781050" cy="57150"/>
+            <a:off x="609600" y="733425"/>
+            <a:ext cx="781050" cy="38100"/>
           </a:xfrm>
           <a:prstGeom xmlns:a="http://schemas.openxmlformats.org/drawingml/2006/main" prst="rect">
             <a:avLst/>
@@ -3857,34 +4132,43 @@
         </p:nvSpPr>
         <p:spPr>
           <a:xfrm xmlns:a="http://schemas.openxmlformats.org/drawingml/2006/main">
-            <a:off x="609600" y="762000"/>
-            <a:ext cx="8572500" cy="285750"/>
-          </a:xfrm>
-          <a:prstGeom xmlns:a="http://schemas.openxmlformats.org/drawingml/2006/main" prst="rect">
-            <a:avLst/>
-          </a:prstGeom>
-          <a:noFill xmlns:a="http://schemas.openxmlformats.org/drawingml/2006/main"/>
-          <a:ln xmlns:a="http://schemas.openxmlformats.org/drawingml/2006/main" w="0">
-            <a:noFill/>
-            <a:prstDash val="solid"/>
-          </a:ln>
-        </p:spPr>
-        <p:txBody>
-          <a:bodyPr xmlns:a="http://schemas.openxmlformats.org/drawingml/2006/main" lIns="0" tIns="0" rIns="0" bIns="0" anchor="ctr"/>
-          <a:lstStyle xmlns:a="http://schemas.openxmlformats.org/drawingml/2006/main"/>
-          <a:p xmlns:a="http://schemas.openxmlformats.org/drawingml/2006/main">
-            <a:pPr>
-              <a:defRPr sz="1500" b="1">
+            <a:off x="609600" y="342900"/>
+            <a:ext cx="9334500" cy="304800"/>
+          </a:xfrm>
+          <a:prstGeom xmlns:a="http://schemas.openxmlformats.org/drawingml/2006/main" prst="rect">
+            <a:avLst/>
+          </a:prstGeom>
+          <a:noFill xmlns:a="http://schemas.openxmlformats.org/drawingml/2006/main"/>
+          <a:ln xmlns:a="http://schemas.openxmlformats.org/drawingml/2006/main" w="0">
+            <a:noFill/>
+            <a:prstDash val="solid"/>
+          </a:ln>
+        </p:spPr>
+        <p:txBody>
+          <a:bodyPr xmlns:a="http://schemas.openxmlformats.org/drawingml/2006/main" lIns="0" tIns="0" rIns="0" bIns="0" anchor="ctr">
+            <a:noAutofit/>
+          </a:bodyPr>
+          <a:lstStyle xmlns:a="http://schemas.openxmlformats.org/drawingml/2006/main"/>
+          <a:p xmlns:a="http://schemas.openxmlformats.org/drawingml/2006/main">
+            <a:pPr algn="l">
+              <a:buNone/>
+              <a:defRPr sz="1350" b="1">
                 <a:solidFill>
                   <a:srgbClr val="28685E"/>
                 </a:solidFill>
-              </a:defRPr>
-            </a:pPr>
-            <a:r>
-              <a:rPr sz="1500" b="1">
+                <a:latin typeface="Calibri"/>
+                <a:ea typeface="Calibri"/>
+                <a:cs typeface="Calibri"/>
+              </a:defRPr>
+            </a:pPr>
+            <a:r>
+              <a:rPr sz="1350" b="1">
                 <a:solidFill>
                   <a:srgbClr val="28685E"/>
                 </a:solidFill>
+                <a:latin typeface="Calibri"/>
+                <a:ea typeface="Calibri"/>
+                <a:cs typeface="Calibri"/>
               </a:rPr>
               <a:t>MADE BY MATT  /  GROW SCIENCE</a:t>
             </a:r>
@@ -3907,34 +4191,43 @@
         </p:nvSpPr>
         <p:spPr>
           <a:xfrm xmlns:a="http://schemas.openxmlformats.org/drawingml/2006/main">
-            <a:off x="609600" y="1352550"/>
-            <a:ext cx="10972800" cy="952500"/>
-          </a:xfrm>
-          <a:prstGeom xmlns:a="http://schemas.openxmlformats.org/drawingml/2006/main" prst="rect">
-            <a:avLst/>
-          </a:prstGeom>
-          <a:noFill xmlns:a="http://schemas.openxmlformats.org/drawingml/2006/main"/>
-          <a:ln xmlns:a="http://schemas.openxmlformats.org/drawingml/2006/main" w="0">
-            <a:noFill/>
-            <a:prstDash val="solid"/>
-          </a:ln>
-        </p:spPr>
-        <p:txBody>
-          <a:bodyPr xmlns:a="http://schemas.openxmlformats.org/drawingml/2006/main" lIns="0" tIns="0" rIns="0" bIns="0" anchor="ctr"/>
-          <a:lstStyle xmlns:a="http://schemas.openxmlformats.org/drawingml/2006/main"/>
-          <a:p xmlns:a="http://schemas.openxmlformats.org/drawingml/2006/main">
-            <a:pPr>
-              <a:defRPr sz="3750" b="1">
+            <a:off x="609600" y="990600"/>
+            <a:ext cx="10972800" cy="1000125"/>
+          </a:xfrm>
+          <a:prstGeom xmlns:a="http://schemas.openxmlformats.org/drawingml/2006/main" prst="rect">
+            <a:avLst/>
+          </a:prstGeom>
+          <a:noFill xmlns:a="http://schemas.openxmlformats.org/drawingml/2006/main"/>
+          <a:ln xmlns:a="http://schemas.openxmlformats.org/drawingml/2006/main" w="0">
+            <a:noFill/>
+            <a:prstDash val="solid"/>
+          </a:ln>
+        </p:spPr>
+        <p:txBody>
+          <a:bodyPr xmlns:a="http://schemas.openxmlformats.org/drawingml/2006/main" lIns="0" tIns="0" rIns="0" bIns="0" anchor="ctr">
+            <a:noAutofit/>
+          </a:bodyPr>
+          <a:lstStyle xmlns:a="http://schemas.openxmlformats.org/drawingml/2006/main"/>
+          <a:p xmlns:a="http://schemas.openxmlformats.org/drawingml/2006/main">
+            <a:pPr algn="l">
+              <a:buNone/>
+              <a:defRPr sz="3675" b="1">
                 <a:solidFill>
                   <a:srgbClr val="152B3A"/>
                 </a:solidFill>
-              </a:defRPr>
-            </a:pPr>
-            <a:r>
-              <a:rPr sz="3750" b="1">
+                <a:latin typeface="Calibri"/>
+                <a:ea typeface="Calibri"/>
+                <a:cs typeface="Calibri"/>
+              </a:defRPr>
+            </a:pPr>
+            <a:r>
+              <a:rPr sz="3675" b="1">
                 <a:solidFill>
                   <a:srgbClr val="152B3A"/>
                 </a:solidFill>
+                <a:latin typeface="Calibri"/>
+                <a:ea typeface="Calibri"/>
+                <a:cs typeface="Calibri"/>
               </a:rPr>
               <a:t>Sort the gain and the cost</a:t>
             </a:r>
@@ -3957,14 +4250,14 @@
         </p:nvSpPr>
         <p:spPr>
           <a:xfrm xmlns:a="http://schemas.openxmlformats.org/drawingml/2006/main">
-            <a:off x="609600" y="6219825"/>
+            <a:off x="609600" y="6191250"/>
             <a:ext cx="10972800" cy="9525"/>
           </a:xfrm>
           <a:prstGeom xmlns:a="http://schemas.openxmlformats.org/drawingml/2006/main" prst="rect">
             <a:avLst/>
           </a:prstGeom>
           <a:solidFill xmlns:a="http://schemas.openxmlformats.org/drawingml/2006/main">
-            <a:srgbClr val="DCE7DD"/>
+            <a:srgbClr val="CEDBD3"/>
           </a:solidFill>
           <a:ln xmlns:a="http://schemas.openxmlformats.org/drawingml/2006/main" w="0">
             <a:noFill/>
@@ -3988,34 +4281,43 @@
         </p:nvSpPr>
         <p:spPr>
           <a:xfrm xmlns:a="http://schemas.openxmlformats.org/drawingml/2006/main">
-            <a:off x="609600" y="6381750"/>
-            <a:ext cx="9906000" cy="228600"/>
-          </a:xfrm>
-          <a:prstGeom xmlns:a="http://schemas.openxmlformats.org/drawingml/2006/main" prst="rect">
-            <a:avLst/>
-          </a:prstGeom>
-          <a:noFill xmlns:a="http://schemas.openxmlformats.org/drawingml/2006/main"/>
-          <a:ln xmlns:a="http://schemas.openxmlformats.org/drawingml/2006/main" w="0">
-            <a:noFill/>
-            <a:prstDash val="solid"/>
-          </a:ln>
-        </p:spPr>
-        <p:txBody>
-          <a:bodyPr xmlns:a="http://schemas.openxmlformats.org/drawingml/2006/main" lIns="0" tIns="0" rIns="0" bIns="0" anchor="ctr"/>
-          <a:lstStyle xmlns:a="http://schemas.openxmlformats.org/drawingml/2006/main"/>
-          <a:p xmlns:a="http://schemas.openxmlformats.org/drawingml/2006/main">
-            <a:pPr>
-              <a:defRPr sz="1275" b="0">
+            <a:off x="609600" y="6419850"/>
+            <a:ext cx="9525000" cy="219075"/>
+          </a:xfrm>
+          <a:prstGeom xmlns:a="http://schemas.openxmlformats.org/drawingml/2006/main" prst="rect">
+            <a:avLst/>
+          </a:prstGeom>
+          <a:noFill xmlns:a="http://schemas.openxmlformats.org/drawingml/2006/main"/>
+          <a:ln xmlns:a="http://schemas.openxmlformats.org/drawingml/2006/main" w="0">
+            <a:noFill/>
+            <a:prstDash val="solid"/>
+          </a:ln>
+        </p:spPr>
+        <p:txBody>
+          <a:bodyPr xmlns:a="http://schemas.openxmlformats.org/drawingml/2006/main" lIns="0" tIns="0" rIns="0" bIns="0" anchor="ctr">
+            <a:noAutofit/>
+          </a:bodyPr>
+          <a:lstStyle xmlns:a="http://schemas.openxmlformats.org/drawingml/2006/main"/>
+          <a:p xmlns:a="http://schemas.openxmlformats.org/drawingml/2006/main">
+            <a:pPr algn="l">
+              <a:buNone/>
+              <a:defRPr sz="1200" b="0">
                 <a:solidFill>
                   <a:srgbClr val="50616B"/>
                 </a:solidFill>
-              </a:defRPr>
-            </a:pPr>
-            <a:r>
-              <a:rPr sz="1275" b="0">
+                <a:latin typeface="Calibri"/>
+                <a:ea typeface="Calibri"/>
+                <a:cs typeface="Calibri"/>
+              </a:defRPr>
+            </a:pPr>
+            <a:r>
+              <a:rPr sz="1200" b="0">
                 <a:solidFill>
                   <a:srgbClr val="50616B"/>
                 </a:solidFill>
+                <a:latin typeface="Calibri"/>
+                <a:ea typeface="Calibri"/>
+                <a:cs typeface="Calibri"/>
               </a:rPr>
               <a:t>AUTUMN 1  ·  WEEK 4  ·  LESSON A</a:t>
             </a:r>
@@ -4038,27 +4340,33 @@
         </p:nvSpPr>
         <p:spPr>
           <a:xfrm xmlns:a="http://schemas.openxmlformats.org/drawingml/2006/main">
-            <a:off x="11106150" y="6362700"/>
-            <a:ext cx="476250" cy="238125"/>
-          </a:xfrm>
-          <a:prstGeom xmlns:a="http://schemas.openxmlformats.org/drawingml/2006/main" prst="rect">
-            <a:avLst/>
-          </a:prstGeom>
-          <a:noFill xmlns:a="http://schemas.openxmlformats.org/drawingml/2006/main"/>
-          <a:ln xmlns:a="http://schemas.openxmlformats.org/drawingml/2006/main" w="0">
-            <a:noFill/>
-            <a:prstDash val="solid"/>
-          </a:ln>
-        </p:spPr>
-        <p:txBody>
-          <a:bodyPr xmlns:a="http://schemas.openxmlformats.org/drawingml/2006/main" lIns="0" tIns="0" rIns="0" bIns="0" anchor="ctr"/>
-          <a:lstStyle xmlns:a="http://schemas.openxmlformats.org/drawingml/2006/main"/>
-          <a:p xmlns:a="http://schemas.openxmlformats.org/drawingml/2006/main">
-            <a:pPr>
+            <a:off x="11106150" y="6400800"/>
+            <a:ext cx="476250" cy="247650"/>
+          </a:xfrm>
+          <a:prstGeom xmlns:a="http://schemas.openxmlformats.org/drawingml/2006/main" prst="rect">
+            <a:avLst/>
+          </a:prstGeom>
+          <a:noFill xmlns:a="http://schemas.openxmlformats.org/drawingml/2006/main"/>
+          <a:ln xmlns:a="http://schemas.openxmlformats.org/drawingml/2006/main" w="0">
+            <a:noFill/>
+            <a:prstDash val="solid"/>
+          </a:ln>
+        </p:spPr>
+        <p:txBody>
+          <a:bodyPr xmlns:a="http://schemas.openxmlformats.org/drawingml/2006/main" lIns="0" tIns="0" rIns="0" bIns="0" anchor="ctr">
+            <a:noAutofit/>
+          </a:bodyPr>
+          <a:lstStyle xmlns:a="http://schemas.openxmlformats.org/drawingml/2006/main"/>
+          <a:p xmlns:a="http://schemas.openxmlformats.org/drawingml/2006/main">
+            <a:pPr algn="l">
+              <a:buNone/>
               <a:defRPr sz="1350" b="1">
                 <a:solidFill>
                   <a:srgbClr val="28685E"/>
                 </a:solidFill>
+                <a:latin typeface="Calibri"/>
+                <a:ea typeface="Calibri"/>
+                <a:cs typeface="Calibri"/>
               </a:defRPr>
             </a:pPr>
             <a:r>
@@ -4066,6 +4374,9 @@
                 <a:solidFill>
                   <a:srgbClr val="28685E"/>
                 </a:solidFill>
+                <a:latin typeface="Calibri"/>
+                <a:ea typeface="Calibri"/>
+                <a:cs typeface="Calibri"/>
               </a:rPr>
               <a:t>12</a:t>
             </a:r>
@@ -4088,34 +4399,43 @@
         </p:nvSpPr>
         <p:spPr>
           <a:xfrm xmlns:a="http://schemas.openxmlformats.org/drawingml/2006/main">
-            <a:off x="609600" y="2619375"/>
-            <a:ext cx="10972800" cy="533400"/>
-          </a:xfrm>
-          <a:prstGeom xmlns:a="http://schemas.openxmlformats.org/drawingml/2006/main" prst="rect">
-            <a:avLst/>
-          </a:prstGeom>
-          <a:noFill xmlns:a="http://schemas.openxmlformats.org/drawingml/2006/main"/>
-          <a:ln xmlns:a="http://schemas.openxmlformats.org/drawingml/2006/main" w="0">
-            <a:noFill/>
-            <a:prstDash val="solid"/>
-          </a:ln>
-        </p:spPr>
-        <p:txBody>
-          <a:bodyPr xmlns:a="http://schemas.openxmlformats.org/drawingml/2006/main" lIns="0" tIns="0" rIns="0" bIns="0" anchor="ctr"/>
-          <a:lstStyle xmlns:a="http://schemas.openxmlformats.org/drawingml/2006/main"/>
-          <a:p xmlns:a="http://schemas.openxmlformats.org/drawingml/2006/main">
-            <a:pPr>
-              <a:defRPr sz="2175" b="0">
+            <a:off x="1000125" y="2333625"/>
+            <a:ext cx="10382250" cy="622935"/>
+          </a:xfrm>
+          <a:prstGeom xmlns:a="http://schemas.openxmlformats.org/drawingml/2006/main" prst="rect">
+            <a:avLst/>
+          </a:prstGeom>
+          <a:noFill xmlns:a="http://schemas.openxmlformats.org/drawingml/2006/main"/>
+          <a:ln xmlns:a="http://schemas.openxmlformats.org/drawingml/2006/main" w="0">
+            <a:noFill/>
+            <a:prstDash val="solid"/>
+          </a:ln>
+        </p:spPr>
+        <p:txBody>
+          <a:bodyPr xmlns:a="http://schemas.openxmlformats.org/drawingml/2006/main" lIns="0" tIns="0" rIns="0" bIns="0" anchor="ctr">
+            <a:noAutofit/>
+          </a:bodyPr>
+          <a:lstStyle xmlns:a="http://schemas.openxmlformats.org/drawingml/2006/main"/>
+          <a:p xmlns:a="http://schemas.openxmlformats.org/drawingml/2006/main">
+            <a:pPr algn="l">
+              <a:buNone/>
+              <a:defRPr sz="2400" b="0">
                 <a:solidFill>
                   <a:srgbClr val="152B3A"/>
                 </a:solidFill>
-              </a:defRPr>
-            </a:pPr>
-            <a:r>
-              <a:rPr sz="2175" b="0">
+                <a:latin typeface="Calibri"/>
+                <a:ea typeface="Calibri"/>
+                <a:cs typeface="Calibri"/>
+              </a:defRPr>
+            </a:pPr>
+            <a:r>
+              <a:rPr sz="2400" b="0">
                 <a:solidFill>
                   <a:srgbClr val="152B3A"/>
                 </a:solidFill>
+                <a:latin typeface="Calibri"/>
+                <a:ea typeface="Calibri"/>
+                <a:cs typeface="Calibri"/>
               </a:rPr>
               <a:t>Less effort force needed</a:t>
             </a:r>
@@ -4138,34 +4458,43 @@
         </p:nvSpPr>
         <p:spPr>
           <a:xfrm xmlns:a="http://schemas.openxmlformats.org/drawingml/2006/main">
-            <a:off x="609600" y="3228975"/>
-            <a:ext cx="10972800" cy="533400"/>
-          </a:xfrm>
-          <a:prstGeom xmlns:a="http://schemas.openxmlformats.org/drawingml/2006/main" prst="rect">
-            <a:avLst/>
-          </a:prstGeom>
-          <a:noFill xmlns:a="http://schemas.openxmlformats.org/drawingml/2006/main"/>
-          <a:ln xmlns:a="http://schemas.openxmlformats.org/drawingml/2006/main" w="0">
-            <a:noFill/>
-            <a:prstDash val="solid"/>
-          </a:ln>
-        </p:spPr>
-        <p:txBody>
-          <a:bodyPr xmlns:a="http://schemas.openxmlformats.org/drawingml/2006/main" lIns="0" tIns="0" rIns="0" bIns="0" anchor="ctr"/>
-          <a:lstStyle xmlns:a="http://schemas.openxmlformats.org/drawingml/2006/main"/>
-          <a:p xmlns:a="http://schemas.openxmlformats.org/drawingml/2006/main">
-            <a:pPr>
-              <a:defRPr sz="2175" b="0">
+            <a:off x="1000125" y="3013710"/>
+            <a:ext cx="10382250" cy="622935"/>
+          </a:xfrm>
+          <a:prstGeom xmlns:a="http://schemas.openxmlformats.org/drawingml/2006/main" prst="rect">
+            <a:avLst/>
+          </a:prstGeom>
+          <a:noFill xmlns:a="http://schemas.openxmlformats.org/drawingml/2006/main"/>
+          <a:ln xmlns:a="http://schemas.openxmlformats.org/drawingml/2006/main" w="0">
+            <a:noFill/>
+            <a:prstDash val="solid"/>
+          </a:ln>
+        </p:spPr>
+        <p:txBody>
+          <a:bodyPr xmlns:a="http://schemas.openxmlformats.org/drawingml/2006/main" lIns="0" tIns="0" rIns="0" bIns="0" anchor="ctr">
+            <a:noAutofit/>
+          </a:bodyPr>
+          <a:lstStyle xmlns:a="http://schemas.openxmlformats.org/drawingml/2006/main"/>
+          <a:p xmlns:a="http://schemas.openxmlformats.org/drawingml/2006/main">
+            <a:pPr algn="l">
+              <a:buNone/>
+              <a:defRPr sz="2400" b="0">
                 <a:solidFill>
                   <a:srgbClr val="152B3A"/>
                 </a:solidFill>
-              </a:defRPr>
-            </a:pPr>
-            <a:r>
-              <a:rPr sz="2175" b="0">
+                <a:latin typeface="Calibri"/>
+                <a:ea typeface="Calibri"/>
+                <a:cs typeface="Calibri"/>
+              </a:defRPr>
+            </a:pPr>
+            <a:r>
+              <a:rPr sz="2400" b="0">
                 <a:solidFill>
                   <a:srgbClr val="152B3A"/>
                 </a:solidFill>
+                <a:latin typeface="Calibri"/>
+                <a:ea typeface="Calibri"/>
+                <a:cs typeface="Calibri"/>
               </a:rPr>
               <a:t>Hand travels farther</a:t>
             </a:r>
@@ -4188,34 +4517,43 @@
         </p:nvSpPr>
         <p:spPr>
           <a:xfrm xmlns:a="http://schemas.openxmlformats.org/drawingml/2006/main">
-            <a:off x="609600" y="3838575"/>
-            <a:ext cx="10972800" cy="533400"/>
-          </a:xfrm>
-          <a:prstGeom xmlns:a="http://schemas.openxmlformats.org/drawingml/2006/main" prst="rect">
-            <a:avLst/>
-          </a:prstGeom>
-          <a:noFill xmlns:a="http://schemas.openxmlformats.org/drawingml/2006/main"/>
-          <a:ln xmlns:a="http://schemas.openxmlformats.org/drawingml/2006/main" w="0">
-            <a:noFill/>
-            <a:prstDash val="solid"/>
-          </a:ln>
-        </p:spPr>
-        <p:txBody>
-          <a:bodyPr xmlns:a="http://schemas.openxmlformats.org/drawingml/2006/main" lIns="0" tIns="0" rIns="0" bIns="0" anchor="ctr"/>
-          <a:lstStyle xmlns:a="http://schemas.openxmlformats.org/drawingml/2006/main"/>
-          <a:p xmlns:a="http://schemas.openxmlformats.org/drawingml/2006/main">
-            <a:pPr>
-              <a:defRPr sz="2175" b="0">
+            <a:off x="1000125" y="3693795"/>
+            <a:ext cx="10382250" cy="622935"/>
+          </a:xfrm>
+          <a:prstGeom xmlns:a="http://schemas.openxmlformats.org/drawingml/2006/main" prst="rect">
+            <a:avLst/>
+          </a:prstGeom>
+          <a:noFill xmlns:a="http://schemas.openxmlformats.org/drawingml/2006/main"/>
+          <a:ln xmlns:a="http://schemas.openxmlformats.org/drawingml/2006/main" w="0">
+            <a:noFill/>
+            <a:prstDash val="solid"/>
+          </a:ln>
+        </p:spPr>
+        <p:txBody>
+          <a:bodyPr xmlns:a="http://schemas.openxmlformats.org/drawingml/2006/main" lIns="0" tIns="0" rIns="0" bIns="0" anchor="ctr">
+            <a:noAutofit/>
+          </a:bodyPr>
+          <a:lstStyle xmlns:a="http://schemas.openxmlformats.org/drawingml/2006/main"/>
+          <a:p xmlns:a="http://schemas.openxmlformats.org/drawingml/2006/main">
+            <a:pPr algn="l">
+              <a:buNone/>
+              <a:defRPr sz="2400" b="0">
                 <a:solidFill>
                   <a:srgbClr val="152B3A"/>
                 </a:solidFill>
-              </a:defRPr>
-            </a:pPr>
-            <a:r>
-              <a:rPr sz="2175" b="0">
+                <a:latin typeface="Calibri"/>
+                <a:ea typeface="Calibri"/>
+                <a:cs typeface="Calibri"/>
+              </a:defRPr>
+            </a:pPr>
+            <a:r>
+              <a:rPr sz="2400" b="0">
                 <a:solidFill>
                   <a:srgbClr val="152B3A"/>
                 </a:solidFill>
+                <a:latin typeface="Calibri"/>
+                <a:ea typeface="Calibri"/>
+                <a:cs typeface="Calibri"/>
               </a:rPr>
               <a:t>Pull down instead of up</a:t>
             </a:r>
@@ -4238,34 +4576,43 @@
         </p:nvSpPr>
         <p:spPr>
           <a:xfrm xmlns:a="http://schemas.openxmlformats.org/drawingml/2006/main">
-            <a:off x="609600" y="4448175"/>
-            <a:ext cx="10972800" cy="533400"/>
-          </a:xfrm>
-          <a:prstGeom xmlns:a="http://schemas.openxmlformats.org/drawingml/2006/main" prst="rect">
-            <a:avLst/>
-          </a:prstGeom>
-          <a:noFill xmlns:a="http://schemas.openxmlformats.org/drawingml/2006/main"/>
-          <a:ln xmlns:a="http://schemas.openxmlformats.org/drawingml/2006/main" w="0">
-            <a:noFill/>
-            <a:prstDash val="solid"/>
-          </a:ln>
-        </p:spPr>
-        <p:txBody>
-          <a:bodyPr xmlns:a="http://schemas.openxmlformats.org/drawingml/2006/main" lIns="0" tIns="0" rIns="0" bIns="0" anchor="ctr"/>
-          <a:lstStyle xmlns:a="http://schemas.openxmlformats.org/drawingml/2006/main"/>
-          <a:p xmlns:a="http://schemas.openxmlformats.org/drawingml/2006/main">
-            <a:pPr>
-              <a:defRPr sz="2175" b="0">
+            <a:off x="1000125" y="4373880"/>
+            <a:ext cx="10382250" cy="622935"/>
+          </a:xfrm>
+          <a:prstGeom xmlns:a="http://schemas.openxmlformats.org/drawingml/2006/main" prst="rect">
+            <a:avLst/>
+          </a:prstGeom>
+          <a:noFill xmlns:a="http://schemas.openxmlformats.org/drawingml/2006/main"/>
+          <a:ln xmlns:a="http://schemas.openxmlformats.org/drawingml/2006/main" w="0">
+            <a:noFill/>
+            <a:prstDash val="solid"/>
+          </a:ln>
+        </p:spPr>
+        <p:txBody>
+          <a:bodyPr xmlns:a="http://schemas.openxmlformats.org/drawingml/2006/main" lIns="0" tIns="0" rIns="0" bIns="0" anchor="ctr">
+            <a:noAutofit/>
+          </a:bodyPr>
+          <a:lstStyle xmlns:a="http://schemas.openxmlformats.org/drawingml/2006/main"/>
+          <a:p xmlns:a="http://schemas.openxmlformats.org/drawingml/2006/main">
+            <a:pPr algn="l">
+              <a:buNone/>
+              <a:defRPr sz="2400" b="0">
                 <a:solidFill>
                   <a:srgbClr val="152B3A"/>
                 </a:solidFill>
-              </a:defRPr>
-            </a:pPr>
-            <a:r>
-              <a:rPr sz="2175" b="0">
+                <a:latin typeface="Calibri"/>
+                <a:ea typeface="Calibri"/>
+                <a:cs typeface="Calibri"/>
+              </a:defRPr>
+            </a:pPr>
+            <a:r>
+              <a:rPr sz="2400" b="0">
                 <a:solidFill>
                   <a:srgbClr val="152B3A"/>
                 </a:solidFill>
+                <a:latin typeface="Calibri"/>
+                <a:ea typeface="Calibri"/>
+                <a:cs typeface="Calibri"/>
               </a:rPr>
               <a:t>Mechanism creates extra energy</a:t>
             </a:r>
@@ -4288,36 +4635,450 @@
         </p:nvSpPr>
         <p:spPr>
           <a:xfrm xmlns:a="http://schemas.openxmlformats.org/drawingml/2006/main">
-            <a:off x="609600" y="5057775"/>
-            <a:ext cx="10972800" cy="533400"/>
-          </a:xfrm>
-          <a:prstGeom xmlns:a="http://schemas.openxmlformats.org/drawingml/2006/main" prst="rect">
-            <a:avLst/>
-          </a:prstGeom>
-          <a:noFill xmlns:a="http://schemas.openxmlformats.org/drawingml/2006/main"/>
-          <a:ln xmlns:a="http://schemas.openxmlformats.org/drawingml/2006/main" w="0">
-            <a:noFill/>
-            <a:prstDash val="solid"/>
-          </a:ln>
-        </p:spPr>
-        <p:txBody>
-          <a:bodyPr xmlns:a="http://schemas.openxmlformats.org/drawingml/2006/main" lIns="0" tIns="0" rIns="0" bIns="0" anchor="ctr"/>
-          <a:lstStyle xmlns:a="http://schemas.openxmlformats.org/drawingml/2006/main"/>
-          <a:p xmlns:a="http://schemas.openxmlformats.org/drawingml/2006/main">
-            <a:pPr>
-              <a:defRPr sz="2175" b="0">
+            <a:off x="1000125" y="5053965"/>
+            <a:ext cx="10382250" cy="622935"/>
+          </a:xfrm>
+          <a:prstGeom xmlns:a="http://schemas.openxmlformats.org/drawingml/2006/main" prst="rect">
+            <a:avLst/>
+          </a:prstGeom>
+          <a:noFill xmlns:a="http://schemas.openxmlformats.org/drawingml/2006/main"/>
+          <a:ln xmlns:a="http://schemas.openxmlformats.org/drawingml/2006/main" w="0">
+            <a:noFill/>
+            <a:prstDash val="solid"/>
+          </a:ln>
+        </p:spPr>
+        <p:txBody>
+          <a:bodyPr xmlns:a="http://schemas.openxmlformats.org/drawingml/2006/main" lIns="0" tIns="0" rIns="0" bIns="0" anchor="ctr">
+            <a:noAutofit/>
+          </a:bodyPr>
+          <a:lstStyle xmlns:a="http://schemas.openxmlformats.org/drawingml/2006/main"/>
+          <a:p xmlns:a="http://schemas.openxmlformats.org/drawingml/2006/main">
+            <a:pPr algn="l">
+              <a:buNone/>
+              <a:defRPr sz="2400" b="0">
                 <a:solidFill>
                   <a:srgbClr val="152B3A"/>
                 </a:solidFill>
-              </a:defRPr>
-            </a:pPr>
-            <a:r>
-              <a:rPr sz="2175" b="0">
+                <a:latin typeface="Calibri"/>
+                <a:ea typeface="Calibri"/>
+                <a:cs typeface="Calibri"/>
+              </a:defRPr>
+            </a:pPr>
+            <a:r>
+              <a:rPr sz="2400" b="0">
                 <a:solidFill>
                   <a:srgbClr val="152B3A"/>
                 </a:solidFill>
+                <a:latin typeface="Calibri"/>
+                <a:ea typeface="Calibri"/>
+                <a:cs typeface="Calibri"/>
               </a:rPr>
               <a:t>Slower turning, greater turning effect</a:t>
+            </a:r>
+          </a:p>
+        </p:txBody>
+      </p:sp>
+      <p:sp>
+        <p:nvSpPr>
+          <p:cNvPr id="13" name="cue-0">
+            <a:extLst xmlns:a="http://schemas.openxmlformats.org/drawingml/2006/main">
+              <a:ext uri="{FF2B5EF4-FFF2-40B4-BE49-F238E27FC236}">
+                <a16:creationId xmlns:a16="http://schemas.microsoft.com/office/drawing/2014/main" id="{6083D0A7-C12A-4CCD-8510-06FDE84CFF55}"/>
+              </a:ext>
+            </a:extLst>
+          </p:cNvPr>
+          <p:cNvSpPr>
+            <a:spLocks xmlns:a="http://schemas.openxmlformats.org/drawingml/2006/main" noGrp="1"/>
+          </p:cNvSpPr>
+          <p:nvPr/>
+        </p:nvSpPr>
+        <p:spPr>
+          <a:xfrm xmlns:a="http://schemas.openxmlformats.org/drawingml/2006/main">
+            <a:off x="609600" y="2362200"/>
+            <a:ext cx="323850" cy="323850"/>
+          </a:xfrm>
+          <a:prstGeom xmlns:a="http://schemas.openxmlformats.org/drawingml/2006/main" prst="rect">
+            <a:avLst/>
+          </a:prstGeom>
+          <a:noFill xmlns:a="http://schemas.openxmlformats.org/drawingml/2006/main"/>
+          <a:ln xmlns:a="http://schemas.openxmlformats.org/drawingml/2006/main" w="0">
+            <a:noFill/>
+          </a:ln>
+        </p:spPr>
+        <p:txBody>
+          <a:bodyPr xmlns:a="http://schemas.openxmlformats.org/drawingml/2006/main" lIns="0" tIns="0" rIns="0" bIns="0" anchor="ctr">
+            <a:noAutofit/>
+          </a:bodyPr>
+          <a:lstStyle xmlns:a="http://schemas.openxmlformats.org/drawingml/2006/main"/>
+          <a:p xmlns:a="http://schemas.openxmlformats.org/drawingml/2006/main">
+            <a:pPr algn="l">
+              <a:defRPr sz="1350" b="1">
+                <a:solidFill>
+                  <a:srgbClr val="28685E"/>
+                </a:solidFill>
+                <a:latin typeface="Calibri"/>
+                <a:ea typeface="Calibri"/>
+                <a:cs typeface="Calibri"/>
+              </a:defRPr>
+            </a:pPr>
+            <a:r>
+              <a:rPr sz="1350" b="1">
+                <a:solidFill>
+                  <a:srgbClr val="28685E"/>
+                </a:solidFill>
+                <a:latin typeface="Calibri"/>
+                <a:ea typeface="Calibri"/>
+                <a:cs typeface="Calibri"/>
+              </a:rPr>
+              <a:t>01</a:t>
+            </a:r>
+          </a:p>
+        </p:txBody>
+      </p:sp>
+      <p:sp>
+        <p:nvSpPr>
+          <p:cNvPr id="14" name="row-rule-0">
+            <a:extLst xmlns:a="http://schemas.openxmlformats.org/drawingml/2006/main">
+              <a:ext uri="{FF2B5EF4-FFF2-40B4-BE49-F238E27FC236}">
+                <a16:creationId xmlns:a16="http://schemas.microsoft.com/office/drawing/2014/main" id="{CECD581B-70CA-45C8-9565-69EB26987378}"/>
+              </a:ext>
+            </a:extLst>
+          </p:cNvPr>
+          <p:cNvSpPr>
+            <a:spLocks xmlns:a="http://schemas.openxmlformats.org/drawingml/2006/main" noGrp="1"/>
+          </p:cNvSpPr>
+          <p:nvPr/>
+        </p:nvSpPr>
+        <p:spPr>
+          <a:xfrm xmlns:a="http://schemas.openxmlformats.org/drawingml/2006/main">
+            <a:off x="1000125" y="2966085"/>
+            <a:ext cx="10334625" cy="0"/>
+          </a:xfrm>
+          <a:prstGeom xmlns:a="http://schemas.openxmlformats.org/drawingml/2006/main" prst="line">
+            <a:avLst/>
+          </a:prstGeom>
+          <a:noFill xmlns:a="http://schemas.openxmlformats.org/drawingml/2006/main"/>
+          <a:ln xmlns:a="http://schemas.openxmlformats.org/drawingml/2006/main" w="9525">
+            <a:solidFill>
+              <a:srgbClr val="CEDBD3"/>
+            </a:solidFill>
+          </a:ln>
+        </p:spPr>
+      </p:sp>
+      <p:sp>
+        <p:nvSpPr>
+          <p:cNvPr id="15" name="cue-1">
+            <a:extLst xmlns:a="http://schemas.openxmlformats.org/drawingml/2006/main">
+              <a:ext uri="{FF2B5EF4-FFF2-40B4-BE49-F238E27FC236}">
+                <a16:creationId xmlns:a16="http://schemas.microsoft.com/office/drawing/2014/main" id="{1446D87B-FF29-4E5D-9992-FEE99150BA8F}"/>
+              </a:ext>
+            </a:extLst>
+          </p:cNvPr>
+          <p:cNvSpPr>
+            <a:spLocks xmlns:a="http://schemas.openxmlformats.org/drawingml/2006/main" noGrp="1"/>
+          </p:cNvSpPr>
+          <p:nvPr/>
+        </p:nvSpPr>
+        <p:spPr>
+          <a:xfrm xmlns:a="http://schemas.openxmlformats.org/drawingml/2006/main">
+            <a:off x="609600" y="3042285"/>
+            <a:ext cx="323850" cy="323850"/>
+          </a:xfrm>
+          <a:prstGeom xmlns:a="http://schemas.openxmlformats.org/drawingml/2006/main" prst="rect">
+            <a:avLst/>
+          </a:prstGeom>
+          <a:noFill xmlns:a="http://schemas.openxmlformats.org/drawingml/2006/main"/>
+          <a:ln xmlns:a="http://schemas.openxmlformats.org/drawingml/2006/main" w="0">
+            <a:noFill/>
+          </a:ln>
+        </p:spPr>
+        <p:txBody>
+          <a:bodyPr xmlns:a="http://schemas.openxmlformats.org/drawingml/2006/main" lIns="0" tIns="0" rIns="0" bIns="0" anchor="ctr">
+            <a:noAutofit/>
+          </a:bodyPr>
+          <a:lstStyle xmlns:a="http://schemas.openxmlformats.org/drawingml/2006/main"/>
+          <a:p xmlns:a="http://schemas.openxmlformats.org/drawingml/2006/main">
+            <a:pPr algn="l">
+              <a:defRPr sz="1350" b="1">
+                <a:solidFill>
+                  <a:srgbClr val="28685E"/>
+                </a:solidFill>
+                <a:latin typeface="Calibri"/>
+                <a:ea typeface="Calibri"/>
+                <a:cs typeface="Calibri"/>
+              </a:defRPr>
+            </a:pPr>
+            <a:r>
+              <a:rPr sz="1350" b="1">
+                <a:solidFill>
+                  <a:srgbClr val="28685E"/>
+                </a:solidFill>
+                <a:latin typeface="Calibri"/>
+                <a:ea typeface="Calibri"/>
+                <a:cs typeface="Calibri"/>
+              </a:rPr>
+              <a:t>02</a:t>
+            </a:r>
+          </a:p>
+        </p:txBody>
+      </p:sp>
+      <p:sp>
+        <p:nvSpPr>
+          <p:cNvPr id="16" name="row-rule-1">
+            <a:extLst xmlns:a="http://schemas.openxmlformats.org/drawingml/2006/main">
+              <a:ext uri="{FF2B5EF4-FFF2-40B4-BE49-F238E27FC236}">
+                <a16:creationId xmlns:a16="http://schemas.microsoft.com/office/drawing/2014/main" id="{7C8A6C06-23D6-4A37-AD3A-4B34DB43BF8F}"/>
+              </a:ext>
+            </a:extLst>
+          </p:cNvPr>
+          <p:cNvSpPr>
+            <a:spLocks xmlns:a="http://schemas.openxmlformats.org/drawingml/2006/main" noGrp="1"/>
+          </p:cNvSpPr>
+          <p:nvPr/>
+        </p:nvSpPr>
+        <p:spPr>
+          <a:xfrm xmlns:a="http://schemas.openxmlformats.org/drawingml/2006/main">
+            <a:off x="1000125" y="3646170"/>
+            <a:ext cx="10334625" cy="0"/>
+          </a:xfrm>
+          <a:prstGeom xmlns:a="http://schemas.openxmlformats.org/drawingml/2006/main" prst="line">
+            <a:avLst/>
+          </a:prstGeom>
+          <a:noFill xmlns:a="http://schemas.openxmlformats.org/drawingml/2006/main"/>
+          <a:ln xmlns:a="http://schemas.openxmlformats.org/drawingml/2006/main" w="9525">
+            <a:solidFill>
+              <a:srgbClr val="CEDBD3"/>
+            </a:solidFill>
+          </a:ln>
+        </p:spPr>
+      </p:sp>
+      <p:sp>
+        <p:nvSpPr>
+          <p:cNvPr id="17" name="cue-2">
+            <a:extLst xmlns:a="http://schemas.openxmlformats.org/drawingml/2006/main">
+              <a:ext uri="{FF2B5EF4-FFF2-40B4-BE49-F238E27FC236}">
+                <a16:creationId xmlns:a16="http://schemas.microsoft.com/office/drawing/2014/main" id="{0464DBE5-942B-4434-BB16-680A7067E16E}"/>
+              </a:ext>
+            </a:extLst>
+          </p:cNvPr>
+          <p:cNvSpPr>
+            <a:spLocks xmlns:a="http://schemas.openxmlformats.org/drawingml/2006/main" noGrp="1"/>
+          </p:cNvSpPr>
+          <p:nvPr/>
+        </p:nvSpPr>
+        <p:spPr>
+          <a:xfrm xmlns:a="http://schemas.openxmlformats.org/drawingml/2006/main">
+            <a:off x="609600" y="3722370"/>
+            <a:ext cx="323850" cy="323850"/>
+          </a:xfrm>
+          <a:prstGeom xmlns:a="http://schemas.openxmlformats.org/drawingml/2006/main" prst="rect">
+            <a:avLst/>
+          </a:prstGeom>
+          <a:noFill xmlns:a="http://schemas.openxmlformats.org/drawingml/2006/main"/>
+          <a:ln xmlns:a="http://schemas.openxmlformats.org/drawingml/2006/main" w="0">
+            <a:noFill/>
+          </a:ln>
+        </p:spPr>
+        <p:txBody>
+          <a:bodyPr xmlns:a="http://schemas.openxmlformats.org/drawingml/2006/main" lIns="0" tIns="0" rIns="0" bIns="0" anchor="ctr">
+            <a:noAutofit/>
+          </a:bodyPr>
+          <a:lstStyle xmlns:a="http://schemas.openxmlformats.org/drawingml/2006/main"/>
+          <a:p xmlns:a="http://schemas.openxmlformats.org/drawingml/2006/main">
+            <a:pPr algn="l">
+              <a:defRPr sz="1350" b="1">
+                <a:solidFill>
+                  <a:srgbClr val="28685E"/>
+                </a:solidFill>
+                <a:latin typeface="Calibri"/>
+                <a:ea typeface="Calibri"/>
+                <a:cs typeface="Calibri"/>
+              </a:defRPr>
+            </a:pPr>
+            <a:r>
+              <a:rPr sz="1350" b="1">
+                <a:solidFill>
+                  <a:srgbClr val="28685E"/>
+                </a:solidFill>
+                <a:latin typeface="Calibri"/>
+                <a:ea typeface="Calibri"/>
+                <a:cs typeface="Calibri"/>
+              </a:rPr>
+              <a:t>03</a:t>
+            </a:r>
+          </a:p>
+        </p:txBody>
+      </p:sp>
+      <p:sp>
+        <p:nvSpPr>
+          <p:cNvPr id="18" name="row-rule-2">
+            <a:extLst xmlns:a="http://schemas.openxmlformats.org/drawingml/2006/main">
+              <a:ext uri="{FF2B5EF4-FFF2-40B4-BE49-F238E27FC236}">
+                <a16:creationId xmlns:a16="http://schemas.microsoft.com/office/drawing/2014/main" id="{62FC6CD1-7F84-45A3-9E6F-0784654EC775}"/>
+              </a:ext>
+            </a:extLst>
+          </p:cNvPr>
+          <p:cNvSpPr>
+            <a:spLocks xmlns:a="http://schemas.openxmlformats.org/drawingml/2006/main" noGrp="1"/>
+          </p:cNvSpPr>
+          <p:nvPr/>
+        </p:nvSpPr>
+        <p:spPr>
+          <a:xfrm xmlns:a="http://schemas.openxmlformats.org/drawingml/2006/main">
+            <a:off x="1000125" y="4326255"/>
+            <a:ext cx="10334625" cy="0"/>
+          </a:xfrm>
+          <a:prstGeom xmlns:a="http://schemas.openxmlformats.org/drawingml/2006/main" prst="line">
+            <a:avLst/>
+          </a:prstGeom>
+          <a:noFill xmlns:a="http://schemas.openxmlformats.org/drawingml/2006/main"/>
+          <a:ln xmlns:a="http://schemas.openxmlformats.org/drawingml/2006/main" w="9525">
+            <a:solidFill>
+              <a:srgbClr val="CEDBD3"/>
+            </a:solidFill>
+          </a:ln>
+        </p:spPr>
+      </p:sp>
+      <p:sp>
+        <p:nvSpPr>
+          <p:cNvPr id="19" name="cue-3">
+            <a:extLst xmlns:a="http://schemas.openxmlformats.org/drawingml/2006/main">
+              <a:ext uri="{FF2B5EF4-FFF2-40B4-BE49-F238E27FC236}">
+                <a16:creationId xmlns:a16="http://schemas.microsoft.com/office/drawing/2014/main" id="{14161916-892D-42B1-AB1B-022C7015C94A}"/>
+              </a:ext>
+            </a:extLst>
+          </p:cNvPr>
+          <p:cNvSpPr>
+            <a:spLocks xmlns:a="http://schemas.openxmlformats.org/drawingml/2006/main" noGrp="1"/>
+          </p:cNvSpPr>
+          <p:nvPr/>
+        </p:nvSpPr>
+        <p:spPr>
+          <a:xfrm xmlns:a="http://schemas.openxmlformats.org/drawingml/2006/main">
+            <a:off x="609600" y="4402455"/>
+            <a:ext cx="323850" cy="323850"/>
+          </a:xfrm>
+          <a:prstGeom xmlns:a="http://schemas.openxmlformats.org/drawingml/2006/main" prst="rect">
+            <a:avLst/>
+          </a:prstGeom>
+          <a:noFill xmlns:a="http://schemas.openxmlformats.org/drawingml/2006/main"/>
+          <a:ln xmlns:a="http://schemas.openxmlformats.org/drawingml/2006/main" w="0">
+            <a:noFill/>
+          </a:ln>
+        </p:spPr>
+        <p:txBody>
+          <a:bodyPr xmlns:a="http://schemas.openxmlformats.org/drawingml/2006/main" lIns="0" tIns="0" rIns="0" bIns="0" anchor="ctr">
+            <a:noAutofit/>
+          </a:bodyPr>
+          <a:lstStyle xmlns:a="http://schemas.openxmlformats.org/drawingml/2006/main"/>
+          <a:p xmlns:a="http://schemas.openxmlformats.org/drawingml/2006/main">
+            <a:pPr algn="l">
+              <a:defRPr sz="1350" b="1">
+                <a:solidFill>
+                  <a:srgbClr val="28685E"/>
+                </a:solidFill>
+                <a:latin typeface="Calibri"/>
+                <a:ea typeface="Calibri"/>
+                <a:cs typeface="Calibri"/>
+              </a:defRPr>
+            </a:pPr>
+            <a:r>
+              <a:rPr sz="1350" b="1">
+                <a:solidFill>
+                  <a:srgbClr val="28685E"/>
+                </a:solidFill>
+                <a:latin typeface="Calibri"/>
+                <a:ea typeface="Calibri"/>
+                <a:cs typeface="Calibri"/>
+              </a:rPr>
+              <a:t>04</a:t>
+            </a:r>
+          </a:p>
+        </p:txBody>
+      </p:sp>
+      <p:sp>
+        <p:nvSpPr>
+          <p:cNvPr id="20" name="row-rule-3">
+            <a:extLst xmlns:a="http://schemas.openxmlformats.org/drawingml/2006/main">
+              <a:ext uri="{FF2B5EF4-FFF2-40B4-BE49-F238E27FC236}">
+                <a16:creationId xmlns:a16="http://schemas.microsoft.com/office/drawing/2014/main" id="{179317C1-A1D2-4929-B68A-423C41F72B2C}"/>
+              </a:ext>
+            </a:extLst>
+          </p:cNvPr>
+          <p:cNvSpPr>
+            <a:spLocks xmlns:a="http://schemas.openxmlformats.org/drawingml/2006/main" noGrp="1"/>
+          </p:cNvSpPr>
+          <p:nvPr/>
+        </p:nvSpPr>
+        <p:spPr>
+          <a:xfrm xmlns:a="http://schemas.openxmlformats.org/drawingml/2006/main">
+            <a:off x="1000125" y="5006340"/>
+            <a:ext cx="10334625" cy="0"/>
+          </a:xfrm>
+          <a:prstGeom xmlns:a="http://schemas.openxmlformats.org/drawingml/2006/main" prst="line">
+            <a:avLst/>
+          </a:prstGeom>
+          <a:noFill xmlns:a="http://schemas.openxmlformats.org/drawingml/2006/main"/>
+          <a:ln xmlns:a="http://schemas.openxmlformats.org/drawingml/2006/main" w="9525">
+            <a:solidFill>
+              <a:srgbClr val="CEDBD3"/>
+            </a:solidFill>
+          </a:ln>
+        </p:spPr>
+      </p:sp>
+      <p:sp>
+        <p:nvSpPr>
+          <p:cNvPr id="21" name="cue-4">
+            <a:extLst xmlns:a="http://schemas.openxmlformats.org/drawingml/2006/main">
+              <a:ext uri="{FF2B5EF4-FFF2-40B4-BE49-F238E27FC236}">
+                <a16:creationId xmlns:a16="http://schemas.microsoft.com/office/drawing/2014/main" id="{F0F28B5C-0B87-46C4-B5E2-FBF8E551CED0}"/>
+              </a:ext>
+            </a:extLst>
+          </p:cNvPr>
+          <p:cNvSpPr>
+            <a:spLocks xmlns:a="http://schemas.openxmlformats.org/drawingml/2006/main" noGrp="1"/>
+          </p:cNvSpPr>
+          <p:nvPr/>
+        </p:nvSpPr>
+        <p:spPr>
+          <a:xfrm xmlns:a="http://schemas.openxmlformats.org/drawingml/2006/main">
+            <a:off x="609600" y="5082540"/>
+            <a:ext cx="323850" cy="323850"/>
+          </a:xfrm>
+          <a:prstGeom xmlns:a="http://schemas.openxmlformats.org/drawingml/2006/main" prst="rect">
+            <a:avLst/>
+          </a:prstGeom>
+          <a:noFill xmlns:a="http://schemas.openxmlformats.org/drawingml/2006/main"/>
+          <a:ln xmlns:a="http://schemas.openxmlformats.org/drawingml/2006/main" w="0">
+            <a:noFill/>
+          </a:ln>
+        </p:spPr>
+        <p:txBody>
+          <a:bodyPr xmlns:a="http://schemas.openxmlformats.org/drawingml/2006/main" lIns="0" tIns="0" rIns="0" bIns="0" anchor="ctr">
+            <a:noAutofit/>
+          </a:bodyPr>
+          <a:lstStyle xmlns:a="http://schemas.openxmlformats.org/drawingml/2006/main"/>
+          <a:p xmlns:a="http://schemas.openxmlformats.org/drawingml/2006/main">
+            <a:pPr algn="l">
+              <a:defRPr sz="1350" b="1">
+                <a:solidFill>
+                  <a:srgbClr val="28685E"/>
+                </a:solidFill>
+                <a:latin typeface="Calibri"/>
+                <a:ea typeface="Calibri"/>
+                <a:cs typeface="Calibri"/>
+              </a:defRPr>
+            </a:pPr>
+            <a:r>
+              <a:rPr sz="1350" b="1">
+                <a:solidFill>
+                  <a:srgbClr val="28685E"/>
+                </a:solidFill>
+                <a:latin typeface="Calibri"/>
+                <a:ea typeface="Calibri"/>
+                <a:cs typeface="Calibri"/>
+              </a:rPr>
+              <a:t>05</a:t>
             </a:r>
           </a:p>
         </p:txBody>
@@ -4338,7 +5099,7 @@
     <p:bg>
       <p:bgPr>
         <a:solidFill xmlns:a="http://schemas.openxmlformats.org/drawingml/2006/main">
-          <a:srgbClr val="F5F1E8"/>
+          <a:srgbClr val="FAF9F5"/>
         </a:solidFill>
       </p:bgPr>
     </p:bg>
@@ -4367,8 +5128,8 @@
         </p:nvSpPr>
         <p:spPr>
           <a:xfrm xmlns:a="http://schemas.openxmlformats.org/drawingml/2006/main">
-            <a:off x="609600" y="552450"/>
-            <a:ext cx="781050" cy="57150"/>
+            <a:off x="609600" y="733425"/>
+            <a:ext cx="781050" cy="38100"/>
           </a:xfrm>
           <a:prstGeom xmlns:a="http://schemas.openxmlformats.org/drawingml/2006/main" prst="rect">
             <a:avLst/>
@@ -4398,34 +5159,43 @@
         </p:nvSpPr>
         <p:spPr>
           <a:xfrm xmlns:a="http://schemas.openxmlformats.org/drawingml/2006/main">
-            <a:off x="609600" y="762000"/>
-            <a:ext cx="8572500" cy="285750"/>
-          </a:xfrm>
-          <a:prstGeom xmlns:a="http://schemas.openxmlformats.org/drawingml/2006/main" prst="rect">
-            <a:avLst/>
-          </a:prstGeom>
-          <a:noFill xmlns:a="http://schemas.openxmlformats.org/drawingml/2006/main"/>
-          <a:ln xmlns:a="http://schemas.openxmlformats.org/drawingml/2006/main" w="0">
-            <a:noFill/>
-            <a:prstDash val="solid"/>
-          </a:ln>
-        </p:spPr>
-        <p:txBody>
-          <a:bodyPr xmlns:a="http://schemas.openxmlformats.org/drawingml/2006/main" lIns="0" tIns="0" rIns="0" bIns="0" anchor="ctr"/>
-          <a:lstStyle xmlns:a="http://schemas.openxmlformats.org/drawingml/2006/main"/>
-          <a:p xmlns:a="http://schemas.openxmlformats.org/drawingml/2006/main">
-            <a:pPr>
-              <a:defRPr sz="1500" b="1">
+            <a:off x="609600" y="342900"/>
+            <a:ext cx="9334500" cy="304800"/>
+          </a:xfrm>
+          <a:prstGeom xmlns:a="http://schemas.openxmlformats.org/drawingml/2006/main" prst="rect">
+            <a:avLst/>
+          </a:prstGeom>
+          <a:noFill xmlns:a="http://schemas.openxmlformats.org/drawingml/2006/main"/>
+          <a:ln xmlns:a="http://schemas.openxmlformats.org/drawingml/2006/main" w="0">
+            <a:noFill/>
+            <a:prstDash val="solid"/>
+          </a:ln>
+        </p:spPr>
+        <p:txBody>
+          <a:bodyPr xmlns:a="http://schemas.openxmlformats.org/drawingml/2006/main" lIns="0" tIns="0" rIns="0" bIns="0" anchor="ctr">
+            <a:noAutofit/>
+          </a:bodyPr>
+          <a:lstStyle xmlns:a="http://schemas.openxmlformats.org/drawingml/2006/main"/>
+          <a:p xmlns:a="http://schemas.openxmlformats.org/drawingml/2006/main">
+            <a:pPr algn="l">
+              <a:buNone/>
+              <a:defRPr sz="1350" b="1">
                 <a:solidFill>
                   <a:srgbClr val="28685E"/>
                 </a:solidFill>
-              </a:defRPr>
-            </a:pPr>
-            <a:r>
-              <a:rPr sz="1500" b="1">
+                <a:latin typeface="Calibri"/>
+                <a:ea typeface="Calibri"/>
+                <a:cs typeface="Calibri"/>
+              </a:defRPr>
+            </a:pPr>
+            <a:r>
+              <a:rPr sz="1350" b="1">
                 <a:solidFill>
                   <a:srgbClr val="28685E"/>
                 </a:solidFill>
+                <a:latin typeface="Calibri"/>
+                <a:ea typeface="Calibri"/>
+                <a:cs typeface="Calibri"/>
               </a:rPr>
               <a:t>MADE BY MATT  /  GROW SCIENCE</a:t>
             </a:r>
@@ -4448,34 +5218,43 @@
         </p:nvSpPr>
         <p:spPr>
           <a:xfrm xmlns:a="http://schemas.openxmlformats.org/drawingml/2006/main">
-            <a:off x="609600" y="1352550"/>
-            <a:ext cx="10972800" cy="952500"/>
-          </a:xfrm>
-          <a:prstGeom xmlns:a="http://schemas.openxmlformats.org/drawingml/2006/main" prst="rect">
-            <a:avLst/>
-          </a:prstGeom>
-          <a:noFill xmlns:a="http://schemas.openxmlformats.org/drawingml/2006/main"/>
-          <a:ln xmlns:a="http://schemas.openxmlformats.org/drawingml/2006/main" w="0">
-            <a:noFill/>
-            <a:prstDash val="solid"/>
-          </a:ln>
-        </p:spPr>
-        <p:txBody>
-          <a:bodyPr xmlns:a="http://schemas.openxmlformats.org/drawingml/2006/main" lIns="0" tIns="0" rIns="0" bIns="0" anchor="ctr"/>
-          <a:lstStyle xmlns:a="http://schemas.openxmlformats.org/drawingml/2006/main"/>
-          <a:p xmlns:a="http://schemas.openxmlformats.org/drawingml/2006/main">
-            <a:pPr>
-              <a:defRPr sz="3750" b="1">
+            <a:off x="609600" y="990600"/>
+            <a:ext cx="10972800" cy="1000125"/>
+          </a:xfrm>
+          <a:prstGeom xmlns:a="http://schemas.openxmlformats.org/drawingml/2006/main" prst="rect">
+            <a:avLst/>
+          </a:prstGeom>
+          <a:noFill xmlns:a="http://schemas.openxmlformats.org/drawingml/2006/main"/>
+          <a:ln xmlns:a="http://schemas.openxmlformats.org/drawingml/2006/main" w="0">
+            <a:noFill/>
+            <a:prstDash val="solid"/>
+          </a:ln>
+        </p:spPr>
+        <p:txBody>
+          <a:bodyPr xmlns:a="http://schemas.openxmlformats.org/drawingml/2006/main" lIns="0" tIns="0" rIns="0" bIns="0" anchor="ctr">
+            <a:noAutofit/>
+          </a:bodyPr>
+          <a:lstStyle xmlns:a="http://schemas.openxmlformats.org/drawingml/2006/main"/>
+          <a:p xmlns:a="http://schemas.openxmlformats.org/drawingml/2006/main">
+            <a:pPr algn="l">
+              <a:buNone/>
+              <a:defRPr sz="3675" b="1">
                 <a:solidFill>
                   <a:srgbClr val="152B3A"/>
                 </a:solidFill>
-              </a:defRPr>
-            </a:pPr>
-            <a:r>
-              <a:rPr sz="3750" b="1">
+                <a:latin typeface="Calibri"/>
+                <a:ea typeface="Calibri"/>
+                <a:cs typeface="Calibri"/>
+              </a:defRPr>
+            </a:pPr>
+            <a:r>
+              <a:rPr sz="3675" b="1">
                 <a:solidFill>
                   <a:srgbClr val="152B3A"/>
                 </a:solidFill>
+                <a:latin typeface="Calibri"/>
+                <a:ea typeface="Calibri"/>
+                <a:cs typeface="Calibri"/>
               </a:rPr>
               <a:t>Check your choices</a:t>
             </a:r>
@@ -4498,14 +5277,14 @@
         </p:nvSpPr>
         <p:spPr>
           <a:xfrm xmlns:a="http://schemas.openxmlformats.org/drawingml/2006/main">
-            <a:off x="609600" y="6219825"/>
+            <a:off x="609600" y="6191250"/>
             <a:ext cx="10972800" cy="9525"/>
           </a:xfrm>
           <a:prstGeom xmlns:a="http://schemas.openxmlformats.org/drawingml/2006/main" prst="rect">
             <a:avLst/>
           </a:prstGeom>
           <a:solidFill xmlns:a="http://schemas.openxmlformats.org/drawingml/2006/main">
-            <a:srgbClr val="DCE7DD"/>
+            <a:srgbClr val="CEDBD3"/>
           </a:solidFill>
           <a:ln xmlns:a="http://schemas.openxmlformats.org/drawingml/2006/main" w="0">
             <a:noFill/>
@@ -4529,34 +5308,43 @@
         </p:nvSpPr>
         <p:spPr>
           <a:xfrm xmlns:a="http://schemas.openxmlformats.org/drawingml/2006/main">
-            <a:off x="609600" y="6381750"/>
-            <a:ext cx="9906000" cy="228600"/>
-          </a:xfrm>
-          <a:prstGeom xmlns:a="http://schemas.openxmlformats.org/drawingml/2006/main" prst="rect">
-            <a:avLst/>
-          </a:prstGeom>
-          <a:noFill xmlns:a="http://schemas.openxmlformats.org/drawingml/2006/main"/>
-          <a:ln xmlns:a="http://schemas.openxmlformats.org/drawingml/2006/main" w="0">
-            <a:noFill/>
-            <a:prstDash val="solid"/>
-          </a:ln>
-        </p:spPr>
-        <p:txBody>
-          <a:bodyPr xmlns:a="http://schemas.openxmlformats.org/drawingml/2006/main" lIns="0" tIns="0" rIns="0" bIns="0" anchor="ctr"/>
-          <a:lstStyle xmlns:a="http://schemas.openxmlformats.org/drawingml/2006/main"/>
-          <a:p xmlns:a="http://schemas.openxmlformats.org/drawingml/2006/main">
-            <a:pPr>
-              <a:defRPr sz="1275" b="0">
+            <a:off x="609600" y="6419850"/>
+            <a:ext cx="9525000" cy="219075"/>
+          </a:xfrm>
+          <a:prstGeom xmlns:a="http://schemas.openxmlformats.org/drawingml/2006/main" prst="rect">
+            <a:avLst/>
+          </a:prstGeom>
+          <a:noFill xmlns:a="http://schemas.openxmlformats.org/drawingml/2006/main"/>
+          <a:ln xmlns:a="http://schemas.openxmlformats.org/drawingml/2006/main" w="0">
+            <a:noFill/>
+            <a:prstDash val="solid"/>
+          </a:ln>
+        </p:spPr>
+        <p:txBody>
+          <a:bodyPr xmlns:a="http://schemas.openxmlformats.org/drawingml/2006/main" lIns="0" tIns="0" rIns="0" bIns="0" anchor="ctr">
+            <a:noAutofit/>
+          </a:bodyPr>
+          <a:lstStyle xmlns:a="http://schemas.openxmlformats.org/drawingml/2006/main"/>
+          <a:p xmlns:a="http://schemas.openxmlformats.org/drawingml/2006/main">
+            <a:pPr algn="l">
+              <a:buNone/>
+              <a:defRPr sz="1200" b="0">
                 <a:solidFill>
                   <a:srgbClr val="50616B"/>
                 </a:solidFill>
-              </a:defRPr>
-            </a:pPr>
-            <a:r>
-              <a:rPr sz="1275" b="0">
+                <a:latin typeface="Calibri"/>
+                <a:ea typeface="Calibri"/>
+                <a:cs typeface="Calibri"/>
+              </a:defRPr>
+            </a:pPr>
+            <a:r>
+              <a:rPr sz="1200" b="0">
                 <a:solidFill>
                   <a:srgbClr val="50616B"/>
                 </a:solidFill>
+                <a:latin typeface="Calibri"/>
+                <a:ea typeface="Calibri"/>
+                <a:cs typeface="Calibri"/>
               </a:rPr>
               <a:t>AUTUMN 1  ·  WEEK 4  ·  LESSON A</a:t>
             </a:r>
@@ -4579,27 +5367,33 @@
         </p:nvSpPr>
         <p:spPr>
           <a:xfrm xmlns:a="http://schemas.openxmlformats.org/drawingml/2006/main">
-            <a:off x="11106150" y="6362700"/>
-            <a:ext cx="476250" cy="238125"/>
-          </a:xfrm>
-          <a:prstGeom xmlns:a="http://schemas.openxmlformats.org/drawingml/2006/main" prst="rect">
-            <a:avLst/>
-          </a:prstGeom>
-          <a:noFill xmlns:a="http://schemas.openxmlformats.org/drawingml/2006/main"/>
-          <a:ln xmlns:a="http://schemas.openxmlformats.org/drawingml/2006/main" w="0">
-            <a:noFill/>
-            <a:prstDash val="solid"/>
-          </a:ln>
-        </p:spPr>
-        <p:txBody>
-          <a:bodyPr xmlns:a="http://schemas.openxmlformats.org/drawingml/2006/main" lIns="0" tIns="0" rIns="0" bIns="0" anchor="ctr"/>
-          <a:lstStyle xmlns:a="http://schemas.openxmlformats.org/drawingml/2006/main"/>
-          <a:p xmlns:a="http://schemas.openxmlformats.org/drawingml/2006/main">
-            <a:pPr>
+            <a:off x="11106150" y="6400800"/>
+            <a:ext cx="476250" cy="247650"/>
+          </a:xfrm>
+          <a:prstGeom xmlns:a="http://schemas.openxmlformats.org/drawingml/2006/main" prst="rect">
+            <a:avLst/>
+          </a:prstGeom>
+          <a:noFill xmlns:a="http://schemas.openxmlformats.org/drawingml/2006/main"/>
+          <a:ln xmlns:a="http://schemas.openxmlformats.org/drawingml/2006/main" w="0">
+            <a:noFill/>
+            <a:prstDash val="solid"/>
+          </a:ln>
+        </p:spPr>
+        <p:txBody>
+          <a:bodyPr xmlns:a="http://schemas.openxmlformats.org/drawingml/2006/main" lIns="0" tIns="0" rIns="0" bIns="0" anchor="ctr">
+            <a:noAutofit/>
+          </a:bodyPr>
+          <a:lstStyle xmlns:a="http://schemas.openxmlformats.org/drawingml/2006/main"/>
+          <a:p xmlns:a="http://schemas.openxmlformats.org/drawingml/2006/main">
+            <a:pPr algn="l">
+              <a:buNone/>
               <a:defRPr sz="1350" b="1">
                 <a:solidFill>
                   <a:srgbClr val="28685E"/>
                 </a:solidFill>
+                <a:latin typeface="Calibri"/>
+                <a:ea typeface="Calibri"/>
+                <a:cs typeface="Calibri"/>
               </a:defRPr>
             </a:pPr>
             <a:r>
@@ -4607,6 +5401,9 @@
                 <a:solidFill>
                   <a:srgbClr val="28685E"/>
                 </a:solidFill>
+                <a:latin typeface="Calibri"/>
+                <a:ea typeface="Calibri"/>
+                <a:cs typeface="Calibri"/>
               </a:rPr>
               <a:t>13</a:t>
             </a:r>
@@ -4629,34 +5426,45 @@
         </p:nvSpPr>
         <p:spPr>
           <a:xfrm xmlns:a="http://schemas.openxmlformats.org/drawingml/2006/main">
-            <a:off x="609600" y="2619375"/>
-            <a:ext cx="4953000" cy="428625"/>
-          </a:xfrm>
-          <a:prstGeom xmlns:a="http://schemas.openxmlformats.org/drawingml/2006/main" prst="rect">
-            <a:avLst/>
-          </a:prstGeom>
-          <a:noFill xmlns:a="http://schemas.openxmlformats.org/drawingml/2006/main"/>
-          <a:ln xmlns:a="http://schemas.openxmlformats.org/drawingml/2006/main" w="0">
-            <a:noFill/>
-            <a:prstDash val="solid"/>
-          </a:ln>
-        </p:spPr>
-        <p:txBody>
-          <a:bodyPr xmlns:a="http://schemas.openxmlformats.org/drawingml/2006/main" lIns="0" tIns="0" rIns="0" bIns="0" anchor="ctr"/>
-          <a:lstStyle xmlns:a="http://schemas.openxmlformats.org/drawingml/2006/main"/>
-          <a:p xmlns:a="http://schemas.openxmlformats.org/drawingml/2006/main">
-            <a:pPr>
-              <a:defRPr sz="2025" b="1">
+            <a:off x="609600" y="2219325"/>
+            <a:ext cx="5257800" cy="762000"/>
+          </a:xfrm>
+          <a:prstGeom xmlns:a="http://schemas.openxmlformats.org/drawingml/2006/main" prst="rect">
+            <a:avLst/>
+          </a:prstGeom>
+          <a:solidFill xmlns:a="http://schemas.openxmlformats.org/drawingml/2006/main">
+            <a:srgbClr val="E7EFE9"/>
+          </a:solidFill>
+          <a:ln xmlns:a="http://schemas.openxmlformats.org/drawingml/2006/main" w="0">
+            <a:noFill/>
+            <a:prstDash val="solid"/>
+          </a:ln>
+        </p:spPr>
+        <p:txBody>
+          <a:bodyPr xmlns:a="http://schemas.openxmlformats.org/drawingml/2006/main" lIns="228600" tIns="114300" rIns="228600" bIns="114300" anchor="ctr">
+            <a:noAutofit/>
+          </a:bodyPr>
+          <a:lstStyle xmlns:a="http://schemas.openxmlformats.org/drawingml/2006/main"/>
+          <a:p xmlns:a="http://schemas.openxmlformats.org/drawingml/2006/main">
+            <a:pPr algn="l">
+              <a:buNone/>
+              <a:defRPr sz="1875" b="1">
                 <a:solidFill>
                   <a:srgbClr val="28685E"/>
                 </a:solidFill>
-              </a:defRPr>
-            </a:pPr>
-            <a:r>
-              <a:rPr sz="2025" b="1">
+                <a:latin typeface="Calibri"/>
+                <a:ea typeface="Calibri"/>
+                <a:cs typeface="Calibri"/>
+              </a:defRPr>
+            </a:pPr>
+            <a:r>
+              <a:rPr sz="1875" b="1">
                 <a:solidFill>
                   <a:srgbClr val="28685E"/>
                 </a:solidFill>
+                <a:latin typeface="Calibri"/>
+                <a:ea typeface="Calibri"/>
+                <a:cs typeface="Calibri"/>
               </a:rPr>
               <a:t>GAIN OR GAIN + COST</a:t>
             </a:r>
@@ -4679,34 +5487,45 @@
         </p:nvSpPr>
         <p:spPr>
           <a:xfrm xmlns:a="http://schemas.openxmlformats.org/drawingml/2006/main">
-            <a:off x="6572250" y="2619375"/>
-            <a:ext cx="4953000" cy="428625"/>
-          </a:xfrm>
-          <a:prstGeom xmlns:a="http://schemas.openxmlformats.org/drawingml/2006/main" prst="rect">
-            <a:avLst/>
-          </a:prstGeom>
-          <a:noFill xmlns:a="http://schemas.openxmlformats.org/drawingml/2006/main"/>
-          <a:ln xmlns:a="http://schemas.openxmlformats.org/drawingml/2006/main" w="0">
-            <a:noFill/>
-            <a:prstDash val="solid"/>
-          </a:ln>
-        </p:spPr>
-        <p:txBody>
-          <a:bodyPr xmlns:a="http://schemas.openxmlformats.org/drawingml/2006/main" lIns="0" tIns="0" rIns="0" bIns="0" anchor="ctr"/>
-          <a:lstStyle xmlns:a="http://schemas.openxmlformats.org/drawingml/2006/main"/>
-          <a:p xmlns:a="http://schemas.openxmlformats.org/drawingml/2006/main">
-            <a:pPr>
-              <a:defRPr sz="2025" b="1">
-                <a:solidFill>
-                  <a:srgbClr val="A65D25"/>
-                </a:solidFill>
-              </a:defRPr>
-            </a:pPr>
-            <a:r>
-              <a:rPr sz="2025" b="1">
-                <a:solidFill>
-                  <a:srgbClr val="A65D25"/>
-                </a:solidFill>
+            <a:off x="6381750" y="2219325"/>
+            <a:ext cx="5200650" cy="762000"/>
+          </a:xfrm>
+          <a:prstGeom xmlns:a="http://schemas.openxmlformats.org/drawingml/2006/main" prst="rect">
+            <a:avLst/>
+          </a:prstGeom>
+          <a:solidFill xmlns:a="http://schemas.openxmlformats.org/drawingml/2006/main">
+            <a:srgbClr val="F0EBE3"/>
+          </a:solidFill>
+          <a:ln xmlns:a="http://schemas.openxmlformats.org/drawingml/2006/main" w="0">
+            <a:noFill/>
+            <a:prstDash val="solid"/>
+          </a:ln>
+        </p:spPr>
+        <p:txBody>
+          <a:bodyPr xmlns:a="http://schemas.openxmlformats.org/drawingml/2006/main" lIns="228600" tIns="114300" rIns="228600" bIns="114300" anchor="ctr">
+            <a:noAutofit/>
+          </a:bodyPr>
+          <a:lstStyle xmlns:a="http://schemas.openxmlformats.org/drawingml/2006/main"/>
+          <a:p xmlns:a="http://schemas.openxmlformats.org/drawingml/2006/main">
+            <a:pPr algn="l">
+              <a:buNone/>
+              <a:defRPr sz="1875" b="1">
+                <a:solidFill>
+                  <a:srgbClr val="A95D21"/>
+                </a:solidFill>
+                <a:latin typeface="Calibri"/>
+                <a:ea typeface="Calibri"/>
+                <a:cs typeface="Calibri"/>
+              </a:defRPr>
+            </a:pPr>
+            <a:r>
+              <a:rPr sz="1875" b="1">
+                <a:solidFill>
+                  <a:srgbClr val="A95D21"/>
+                </a:solidFill>
+                <a:latin typeface="Calibri"/>
+                <a:ea typeface="Calibri"/>
+                <a:cs typeface="Calibri"/>
               </a:rPr>
               <a:t>COST OR FALSE CLAIM</a:t>
             </a:r>
@@ -4729,27 +5548,35 @@
         </p:nvSpPr>
         <p:spPr>
           <a:xfrm xmlns:a="http://schemas.openxmlformats.org/drawingml/2006/main">
-            <a:off x="609600" y="3333750"/>
-            <a:ext cx="4953000" cy="2524125"/>
-          </a:xfrm>
-          <a:prstGeom xmlns:a="http://schemas.openxmlformats.org/drawingml/2006/main" prst="rect">
-            <a:avLst/>
-          </a:prstGeom>
-          <a:noFill xmlns:a="http://schemas.openxmlformats.org/drawingml/2006/main"/>
-          <a:ln xmlns:a="http://schemas.openxmlformats.org/drawingml/2006/main" w="0">
-            <a:noFill/>
-            <a:prstDash val="solid"/>
-          </a:ln>
-        </p:spPr>
-        <p:txBody>
-          <a:bodyPr xmlns:a="http://schemas.openxmlformats.org/drawingml/2006/main" lIns="0" tIns="0" rIns="0" bIns="0" anchor="ctr"/>
-          <a:lstStyle xmlns:a="http://schemas.openxmlformats.org/drawingml/2006/main"/>
-          <a:p xmlns:a="http://schemas.openxmlformats.org/drawingml/2006/main">
-            <a:pPr>
+            <a:off x="609600" y="2981325"/>
+            <a:ext cx="5257800" cy="2714625"/>
+          </a:xfrm>
+          <a:prstGeom xmlns:a="http://schemas.openxmlformats.org/drawingml/2006/main" prst="rect">
+            <a:avLst/>
+          </a:prstGeom>
+          <a:solidFill xmlns:a="http://schemas.openxmlformats.org/drawingml/2006/main">
+            <a:srgbClr val="E7EFE9"/>
+          </a:solidFill>
+          <a:ln xmlns:a="http://schemas.openxmlformats.org/drawingml/2006/main" w="0">
+            <a:noFill/>
+            <a:prstDash val="solid"/>
+          </a:ln>
+        </p:spPr>
+        <p:txBody>
+          <a:bodyPr xmlns:a="http://schemas.openxmlformats.org/drawingml/2006/main" lIns="228600" tIns="114300" rIns="228600" bIns="114300" anchor="ctr">
+            <a:noAutofit/>
+          </a:bodyPr>
+          <a:lstStyle xmlns:a="http://schemas.openxmlformats.org/drawingml/2006/main"/>
+          <a:p xmlns:a="http://schemas.openxmlformats.org/drawingml/2006/main">
+            <a:pPr algn="l">
+              <a:buNone/>
               <a:defRPr sz="2400" b="0">
                 <a:solidFill>
                   <a:srgbClr val="152B3A"/>
                 </a:solidFill>
+                <a:latin typeface="Calibri"/>
+                <a:ea typeface="Calibri"/>
+                <a:cs typeface="Calibri"/>
               </a:defRPr>
             </a:pPr>
             <a:r>
@@ -4757,16 +5584,23 @@
                 <a:solidFill>
                   <a:srgbClr val="152B3A"/>
                 </a:solidFill>
+                <a:latin typeface="Calibri"/>
+                <a:ea typeface="Calibri"/>
+                <a:cs typeface="Calibri"/>
               </a:rPr>
               <a:t>Less effort: gain</a:t>
             </a:r>
           </a:p>
           <a:p xmlns:a="http://schemas.openxmlformats.org/drawingml/2006/main">
-            <a:pPr>
+            <a:pPr algn="l">
+              <a:buNone/>
               <a:defRPr sz="2400" b="0">
                 <a:solidFill>
                   <a:srgbClr val="152B3A"/>
                 </a:solidFill>
+                <a:latin typeface="Calibri"/>
+                <a:ea typeface="Calibri"/>
+                <a:cs typeface="Calibri"/>
               </a:defRPr>
             </a:pPr>
             <a:r>
@@ -4774,16 +5608,23 @@
                 <a:solidFill>
                   <a:srgbClr val="152B3A"/>
                 </a:solidFill>
+                <a:latin typeface="Calibri"/>
+                <a:ea typeface="Calibri"/>
+                <a:cs typeface="Calibri"/>
               </a:rPr>
               <a:t>Pull down: direction benefit</a:t>
             </a:r>
           </a:p>
           <a:p xmlns:a="http://schemas.openxmlformats.org/drawingml/2006/main">
-            <a:pPr>
+            <a:pPr algn="l">
+              <a:buNone/>
               <a:defRPr sz="2400" b="0">
                 <a:solidFill>
                   <a:srgbClr val="152B3A"/>
                 </a:solidFill>
+                <a:latin typeface="Calibri"/>
+                <a:ea typeface="Calibri"/>
+                <a:cs typeface="Calibri"/>
               </a:defRPr>
             </a:pPr>
             <a:r>
@@ -4791,6 +5632,9 @@
                 <a:solidFill>
                   <a:srgbClr val="152B3A"/>
                 </a:solidFill>
+                <a:latin typeface="Calibri"/>
+                <a:ea typeface="Calibri"/>
+                <a:cs typeface="Calibri"/>
               </a:rPr>
               <a:t>Slower + stronger turn: both</a:t>
             </a:r>
@@ -4813,27 +5657,35 @@
         </p:nvSpPr>
         <p:spPr>
           <a:xfrm xmlns:a="http://schemas.openxmlformats.org/drawingml/2006/main">
-            <a:off x="6572250" y="3333750"/>
-            <a:ext cx="4857750" cy="2524125"/>
-          </a:xfrm>
-          <a:prstGeom xmlns:a="http://schemas.openxmlformats.org/drawingml/2006/main" prst="rect">
-            <a:avLst/>
-          </a:prstGeom>
-          <a:noFill xmlns:a="http://schemas.openxmlformats.org/drawingml/2006/main"/>
-          <a:ln xmlns:a="http://schemas.openxmlformats.org/drawingml/2006/main" w="0">
-            <a:noFill/>
-            <a:prstDash val="solid"/>
-          </a:ln>
-        </p:spPr>
-        <p:txBody>
-          <a:bodyPr xmlns:a="http://schemas.openxmlformats.org/drawingml/2006/main" lIns="0" tIns="0" rIns="0" bIns="0" anchor="ctr"/>
-          <a:lstStyle xmlns:a="http://schemas.openxmlformats.org/drawingml/2006/main"/>
-          <a:p xmlns:a="http://schemas.openxmlformats.org/drawingml/2006/main">
-            <a:pPr>
+            <a:off x="6381750" y="2981325"/>
+            <a:ext cx="5200650" cy="2714625"/>
+          </a:xfrm>
+          <a:prstGeom xmlns:a="http://schemas.openxmlformats.org/drawingml/2006/main" prst="rect">
+            <a:avLst/>
+          </a:prstGeom>
+          <a:solidFill xmlns:a="http://schemas.openxmlformats.org/drawingml/2006/main">
+            <a:srgbClr val="F0EBE3"/>
+          </a:solidFill>
+          <a:ln xmlns:a="http://schemas.openxmlformats.org/drawingml/2006/main" w="0">
+            <a:noFill/>
+            <a:prstDash val="solid"/>
+          </a:ln>
+        </p:spPr>
+        <p:txBody>
+          <a:bodyPr xmlns:a="http://schemas.openxmlformats.org/drawingml/2006/main" lIns="228600" tIns="114300" rIns="228600" bIns="114300" anchor="ctr">
+            <a:noAutofit/>
+          </a:bodyPr>
+          <a:lstStyle xmlns:a="http://schemas.openxmlformats.org/drawingml/2006/main"/>
+          <a:p xmlns:a="http://schemas.openxmlformats.org/drawingml/2006/main">
+            <a:pPr algn="l">
+              <a:buNone/>
               <a:defRPr sz="2400" b="0">
                 <a:solidFill>
                   <a:srgbClr val="152B3A"/>
                 </a:solidFill>
+                <a:latin typeface="Calibri"/>
+                <a:ea typeface="Calibri"/>
+                <a:cs typeface="Calibri"/>
               </a:defRPr>
             </a:pPr>
             <a:r>
@@ -4841,16 +5693,23 @@
                 <a:solidFill>
                   <a:srgbClr val="152B3A"/>
                 </a:solidFill>
+                <a:latin typeface="Calibri"/>
+                <a:ea typeface="Calibri"/>
+                <a:cs typeface="Calibri"/>
               </a:rPr>
               <a:t>Farther hand travel: cost</a:t>
             </a:r>
           </a:p>
           <a:p xmlns:a="http://schemas.openxmlformats.org/drawingml/2006/main">
-            <a:pPr>
+            <a:pPr algn="l">
+              <a:buNone/>
               <a:defRPr sz="2400" b="0">
                 <a:solidFill>
                   <a:srgbClr val="152B3A"/>
                 </a:solidFill>
+                <a:latin typeface="Calibri"/>
+                <a:ea typeface="Calibri"/>
+                <a:cs typeface="Calibri"/>
               </a:defRPr>
             </a:pPr>
             <a:r>
@@ -4858,6 +5717,9 @@
                 <a:solidFill>
                   <a:srgbClr val="152B3A"/>
                 </a:solidFill>
+                <a:latin typeface="Calibri"/>
+                <a:ea typeface="Calibri"/>
+                <a:cs typeface="Calibri"/>
               </a:rPr>
               <a:t>Extra energy created: false</a:t>
             </a:r>
@@ -4880,7 +5742,7 @@
     <p:bg>
       <p:bgPr>
         <a:solidFill xmlns:a="http://schemas.openxmlformats.org/drawingml/2006/main">
-          <a:srgbClr val="F5F1E8"/>
+          <a:srgbClr val="FAF9F5"/>
         </a:solidFill>
       </p:bgPr>
     </p:bg>
@@ -4909,8 +5771,8 @@
         </p:nvSpPr>
         <p:spPr>
           <a:xfrm xmlns:a="http://schemas.openxmlformats.org/drawingml/2006/main">
-            <a:off x="609600" y="552450"/>
-            <a:ext cx="781050" cy="57150"/>
+            <a:off x="609600" y="733425"/>
+            <a:ext cx="781050" cy="38100"/>
           </a:xfrm>
           <a:prstGeom xmlns:a="http://schemas.openxmlformats.org/drawingml/2006/main" prst="rect">
             <a:avLst/>
@@ -4940,34 +5802,43 @@
         </p:nvSpPr>
         <p:spPr>
           <a:xfrm xmlns:a="http://schemas.openxmlformats.org/drawingml/2006/main">
-            <a:off x="609600" y="762000"/>
-            <a:ext cx="8572500" cy="285750"/>
-          </a:xfrm>
-          <a:prstGeom xmlns:a="http://schemas.openxmlformats.org/drawingml/2006/main" prst="rect">
-            <a:avLst/>
-          </a:prstGeom>
-          <a:noFill xmlns:a="http://schemas.openxmlformats.org/drawingml/2006/main"/>
-          <a:ln xmlns:a="http://schemas.openxmlformats.org/drawingml/2006/main" w="0">
-            <a:noFill/>
-            <a:prstDash val="solid"/>
-          </a:ln>
-        </p:spPr>
-        <p:txBody>
-          <a:bodyPr xmlns:a="http://schemas.openxmlformats.org/drawingml/2006/main" lIns="0" tIns="0" rIns="0" bIns="0" anchor="ctr"/>
-          <a:lstStyle xmlns:a="http://schemas.openxmlformats.org/drawingml/2006/main"/>
-          <a:p xmlns:a="http://schemas.openxmlformats.org/drawingml/2006/main">
-            <a:pPr>
-              <a:defRPr sz="1500" b="1">
+            <a:off x="609600" y="342900"/>
+            <a:ext cx="9334500" cy="304800"/>
+          </a:xfrm>
+          <a:prstGeom xmlns:a="http://schemas.openxmlformats.org/drawingml/2006/main" prst="rect">
+            <a:avLst/>
+          </a:prstGeom>
+          <a:noFill xmlns:a="http://schemas.openxmlformats.org/drawingml/2006/main"/>
+          <a:ln xmlns:a="http://schemas.openxmlformats.org/drawingml/2006/main" w="0">
+            <a:noFill/>
+            <a:prstDash val="solid"/>
+          </a:ln>
+        </p:spPr>
+        <p:txBody>
+          <a:bodyPr xmlns:a="http://schemas.openxmlformats.org/drawingml/2006/main" lIns="0" tIns="0" rIns="0" bIns="0" anchor="ctr">
+            <a:noAutofit/>
+          </a:bodyPr>
+          <a:lstStyle xmlns:a="http://schemas.openxmlformats.org/drawingml/2006/main"/>
+          <a:p xmlns:a="http://schemas.openxmlformats.org/drawingml/2006/main">
+            <a:pPr algn="l">
+              <a:buNone/>
+              <a:defRPr sz="1350" b="1">
                 <a:solidFill>
                   <a:srgbClr val="28685E"/>
                 </a:solidFill>
-              </a:defRPr>
-            </a:pPr>
-            <a:r>
-              <a:rPr sz="1500" b="1">
+                <a:latin typeface="Calibri"/>
+                <a:ea typeface="Calibri"/>
+                <a:cs typeface="Calibri"/>
+              </a:defRPr>
+            </a:pPr>
+            <a:r>
+              <a:rPr sz="1350" b="1">
                 <a:solidFill>
                   <a:srgbClr val="28685E"/>
                 </a:solidFill>
+                <a:latin typeface="Calibri"/>
+                <a:ea typeface="Calibri"/>
+                <a:cs typeface="Calibri"/>
               </a:rPr>
               <a:t>MADE BY MATT  /  GROW SCIENCE</a:t>
             </a:r>
@@ -4990,34 +5861,43 @@
         </p:nvSpPr>
         <p:spPr>
           <a:xfrm xmlns:a="http://schemas.openxmlformats.org/drawingml/2006/main">
-            <a:off x="609600" y="1352550"/>
-            <a:ext cx="10972800" cy="952500"/>
-          </a:xfrm>
-          <a:prstGeom xmlns:a="http://schemas.openxmlformats.org/drawingml/2006/main" prst="rect">
-            <a:avLst/>
-          </a:prstGeom>
-          <a:noFill xmlns:a="http://schemas.openxmlformats.org/drawingml/2006/main"/>
-          <a:ln xmlns:a="http://schemas.openxmlformats.org/drawingml/2006/main" w="0">
-            <a:noFill/>
-            <a:prstDash val="solid"/>
-          </a:ln>
-        </p:spPr>
-        <p:txBody>
-          <a:bodyPr xmlns:a="http://schemas.openxmlformats.org/drawingml/2006/main" lIns="0" tIns="0" rIns="0" bIns="0" anchor="ctr"/>
-          <a:lstStyle xmlns:a="http://schemas.openxmlformats.org/drawingml/2006/main"/>
-          <a:p xmlns:a="http://schemas.openxmlformats.org/drawingml/2006/main">
-            <a:pPr>
-              <a:defRPr sz="3750" b="1">
+            <a:off x="609600" y="990600"/>
+            <a:ext cx="10972800" cy="1000125"/>
+          </a:xfrm>
+          <a:prstGeom xmlns:a="http://schemas.openxmlformats.org/drawingml/2006/main" prst="rect">
+            <a:avLst/>
+          </a:prstGeom>
+          <a:noFill xmlns:a="http://schemas.openxmlformats.org/drawingml/2006/main"/>
+          <a:ln xmlns:a="http://schemas.openxmlformats.org/drawingml/2006/main" w="0">
+            <a:noFill/>
+            <a:prstDash val="solid"/>
+          </a:ln>
+        </p:spPr>
+        <p:txBody>
+          <a:bodyPr xmlns:a="http://schemas.openxmlformats.org/drawingml/2006/main" lIns="0" tIns="0" rIns="0" bIns="0" anchor="ctr">
+            <a:noAutofit/>
+          </a:bodyPr>
+          <a:lstStyle xmlns:a="http://schemas.openxmlformats.org/drawingml/2006/main"/>
+          <a:p xmlns:a="http://schemas.openxmlformats.org/drawingml/2006/main">
+            <a:pPr algn="l">
+              <a:buNone/>
+              <a:defRPr sz="3675" b="1">
                 <a:solidFill>
                   <a:srgbClr val="152B3A"/>
                 </a:solidFill>
-              </a:defRPr>
-            </a:pPr>
-            <a:r>
-              <a:rPr sz="3750" b="1">
+                <a:latin typeface="Calibri"/>
+                <a:ea typeface="Calibri"/>
+                <a:cs typeface="Calibri"/>
+              </a:defRPr>
+            </a:pPr>
+            <a:r>
+              <a:rPr sz="3675" b="1">
                 <a:solidFill>
                   <a:srgbClr val="152B3A"/>
                 </a:solidFill>
+                <a:latin typeface="Calibri"/>
+                <a:ea typeface="Calibri"/>
+                <a:cs typeface="Calibri"/>
               </a:rPr>
               <a:t>Keep both halves of the explanation</a:t>
             </a:r>
@@ -5040,14 +5920,14 @@
         </p:nvSpPr>
         <p:spPr>
           <a:xfrm xmlns:a="http://schemas.openxmlformats.org/drawingml/2006/main">
-            <a:off x="609600" y="6219825"/>
+            <a:off x="609600" y="6191250"/>
             <a:ext cx="10972800" cy="9525"/>
           </a:xfrm>
           <a:prstGeom xmlns:a="http://schemas.openxmlformats.org/drawingml/2006/main" prst="rect">
             <a:avLst/>
           </a:prstGeom>
           <a:solidFill xmlns:a="http://schemas.openxmlformats.org/drawingml/2006/main">
-            <a:srgbClr val="DCE7DD"/>
+            <a:srgbClr val="CEDBD3"/>
           </a:solidFill>
           <a:ln xmlns:a="http://schemas.openxmlformats.org/drawingml/2006/main" w="0">
             <a:noFill/>
@@ -5071,34 +5951,43 @@
         </p:nvSpPr>
         <p:spPr>
           <a:xfrm xmlns:a="http://schemas.openxmlformats.org/drawingml/2006/main">
-            <a:off x="609600" y="6381750"/>
-            <a:ext cx="9906000" cy="228600"/>
-          </a:xfrm>
-          <a:prstGeom xmlns:a="http://schemas.openxmlformats.org/drawingml/2006/main" prst="rect">
-            <a:avLst/>
-          </a:prstGeom>
-          <a:noFill xmlns:a="http://schemas.openxmlformats.org/drawingml/2006/main"/>
-          <a:ln xmlns:a="http://schemas.openxmlformats.org/drawingml/2006/main" w="0">
-            <a:noFill/>
-            <a:prstDash val="solid"/>
-          </a:ln>
-        </p:spPr>
-        <p:txBody>
-          <a:bodyPr xmlns:a="http://schemas.openxmlformats.org/drawingml/2006/main" lIns="0" tIns="0" rIns="0" bIns="0" anchor="ctr"/>
-          <a:lstStyle xmlns:a="http://schemas.openxmlformats.org/drawingml/2006/main"/>
-          <a:p xmlns:a="http://schemas.openxmlformats.org/drawingml/2006/main">
-            <a:pPr>
-              <a:defRPr sz="1275" b="0">
+            <a:off x="609600" y="6419850"/>
+            <a:ext cx="9525000" cy="219075"/>
+          </a:xfrm>
+          <a:prstGeom xmlns:a="http://schemas.openxmlformats.org/drawingml/2006/main" prst="rect">
+            <a:avLst/>
+          </a:prstGeom>
+          <a:noFill xmlns:a="http://schemas.openxmlformats.org/drawingml/2006/main"/>
+          <a:ln xmlns:a="http://schemas.openxmlformats.org/drawingml/2006/main" w="0">
+            <a:noFill/>
+            <a:prstDash val="solid"/>
+          </a:ln>
+        </p:spPr>
+        <p:txBody>
+          <a:bodyPr xmlns:a="http://schemas.openxmlformats.org/drawingml/2006/main" lIns="0" tIns="0" rIns="0" bIns="0" anchor="ctr">
+            <a:noAutofit/>
+          </a:bodyPr>
+          <a:lstStyle xmlns:a="http://schemas.openxmlformats.org/drawingml/2006/main"/>
+          <a:p xmlns:a="http://schemas.openxmlformats.org/drawingml/2006/main">
+            <a:pPr algn="l">
+              <a:buNone/>
+              <a:defRPr sz="1200" b="0">
                 <a:solidFill>
                   <a:srgbClr val="50616B"/>
                 </a:solidFill>
-              </a:defRPr>
-            </a:pPr>
-            <a:r>
-              <a:rPr sz="1275" b="0">
+                <a:latin typeface="Calibri"/>
+                <a:ea typeface="Calibri"/>
+                <a:cs typeface="Calibri"/>
+              </a:defRPr>
+            </a:pPr>
+            <a:r>
+              <a:rPr sz="1200" b="0">
                 <a:solidFill>
                   <a:srgbClr val="50616B"/>
                 </a:solidFill>
+                <a:latin typeface="Calibri"/>
+                <a:ea typeface="Calibri"/>
+                <a:cs typeface="Calibri"/>
               </a:rPr>
               <a:t>AUTUMN 1  ·  WEEK 4  ·  LESSON A</a:t>
             </a:r>
@@ -5121,27 +6010,33 @@
         </p:nvSpPr>
         <p:spPr>
           <a:xfrm xmlns:a="http://schemas.openxmlformats.org/drawingml/2006/main">
-            <a:off x="11106150" y="6362700"/>
-            <a:ext cx="476250" cy="238125"/>
-          </a:xfrm>
-          <a:prstGeom xmlns:a="http://schemas.openxmlformats.org/drawingml/2006/main" prst="rect">
-            <a:avLst/>
-          </a:prstGeom>
-          <a:noFill xmlns:a="http://schemas.openxmlformats.org/drawingml/2006/main"/>
-          <a:ln xmlns:a="http://schemas.openxmlformats.org/drawingml/2006/main" w="0">
-            <a:noFill/>
-            <a:prstDash val="solid"/>
-          </a:ln>
-        </p:spPr>
-        <p:txBody>
-          <a:bodyPr xmlns:a="http://schemas.openxmlformats.org/drawingml/2006/main" lIns="0" tIns="0" rIns="0" bIns="0" anchor="ctr"/>
-          <a:lstStyle xmlns:a="http://schemas.openxmlformats.org/drawingml/2006/main"/>
-          <a:p xmlns:a="http://schemas.openxmlformats.org/drawingml/2006/main">
-            <a:pPr>
+            <a:off x="11106150" y="6400800"/>
+            <a:ext cx="476250" cy="247650"/>
+          </a:xfrm>
+          <a:prstGeom xmlns:a="http://schemas.openxmlformats.org/drawingml/2006/main" prst="rect">
+            <a:avLst/>
+          </a:prstGeom>
+          <a:noFill xmlns:a="http://schemas.openxmlformats.org/drawingml/2006/main"/>
+          <a:ln xmlns:a="http://schemas.openxmlformats.org/drawingml/2006/main" w="0">
+            <a:noFill/>
+            <a:prstDash val="solid"/>
+          </a:ln>
+        </p:spPr>
+        <p:txBody>
+          <a:bodyPr xmlns:a="http://schemas.openxmlformats.org/drawingml/2006/main" lIns="0" tIns="0" rIns="0" bIns="0" anchor="ctr">
+            <a:noAutofit/>
+          </a:bodyPr>
+          <a:lstStyle xmlns:a="http://schemas.openxmlformats.org/drawingml/2006/main"/>
+          <a:p xmlns:a="http://schemas.openxmlformats.org/drawingml/2006/main">
+            <a:pPr algn="l">
+              <a:buNone/>
               <a:defRPr sz="1350" b="1">
                 <a:solidFill>
                   <a:srgbClr val="28685E"/>
                 </a:solidFill>
+                <a:latin typeface="Calibri"/>
+                <a:ea typeface="Calibri"/>
+                <a:cs typeface="Calibri"/>
               </a:defRPr>
             </a:pPr>
             <a:r>
@@ -5149,6 +6044,9 @@
                 <a:solidFill>
                   <a:srgbClr val="28685E"/>
                 </a:solidFill>
+                <a:latin typeface="Calibri"/>
+                <a:ea typeface="Calibri"/>
+                <a:cs typeface="Calibri"/>
               </a:rPr>
               <a:t>14</a:t>
             </a:r>
@@ -5171,34 +6069,45 @@
         </p:nvSpPr>
         <p:spPr>
           <a:xfrm xmlns:a="http://schemas.openxmlformats.org/drawingml/2006/main">
-            <a:off x="609600" y="2686050"/>
-            <a:ext cx="10858500" cy="1524000"/>
-          </a:xfrm>
-          <a:prstGeom xmlns:a="http://schemas.openxmlformats.org/drawingml/2006/main" prst="rect">
-            <a:avLst/>
-          </a:prstGeom>
-          <a:noFill xmlns:a="http://schemas.openxmlformats.org/drawingml/2006/main"/>
-          <a:ln xmlns:a="http://schemas.openxmlformats.org/drawingml/2006/main" w="0">
-            <a:noFill/>
-            <a:prstDash val="solid"/>
-          </a:ln>
-        </p:spPr>
-        <p:txBody>
-          <a:bodyPr xmlns:a="http://schemas.openxmlformats.org/drawingml/2006/main" lIns="0" tIns="0" rIns="0" bIns="0" anchor="ctr"/>
-          <a:lstStyle xmlns:a="http://schemas.openxmlformats.org/drawingml/2006/main"/>
-          <a:p xmlns:a="http://schemas.openxmlformats.org/drawingml/2006/main">
-            <a:pPr>
-              <a:defRPr sz="2925" b="1">
+            <a:off x="457200" y="2181225"/>
+            <a:ext cx="5734050" cy="2409825"/>
+          </a:xfrm>
+          <a:prstGeom xmlns:a="http://schemas.openxmlformats.org/drawingml/2006/main" prst="rect">
+            <a:avLst/>
+          </a:prstGeom>
+          <a:solidFill xmlns:a="http://schemas.openxmlformats.org/drawingml/2006/main">
+            <a:srgbClr val="E7EFE9"/>
+          </a:solidFill>
+          <a:ln xmlns:a="http://schemas.openxmlformats.org/drawingml/2006/main" w="0">
+            <a:noFill/>
+            <a:prstDash val="solid"/>
+          </a:ln>
+        </p:spPr>
+        <p:txBody>
+          <a:bodyPr xmlns:a="http://schemas.openxmlformats.org/drawingml/2006/main" lIns="152400" tIns="114300" rIns="152400" bIns="114300" anchor="ctr">
+            <a:noAutofit/>
+          </a:bodyPr>
+          <a:lstStyle xmlns:a="http://schemas.openxmlformats.org/drawingml/2006/main"/>
+          <a:p xmlns:a="http://schemas.openxmlformats.org/drawingml/2006/main">
+            <a:pPr algn="l">
+              <a:buNone/>
+              <a:defRPr sz="2775" b="1">
                 <a:solidFill>
                   <a:srgbClr val="28685E"/>
                 </a:solidFill>
-              </a:defRPr>
-            </a:pPr>
-            <a:r>
-              <a:rPr sz="2925" b="1">
+                <a:latin typeface="Calibri"/>
+                <a:ea typeface="Calibri"/>
+                <a:cs typeface="Calibri"/>
+              </a:defRPr>
+            </a:pPr>
+            <a:r>
+              <a:rPr sz="2775" b="1">
                 <a:solidFill>
                   <a:srgbClr val="28685E"/>
                 </a:solidFill>
+                <a:latin typeface="Calibri"/>
+                <a:ea typeface="Calibri"/>
+                <a:cs typeface="Calibri"/>
               </a:rPr>
               <a:t>Moving the pivot nearer the load can reduce the effort force needed.</a:t>
             </a:r>
@@ -5221,36 +6130,338 @@
         </p:nvSpPr>
         <p:spPr>
           <a:xfrm xmlns:a="http://schemas.openxmlformats.org/drawingml/2006/main">
-            <a:off x="609600" y="4552950"/>
-            <a:ext cx="10858500" cy="1285875"/>
-          </a:xfrm>
-          <a:prstGeom xmlns:a="http://schemas.openxmlformats.org/drawingml/2006/main" prst="rect">
-            <a:avLst/>
-          </a:prstGeom>
-          <a:noFill xmlns:a="http://schemas.openxmlformats.org/drawingml/2006/main"/>
-          <a:ln xmlns:a="http://schemas.openxmlformats.org/drawingml/2006/main" w="0">
-            <a:noFill/>
-            <a:prstDash val="solid"/>
-          </a:ln>
-        </p:spPr>
-        <p:txBody>
-          <a:bodyPr xmlns:a="http://schemas.openxmlformats.org/drawingml/2006/main" lIns="0" tIns="0" rIns="0" bIns="0" anchor="ctr"/>
-          <a:lstStyle xmlns:a="http://schemas.openxmlformats.org/drawingml/2006/main"/>
-          <a:p xmlns:a="http://schemas.openxmlformats.org/drawingml/2006/main">
-            <a:pPr>
-              <a:defRPr sz="2700" b="0">
+            <a:off x="609600" y="4533900"/>
+            <a:ext cx="5429250" cy="1409700"/>
+          </a:xfrm>
+          <a:prstGeom xmlns:a="http://schemas.openxmlformats.org/drawingml/2006/main" prst="rect">
+            <a:avLst/>
+          </a:prstGeom>
+          <a:noFill xmlns:a="http://schemas.openxmlformats.org/drawingml/2006/main"/>
+          <a:ln xmlns:a="http://schemas.openxmlformats.org/drawingml/2006/main" w="0">
+            <a:noFill/>
+            <a:prstDash val="solid"/>
+          </a:ln>
+        </p:spPr>
+        <p:txBody>
+          <a:bodyPr xmlns:a="http://schemas.openxmlformats.org/drawingml/2006/main" lIns="0" tIns="0" rIns="0" bIns="0" anchor="ctr">
+            <a:noAutofit/>
+          </a:bodyPr>
+          <a:lstStyle xmlns:a="http://schemas.openxmlformats.org/drawingml/2006/main"/>
+          <a:p xmlns:a="http://schemas.openxmlformats.org/drawingml/2006/main">
+            <a:pPr algn="l">
+              <a:buNone/>
+              <a:defRPr sz="2250" b="0">
                 <a:solidFill>
                   <a:srgbClr val="152B3A"/>
                 </a:solidFill>
-              </a:defRPr>
-            </a:pPr>
-            <a:r>
-              <a:rPr sz="2700" b="0">
+                <a:latin typeface="Calibri"/>
+                <a:ea typeface="Calibri"/>
+                <a:cs typeface="Calibri"/>
+              </a:defRPr>
+            </a:pPr>
+            <a:r>
+              <a:rPr sz="2250" b="0">
                 <a:solidFill>
                   <a:srgbClr val="152B3A"/>
                 </a:solidFill>
+                <a:latin typeface="Calibri"/>
+                <a:ea typeface="Calibri"/>
+                <a:cs typeface="Calibri"/>
               </a:rPr>
               <a:t>For the same small load rise, the effort end must travel farther.</a:t>
+            </a:r>
+          </a:p>
+        </p:txBody>
+      </p:sp>
+      <p:sp>
+        <p:nvSpPr>
+          <p:cNvPr id="11" name="lever-beam">
+            <a:extLst xmlns:a="http://schemas.openxmlformats.org/drawingml/2006/main">
+              <a:ext uri="{FF2B5EF4-FFF2-40B4-BE49-F238E27FC236}">
+                <a16:creationId xmlns:a16="http://schemas.microsoft.com/office/drawing/2014/main" id="{855A4785-66B7-4152-9B8B-12D5046A5E26}"/>
+              </a:ext>
+            </a:extLst>
+          </p:cNvPr>
+          <p:cNvSpPr>
+            <a:spLocks xmlns:a="http://schemas.openxmlformats.org/drawingml/2006/main" noGrp="1"/>
+          </p:cNvSpPr>
+          <p:nvPr/>
+        </p:nvSpPr>
+        <p:spPr>
+          <a:xfrm xmlns:a="http://schemas.openxmlformats.org/drawingml/2006/main">
+            <a:off x="6762750" y="4333875"/>
+            <a:ext cx="4381500" cy="133350"/>
+          </a:xfrm>
+          <a:prstGeom xmlns:a="http://schemas.openxmlformats.org/drawingml/2006/main" prst="rect">
+            <a:avLst/>
+          </a:prstGeom>
+          <a:solidFill xmlns:a="http://schemas.openxmlformats.org/drawingml/2006/main">
+            <a:srgbClr val="50616B"/>
+          </a:solidFill>
+          <a:ln xmlns:a="http://schemas.openxmlformats.org/drawingml/2006/main" w="0">
+            <a:noFill/>
+          </a:ln>
+        </p:spPr>
+      </p:sp>
+      <p:sp>
+        <p:nvSpPr>
+          <p:cNvPr id="12" name="lever-pivot">
+            <a:extLst xmlns:a="http://schemas.openxmlformats.org/drawingml/2006/main">
+              <a:ext uri="{FF2B5EF4-FFF2-40B4-BE49-F238E27FC236}">
+                <a16:creationId xmlns:a16="http://schemas.microsoft.com/office/drawing/2014/main" id="{4F87C4FE-7AF3-4C4E-B42B-34797E523E59}"/>
+              </a:ext>
+            </a:extLst>
+          </p:cNvPr>
+          <p:cNvSpPr>
+            <a:spLocks xmlns:a="http://schemas.openxmlformats.org/drawingml/2006/main" noGrp="1"/>
+          </p:cNvSpPr>
+          <p:nvPr/>
+        </p:nvSpPr>
+        <p:spPr>
+          <a:xfrm xmlns:a="http://schemas.openxmlformats.org/drawingml/2006/main">
+            <a:off x="9835515" y="4467225"/>
+            <a:ext cx="514350" cy="514350"/>
+          </a:xfrm>
+          <a:prstGeom xmlns:a="http://schemas.openxmlformats.org/drawingml/2006/main" prst="triangle">
+            <a:avLst/>
+          </a:prstGeom>
+          <a:solidFill xmlns:a="http://schemas.openxmlformats.org/drawingml/2006/main">
+            <a:srgbClr val="E7EFE9"/>
+          </a:solidFill>
+          <a:ln xmlns:a="http://schemas.openxmlformats.org/drawingml/2006/main" w="19050">
+            <a:solidFill>
+              <a:srgbClr val="152B3A"/>
+            </a:solidFill>
+          </a:ln>
+        </p:spPr>
+      </p:sp>
+      <p:sp>
+        <p:nvSpPr>
+          <p:cNvPr id="13" name="lever-load">
+            <a:extLst xmlns:a="http://schemas.openxmlformats.org/drawingml/2006/main">
+              <a:ext uri="{FF2B5EF4-FFF2-40B4-BE49-F238E27FC236}">
+                <a16:creationId xmlns:a16="http://schemas.microsoft.com/office/drawing/2014/main" id="{46AFCF0E-FBB2-47C1-9DD5-9716F8474293}"/>
+              </a:ext>
+            </a:extLst>
+          </p:cNvPr>
+          <p:cNvSpPr>
+            <a:spLocks xmlns:a="http://schemas.openxmlformats.org/drawingml/2006/main" noGrp="1"/>
+          </p:cNvSpPr>
+          <p:nvPr/>
+        </p:nvSpPr>
+        <p:spPr>
+          <a:xfrm xmlns:a="http://schemas.openxmlformats.org/drawingml/2006/main">
+            <a:off x="10525125" y="3781425"/>
+            <a:ext cx="495300" cy="552450"/>
+          </a:xfrm>
+          <a:prstGeom xmlns:a="http://schemas.openxmlformats.org/drawingml/2006/main" prst="rect">
+            <a:avLst/>
+          </a:prstGeom>
+          <a:solidFill xmlns:a="http://schemas.openxmlformats.org/drawingml/2006/main">
+            <a:srgbClr val="28685E"/>
+          </a:solidFill>
+          <a:ln xmlns:a="http://schemas.openxmlformats.org/drawingml/2006/main" w="0">
+            <a:noFill/>
+          </a:ln>
+        </p:spPr>
+      </p:sp>
+      <p:sp>
+        <p:nvSpPr>
+          <p:cNvPr id="14" name="lever-effort">
+            <a:extLst xmlns:a="http://schemas.openxmlformats.org/drawingml/2006/main">
+              <a:ext uri="{FF2B5EF4-FFF2-40B4-BE49-F238E27FC236}">
+                <a16:creationId xmlns:a16="http://schemas.microsoft.com/office/drawing/2014/main" id="{A991333F-419A-4A5D-B37A-FB6689DC9761}"/>
+              </a:ext>
+            </a:extLst>
+          </p:cNvPr>
+          <p:cNvSpPr>
+            <a:spLocks xmlns:a="http://schemas.openxmlformats.org/drawingml/2006/main" noGrp="1"/>
+          </p:cNvSpPr>
+          <p:nvPr/>
+        </p:nvSpPr>
+        <p:spPr>
+          <a:xfrm xmlns:a="http://schemas.openxmlformats.org/drawingml/2006/main" rot="5400000">
+            <a:off x="6838950" y="3838575"/>
+            <a:ext cx="666750" cy="209550"/>
+          </a:xfrm>
+          <a:prstGeom xmlns:a="http://schemas.openxmlformats.org/drawingml/2006/main" prst="rightArrow">
+            <a:avLst/>
+          </a:prstGeom>
+          <a:solidFill xmlns:a="http://schemas.openxmlformats.org/drawingml/2006/main">
+            <a:srgbClr val="28685E"/>
+          </a:solidFill>
+          <a:ln xmlns:a="http://schemas.openxmlformats.org/drawingml/2006/main" w="0">
+            <a:noFill/>
+          </a:ln>
+        </p:spPr>
+      </p:sp>
+      <p:sp>
+        <p:nvSpPr>
+          <p:cNvPr id="15" name="lever-label-effort">
+            <a:extLst xmlns:a="http://schemas.openxmlformats.org/drawingml/2006/main">
+              <a:ext uri="{FF2B5EF4-FFF2-40B4-BE49-F238E27FC236}">
+                <a16:creationId xmlns:a16="http://schemas.microsoft.com/office/drawing/2014/main" id="{30E2F203-4463-43E1-AE5F-895726744689}"/>
+              </a:ext>
+            </a:extLst>
+          </p:cNvPr>
+          <p:cNvSpPr>
+            <a:spLocks xmlns:a="http://schemas.openxmlformats.org/drawingml/2006/main" noGrp="1"/>
+          </p:cNvSpPr>
+          <p:nvPr/>
+        </p:nvSpPr>
+        <p:spPr>
+          <a:xfrm xmlns:a="http://schemas.openxmlformats.org/drawingml/2006/main">
+            <a:off x="6715125" y="3143250"/>
+            <a:ext cx="1619250" cy="381000"/>
+          </a:xfrm>
+          <a:prstGeom xmlns:a="http://schemas.openxmlformats.org/drawingml/2006/main" prst="rect">
+            <a:avLst/>
+          </a:prstGeom>
+          <a:noFill xmlns:a="http://schemas.openxmlformats.org/drawingml/2006/main"/>
+          <a:ln xmlns:a="http://schemas.openxmlformats.org/drawingml/2006/main" w="0">
+            <a:noFill/>
+          </a:ln>
+        </p:spPr>
+        <p:txBody>
+          <a:bodyPr xmlns:a="http://schemas.openxmlformats.org/drawingml/2006/main" lIns="0" tIns="0" rIns="0" bIns="0" anchor="ctr">
+            <a:noAutofit/>
+          </a:bodyPr>
+          <a:lstStyle xmlns:a="http://schemas.openxmlformats.org/drawingml/2006/main"/>
+          <a:p xmlns:a="http://schemas.openxmlformats.org/drawingml/2006/main">
+            <a:pPr algn="l">
+              <a:defRPr sz="1725" b="1">
+                <a:solidFill>
+                  <a:srgbClr val="28685E"/>
+                </a:solidFill>
+                <a:latin typeface="Calibri"/>
+                <a:ea typeface="Calibri"/>
+                <a:cs typeface="Calibri"/>
+              </a:defRPr>
+            </a:pPr>
+            <a:r>
+              <a:rPr sz="1725" b="1">
+                <a:solidFill>
+                  <a:srgbClr val="28685E"/>
+                </a:solidFill>
+                <a:latin typeface="Calibri"/>
+                <a:ea typeface="Calibri"/>
+                <a:cs typeface="Calibri"/>
+              </a:rPr>
+              <a:t>EFFORT</a:t>
+            </a:r>
+          </a:p>
+        </p:txBody>
+      </p:sp>
+      <p:sp>
+        <p:nvSpPr>
+          <p:cNvPr id="16" name="lever-label-load">
+            <a:extLst xmlns:a="http://schemas.openxmlformats.org/drawingml/2006/main">
+              <a:ext uri="{FF2B5EF4-FFF2-40B4-BE49-F238E27FC236}">
+                <a16:creationId xmlns:a16="http://schemas.microsoft.com/office/drawing/2014/main" id="{FF9D12FB-9D34-4E33-AF50-D70F6A14E92D}"/>
+              </a:ext>
+            </a:extLst>
+          </p:cNvPr>
+          <p:cNvSpPr>
+            <a:spLocks xmlns:a="http://schemas.openxmlformats.org/drawingml/2006/main" noGrp="1"/>
+          </p:cNvSpPr>
+          <p:nvPr/>
+        </p:nvSpPr>
+        <p:spPr>
+          <a:xfrm xmlns:a="http://schemas.openxmlformats.org/drawingml/2006/main">
+            <a:off x="10153650" y="3286125"/>
+            <a:ext cx="1238250" cy="381000"/>
+          </a:xfrm>
+          <a:prstGeom xmlns:a="http://schemas.openxmlformats.org/drawingml/2006/main" prst="rect">
+            <a:avLst/>
+          </a:prstGeom>
+          <a:noFill xmlns:a="http://schemas.openxmlformats.org/drawingml/2006/main"/>
+          <a:ln xmlns:a="http://schemas.openxmlformats.org/drawingml/2006/main" w="0">
+            <a:noFill/>
+          </a:ln>
+        </p:spPr>
+        <p:txBody>
+          <a:bodyPr xmlns:a="http://schemas.openxmlformats.org/drawingml/2006/main" lIns="0" tIns="0" rIns="0" bIns="0" anchor="ctr">
+            <a:noAutofit/>
+          </a:bodyPr>
+          <a:lstStyle xmlns:a="http://schemas.openxmlformats.org/drawingml/2006/main"/>
+          <a:p xmlns:a="http://schemas.openxmlformats.org/drawingml/2006/main">
+            <a:pPr algn="l">
+              <a:defRPr sz="1725" b="1">
+                <a:solidFill>
+                  <a:srgbClr val="28685E"/>
+                </a:solidFill>
+                <a:latin typeface="Calibri"/>
+                <a:ea typeface="Calibri"/>
+                <a:cs typeface="Calibri"/>
+              </a:defRPr>
+            </a:pPr>
+            <a:r>
+              <a:rPr sz="1725" b="1">
+                <a:solidFill>
+                  <a:srgbClr val="28685E"/>
+                </a:solidFill>
+                <a:latin typeface="Calibri"/>
+                <a:ea typeface="Calibri"/>
+                <a:cs typeface="Calibri"/>
+              </a:rPr>
+              <a:t>LOAD</a:t>
+            </a:r>
+          </a:p>
+        </p:txBody>
+      </p:sp>
+      <p:sp>
+        <p:nvSpPr>
+          <p:cNvPr id="17" name="lever-label-pivot">
+            <a:extLst xmlns:a="http://schemas.openxmlformats.org/drawingml/2006/main">
+              <a:ext uri="{FF2B5EF4-FFF2-40B4-BE49-F238E27FC236}">
+                <a16:creationId xmlns:a16="http://schemas.microsoft.com/office/drawing/2014/main" id="{DDAFE2EE-5F2C-47DF-831B-027F5A432E80}"/>
+              </a:ext>
+            </a:extLst>
+          </p:cNvPr>
+          <p:cNvSpPr>
+            <a:spLocks xmlns:a="http://schemas.openxmlformats.org/drawingml/2006/main" noGrp="1"/>
+          </p:cNvSpPr>
+          <p:nvPr/>
+        </p:nvSpPr>
+        <p:spPr>
+          <a:xfrm xmlns:a="http://schemas.openxmlformats.org/drawingml/2006/main">
+            <a:off x="9587865" y="5133975"/>
+            <a:ext cx="1428750" cy="381000"/>
+          </a:xfrm>
+          <a:prstGeom xmlns:a="http://schemas.openxmlformats.org/drawingml/2006/main" prst="rect">
+            <a:avLst/>
+          </a:prstGeom>
+          <a:noFill xmlns:a="http://schemas.openxmlformats.org/drawingml/2006/main"/>
+          <a:ln xmlns:a="http://schemas.openxmlformats.org/drawingml/2006/main" w="0">
+            <a:noFill/>
+          </a:ln>
+        </p:spPr>
+        <p:txBody>
+          <a:bodyPr xmlns:a="http://schemas.openxmlformats.org/drawingml/2006/main" lIns="0" tIns="0" rIns="0" bIns="0" anchor="ctr">
+            <a:noAutofit/>
+          </a:bodyPr>
+          <a:lstStyle xmlns:a="http://schemas.openxmlformats.org/drawingml/2006/main"/>
+          <a:p xmlns:a="http://schemas.openxmlformats.org/drawingml/2006/main">
+            <a:pPr algn="l">
+              <a:defRPr sz="1725" b="1">
+                <a:solidFill>
+                  <a:srgbClr val="152B3A"/>
+                </a:solidFill>
+                <a:latin typeface="Calibri"/>
+                <a:ea typeface="Calibri"/>
+                <a:cs typeface="Calibri"/>
+              </a:defRPr>
+            </a:pPr>
+            <a:r>
+              <a:rPr sz="1725" b="1">
+                <a:solidFill>
+                  <a:srgbClr val="152B3A"/>
+                </a:solidFill>
+                <a:latin typeface="Calibri"/>
+                <a:ea typeface="Calibri"/>
+                <a:cs typeface="Calibri"/>
+              </a:rPr>
+              <a:t>PIVOT</a:t>
             </a:r>
           </a:p>
         </p:txBody>
@@ -5271,7 +6482,7 @@
     <p:bg>
       <p:bgPr>
         <a:solidFill xmlns:a="http://schemas.openxmlformats.org/drawingml/2006/main">
-          <a:srgbClr val="F5F1E8"/>
+          <a:srgbClr val="FAF9F5"/>
         </a:solidFill>
       </p:bgPr>
     </p:bg>
@@ -5300,8 +6511,8 @@
         </p:nvSpPr>
         <p:spPr>
           <a:xfrm xmlns:a="http://schemas.openxmlformats.org/drawingml/2006/main">
-            <a:off x="609600" y="552450"/>
-            <a:ext cx="781050" cy="57150"/>
+            <a:off x="609600" y="733425"/>
+            <a:ext cx="781050" cy="38100"/>
           </a:xfrm>
           <a:prstGeom xmlns:a="http://schemas.openxmlformats.org/drawingml/2006/main" prst="rect">
             <a:avLst/>
@@ -5331,34 +6542,43 @@
         </p:nvSpPr>
         <p:spPr>
           <a:xfrm xmlns:a="http://schemas.openxmlformats.org/drawingml/2006/main">
-            <a:off x="609600" y="762000"/>
-            <a:ext cx="8572500" cy="285750"/>
-          </a:xfrm>
-          <a:prstGeom xmlns:a="http://schemas.openxmlformats.org/drawingml/2006/main" prst="rect">
-            <a:avLst/>
-          </a:prstGeom>
-          <a:noFill xmlns:a="http://schemas.openxmlformats.org/drawingml/2006/main"/>
-          <a:ln xmlns:a="http://schemas.openxmlformats.org/drawingml/2006/main" w="0">
-            <a:noFill/>
-            <a:prstDash val="solid"/>
-          </a:ln>
-        </p:spPr>
-        <p:txBody>
-          <a:bodyPr xmlns:a="http://schemas.openxmlformats.org/drawingml/2006/main" lIns="0" tIns="0" rIns="0" bIns="0" anchor="ctr"/>
-          <a:lstStyle xmlns:a="http://schemas.openxmlformats.org/drawingml/2006/main"/>
-          <a:p xmlns:a="http://schemas.openxmlformats.org/drawingml/2006/main">
-            <a:pPr>
-              <a:defRPr sz="1500" b="1">
+            <a:off x="609600" y="342900"/>
+            <a:ext cx="9334500" cy="304800"/>
+          </a:xfrm>
+          <a:prstGeom xmlns:a="http://schemas.openxmlformats.org/drawingml/2006/main" prst="rect">
+            <a:avLst/>
+          </a:prstGeom>
+          <a:noFill xmlns:a="http://schemas.openxmlformats.org/drawingml/2006/main"/>
+          <a:ln xmlns:a="http://schemas.openxmlformats.org/drawingml/2006/main" w="0">
+            <a:noFill/>
+            <a:prstDash val="solid"/>
+          </a:ln>
+        </p:spPr>
+        <p:txBody>
+          <a:bodyPr xmlns:a="http://schemas.openxmlformats.org/drawingml/2006/main" lIns="0" tIns="0" rIns="0" bIns="0" anchor="ctr">
+            <a:noAutofit/>
+          </a:bodyPr>
+          <a:lstStyle xmlns:a="http://schemas.openxmlformats.org/drawingml/2006/main"/>
+          <a:p xmlns:a="http://schemas.openxmlformats.org/drawingml/2006/main">
+            <a:pPr algn="l">
+              <a:buNone/>
+              <a:defRPr sz="1350" b="1">
                 <a:solidFill>
                   <a:srgbClr val="28685E"/>
                 </a:solidFill>
-              </a:defRPr>
-            </a:pPr>
-            <a:r>
-              <a:rPr sz="1500" b="1">
+                <a:latin typeface="Calibri"/>
+                <a:ea typeface="Calibri"/>
+                <a:cs typeface="Calibri"/>
+              </a:defRPr>
+            </a:pPr>
+            <a:r>
+              <a:rPr sz="1350" b="1">
                 <a:solidFill>
                   <a:srgbClr val="28685E"/>
                 </a:solidFill>
+                <a:latin typeface="Calibri"/>
+                <a:ea typeface="Calibri"/>
+                <a:cs typeface="Calibri"/>
               </a:rPr>
               <a:t>MADE BY MATT  /  GROW SCIENCE</a:t>
             </a:r>
@@ -5381,34 +6601,43 @@
         </p:nvSpPr>
         <p:spPr>
           <a:xfrm xmlns:a="http://schemas.openxmlformats.org/drawingml/2006/main">
-            <a:off x="609600" y="1352550"/>
-            <a:ext cx="10972800" cy="952500"/>
-          </a:xfrm>
-          <a:prstGeom xmlns:a="http://schemas.openxmlformats.org/drawingml/2006/main" prst="rect">
-            <a:avLst/>
-          </a:prstGeom>
-          <a:noFill xmlns:a="http://schemas.openxmlformats.org/drawingml/2006/main"/>
-          <a:ln xmlns:a="http://schemas.openxmlformats.org/drawingml/2006/main" w="0">
-            <a:noFill/>
-            <a:prstDash val="solid"/>
-          </a:ln>
-        </p:spPr>
-        <p:txBody>
-          <a:bodyPr xmlns:a="http://schemas.openxmlformats.org/drawingml/2006/main" lIns="0" tIns="0" rIns="0" bIns="0" anchor="ctr"/>
-          <a:lstStyle xmlns:a="http://schemas.openxmlformats.org/drawingml/2006/main"/>
-          <a:p xmlns:a="http://schemas.openxmlformats.org/drawingml/2006/main">
-            <a:pPr>
-              <a:defRPr sz="3750" b="1">
+            <a:off x="609600" y="990600"/>
+            <a:ext cx="10972800" cy="1000125"/>
+          </a:xfrm>
+          <a:prstGeom xmlns:a="http://schemas.openxmlformats.org/drawingml/2006/main" prst="rect">
+            <a:avLst/>
+          </a:prstGeom>
+          <a:noFill xmlns:a="http://schemas.openxmlformats.org/drawingml/2006/main"/>
+          <a:ln xmlns:a="http://schemas.openxmlformats.org/drawingml/2006/main" w="0">
+            <a:noFill/>
+            <a:prstDash val="solid"/>
+          </a:ln>
+        </p:spPr>
+        <p:txBody>
+          <a:bodyPr xmlns:a="http://schemas.openxmlformats.org/drawingml/2006/main" lIns="0" tIns="0" rIns="0" bIns="0" anchor="ctr">
+            <a:noAutofit/>
+          </a:bodyPr>
+          <a:lstStyle xmlns:a="http://schemas.openxmlformats.org/drawingml/2006/main"/>
+          <a:p xmlns:a="http://schemas.openxmlformats.org/drawingml/2006/main">
+            <a:pPr algn="l">
+              <a:buNone/>
+              <a:defRPr sz="3675" b="1">
                 <a:solidFill>
                   <a:srgbClr val="152B3A"/>
                 </a:solidFill>
-              </a:defRPr>
-            </a:pPr>
-            <a:r>
-              <a:rPr sz="3750" b="1">
+                <a:latin typeface="Calibri"/>
+                <a:ea typeface="Calibri"/>
+                <a:cs typeface="Calibri"/>
+              </a:defRPr>
+            </a:pPr>
+            <a:r>
+              <a:rPr sz="3675" b="1">
                 <a:solidFill>
                   <a:srgbClr val="152B3A"/>
                 </a:solidFill>
+                <a:latin typeface="Calibri"/>
+                <a:ea typeface="Calibri"/>
+                <a:cs typeface="Calibri"/>
               </a:rPr>
               <a:t>Find the turning point</a:t>
             </a:r>
@@ -5431,14 +6660,14 @@
         </p:nvSpPr>
         <p:spPr>
           <a:xfrm xmlns:a="http://schemas.openxmlformats.org/drawingml/2006/main">
-            <a:off x="609600" y="6219825"/>
+            <a:off x="609600" y="6191250"/>
             <a:ext cx="10972800" cy="9525"/>
           </a:xfrm>
           <a:prstGeom xmlns:a="http://schemas.openxmlformats.org/drawingml/2006/main" prst="rect">
             <a:avLst/>
           </a:prstGeom>
           <a:solidFill xmlns:a="http://schemas.openxmlformats.org/drawingml/2006/main">
-            <a:srgbClr val="DCE7DD"/>
+            <a:srgbClr val="CEDBD3"/>
           </a:solidFill>
           <a:ln xmlns:a="http://schemas.openxmlformats.org/drawingml/2006/main" w="0">
             <a:noFill/>
@@ -5462,34 +6691,43 @@
         </p:nvSpPr>
         <p:spPr>
           <a:xfrm xmlns:a="http://schemas.openxmlformats.org/drawingml/2006/main">
-            <a:off x="609600" y="6381750"/>
-            <a:ext cx="9906000" cy="228600"/>
-          </a:xfrm>
-          <a:prstGeom xmlns:a="http://schemas.openxmlformats.org/drawingml/2006/main" prst="rect">
-            <a:avLst/>
-          </a:prstGeom>
-          <a:noFill xmlns:a="http://schemas.openxmlformats.org/drawingml/2006/main"/>
-          <a:ln xmlns:a="http://schemas.openxmlformats.org/drawingml/2006/main" w="0">
-            <a:noFill/>
-            <a:prstDash val="solid"/>
-          </a:ln>
-        </p:spPr>
-        <p:txBody>
-          <a:bodyPr xmlns:a="http://schemas.openxmlformats.org/drawingml/2006/main" lIns="0" tIns="0" rIns="0" bIns="0" anchor="ctr"/>
-          <a:lstStyle xmlns:a="http://schemas.openxmlformats.org/drawingml/2006/main"/>
-          <a:p xmlns:a="http://schemas.openxmlformats.org/drawingml/2006/main">
-            <a:pPr>
-              <a:defRPr sz="1275" b="0">
+            <a:off x="609600" y="6419850"/>
+            <a:ext cx="9525000" cy="219075"/>
+          </a:xfrm>
+          <a:prstGeom xmlns:a="http://schemas.openxmlformats.org/drawingml/2006/main" prst="rect">
+            <a:avLst/>
+          </a:prstGeom>
+          <a:noFill xmlns:a="http://schemas.openxmlformats.org/drawingml/2006/main"/>
+          <a:ln xmlns:a="http://schemas.openxmlformats.org/drawingml/2006/main" w="0">
+            <a:noFill/>
+            <a:prstDash val="solid"/>
+          </a:ln>
+        </p:spPr>
+        <p:txBody>
+          <a:bodyPr xmlns:a="http://schemas.openxmlformats.org/drawingml/2006/main" lIns="0" tIns="0" rIns="0" bIns="0" anchor="ctr">
+            <a:noAutofit/>
+          </a:bodyPr>
+          <a:lstStyle xmlns:a="http://schemas.openxmlformats.org/drawingml/2006/main"/>
+          <a:p xmlns:a="http://schemas.openxmlformats.org/drawingml/2006/main">
+            <a:pPr algn="l">
+              <a:buNone/>
+              <a:defRPr sz="1200" b="0">
                 <a:solidFill>
                   <a:srgbClr val="50616B"/>
                 </a:solidFill>
-              </a:defRPr>
-            </a:pPr>
-            <a:r>
-              <a:rPr sz="1275" b="0">
+                <a:latin typeface="Calibri"/>
+                <a:ea typeface="Calibri"/>
+                <a:cs typeface="Calibri"/>
+              </a:defRPr>
+            </a:pPr>
+            <a:r>
+              <a:rPr sz="1200" b="0">
                 <a:solidFill>
                   <a:srgbClr val="50616B"/>
                 </a:solidFill>
+                <a:latin typeface="Calibri"/>
+                <a:ea typeface="Calibri"/>
+                <a:cs typeface="Calibri"/>
               </a:rPr>
               <a:t>AUTUMN 1  ·  WEEK 4  ·  LESSON A</a:t>
             </a:r>
@@ -5512,27 +6750,33 @@
         </p:nvSpPr>
         <p:spPr>
           <a:xfrm xmlns:a="http://schemas.openxmlformats.org/drawingml/2006/main">
-            <a:off x="11106150" y="6362700"/>
-            <a:ext cx="476250" cy="238125"/>
-          </a:xfrm>
-          <a:prstGeom xmlns:a="http://schemas.openxmlformats.org/drawingml/2006/main" prst="rect">
-            <a:avLst/>
-          </a:prstGeom>
-          <a:noFill xmlns:a="http://schemas.openxmlformats.org/drawingml/2006/main"/>
-          <a:ln xmlns:a="http://schemas.openxmlformats.org/drawingml/2006/main" w="0">
-            <a:noFill/>
-            <a:prstDash val="solid"/>
-          </a:ln>
-        </p:spPr>
-        <p:txBody>
-          <a:bodyPr xmlns:a="http://schemas.openxmlformats.org/drawingml/2006/main" lIns="0" tIns="0" rIns="0" bIns="0" anchor="ctr"/>
-          <a:lstStyle xmlns:a="http://schemas.openxmlformats.org/drawingml/2006/main"/>
-          <a:p xmlns:a="http://schemas.openxmlformats.org/drawingml/2006/main">
-            <a:pPr>
+            <a:off x="11106150" y="6400800"/>
+            <a:ext cx="476250" cy="247650"/>
+          </a:xfrm>
+          <a:prstGeom xmlns:a="http://schemas.openxmlformats.org/drawingml/2006/main" prst="rect">
+            <a:avLst/>
+          </a:prstGeom>
+          <a:noFill xmlns:a="http://schemas.openxmlformats.org/drawingml/2006/main"/>
+          <a:ln xmlns:a="http://schemas.openxmlformats.org/drawingml/2006/main" w="0">
+            <a:noFill/>
+            <a:prstDash val="solid"/>
+          </a:ln>
+        </p:spPr>
+        <p:txBody>
+          <a:bodyPr xmlns:a="http://schemas.openxmlformats.org/drawingml/2006/main" lIns="0" tIns="0" rIns="0" bIns="0" anchor="ctr">
+            <a:noAutofit/>
+          </a:bodyPr>
+          <a:lstStyle xmlns:a="http://schemas.openxmlformats.org/drawingml/2006/main"/>
+          <a:p xmlns:a="http://schemas.openxmlformats.org/drawingml/2006/main">
+            <a:pPr algn="l">
+              <a:buNone/>
               <a:defRPr sz="1350" b="1">
                 <a:solidFill>
                   <a:srgbClr val="28685E"/>
                 </a:solidFill>
+                <a:latin typeface="Calibri"/>
+                <a:ea typeface="Calibri"/>
+                <a:cs typeface="Calibri"/>
               </a:defRPr>
             </a:pPr>
             <a:r>
@@ -5540,6 +6784,9 @@
                 <a:solidFill>
                   <a:srgbClr val="28685E"/>
                 </a:solidFill>
+                <a:latin typeface="Calibri"/>
+                <a:ea typeface="Calibri"/>
+                <a:cs typeface="Calibri"/>
               </a:rPr>
               <a:t>02</a:t>
             </a:r>
@@ -5562,34 +6809,43 @@
         </p:nvSpPr>
         <p:spPr>
           <a:xfrm xmlns:a="http://schemas.openxmlformats.org/drawingml/2006/main">
-            <a:off x="609600" y="2524125"/>
-            <a:ext cx="10972800" cy="781050"/>
-          </a:xfrm>
-          <a:prstGeom xmlns:a="http://schemas.openxmlformats.org/drawingml/2006/main" prst="rect">
-            <a:avLst/>
-          </a:prstGeom>
-          <a:noFill xmlns:a="http://schemas.openxmlformats.org/drawingml/2006/main"/>
-          <a:ln xmlns:a="http://schemas.openxmlformats.org/drawingml/2006/main" w="0">
-            <a:noFill/>
-            <a:prstDash val="solid"/>
-          </a:ln>
-        </p:spPr>
-        <p:txBody>
-          <a:bodyPr xmlns:a="http://schemas.openxmlformats.org/drawingml/2006/main" lIns="0" tIns="0" rIns="0" bIns="0" anchor="ctr"/>
-          <a:lstStyle xmlns:a="http://schemas.openxmlformats.org/drawingml/2006/main"/>
-          <a:p xmlns:a="http://schemas.openxmlformats.org/drawingml/2006/main">
-            <a:pPr>
-              <a:defRPr sz="2550" b="0">
+            <a:off x="1000125" y="2333625"/>
+            <a:ext cx="10382250" cy="1076325"/>
+          </a:xfrm>
+          <a:prstGeom xmlns:a="http://schemas.openxmlformats.org/drawingml/2006/main" prst="rect">
+            <a:avLst/>
+          </a:prstGeom>
+          <a:noFill xmlns:a="http://schemas.openxmlformats.org/drawingml/2006/main"/>
+          <a:ln xmlns:a="http://schemas.openxmlformats.org/drawingml/2006/main" w="0">
+            <a:noFill/>
+            <a:prstDash val="solid"/>
+          </a:ln>
+        </p:spPr>
+        <p:txBody>
+          <a:bodyPr xmlns:a="http://schemas.openxmlformats.org/drawingml/2006/main" lIns="0" tIns="0" rIns="0" bIns="0" anchor="ctr">
+            <a:noAutofit/>
+          </a:bodyPr>
+          <a:lstStyle xmlns:a="http://schemas.openxmlformats.org/drawingml/2006/main"/>
+          <a:p xmlns:a="http://schemas.openxmlformats.org/drawingml/2006/main">
+            <a:pPr algn="l">
+              <a:buNone/>
+              <a:defRPr sz="2625" b="0">
                 <a:solidFill>
                   <a:srgbClr val="152B3A"/>
                 </a:solidFill>
-              </a:defRPr>
-            </a:pPr>
-            <a:r>
-              <a:rPr sz="2550" b="0">
+                <a:latin typeface="Calibri"/>
+                <a:ea typeface="Calibri"/>
+                <a:cs typeface="Calibri"/>
+              </a:defRPr>
+            </a:pPr>
+            <a:r>
+              <a:rPr sz="2625" b="0">
                 <a:solidFill>
                   <a:srgbClr val="152B3A"/>
                 </a:solidFill>
+                <a:latin typeface="Calibri"/>
+                <a:ea typeface="Calibri"/>
+                <a:cs typeface="Calibri"/>
               </a:rPr>
               <a:t>Supported: point to where scissors turn.</a:t>
             </a:r>
@@ -5612,34 +6868,43 @@
         </p:nvSpPr>
         <p:spPr>
           <a:xfrm xmlns:a="http://schemas.openxmlformats.org/drawingml/2006/main">
-            <a:off x="609600" y="3381375"/>
-            <a:ext cx="10972800" cy="781050"/>
-          </a:xfrm>
-          <a:prstGeom xmlns:a="http://schemas.openxmlformats.org/drawingml/2006/main" prst="rect">
-            <a:avLst/>
-          </a:prstGeom>
-          <a:noFill xmlns:a="http://schemas.openxmlformats.org/drawingml/2006/main"/>
-          <a:ln xmlns:a="http://schemas.openxmlformats.org/drawingml/2006/main" w="0">
-            <a:noFill/>
-            <a:prstDash val="solid"/>
-          </a:ln>
-        </p:spPr>
-        <p:txBody>
-          <a:bodyPr xmlns:a="http://schemas.openxmlformats.org/drawingml/2006/main" lIns="0" tIns="0" rIns="0" bIns="0" anchor="ctr"/>
-          <a:lstStyle xmlns:a="http://schemas.openxmlformats.org/drawingml/2006/main"/>
-          <a:p xmlns:a="http://schemas.openxmlformats.org/drawingml/2006/main">
-            <a:pPr>
-              <a:defRPr sz="2550" b="0">
+            <a:off x="1000125" y="3467100"/>
+            <a:ext cx="10382250" cy="1076325"/>
+          </a:xfrm>
+          <a:prstGeom xmlns:a="http://schemas.openxmlformats.org/drawingml/2006/main" prst="rect">
+            <a:avLst/>
+          </a:prstGeom>
+          <a:noFill xmlns:a="http://schemas.openxmlformats.org/drawingml/2006/main"/>
+          <a:ln xmlns:a="http://schemas.openxmlformats.org/drawingml/2006/main" w="0">
+            <a:noFill/>
+            <a:prstDash val="solid"/>
+          </a:ln>
+        </p:spPr>
+        <p:txBody>
+          <a:bodyPr xmlns:a="http://schemas.openxmlformats.org/drawingml/2006/main" lIns="0" tIns="0" rIns="0" bIns="0" anchor="ctr">
+            <a:noAutofit/>
+          </a:bodyPr>
+          <a:lstStyle xmlns:a="http://schemas.openxmlformats.org/drawingml/2006/main"/>
+          <a:p xmlns:a="http://schemas.openxmlformats.org/drawingml/2006/main">
+            <a:pPr algn="l">
+              <a:buNone/>
+              <a:defRPr sz="2625" b="0">
                 <a:solidFill>
                   <a:srgbClr val="152B3A"/>
                 </a:solidFill>
-              </a:defRPr>
-            </a:pPr>
-            <a:r>
-              <a:rPr sz="2550" b="0">
+                <a:latin typeface="Calibri"/>
+                <a:ea typeface="Calibri"/>
+                <a:cs typeface="Calibri"/>
+              </a:defRPr>
+            </a:pPr>
+            <a:r>
+              <a:rPr sz="2625" b="0">
                 <a:solidFill>
                   <a:srgbClr val="152B3A"/>
                 </a:solidFill>
+                <a:latin typeface="Calibri"/>
+                <a:ea typeface="Calibri"/>
+                <a:cs typeface="Calibri"/>
               </a:rPr>
               <a:t>Standard: name that turning point.</a:t>
             </a:r>
@@ -5662,34 +6927,43 @@
         </p:nvSpPr>
         <p:spPr>
           <a:xfrm xmlns:a="http://schemas.openxmlformats.org/drawingml/2006/main">
-            <a:off x="609600" y="4238625"/>
-            <a:ext cx="10972800" cy="781050"/>
-          </a:xfrm>
-          <a:prstGeom xmlns:a="http://schemas.openxmlformats.org/drawingml/2006/main" prst="rect">
-            <a:avLst/>
-          </a:prstGeom>
-          <a:noFill xmlns:a="http://schemas.openxmlformats.org/drawingml/2006/main"/>
-          <a:ln xmlns:a="http://schemas.openxmlformats.org/drawingml/2006/main" w="0">
-            <a:noFill/>
-            <a:prstDash val="solid"/>
-          </a:ln>
-        </p:spPr>
-        <p:txBody>
-          <a:bodyPr xmlns:a="http://schemas.openxmlformats.org/drawingml/2006/main" lIns="0" tIns="0" rIns="0" bIns="0" anchor="ctr"/>
-          <a:lstStyle xmlns:a="http://schemas.openxmlformats.org/drawingml/2006/main"/>
-          <a:p xmlns:a="http://schemas.openxmlformats.org/drawingml/2006/main">
-            <a:pPr>
-              <a:defRPr sz="2550" b="0">
+            <a:off x="1000125" y="4600575"/>
+            <a:ext cx="10382250" cy="1076325"/>
+          </a:xfrm>
+          <a:prstGeom xmlns:a="http://schemas.openxmlformats.org/drawingml/2006/main" prst="rect">
+            <a:avLst/>
+          </a:prstGeom>
+          <a:noFill xmlns:a="http://schemas.openxmlformats.org/drawingml/2006/main"/>
+          <a:ln xmlns:a="http://schemas.openxmlformats.org/drawingml/2006/main" w="0">
+            <a:noFill/>
+            <a:prstDash val="solid"/>
+          </a:ln>
+        </p:spPr>
+        <p:txBody>
+          <a:bodyPr xmlns:a="http://schemas.openxmlformats.org/drawingml/2006/main" lIns="0" tIns="0" rIns="0" bIns="0" anchor="ctr">
+            <a:noAutofit/>
+          </a:bodyPr>
+          <a:lstStyle xmlns:a="http://schemas.openxmlformats.org/drawingml/2006/main"/>
+          <a:p xmlns:a="http://schemas.openxmlformats.org/drawingml/2006/main">
+            <a:pPr algn="l">
+              <a:buNone/>
+              <a:defRPr sz="2625" b="0">
                 <a:solidFill>
                   <a:srgbClr val="152B3A"/>
                 </a:solidFill>
-              </a:defRPr>
-            </a:pPr>
-            <a:r>
-              <a:rPr sz="2550" b="0">
+                <a:latin typeface="Calibri"/>
+                <a:ea typeface="Calibri"/>
+                <a:cs typeface="Calibri"/>
+              </a:defRPr>
+            </a:pPr>
+            <a:r>
+              <a:rPr sz="2625" b="0">
                 <a:solidFill>
                   <a:srgbClr val="152B3A"/>
                 </a:solidFill>
+                <a:latin typeface="Calibri"/>
+                <a:ea typeface="Calibri"/>
+                <a:cs typeface="Calibri"/>
               </a:rPr>
               <a:t>Stretch: find it on a wheelbarrow drawing too.</a:t>
             </a:r>
@@ -5729,6 +7003,7 @@
           <a:lstStyle xmlns:a="http://schemas.openxmlformats.org/drawingml/2006/main"/>
           <a:p xmlns:a="http://schemas.openxmlformats.org/drawingml/2006/main">
             <a:pPr>
+              <a:buNone/>
               <a:defRPr sz="2100" b="1">
                 <a:solidFill>
                   <a:srgbClr val="28685E"/>
@@ -5742,6 +7017,237 @@
                 </a:solidFill>
               </a:rPr>
               <a:t>Look, point, describe or draw.</a:t>
+            </a:r>
+          </a:p>
+        </p:txBody>
+      </p:sp>
+      <p:sp>
+        <p:nvSpPr>
+          <p:cNvPr id="12" name="cue-0">
+            <a:extLst xmlns:a="http://schemas.openxmlformats.org/drawingml/2006/main">
+              <a:ext uri="{FF2B5EF4-FFF2-40B4-BE49-F238E27FC236}">
+                <a16:creationId xmlns:a16="http://schemas.microsoft.com/office/drawing/2014/main" id="{51A35AC0-7E96-47FE-9EDF-049C765A0D22}"/>
+              </a:ext>
+            </a:extLst>
+          </p:cNvPr>
+          <p:cNvSpPr>
+            <a:spLocks xmlns:a="http://schemas.openxmlformats.org/drawingml/2006/main" noGrp="1"/>
+          </p:cNvSpPr>
+          <p:nvPr/>
+        </p:nvSpPr>
+        <p:spPr>
+          <a:xfrm xmlns:a="http://schemas.openxmlformats.org/drawingml/2006/main">
+            <a:off x="609600" y="2362200"/>
+            <a:ext cx="323850" cy="323850"/>
+          </a:xfrm>
+          <a:prstGeom xmlns:a="http://schemas.openxmlformats.org/drawingml/2006/main" prst="rect">
+            <a:avLst/>
+          </a:prstGeom>
+          <a:noFill xmlns:a="http://schemas.openxmlformats.org/drawingml/2006/main"/>
+          <a:ln xmlns:a="http://schemas.openxmlformats.org/drawingml/2006/main" w="0">
+            <a:noFill/>
+          </a:ln>
+        </p:spPr>
+        <p:txBody>
+          <a:bodyPr xmlns:a="http://schemas.openxmlformats.org/drawingml/2006/main" lIns="0" tIns="0" rIns="0" bIns="0" anchor="ctr">
+            <a:noAutofit/>
+          </a:bodyPr>
+          <a:lstStyle xmlns:a="http://schemas.openxmlformats.org/drawingml/2006/main"/>
+          <a:p xmlns:a="http://schemas.openxmlformats.org/drawingml/2006/main">
+            <a:pPr algn="l">
+              <a:defRPr sz="1350" b="1">
+                <a:solidFill>
+                  <a:srgbClr val="28685E"/>
+                </a:solidFill>
+                <a:latin typeface="Calibri"/>
+                <a:ea typeface="Calibri"/>
+                <a:cs typeface="Calibri"/>
+              </a:defRPr>
+            </a:pPr>
+            <a:r>
+              <a:rPr sz="1350" b="1">
+                <a:solidFill>
+                  <a:srgbClr val="28685E"/>
+                </a:solidFill>
+                <a:latin typeface="Calibri"/>
+                <a:ea typeface="Calibri"/>
+                <a:cs typeface="Calibri"/>
+              </a:rPr>
+              <a:t>01</a:t>
+            </a:r>
+          </a:p>
+        </p:txBody>
+      </p:sp>
+      <p:sp>
+        <p:nvSpPr>
+          <p:cNvPr id="13" name="row-rule-0">
+            <a:extLst xmlns:a="http://schemas.openxmlformats.org/drawingml/2006/main">
+              <a:ext uri="{FF2B5EF4-FFF2-40B4-BE49-F238E27FC236}">
+                <a16:creationId xmlns:a16="http://schemas.microsoft.com/office/drawing/2014/main" id="{DB1A5E73-0118-4070-A22E-08A070AD12AD}"/>
+              </a:ext>
+            </a:extLst>
+          </p:cNvPr>
+          <p:cNvSpPr>
+            <a:spLocks xmlns:a="http://schemas.openxmlformats.org/drawingml/2006/main" noGrp="1"/>
+          </p:cNvSpPr>
+          <p:nvPr/>
+        </p:nvSpPr>
+        <p:spPr>
+          <a:xfrm xmlns:a="http://schemas.openxmlformats.org/drawingml/2006/main">
+            <a:off x="1000125" y="3419475"/>
+            <a:ext cx="10334625" cy="0"/>
+          </a:xfrm>
+          <a:prstGeom xmlns:a="http://schemas.openxmlformats.org/drawingml/2006/main" prst="line">
+            <a:avLst/>
+          </a:prstGeom>
+          <a:noFill xmlns:a="http://schemas.openxmlformats.org/drawingml/2006/main"/>
+          <a:ln xmlns:a="http://schemas.openxmlformats.org/drawingml/2006/main" w="9525">
+            <a:solidFill>
+              <a:srgbClr val="CEDBD3"/>
+            </a:solidFill>
+          </a:ln>
+        </p:spPr>
+      </p:sp>
+      <p:sp>
+        <p:nvSpPr>
+          <p:cNvPr id="14" name="cue-1">
+            <a:extLst xmlns:a="http://schemas.openxmlformats.org/drawingml/2006/main">
+              <a:ext uri="{FF2B5EF4-FFF2-40B4-BE49-F238E27FC236}">
+                <a16:creationId xmlns:a16="http://schemas.microsoft.com/office/drawing/2014/main" id="{54134956-E67E-41EF-8BB3-5195B7D6C35D}"/>
+              </a:ext>
+            </a:extLst>
+          </p:cNvPr>
+          <p:cNvSpPr>
+            <a:spLocks xmlns:a="http://schemas.openxmlformats.org/drawingml/2006/main" noGrp="1"/>
+          </p:cNvSpPr>
+          <p:nvPr/>
+        </p:nvSpPr>
+        <p:spPr>
+          <a:xfrm xmlns:a="http://schemas.openxmlformats.org/drawingml/2006/main">
+            <a:off x="609600" y="3495675"/>
+            <a:ext cx="323850" cy="323850"/>
+          </a:xfrm>
+          <a:prstGeom xmlns:a="http://schemas.openxmlformats.org/drawingml/2006/main" prst="rect">
+            <a:avLst/>
+          </a:prstGeom>
+          <a:noFill xmlns:a="http://schemas.openxmlformats.org/drawingml/2006/main"/>
+          <a:ln xmlns:a="http://schemas.openxmlformats.org/drawingml/2006/main" w="0">
+            <a:noFill/>
+          </a:ln>
+        </p:spPr>
+        <p:txBody>
+          <a:bodyPr xmlns:a="http://schemas.openxmlformats.org/drawingml/2006/main" lIns="0" tIns="0" rIns="0" bIns="0" anchor="ctr">
+            <a:noAutofit/>
+          </a:bodyPr>
+          <a:lstStyle xmlns:a="http://schemas.openxmlformats.org/drawingml/2006/main"/>
+          <a:p xmlns:a="http://schemas.openxmlformats.org/drawingml/2006/main">
+            <a:pPr algn="l">
+              <a:defRPr sz="1350" b="1">
+                <a:solidFill>
+                  <a:srgbClr val="28685E"/>
+                </a:solidFill>
+                <a:latin typeface="Calibri"/>
+                <a:ea typeface="Calibri"/>
+                <a:cs typeface="Calibri"/>
+              </a:defRPr>
+            </a:pPr>
+            <a:r>
+              <a:rPr sz="1350" b="1">
+                <a:solidFill>
+                  <a:srgbClr val="28685E"/>
+                </a:solidFill>
+                <a:latin typeface="Calibri"/>
+                <a:ea typeface="Calibri"/>
+                <a:cs typeface="Calibri"/>
+              </a:rPr>
+              <a:t>02</a:t>
+            </a:r>
+          </a:p>
+        </p:txBody>
+      </p:sp>
+      <p:sp>
+        <p:nvSpPr>
+          <p:cNvPr id="15" name="row-rule-1">
+            <a:extLst xmlns:a="http://schemas.openxmlformats.org/drawingml/2006/main">
+              <a:ext uri="{FF2B5EF4-FFF2-40B4-BE49-F238E27FC236}">
+                <a16:creationId xmlns:a16="http://schemas.microsoft.com/office/drawing/2014/main" id="{664CBE50-EAB2-4D87-BE69-FDD221A1F1B8}"/>
+              </a:ext>
+            </a:extLst>
+          </p:cNvPr>
+          <p:cNvSpPr>
+            <a:spLocks xmlns:a="http://schemas.openxmlformats.org/drawingml/2006/main" noGrp="1"/>
+          </p:cNvSpPr>
+          <p:nvPr/>
+        </p:nvSpPr>
+        <p:spPr>
+          <a:xfrm xmlns:a="http://schemas.openxmlformats.org/drawingml/2006/main">
+            <a:off x="1000125" y="4552950"/>
+            <a:ext cx="10334625" cy="0"/>
+          </a:xfrm>
+          <a:prstGeom xmlns:a="http://schemas.openxmlformats.org/drawingml/2006/main" prst="line">
+            <a:avLst/>
+          </a:prstGeom>
+          <a:noFill xmlns:a="http://schemas.openxmlformats.org/drawingml/2006/main"/>
+          <a:ln xmlns:a="http://schemas.openxmlformats.org/drawingml/2006/main" w="9525">
+            <a:solidFill>
+              <a:srgbClr val="CEDBD3"/>
+            </a:solidFill>
+          </a:ln>
+        </p:spPr>
+      </p:sp>
+      <p:sp>
+        <p:nvSpPr>
+          <p:cNvPr id="16" name="cue-2">
+            <a:extLst xmlns:a="http://schemas.openxmlformats.org/drawingml/2006/main">
+              <a:ext uri="{FF2B5EF4-FFF2-40B4-BE49-F238E27FC236}">
+                <a16:creationId xmlns:a16="http://schemas.microsoft.com/office/drawing/2014/main" id="{D72C670C-F6E5-4562-940D-7FC0A50F8C4A}"/>
+              </a:ext>
+            </a:extLst>
+          </p:cNvPr>
+          <p:cNvSpPr>
+            <a:spLocks xmlns:a="http://schemas.openxmlformats.org/drawingml/2006/main" noGrp="1"/>
+          </p:cNvSpPr>
+          <p:nvPr/>
+        </p:nvSpPr>
+        <p:spPr>
+          <a:xfrm xmlns:a="http://schemas.openxmlformats.org/drawingml/2006/main">
+            <a:off x="609600" y="4629150"/>
+            <a:ext cx="323850" cy="323850"/>
+          </a:xfrm>
+          <a:prstGeom xmlns:a="http://schemas.openxmlformats.org/drawingml/2006/main" prst="rect">
+            <a:avLst/>
+          </a:prstGeom>
+          <a:noFill xmlns:a="http://schemas.openxmlformats.org/drawingml/2006/main"/>
+          <a:ln xmlns:a="http://schemas.openxmlformats.org/drawingml/2006/main" w="0">
+            <a:noFill/>
+          </a:ln>
+        </p:spPr>
+        <p:txBody>
+          <a:bodyPr xmlns:a="http://schemas.openxmlformats.org/drawingml/2006/main" lIns="0" tIns="0" rIns="0" bIns="0" anchor="ctr">
+            <a:noAutofit/>
+          </a:bodyPr>
+          <a:lstStyle xmlns:a="http://schemas.openxmlformats.org/drawingml/2006/main"/>
+          <a:p xmlns:a="http://schemas.openxmlformats.org/drawingml/2006/main">
+            <a:pPr algn="l">
+              <a:defRPr sz="1350" b="1">
+                <a:solidFill>
+                  <a:srgbClr val="28685E"/>
+                </a:solidFill>
+                <a:latin typeface="Calibri"/>
+                <a:ea typeface="Calibri"/>
+                <a:cs typeface="Calibri"/>
+              </a:defRPr>
+            </a:pPr>
+            <a:r>
+              <a:rPr sz="1350" b="1">
+                <a:solidFill>
+                  <a:srgbClr val="28685E"/>
+                </a:solidFill>
+                <a:latin typeface="Calibri"/>
+                <a:ea typeface="Calibri"/>
+                <a:cs typeface="Calibri"/>
+              </a:rPr>
+              <a:t>03</a:t>
             </a:r>
           </a:p>
         </p:txBody>
@@ -5762,7 +7268,7 @@
     <p:bg>
       <p:bgPr>
         <a:solidFill xmlns:a="http://schemas.openxmlformats.org/drawingml/2006/main">
-          <a:srgbClr val="F5F1E8"/>
+          <a:srgbClr val="FAF9F5"/>
         </a:solidFill>
       </p:bgPr>
     </p:bg>
@@ -5791,8 +7297,8 @@
         </p:nvSpPr>
         <p:spPr>
           <a:xfrm xmlns:a="http://schemas.openxmlformats.org/drawingml/2006/main">
-            <a:off x="609600" y="552450"/>
-            <a:ext cx="781050" cy="57150"/>
+            <a:off x="609600" y="733425"/>
+            <a:ext cx="781050" cy="38100"/>
           </a:xfrm>
           <a:prstGeom xmlns:a="http://schemas.openxmlformats.org/drawingml/2006/main" prst="rect">
             <a:avLst/>
@@ -5822,34 +7328,43 @@
         </p:nvSpPr>
         <p:spPr>
           <a:xfrm xmlns:a="http://schemas.openxmlformats.org/drawingml/2006/main">
-            <a:off x="609600" y="762000"/>
-            <a:ext cx="8572500" cy="285750"/>
-          </a:xfrm>
-          <a:prstGeom xmlns:a="http://schemas.openxmlformats.org/drawingml/2006/main" prst="rect">
-            <a:avLst/>
-          </a:prstGeom>
-          <a:noFill xmlns:a="http://schemas.openxmlformats.org/drawingml/2006/main"/>
-          <a:ln xmlns:a="http://schemas.openxmlformats.org/drawingml/2006/main" w="0">
-            <a:noFill/>
-            <a:prstDash val="solid"/>
-          </a:ln>
-        </p:spPr>
-        <p:txBody>
-          <a:bodyPr xmlns:a="http://schemas.openxmlformats.org/drawingml/2006/main" lIns="0" tIns="0" rIns="0" bIns="0" anchor="ctr"/>
-          <a:lstStyle xmlns:a="http://schemas.openxmlformats.org/drawingml/2006/main"/>
-          <a:p xmlns:a="http://schemas.openxmlformats.org/drawingml/2006/main">
-            <a:pPr>
-              <a:defRPr sz="1500" b="1">
+            <a:off x="609600" y="342900"/>
+            <a:ext cx="9334500" cy="304800"/>
+          </a:xfrm>
+          <a:prstGeom xmlns:a="http://schemas.openxmlformats.org/drawingml/2006/main" prst="rect">
+            <a:avLst/>
+          </a:prstGeom>
+          <a:noFill xmlns:a="http://schemas.openxmlformats.org/drawingml/2006/main"/>
+          <a:ln xmlns:a="http://schemas.openxmlformats.org/drawingml/2006/main" w="0">
+            <a:noFill/>
+            <a:prstDash val="solid"/>
+          </a:ln>
+        </p:spPr>
+        <p:txBody>
+          <a:bodyPr xmlns:a="http://schemas.openxmlformats.org/drawingml/2006/main" lIns="0" tIns="0" rIns="0" bIns="0" anchor="ctr">
+            <a:noAutofit/>
+          </a:bodyPr>
+          <a:lstStyle xmlns:a="http://schemas.openxmlformats.org/drawingml/2006/main"/>
+          <a:p xmlns:a="http://schemas.openxmlformats.org/drawingml/2006/main">
+            <a:pPr algn="l">
+              <a:buNone/>
+              <a:defRPr sz="1350" b="1">
                 <a:solidFill>
                   <a:srgbClr val="28685E"/>
                 </a:solidFill>
-              </a:defRPr>
-            </a:pPr>
-            <a:r>
-              <a:rPr sz="1500" b="1">
+                <a:latin typeface="Calibri"/>
+                <a:ea typeface="Calibri"/>
+                <a:cs typeface="Calibri"/>
+              </a:defRPr>
+            </a:pPr>
+            <a:r>
+              <a:rPr sz="1350" b="1">
                 <a:solidFill>
                   <a:srgbClr val="28685E"/>
                 </a:solidFill>
+                <a:latin typeface="Calibri"/>
+                <a:ea typeface="Calibri"/>
+                <a:cs typeface="Calibri"/>
               </a:rPr>
               <a:t>MADE BY MATT  /  GROW SCIENCE</a:t>
             </a:r>
@@ -5872,34 +7387,43 @@
         </p:nvSpPr>
         <p:spPr>
           <a:xfrm xmlns:a="http://schemas.openxmlformats.org/drawingml/2006/main">
-            <a:off x="609600" y="1352550"/>
-            <a:ext cx="10972800" cy="952500"/>
-          </a:xfrm>
-          <a:prstGeom xmlns:a="http://schemas.openxmlformats.org/drawingml/2006/main" prst="rect">
-            <a:avLst/>
-          </a:prstGeom>
-          <a:noFill xmlns:a="http://schemas.openxmlformats.org/drawingml/2006/main"/>
-          <a:ln xmlns:a="http://schemas.openxmlformats.org/drawingml/2006/main" w="0">
-            <a:noFill/>
-            <a:prstDash val="solid"/>
-          </a:ln>
-        </p:spPr>
-        <p:txBody>
-          <a:bodyPr xmlns:a="http://schemas.openxmlformats.org/drawingml/2006/main" lIns="0" tIns="0" rIns="0" bIns="0" anchor="ctr"/>
-          <a:lstStyle xmlns:a="http://schemas.openxmlformats.org/drawingml/2006/main"/>
-          <a:p xmlns:a="http://schemas.openxmlformats.org/drawingml/2006/main">
-            <a:pPr>
-              <a:defRPr sz="3750" b="1">
+            <a:off x="609600" y="990600"/>
+            <a:ext cx="10972800" cy="1000125"/>
+          </a:xfrm>
+          <a:prstGeom xmlns:a="http://schemas.openxmlformats.org/drawingml/2006/main" prst="rect">
+            <a:avLst/>
+          </a:prstGeom>
+          <a:noFill xmlns:a="http://schemas.openxmlformats.org/drawingml/2006/main"/>
+          <a:ln xmlns:a="http://schemas.openxmlformats.org/drawingml/2006/main" w="0">
+            <a:noFill/>
+            <a:prstDash val="solid"/>
+          </a:ln>
+        </p:spPr>
+        <p:txBody>
+          <a:bodyPr xmlns:a="http://schemas.openxmlformats.org/drawingml/2006/main" lIns="0" tIns="0" rIns="0" bIns="0" anchor="ctr">
+            <a:noAutofit/>
+          </a:bodyPr>
+          <a:lstStyle xmlns:a="http://schemas.openxmlformats.org/drawingml/2006/main"/>
+          <a:p xmlns:a="http://schemas.openxmlformats.org/drawingml/2006/main">
+            <a:pPr algn="l">
+              <a:buNone/>
+              <a:defRPr sz="3675" b="1">
                 <a:solidFill>
                   <a:srgbClr val="152B3A"/>
                 </a:solidFill>
-              </a:defRPr>
-            </a:pPr>
-            <a:r>
-              <a:rPr sz="3750" b="1">
+                <a:latin typeface="Calibri"/>
+                <a:ea typeface="Calibri"/>
+                <a:cs typeface="Calibri"/>
+              </a:defRPr>
+            </a:pPr>
+            <a:r>
+              <a:rPr sz="3675" b="1">
                 <a:solidFill>
                   <a:srgbClr val="152B3A"/>
                 </a:solidFill>
+                <a:latin typeface="Calibri"/>
+                <a:ea typeface="Calibri"/>
+                <a:cs typeface="Calibri"/>
               </a:rPr>
               <a:t>Check the wheelbarrow’s pivot</a:t>
             </a:r>
@@ -5922,14 +7446,14 @@
         </p:nvSpPr>
         <p:spPr>
           <a:xfrm xmlns:a="http://schemas.openxmlformats.org/drawingml/2006/main">
-            <a:off x="609600" y="6219825"/>
+            <a:off x="609600" y="6191250"/>
             <a:ext cx="10972800" cy="9525"/>
           </a:xfrm>
           <a:prstGeom xmlns:a="http://schemas.openxmlformats.org/drawingml/2006/main" prst="rect">
             <a:avLst/>
           </a:prstGeom>
           <a:solidFill xmlns:a="http://schemas.openxmlformats.org/drawingml/2006/main">
-            <a:srgbClr val="DCE7DD"/>
+            <a:srgbClr val="CEDBD3"/>
           </a:solidFill>
           <a:ln xmlns:a="http://schemas.openxmlformats.org/drawingml/2006/main" w="0">
             <a:noFill/>
@@ -5953,34 +7477,43 @@
         </p:nvSpPr>
         <p:spPr>
           <a:xfrm xmlns:a="http://schemas.openxmlformats.org/drawingml/2006/main">
-            <a:off x="609600" y="6381750"/>
-            <a:ext cx="9906000" cy="228600"/>
-          </a:xfrm>
-          <a:prstGeom xmlns:a="http://schemas.openxmlformats.org/drawingml/2006/main" prst="rect">
-            <a:avLst/>
-          </a:prstGeom>
-          <a:noFill xmlns:a="http://schemas.openxmlformats.org/drawingml/2006/main"/>
-          <a:ln xmlns:a="http://schemas.openxmlformats.org/drawingml/2006/main" w="0">
-            <a:noFill/>
-            <a:prstDash val="solid"/>
-          </a:ln>
-        </p:spPr>
-        <p:txBody>
-          <a:bodyPr xmlns:a="http://schemas.openxmlformats.org/drawingml/2006/main" lIns="0" tIns="0" rIns="0" bIns="0" anchor="ctr"/>
-          <a:lstStyle xmlns:a="http://schemas.openxmlformats.org/drawingml/2006/main"/>
-          <a:p xmlns:a="http://schemas.openxmlformats.org/drawingml/2006/main">
-            <a:pPr>
-              <a:defRPr sz="1275" b="0">
+            <a:off x="609600" y="6419850"/>
+            <a:ext cx="9525000" cy="219075"/>
+          </a:xfrm>
+          <a:prstGeom xmlns:a="http://schemas.openxmlformats.org/drawingml/2006/main" prst="rect">
+            <a:avLst/>
+          </a:prstGeom>
+          <a:noFill xmlns:a="http://schemas.openxmlformats.org/drawingml/2006/main"/>
+          <a:ln xmlns:a="http://schemas.openxmlformats.org/drawingml/2006/main" w="0">
+            <a:noFill/>
+            <a:prstDash val="solid"/>
+          </a:ln>
+        </p:spPr>
+        <p:txBody>
+          <a:bodyPr xmlns:a="http://schemas.openxmlformats.org/drawingml/2006/main" lIns="0" tIns="0" rIns="0" bIns="0" anchor="ctr">
+            <a:noAutofit/>
+          </a:bodyPr>
+          <a:lstStyle xmlns:a="http://schemas.openxmlformats.org/drawingml/2006/main"/>
+          <a:p xmlns:a="http://schemas.openxmlformats.org/drawingml/2006/main">
+            <a:pPr algn="l">
+              <a:buNone/>
+              <a:defRPr sz="1200" b="0">
                 <a:solidFill>
                   <a:srgbClr val="50616B"/>
                 </a:solidFill>
-              </a:defRPr>
-            </a:pPr>
-            <a:r>
-              <a:rPr sz="1275" b="0">
+                <a:latin typeface="Calibri"/>
+                <a:ea typeface="Calibri"/>
+                <a:cs typeface="Calibri"/>
+              </a:defRPr>
+            </a:pPr>
+            <a:r>
+              <a:rPr sz="1200" b="0">
                 <a:solidFill>
                   <a:srgbClr val="50616B"/>
                 </a:solidFill>
+                <a:latin typeface="Calibri"/>
+                <a:ea typeface="Calibri"/>
+                <a:cs typeface="Calibri"/>
               </a:rPr>
               <a:t>AUTUMN 1  ·  WEEK 4  ·  LESSON A</a:t>
             </a:r>
@@ -6003,27 +7536,33 @@
         </p:nvSpPr>
         <p:spPr>
           <a:xfrm xmlns:a="http://schemas.openxmlformats.org/drawingml/2006/main">
-            <a:off x="11106150" y="6362700"/>
-            <a:ext cx="476250" cy="238125"/>
-          </a:xfrm>
-          <a:prstGeom xmlns:a="http://schemas.openxmlformats.org/drawingml/2006/main" prst="rect">
-            <a:avLst/>
-          </a:prstGeom>
-          <a:noFill xmlns:a="http://schemas.openxmlformats.org/drawingml/2006/main"/>
-          <a:ln xmlns:a="http://schemas.openxmlformats.org/drawingml/2006/main" w="0">
-            <a:noFill/>
-            <a:prstDash val="solid"/>
-          </a:ln>
-        </p:spPr>
-        <p:txBody>
-          <a:bodyPr xmlns:a="http://schemas.openxmlformats.org/drawingml/2006/main" lIns="0" tIns="0" rIns="0" bIns="0" anchor="ctr"/>
-          <a:lstStyle xmlns:a="http://schemas.openxmlformats.org/drawingml/2006/main"/>
-          <a:p xmlns:a="http://schemas.openxmlformats.org/drawingml/2006/main">
-            <a:pPr>
+            <a:off x="11106150" y="6400800"/>
+            <a:ext cx="476250" cy="247650"/>
+          </a:xfrm>
+          <a:prstGeom xmlns:a="http://schemas.openxmlformats.org/drawingml/2006/main" prst="rect">
+            <a:avLst/>
+          </a:prstGeom>
+          <a:noFill xmlns:a="http://schemas.openxmlformats.org/drawingml/2006/main"/>
+          <a:ln xmlns:a="http://schemas.openxmlformats.org/drawingml/2006/main" w="0">
+            <a:noFill/>
+            <a:prstDash val="solid"/>
+          </a:ln>
+        </p:spPr>
+        <p:txBody>
+          <a:bodyPr xmlns:a="http://schemas.openxmlformats.org/drawingml/2006/main" lIns="0" tIns="0" rIns="0" bIns="0" anchor="ctr">
+            <a:noAutofit/>
+          </a:bodyPr>
+          <a:lstStyle xmlns:a="http://schemas.openxmlformats.org/drawingml/2006/main"/>
+          <a:p xmlns:a="http://schemas.openxmlformats.org/drawingml/2006/main">
+            <a:pPr algn="l">
+              <a:buNone/>
               <a:defRPr sz="1350" b="1">
                 <a:solidFill>
                   <a:srgbClr val="28685E"/>
                 </a:solidFill>
+                <a:latin typeface="Calibri"/>
+                <a:ea typeface="Calibri"/>
+                <a:cs typeface="Calibri"/>
               </a:defRPr>
             </a:pPr>
             <a:r>
@@ -6031,6 +7570,9 @@
                 <a:solidFill>
                   <a:srgbClr val="28685E"/>
                 </a:solidFill>
+                <a:latin typeface="Calibri"/>
+                <a:ea typeface="Calibri"/>
+                <a:cs typeface="Calibri"/>
               </a:rPr>
               <a:t>03</a:t>
             </a:r>
@@ -6198,6 +7740,7 @@
           <a:lstStyle xmlns:a="http://schemas.openxmlformats.org/drawingml/2006/main"/>
           <a:p xmlns:a="http://schemas.openxmlformats.org/drawingml/2006/main">
             <a:pPr>
+              <a:buNone/>
               <a:defRPr sz="1950" b="1">
                 <a:solidFill>
                   <a:srgbClr val="152B3A"/>
@@ -6248,6 +7791,7 @@
           <a:lstStyle xmlns:a="http://schemas.openxmlformats.org/drawingml/2006/main"/>
           <a:p xmlns:a="http://schemas.openxmlformats.org/drawingml/2006/main">
             <a:pPr>
+              <a:buNone/>
               <a:defRPr sz="1800" b="1">
                 <a:solidFill>
                   <a:srgbClr val="152B3A"/>
@@ -6298,6 +7842,7 @@
           <a:lstStyle xmlns:a="http://schemas.openxmlformats.org/drawingml/2006/main"/>
           <a:p xmlns:a="http://schemas.openxmlformats.org/drawingml/2006/main">
             <a:pPr>
+              <a:buNone/>
               <a:defRPr sz="1950" b="1">
                 <a:solidFill>
                   <a:srgbClr val="152B3A"/>
@@ -6331,34 +7876,43 @@
         </p:nvSpPr>
         <p:spPr>
           <a:xfrm xmlns:a="http://schemas.openxmlformats.org/drawingml/2006/main">
-            <a:off x="6667500" y="2714625"/>
-            <a:ext cx="4857750" cy="1762125"/>
-          </a:xfrm>
-          <a:prstGeom xmlns:a="http://schemas.openxmlformats.org/drawingml/2006/main" prst="rect">
-            <a:avLst/>
-          </a:prstGeom>
-          <a:noFill xmlns:a="http://schemas.openxmlformats.org/drawingml/2006/main"/>
-          <a:ln xmlns:a="http://schemas.openxmlformats.org/drawingml/2006/main" w="0">
-            <a:noFill/>
-            <a:prstDash val="solid"/>
-          </a:ln>
-        </p:spPr>
-        <p:txBody>
-          <a:bodyPr xmlns:a="http://schemas.openxmlformats.org/drawingml/2006/main" lIns="0" tIns="0" rIns="0" bIns="0" anchor="ctr"/>
-          <a:lstStyle xmlns:a="http://schemas.openxmlformats.org/drawingml/2006/main"/>
-          <a:p xmlns:a="http://schemas.openxmlformats.org/drawingml/2006/main">
-            <a:pPr>
-              <a:defRPr sz="2550" b="1">
+            <a:off x="6667500" y="2476500"/>
+            <a:ext cx="4914900" cy="2095500"/>
+          </a:xfrm>
+          <a:prstGeom xmlns:a="http://schemas.openxmlformats.org/drawingml/2006/main" prst="rect">
+            <a:avLst/>
+          </a:prstGeom>
+          <a:noFill xmlns:a="http://schemas.openxmlformats.org/drawingml/2006/main"/>
+          <a:ln xmlns:a="http://schemas.openxmlformats.org/drawingml/2006/main" w="0">
+            <a:noFill/>
+            <a:prstDash val="solid"/>
+          </a:ln>
+        </p:spPr>
+        <p:txBody>
+          <a:bodyPr xmlns:a="http://schemas.openxmlformats.org/drawingml/2006/main" lIns="0" tIns="0" rIns="0" bIns="0" anchor="ctr">
+            <a:noAutofit/>
+          </a:bodyPr>
+          <a:lstStyle xmlns:a="http://schemas.openxmlformats.org/drawingml/2006/main"/>
+          <a:p xmlns:a="http://schemas.openxmlformats.org/drawingml/2006/main">
+            <a:pPr algn="l">
+              <a:buNone/>
+              <a:defRPr sz="2625" b="1">
                 <a:solidFill>
                   <a:srgbClr val="152B3A"/>
                 </a:solidFill>
-              </a:defRPr>
-            </a:pPr>
-            <a:r>
-              <a:rPr sz="2550" b="1">
+                <a:latin typeface="Calibri"/>
+                <a:ea typeface="Calibri"/>
+                <a:cs typeface="Calibri"/>
+              </a:defRPr>
+            </a:pPr>
+            <a:r>
+              <a:rPr sz="2625" b="1">
                 <a:solidFill>
                   <a:srgbClr val="152B3A"/>
                 </a:solidFill>
+                <a:latin typeface="Calibri"/>
+                <a:ea typeface="Calibri"/>
+                <a:cs typeface="Calibri"/>
               </a:rPr>
               <a:t>The wheel axle is the turning point when you lift the handles.</a:t>
             </a:r>
@@ -6381,27 +7935,33 @@
         </p:nvSpPr>
         <p:spPr>
           <a:xfrm xmlns:a="http://schemas.openxmlformats.org/drawingml/2006/main">
-            <a:off x="6667500" y="4714875"/>
-            <a:ext cx="4857750" cy="1000125"/>
-          </a:xfrm>
-          <a:prstGeom xmlns:a="http://schemas.openxmlformats.org/drawingml/2006/main" prst="rect">
-            <a:avLst/>
-          </a:prstGeom>
-          <a:noFill xmlns:a="http://schemas.openxmlformats.org/drawingml/2006/main"/>
-          <a:ln xmlns:a="http://schemas.openxmlformats.org/drawingml/2006/main" w="0">
-            <a:noFill/>
-            <a:prstDash val="solid"/>
-          </a:ln>
-        </p:spPr>
-        <p:txBody>
-          <a:bodyPr xmlns:a="http://schemas.openxmlformats.org/drawingml/2006/main" lIns="0" tIns="0" rIns="0" bIns="0" anchor="ctr"/>
-          <a:lstStyle xmlns:a="http://schemas.openxmlformats.org/drawingml/2006/main"/>
-          <a:p xmlns:a="http://schemas.openxmlformats.org/drawingml/2006/main">
-            <a:pPr>
+            <a:off x="6667500" y="4781550"/>
+            <a:ext cx="4914900" cy="1057275"/>
+          </a:xfrm>
+          <a:prstGeom xmlns:a="http://schemas.openxmlformats.org/drawingml/2006/main" prst="rect">
+            <a:avLst/>
+          </a:prstGeom>
+          <a:noFill xmlns:a="http://schemas.openxmlformats.org/drawingml/2006/main"/>
+          <a:ln xmlns:a="http://schemas.openxmlformats.org/drawingml/2006/main" w="0">
+            <a:noFill/>
+            <a:prstDash val="solid"/>
+          </a:ln>
+        </p:spPr>
+        <p:txBody>
+          <a:bodyPr xmlns:a="http://schemas.openxmlformats.org/drawingml/2006/main" lIns="0" tIns="0" rIns="0" bIns="0" anchor="ctr">
+            <a:noAutofit/>
+          </a:bodyPr>
+          <a:lstStyle xmlns:a="http://schemas.openxmlformats.org/drawingml/2006/main"/>
+          <a:p xmlns:a="http://schemas.openxmlformats.org/drawingml/2006/main">
+            <a:pPr algn="l">
+              <a:buNone/>
               <a:defRPr sz="2175" b="0">
                 <a:solidFill>
                   <a:srgbClr val="28685E"/>
                 </a:solidFill>
+                <a:latin typeface="Calibri"/>
+                <a:ea typeface="Calibri"/>
+                <a:cs typeface="Calibri"/>
               </a:defRPr>
             </a:pPr>
             <a:r>
@@ -6409,6 +7969,9 @@
                 <a:solidFill>
                   <a:srgbClr val="28685E"/>
                 </a:solidFill>
+                <a:latin typeface="Calibri"/>
+                <a:ea typeface="Calibri"/>
+                <a:cs typeface="Calibri"/>
               </a:rPr>
               <a:t>A wheelbarrow is a lever. The load sits between pivot and effort.</a:t>
             </a:r>
@@ -6431,7 +7994,7 @@
     <p:bg>
       <p:bgPr>
         <a:solidFill xmlns:a="http://schemas.openxmlformats.org/drawingml/2006/main">
-          <a:srgbClr val="F5F1E8"/>
+          <a:srgbClr val="FAF9F5"/>
         </a:solidFill>
       </p:bgPr>
     </p:bg>
@@ -6460,8 +8023,8 @@
         </p:nvSpPr>
         <p:spPr>
           <a:xfrm xmlns:a="http://schemas.openxmlformats.org/drawingml/2006/main">
-            <a:off x="609600" y="552450"/>
-            <a:ext cx="781050" cy="57150"/>
+            <a:off x="609600" y="733425"/>
+            <a:ext cx="781050" cy="38100"/>
           </a:xfrm>
           <a:prstGeom xmlns:a="http://schemas.openxmlformats.org/drawingml/2006/main" prst="rect">
             <a:avLst/>
@@ -6491,34 +8054,43 @@
         </p:nvSpPr>
         <p:spPr>
           <a:xfrm xmlns:a="http://schemas.openxmlformats.org/drawingml/2006/main">
-            <a:off x="609600" y="762000"/>
-            <a:ext cx="8572500" cy="285750"/>
-          </a:xfrm>
-          <a:prstGeom xmlns:a="http://schemas.openxmlformats.org/drawingml/2006/main" prst="rect">
-            <a:avLst/>
-          </a:prstGeom>
-          <a:noFill xmlns:a="http://schemas.openxmlformats.org/drawingml/2006/main"/>
-          <a:ln xmlns:a="http://schemas.openxmlformats.org/drawingml/2006/main" w="0">
-            <a:noFill/>
-            <a:prstDash val="solid"/>
-          </a:ln>
-        </p:spPr>
-        <p:txBody>
-          <a:bodyPr xmlns:a="http://schemas.openxmlformats.org/drawingml/2006/main" lIns="0" tIns="0" rIns="0" bIns="0" anchor="ctr"/>
-          <a:lstStyle xmlns:a="http://schemas.openxmlformats.org/drawingml/2006/main"/>
-          <a:p xmlns:a="http://schemas.openxmlformats.org/drawingml/2006/main">
-            <a:pPr>
-              <a:defRPr sz="1500" b="1">
+            <a:off x="609600" y="342900"/>
+            <a:ext cx="9334500" cy="304800"/>
+          </a:xfrm>
+          <a:prstGeom xmlns:a="http://schemas.openxmlformats.org/drawingml/2006/main" prst="rect">
+            <a:avLst/>
+          </a:prstGeom>
+          <a:noFill xmlns:a="http://schemas.openxmlformats.org/drawingml/2006/main"/>
+          <a:ln xmlns:a="http://schemas.openxmlformats.org/drawingml/2006/main" w="0">
+            <a:noFill/>
+            <a:prstDash val="solid"/>
+          </a:ln>
+        </p:spPr>
+        <p:txBody>
+          <a:bodyPr xmlns:a="http://schemas.openxmlformats.org/drawingml/2006/main" lIns="0" tIns="0" rIns="0" bIns="0" anchor="ctr">
+            <a:noAutofit/>
+          </a:bodyPr>
+          <a:lstStyle xmlns:a="http://schemas.openxmlformats.org/drawingml/2006/main"/>
+          <a:p xmlns:a="http://schemas.openxmlformats.org/drawingml/2006/main">
+            <a:pPr algn="l">
+              <a:buNone/>
+              <a:defRPr sz="1350" b="1">
                 <a:solidFill>
                   <a:srgbClr val="28685E"/>
                 </a:solidFill>
-              </a:defRPr>
-            </a:pPr>
-            <a:r>
-              <a:rPr sz="1500" b="1">
+                <a:latin typeface="Calibri"/>
+                <a:ea typeface="Calibri"/>
+                <a:cs typeface="Calibri"/>
+              </a:defRPr>
+            </a:pPr>
+            <a:r>
+              <a:rPr sz="1350" b="1">
                 <a:solidFill>
                   <a:srgbClr val="28685E"/>
                 </a:solidFill>
+                <a:latin typeface="Calibri"/>
+                <a:ea typeface="Calibri"/>
+                <a:cs typeface="Calibri"/>
               </a:rPr>
               <a:t>MADE BY MATT  /  GROW SCIENCE</a:t>
             </a:r>
@@ -6541,34 +8113,43 @@
         </p:nvSpPr>
         <p:spPr>
           <a:xfrm xmlns:a="http://schemas.openxmlformats.org/drawingml/2006/main">
-            <a:off x="609600" y="1352550"/>
-            <a:ext cx="10972800" cy="952500"/>
-          </a:xfrm>
-          <a:prstGeom xmlns:a="http://schemas.openxmlformats.org/drawingml/2006/main" prst="rect">
-            <a:avLst/>
-          </a:prstGeom>
-          <a:noFill xmlns:a="http://schemas.openxmlformats.org/drawingml/2006/main"/>
-          <a:ln xmlns:a="http://schemas.openxmlformats.org/drawingml/2006/main" w="0">
-            <a:noFill/>
-            <a:prstDash val="solid"/>
-          </a:ln>
-        </p:spPr>
-        <p:txBody>
-          <a:bodyPr xmlns:a="http://schemas.openxmlformats.org/drawingml/2006/main" lIns="0" tIns="0" rIns="0" bIns="0" anchor="ctr"/>
-          <a:lstStyle xmlns:a="http://schemas.openxmlformats.org/drawingml/2006/main"/>
-          <a:p xmlns:a="http://schemas.openxmlformats.org/drawingml/2006/main">
-            <a:pPr>
-              <a:defRPr sz="3750" b="1">
+            <a:off x="609600" y="990600"/>
+            <a:ext cx="10972800" cy="1000125"/>
+          </a:xfrm>
+          <a:prstGeom xmlns:a="http://schemas.openxmlformats.org/drawingml/2006/main" prst="rect">
+            <a:avLst/>
+          </a:prstGeom>
+          <a:noFill xmlns:a="http://schemas.openxmlformats.org/drawingml/2006/main"/>
+          <a:ln xmlns:a="http://schemas.openxmlformats.org/drawingml/2006/main" w="0">
+            <a:noFill/>
+            <a:prstDash val="solid"/>
+          </a:ln>
+        </p:spPr>
+        <p:txBody>
+          <a:bodyPr xmlns:a="http://schemas.openxmlformats.org/drawingml/2006/main" lIns="0" tIns="0" rIns="0" bIns="0" anchor="ctr">
+            <a:noAutofit/>
+          </a:bodyPr>
+          <a:lstStyle xmlns:a="http://schemas.openxmlformats.org/drawingml/2006/main"/>
+          <a:p xmlns:a="http://schemas.openxmlformats.org/drawingml/2006/main">
+            <a:pPr algn="l">
+              <a:buNone/>
+              <a:defRPr sz="3675" b="1">
                 <a:solidFill>
                   <a:srgbClr val="152B3A"/>
                 </a:solidFill>
-              </a:defRPr>
-            </a:pPr>
-            <a:r>
-              <a:rPr sz="3750" b="1">
+                <a:latin typeface="Calibri"/>
+                <a:ea typeface="Calibri"/>
+                <a:cs typeface="Calibri"/>
+              </a:defRPr>
+            </a:pPr>
+            <a:r>
+              <a:rPr sz="3675" b="1">
                 <a:solidFill>
                   <a:srgbClr val="152B3A"/>
                 </a:solidFill>
+                <a:latin typeface="Calibri"/>
+                <a:ea typeface="Calibri"/>
+                <a:cs typeface="Calibri"/>
               </a:rPr>
               <a:t>Three things to notice</a:t>
             </a:r>
@@ -6591,14 +8172,14 @@
         </p:nvSpPr>
         <p:spPr>
           <a:xfrm xmlns:a="http://schemas.openxmlformats.org/drawingml/2006/main">
-            <a:off x="609600" y="6219825"/>
+            <a:off x="609600" y="6191250"/>
             <a:ext cx="10972800" cy="9525"/>
           </a:xfrm>
           <a:prstGeom xmlns:a="http://schemas.openxmlformats.org/drawingml/2006/main" prst="rect">
             <a:avLst/>
           </a:prstGeom>
           <a:solidFill xmlns:a="http://schemas.openxmlformats.org/drawingml/2006/main">
-            <a:srgbClr val="DCE7DD"/>
+            <a:srgbClr val="CEDBD3"/>
           </a:solidFill>
           <a:ln xmlns:a="http://schemas.openxmlformats.org/drawingml/2006/main" w="0">
             <a:noFill/>
@@ -6622,34 +8203,43 @@
         </p:nvSpPr>
         <p:spPr>
           <a:xfrm xmlns:a="http://schemas.openxmlformats.org/drawingml/2006/main">
-            <a:off x="609600" y="6381750"/>
-            <a:ext cx="9906000" cy="228600"/>
-          </a:xfrm>
-          <a:prstGeom xmlns:a="http://schemas.openxmlformats.org/drawingml/2006/main" prst="rect">
-            <a:avLst/>
-          </a:prstGeom>
-          <a:noFill xmlns:a="http://schemas.openxmlformats.org/drawingml/2006/main"/>
-          <a:ln xmlns:a="http://schemas.openxmlformats.org/drawingml/2006/main" w="0">
-            <a:noFill/>
-            <a:prstDash val="solid"/>
-          </a:ln>
-        </p:spPr>
-        <p:txBody>
-          <a:bodyPr xmlns:a="http://schemas.openxmlformats.org/drawingml/2006/main" lIns="0" tIns="0" rIns="0" bIns="0" anchor="ctr"/>
-          <a:lstStyle xmlns:a="http://schemas.openxmlformats.org/drawingml/2006/main"/>
-          <a:p xmlns:a="http://schemas.openxmlformats.org/drawingml/2006/main">
-            <a:pPr>
-              <a:defRPr sz="1275" b="0">
+            <a:off x="609600" y="6419850"/>
+            <a:ext cx="9525000" cy="219075"/>
+          </a:xfrm>
+          <a:prstGeom xmlns:a="http://schemas.openxmlformats.org/drawingml/2006/main" prst="rect">
+            <a:avLst/>
+          </a:prstGeom>
+          <a:noFill xmlns:a="http://schemas.openxmlformats.org/drawingml/2006/main"/>
+          <a:ln xmlns:a="http://schemas.openxmlformats.org/drawingml/2006/main" w="0">
+            <a:noFill/>
+            <a:prstDash val="solid"/>
+          </a:ln>
+        </p:spPr>
+        <p:txBody>
+          <a:bodyPr xmlns:a="http://schemas.openxmlformats.org/drawingml/2006/main" lIns="0" tIns="0" rIns="0" bIns="0" anchor="ctr">
+            <a:noAutofit/>
+          </a:bodyPr>
+          <a:lstStyle xmlns:a="http://schemas.openxmlformats.org/drawingml/2006/main"/>
+          <a:p xmlns:a="http://schemas.openxmlformats.org/drawingml/2006/main">
+            <a:pPr algn="l">
+              <a:buNone/>
+              <a:defRPr sz="1200" b="0">
                 <a:solidFill>
                   <a:srgbClr val="50616B"/>
                 </a:solidFill>
-              </a:defRPr>
-            </a:pPr>
-            <a:r>
-              <a:rPr sz="1275" b="0">
+                <a:latin typeface="Calibri"/>
+                <a:ea typeface="Calibri"/>
+                <a:cs typeface="Calibri"/>
+              </a:defRPr>
+            </a:pPr>
+            <a:r>
+              <a:rPr sz="1200" b="0">
                 <a:solidFill>
                   <a:srgbClr val="50616B"/>
                 </a:solidFill>
+                <a:latin typeface="Calibri"/>
+                <a:ea typeface="Calibri"/>
+                <a:cs typeface="Calibri"/>
               </a:rPr>
               <a:t>AUTUMN 1  ·  WEEK 4  ·  LESSON A</a:t>
             </a:r>
@@ -6672,27 +8262,33 @@
         </p:nvSpPr>
         <p:spPr>
           <a:xfrm xmlns:a="http://schemas.openxmlformats.org/drawingml/2006/main">
-            <a:off x="11106150" y="6362700"/>
-            <a:ext cx="476250" cy="238125"/>
-          </a:xfrm>
-          <a:prstGeom xmlns:a="http://schemas.openxmlformats.org/drawingml/2006/main" prst="rect">
-            <a:avLst/>
-          </a:prstGeom>
-          <a:noFill xmlns:a="http://schemas.openxmlformats.org/drawingml/2006/main"/>
-          <a:ln xmlns:a="http://schemas.openxmlformats.org/drawingml/2006/main" w="0">
-            <a:noFill/>
-            <a:prstDash val="solid"/>
-          </a:ln>
-        </p:spPr>
-        <p:txBody>
-          <a:bodyPr xmlns:a="http://schemas.openxmlformats.org/drawingml/2006/main" lIns="0" tIns="0" rIns="0" bIns="0" anchor="ctr"/>
-          <a:lstStyle xmlns:a="http://schemas.openxmlformats.org/drawingml/2006/main"/>
-          <a:p xmlns:a="http://schemas.openxmlformats.org/drawingml/2006/main">
-            <a:pPr>
+            <a:off x="11106150" y="6400800"/>
+            <a:ext cx="476250" cy="247650"/>
+          </a:xfrm>
+          <a:prstGeom xmlns:a="http://schemas.openxmlformats.org/drawingml/2006/main" prst="rect">
+            <a:avLst/>
+          </a:prstGeom>
+          <a:noFill xmlns:a="http://schemas.openxmlformats.org/drawingml/2006/main"/>
+          <a:ln xmlns:a="http://schemas.openxmlformats.org/drawingml/2006/main" w="0">
+            <a:noFill/>
+            <a:prstDash val="solid"/>
+          </a:ln>
+        </p:spPr>
+        <p:txBody>
+          <a:bodyPr xmlns:a="http://schemas.openxmlformats.org/drawingml/2006/main" lIns="0" tIns="0" rIns="0" bIns="0" anchor="ctr">
+            <a:noAutofit/>
+          </a:bodyPr>
+          <a:lstStyle xmlns:a="http://schemas.openxmlformats.org/drawingml/2006/main"/>
+          <a:p xmlns:a="http://schemas.openxmlformats.org/drawingml/2006/main">
+            <a:pPr algn="l">
+              <a:buNone/>
               <a:defRPr sz="1350" b="1">
                 <a:solidFill>
                   <a:srgbClr val="28685E"/>
                 </a:solidFill>
+                <a:latin typeface="Calibri"/>
+                <a:ea typeface="Calibri"/>
+                <a:cs typeface="Calibri"/>
               </a:defRPr>
             </a:pPr>
             <a:r>
@@ -6700,6 +8296,9 @@
                 <a:solidFill>
                   <a:srgbClr val="28685E"/>
                 </a:solidFill>
+                <a:latin typeface="Calibri"/>
+                <a:ea typeface="Calibri"/>
+                <a:cs typeface="Calibri"/>
               </a:rPr>
               <a:t>04</a:t>
             </a:r>
@@ -6722,34 +8321,43 @@
         </p:nvSpPr>
         <p:spPr>
           <a:xfrm xmlns:a="http://schemas.openxmlformats.org/drawingml/2006/main">
-            <a:off x="609600" y="2619375"/>
-            <a:ext cx="10972800" cy="781050"/>
-          </a:xfrm>
-          <a:prstGeom xmlns:a="http://schemas.openxmlformats.org/drawingml/2006/main" prst="rect">
-            <a:avLst/>
-          </a:prstGeom>
-          <a:noFill xmlns:a="http://schemas.openxmlformats.org/drawingml/2006/main"/>
-          <a:ln xmlns:a="http://schemas.openxmlformats.org/drawingml/2006/main" w="0">
-            <a:noFill/>
-            <a:prstDash val="solid"/>
-          </a:ln>
-        </p:spPr>
-        <p:txBody>
-          <a:bodyPr xmlns:a="http://schemas.openxmlformats.org/drawingml/2006/main" lIns="0" tIns="0" rIns="0" bIns="0" anchor="ctr"/>
-          <a:lstStyle xmlns:a="http://schemas.openxmlformats.org/drawingml/2006/main"/>
-          <a:p xmlns:a="http://schemas.openxmlformats.org/drawingml/2006/main">
-            <a:pPr>
-              <a:defRPr sz="2550" b="0">
+            <a:off x="1000125" y="2333625"/>
+            <a:ext cx="10382250" cy="1076325"/>
+          </a:xfrm>
+          <a:prstGeom xmlns:a="http://schemas.openxmlformats.org/drawingml/2006/main" prst="rect">
+            <a:avLst/>
+          </a:prstGeom>
+          <a:noFill xmlns:a="http://schemas.openxmlformats.org/drawingml/2006/main"/>
+          <a:ln xmlns:a="http://schemas.openxmlformats.org/drawingml/2006/main" w="0">
+            <a:noFill/>
+            <a:prstDash val="solid"/>
+          </a:ln>
+        </p:spPr>
+        <p:txBody>
+          <a:bodyPr xmlns:a="http://schemas.openxmlformats.org/drawingml/2006/main" lIns="0" tIns="0" rIns="0" bIns="0" anchor="ctr">
+            <a:noAutofit/>
+          </a:bodyPr>
+          <a:lstStyle xmlns:a="http://schemas.openxmlformats.org/drawingml/2006/main"/>
+          <a:p xmlns:a="http://schemas.openxmlformats.org/drawingml/2006/main">
+            <a:pPr algn="l">
+              <a:buNone/>
+              <a:defRPr sz="2625" b="0">
                 <a:solidFill>
                   <a:srgbClr val="152B3A"/>
                 </a:solidFill>
-              </a:defRPr>
-            </a:pPr>
-            <a:r>
-              <a:rPr sz="2550" b="0">
+                <a:latin typeface="Calibri"/>
+                <a:ea typeface="Calibri"/>
+                <a:cs typeface="Calibri"/>
+              </a:defRPr>
+            </a:pPr>
+            <a:r>
+              <a:rPr sz="2625" b="0">
                 <a:solidFill>
                   <a:srgbClr val="152B3A"/>
                 </a:solidFill>
+                <a:latin typeface="Calibri"/>
+                <a:ea typeface="Calibri"/>
+                <a:cs typeface="Calibri"/>
               </a:rPr>
               <a:t>1   Find the pivot.</a:t>
             </a:r>
@@ -6772,34 +8380,43 @@
         </p:nvSpPr>
         <p:spPr>
           <a:xfrm xmlns:a="http://schemas.openxmlformats.org/drawingml/2006/main">
-            <a:off x="609600" y="3476625"/>
-            <a:ext cx="10972800" cy="781050"/>
-          </a:xfrm>
-          <a:prstGeom xmlns:a="http://schemas.openxmlformats.org/drawingml/2006/main" prst="rect">
-            <a:avLst/>
-          </a:prstGeom>
-          <a:noFill xmlns:a="http://schemas.openxmlformats.org/drawingml/2006/main"/>
-          <a:ln xmlns:a="http://schemas.openxmlformats.org/drawingml/2006/main" w="0">
-            <a:noFill/>
-            <a:prstDash val="solid"/>
-          </a:ln>
-        </p:spPr>
-        <p:txBody>
-          <a:bodyPr xmlns:a="http://schemas.openxmlformats.org/drawingml/2006/main" lIns="0" tIns="0" rIns="0" bIns="0" anchor="ctr"/>
-          <a:lstStyle xmlns:a="http://schemas.openxmlformats.org/drawingml/2006/main"/>
-          <a:p xmlns:a="http://schemas.openxmlformats.org/drawingml/2006/main">
-            <a:pPr>
-              <a:defRPr sz="2550" b="0">
+            <a:off x="1000125" y="3467100"/>
+            <a:ext cx="10382250" cy="1076325"/>
+          </a:xfrm>
+          <a:prstGeom xmlns:a="http://schemas.openxmlformats.org/drawingml/2006/main" prst="rect">
+            <a:avLst/>
+          </a:prstGeom>
+          <a:noFill xmlns:a="http://schemas.openxmlformats.org/drawingml/2006/main"/>
+          <a:ln xmlns:a="http://schemas.openxmlformats.org/drawingml/2006/main" w="0">
+            <a:noFill/>
+            <a:prstDash val="solid"/>
+          </a:ln>
+        </p:spPr>
+        <p:txBody>
+          <a:bodyPr xmlns:a="http://schemas.openxmlformats.org/drawingml/2006/main" lIns="0" tIns="0" rIns="0" bIns="0" anchor="ctr">
+            <a:noAutofit/>
+          </a:bodyPr>
+          <a:lstStyle xmlns:a="http://schemas.openxmlformats.org/drawingml/2006/main"/>
+          <a:p xmlns:a="http://schemas.openxmlformats.org/drawingml/2006/main">
+            <a:pPr algn="l">
+              <a:buNone/>
+              <a:defRPr sz="2625" b="0">
                 <a:solidFill>
                   <a:srgbClr val="152B3A"/>
                 </a:solidFill>
-              </a:defRPr>
-            </a:pPr>
-            <a:r>
-              <a:rPr sz="2550" b="0">
+                <a:latin typeface="Calibri"/>
+                <a:ea typeface="Calibri"/>
+                <a:cs typeface="Calibri"/>
+              </a:defRPr>
+            </a:pPr>
+            <a:r>
+              <a:rPr sz="2625" b="0">
                 <a:solidFill>
                   <a:srgbClr val="152B3A"/>
                 </a:solidFill>
+                <a:latin typeface="Calibri"/>
+                <a:ea typeface="Calibri"/>
+                <a:cs typeface="Calibri"/>
               </a:rPr>
               <a:t>2   Move it and compare the effort.</a:t>
             </a:r>
@@ -6822,39 +8439,108 @@
         </p:nvSpPr>
         <p:spPr>
           <a:xfrm xmlns:a="http://schemas.openxmlformats.org/drawingml/2006/main">
-            <a:off x="609600" y="4333875"/>
-            <a:ext cx="10972800" cy="781050"/>
-          </a:xfrm>
-          <a:prstGeom xmlns:a="http://schemas.openxmlformats.org/drawingml/2006/main" prst="rect">
-            <a:avLst/>
-          </a:prstGeom>
-          <a:noFill xmlns:a="http://schemas.openxmlformats.org/drawingml/2006/main"/>
-          <a:ln xmlns:a="http://schemas.openxmlformats.org/drawingml/2006/main" w="0">
-            <a:noFill/>
-            <a:prstDash val="solid"/>
-          </a:ln>
-        </p:spPr>
-        <p:txBody>
-          <a:bodyPr xmlns:a="http://schemas.openxmlformats.org/drawingml/2006/main" lIns="0" tIns="0" rIns="0" bIns="0" anchor="ctr"/>
-          <a:lstStyle xmlns:a="http://schemas.openxmlformats.org/drawingml/2006/main"/>
-          <a:p xmlns:a="http://schemas.openxmlformats.org/drawingml/2006/main">
-            <a:pPr>
-              <a:defRPr sz="2550" b="0">
+            <a:off x="1000125" y="4600575"/>
+            <a:ext cx="10382250" cy="1076325"/>
+          </a:xfrm>
+          <a:prstGeom xmlns:a="http://schemas.openxmlformats.org/drawingml/2006/main" prst="rect">
+            <a:avLst/>
+          </a:prstGeom>
+          <a:noFill xmlns:a="http://schemas.openxmlformats.org/drawingml/2006/main"/>
+          <a:ln xmlns:a="http://schemas.openxmlformats.org/drawingml/2006/main" w="0">
+            <a:noFill/>
+            <a:prstDash val="solid"/>
+          </a:ln>
+        </p:spPr>
+        <p:txBody>
+          <a:bodyPr xmlns:a="http://schemas.openxmlformats.org/drawingml/2006/main" lIns="0" tIns="0" rIns="0" bIns="0" anchor="ctr">
+            <a:noAutofit/>
+          </a:bodyPr>
+          <a:lstStyle xmlns:a="http://schemas.openxmlformats.org/drawingml/2006/main"/>
+          <a:p xmlns:a="http://schemas.openxmlformats.org/drawingml/2006/main">
+            <a:pPr algn="l">
+              <a:buNone/>
+              <a:defRPr sz="2625" b="0">
                 <a:solidFill>
                   <a:srgbClr val="152B3A"/>
                 </a:solidFill>
-              </a:defRPr>
-            </a:pPr>
-            <a:r>
-              <a:rPr sz="2550" b="0">
+                <a:latin typeface="Calibri"/>
+                <a:ea typeface="Calibri"/>
+                <a:cs typeface="Calibri"/>
+              </a:defRPr>
+            </a:pPr>
+            <a:r>
+              <a:rPr sz="2625" b="0">
                 <a:solidFill>
                   <a:srgbClr val="152B3A"/>
                 </a:solidFill>
+                <a:latin typeface="Calibri"/>
+                <a:ea typeface="Calibri"/>
+                <a:cs typeface="Calibri"/>
               </a:rPr>
               <a:t>3   Explain what you gain and what it costs.</a:t>
             </a:r>
           </a:p>
         </p:txBody>
+      </p:sp>
+      <p:sp>
+        <p:nvSpPr>
+          <p:cNvPr id="11" name="row-rule-0">
+            <a:extLst xmlns:a="http://schemas.openxmlformats.org/drawingml/2006/main">
+              <a:ext uri="{FF2B5EF4-FFF2-40B4-BE49-F238E27FC236}">
+                <a16:creationId xmlns:a16="http://schemas.microsoft.com/office/drawing/2014/main" id="{AB873808-B79B-4278-8E7B-782BAD74EDCE}"/>
+              </a:ext>
+            </a:extLst>
+          </p:cNvPr>
+          <p:cNvSpPr>
+            <a:spLocks xmlns:a="http://schemas.openxmlformats.org/drawingml/2006/main" noGrp="1"/>
+          </p:cNvSpPr>
+          <p:nvPr/>
+        </p:nvSpPr>
+        <p:spPr>
+          <a:xfrm xmlns:a="http://schemas.openxmlformats.org/drawingml/2006/main">
+            <a:off x="1000125" y="3419475"/>
+            <a:ext cx="10334625" cy="0"/>
+          </a:xfrm>
+          <a:prstGeom xmlns:a="http://schemas.openxmlformats.org/drawingml/2006/main" prst="line">
+            <a:avLst/>
+          </a:prstGeom>
+          <a:noFill xmlns:a="http://schemas.openxmlformats.org/drawingml/2006/main"/>
+          <a:ln xmlns:a="http://schemas.openxmlformats.org/drawingml/2006/main" w="9525">
+            <a:solidFill>
+              <a:srgbClr val="CEDBD3"/>
+            </a:solidFill>
+          </a:ln>
+        </p:spPr>
+      </p:sp>
+      <p:sp>
+        <p:nvSpPr>
+          <p:cNvPr id="12" name="row-rule-1">
+            <a:extLst xmlns:a="http://schemas.openxmlformats.org/drawingml/2006/main">
+              <a:ext uri="{FF2B5EF4-FFF2-40B4-BE49-F238E27FC236}">
+                <a16:creationId xmlns:a16="http://schemas.microsoft.com/office/drawing/2014/main" id="{F3BDA5AB-D2E1-482F-922B-9133ED2B1DBA}"/>
+              </a:ext>
+            </a:extLst>
+          </p:cNvPr>
+          <p:cNvSpPr>
+            <a:spLocks xmlns:a="http://schemas.openxmlformats.org/drawingml/2006/main" noGrp="1"/>
+          </p:cNvSpPr>
+          <p:nvPr/>
+        </p:nvSpPr>
+        <p:spPr>
+          <a:xfrm xmlns:a="http://schemas.openxmlformats.org/drawingml/2006/main">
+            <a:off x="1000125" y="4552950"/>
+            <a:ext cx="10334625" cy="0"/>
+          </a:xfrm>
+          <a:prstGeom xmlns:a="http://schemas.openxmlformats.org/drawingml/2006/main" prst="line">
+            <a:avLst/>
+          </a:prstGeom>
+          <a:noFill xmlns:a="http://schemas.openxmlformats.org/drawingml/2006/main"/>
+          <a:ln xmlns:a="http://schemas.openxmlformats.org/drawingml/2006/main" w="9525">
+            <a:solidFill>
+              <a:srgbClr val="CEDBD3"/>
+            </a:solidFill>
+          </a:ln>
+        </p:spPr>
       </p:sp>
     </p:spTree>
     <p:extLst>
@@ -6872,7 +8558,7 @@
     <p:bg>
       <p:bgPr>
         <a:solidFill xmlns:a="http://schemas.openxmlformats.org/drawingml/2006/main">
-          <a:srgbClr val="F5F1E8"/>
+          <a:srgbClr val="FAF9F5"/>
         </a:solidFill>
       </p:bgPr>
     </p:bg>
@@ -6901,8 +8587,8 @@
         </p:nvSpPr>
         <p:spPr>
           <a:xfrm xmlns:a="http://schemas.openxmlformats.org/drawingml/2006/main">
-            <a:off x="609600" y="552450"/>
-            <a:ext cx="781050" cy="57150"/>
+            <a:off x="609600" y="733425"/>
+            <a:ext cx="781050" cy="38100"/>
           </a:xfrm>
           <a:prstGeom xmlns:a="http://schemas.openxmlformats.org/drawingml/2006/main" prst="rect">
             <a:avLst/>
@@ -6932,34 +8618,43 @@
         </p:nvSpPr>
         <p:spPr>
           <a:xfrm xmlns:a="http://schemas.openxmlformats.org/drawingml/2006/main">
-            <a:off x="609600" y="762000"/>
-            <a:ext cx="8572500" cy="285750"/>
-          </a:xfrm>
-          <a:prstGeom xmlns:a="http://schemas.openxmlformats.org/drawingml/2006/main" prst="rect">
-            <a:avLst/>
-          </a:prstGeom>
-          <a:noFill xmlns:a="http://schemas.openxmlformats.org/drawingml/2006/main"/>
-          <a:ln xmlns:a="http://schemas.openxmlformats.org/drawingml/2006/main" w="0">
-            <a:noFill/>
-            <a:prstDash val="solid"/>
-          </a:ln>
-        </p:spPr>
-        <p:txBody>
-          <a:bodyPr xmlns:a="http://schemas.openxmlformats.org/drawingml/2006/main" lIns="0" tIns="0" rIns="0" bIns="0" anchor="ctr"/>
-          <a:lstStyle xmlns:a="http://schemas.openxmlformats.org/drawingml/2006/main"/>
-          <a:p xmlns:a="http://schemas.openxmlformats.org/drawingml/2006/main">
-            <a:pPr>
-              <a:defRPr sz="1500" b="1">
+            <a:off x="609600" y="342900"/>
+            <a:ext cx="9334500" cy="304800"/>
+          </a:xfrm>
+          <a:prstGeom xmlns:a="http://schemas.openxmlformats.org/drawingml/2006/main" prst="rect">
+            <a:avLst/>
+          </a:prstGeom>
+          <a:noFill xmlns:a="http://schemas.openxmlformats.org/drawingml/2006/main"/>
+          <a:ln xmlns:a="http://schemas.openxmlformats.org/drawingml/2006/main" w="0">
+            <a:noFill/>
+            <a:prstDash val="solid"/>
+          </a:ln>
+        </p:spPr>
+        <p:txBody>
+          <a:bodyPr xmlns:a="http://schemas.openxmlformats.org/drawingml/2006/main" lIns="0" tIns="0" rIns="0" bIns="0" anchor="ctr">
+            <a:noAutofit/>
+          </a:bodyPr>
+          <a:lstStyle xmlns:a="http://schemas.openxmlformats.org/drawingml/2006/main"/>
+          <a:p xmlns:a="http://schemas.openxmlformats.org/drawingml/2006/main">
+            <a:pPr algn="l">
+              <a:buNone/>
+              <a:defRPr sz="1350" b="1">
                 <a:solidFill>
                   <a:srgbClr val="28685E"/>
                 </a:solidFill>
-              </a:defRPr>
-            </a:pPr>
-            <a:r>
-              <a:rPr sz="1500" b="1">
+                <a:latin typeface="Calibri"/>
+                <a:ea typeface="Calibri"/>
+                <a:cs typeface="Calibri"/>
+              </a:defRPr>
+            </a:pPr>
+            <a:r>
+              <a:rPr sz="1350" b="1">
                 <a:solidFill>
                   <a:srgbClr val="28685E"/>
                 </a:solidFill>
+                <a:latin typeface="Calibri"/>
+                <a:ea typeface="Calibri"/>
+                <a:cs typeface="Calibri"/>
               </a:rPr>
               <a:t>MADE BY MATT  /  GROW SCIENCE</a:t>
             </a:r>
@@ -6982,34 +8677,43 @@
         </p:nvSpPr>
         <p:spPr>
           <a:xfrm xmlns:a="http://schemas.openxmlformats.org/drawingml/2006/main">
-            <a:off x="609600" y="1352550"/>
-            <a:ext cx="10972800" cy="952500"/>
-          </a:xfrm>
-          <a:prstGeom xmlns:a="http://schemas.openxmlformats.org/drawingml/2006/main" prst="rect">
-            <a:avLst/>
-          </a:prstGeom>
-          <a:noFill xmlns:a="http://schemas.openxmlformats.org/drawingml/2006/main"/>
-          <a:ln xmlns:a="http://schemas.openxmlformats.org/drawingml/2006/main" w="0">
-            <a:noFill/>
-            <a:prstDash val="solid"/>
-          </a:ln>
-        </p:spPr>
-        <p:txBody>
-          <a:bodyPr xmlns:a="http://schemas.openxmlformats.org/drawingml/2006/main" lIns="0" tIns="0" rIns="0" bIns="0" anchor="ctr"/>
-          <a:lstStyle xmlns:a="http://schemas.openxmlformats.org/drawingml/2006/main"/>
-          <a:p xmlns:a="http://schemas.openxmlformats.org/drawingml/2006/main">
-            <a:pPr>
-              <a:defRPr sz="3750" b="1">
+            <a:off x="609600" y="990600"/>
+            <a:ext cx="10972800" cy="1000125"/>
+          </a:xfrm>
+          <a:prstGeom xmlns:a="http://schemas.openxmlformats.org/drawingml/2006/main" prst="rect">
+            <a:avLst/>
+          </a:prstGeom>
+          <a:noFill xmlns:a="http://schemas.openxmlformats.org/drawingml/2006/main"/>
+          <a:ln xmlns:a="http://schemas.openxmlformats.org/drawingml/2006/main" w="0">
+            <a:noFill/>
+            <a:prstDash val="solid"/>
+          </a:ln>
+        </p:spPr>
+        <p:txBody>
+          <a:bodyPr xmlns:a="http://schemas.openxmlformats.org/drawingml/2006/main" lIns="0" tIns="0" rIns="0" bIns="0" anchor="ctr">
+            <a:noAutofit/>
+          </a:bodyPr>
+          <a:lstStyle xmlns:a="http://schemas.openxmlformats.org/drawingml/2006/main"/>
+          <a:p xmlns:a="http://schemas.openxmlformats.org/drawingml/2006/main">
+            <a:pPr algn="l">
+              <a:buNone/>
+              <a:defRPr sz="3675" b="1">
                 <a:solidFill>
                   <a:srgbClr val="152B3A"/>
                 </a:solidFill>
-              </a:defRPr>
-            </a:pPr>
-            <a:r>
-              <a:rPr sz="3750" b="1">
+                <a:latin typeface="Calibri"/>
+                <a:ea typeface="Calibri"/>
+                <a:cs typeface="Calibri"/>
+              </a:defRPr>
+            </a:pPr>
+            <a:r>
+              <a:rPr sz="3675" b="1">
                 <a:solidFill>
                   <a:srgbClr val="152B3A"/>
                 </a:solidFill>
+                <a:latin typeface="Calibri"/>
+                <a:ea typeface="Calibri"/>
+                <a:cs typeface="Calibri"/>
               </a:rPr>
               <a:t>A lever turns about a pivot</a:t>
             </a:r>
@@ -7032,14 +8736,14 @@
         </p:nvSpPr>
         <p:spPr>
           <a:xfrm xmlns:a="http://schemas.openxmlformats.org/drawingml/2006/main">
-            <a:off x="609600" y="6219825"/>
+            <a:off x="609600" y="6191250"/>
             <a:ext cx="10972800" cy="9525"/>
           </a:xfrm>
           <a:prstGeom xmlns:a="http://schemas.openxmlformats.org/drawingml/2006/main" prst="rect">
             <a:avLst/>
           </a:prstGeom>
           <a:solidFill xmlns:a="http://schemas.openxmlformats.org/drawingml/2006/main">
-            <a:srgbClr val="DCE7DD"/>
+            <a:srgbClr val="CEDBD3"/>
           </a:solidFill>
           <a:ln xmlns:a="http://schemas.openxmlformats.org/drawingml/2006/main" w="0">
             <a:noFill/>
@@ -7063,34 +8767,43 @@
         </p:nvSpPr>
         <p:spPr>
           <a:xfrm xmlns:a="http://schemas.openxmlformats.org/drawingml/2006/main">
-            <a:off x="609600" y="6381750"/>
-            <a:ext cx="9906000" cy="228600"/>
-          </a:xfrm>
-          <a:prstGeom xmlns:a="http://schemas.openxmlformats.org/drawingml/2006/main" prst="rect">
-            <a:avLst/>
-          </a:prstGeom>
-          <a:noFill xmlns:a="http://schemas.openxmlformats.org/drawingml/2006/main"/>
-          <a:ln xmlns:a="http://schemas.openxmlformats.org/drawingml/2006/main" w="0">
-            <a:noFill/>
-            <a:prstDash val="solid"/>
-          </a:ln>
-        </p:spPr>
-        <p:txBody>
-          <a:bodyPr xmlns:a="http://schemas.openxmlformats.org/drawingml/2006/main" lIns="0" tIns="0" rIns="0" bIns="0" anchor="ctr"/>
-          <a:lstStyle xmlns:a="http://schemas.openxmlformats.org/drawingml/2006/main"/>
-          <a:p xmlns:a="http://schemas.openxmlformats.org/drawingml/2006/main">
-            <a:pPr>
-              <a:defRPr sz="1275" b="0">
+            <a:off x="609600" y="6419850"/>
+            <a:ext cx="9525000" cy="219075"/>
+          </a:xfrm>
+          <a:prstGeom xmlns:a="http://schemas.openxmlformats.org/drawingml/2006/main" prst="rect">
+            <a:avLst/>
+          </a:prstGeom>
+          <a:noFill xmlns:a="http://schemas.openxmlformats.org/drawingml/2006/main"/>
+          <a:ln xmlns:a="http://schemas.openxmlformats.org/drawingml/2006/main" w="0">
+            <a:noFill/>
+            <a:prstDash val="solid"/>
+          </a:ln>
+        </p:spPr>
+        <p:txBody>
+          <a:bodyPr xmlns:a="http://schemas.openxmlformats.org/drawingml/2006/main" lIns="0" tIns="0" rIns="0" bIns="0" anchor="ctr">
+            <a:noAutofit/>
+          </a:bodyPr>
+          <a:lstStyle xmlns:a="http://schemas.openxmlformats.org/drawingml/2006/main"/>
+          <a:p xmlns:a="http://schemas.openxmlformats.org/drawingml/2006/main">
+            <a:pPr algn="l">
+              <a:buNone/>
+              <a:defRPr sz="1200" b="0">
                 <a:solidFill>
                   <a:srgbClr val="50616B"/>
                 </a:solidFill>
-              </a:defRPr>
-            </a:pPr>
-            <a:r>
-              <a:rPr sz="1275" b="0">
+                <a:latin typeface="Calibri"/>
+                <a:ea typeface="Calibri"/>
+                <a:cs typeface="Calibri"/>
+              </a:defRPr>
+            </a:pPr>
+            <a:r>
+              <a:rPr sz="1200" b="0">
                 <a:solidFill>
                   <a:srgbClr val="50616B"/>
                 </a:solidFill>
+                <a:latin typeface="Calibri"/>
+                <a:ea typeface="Calibri"/>
+                <a:cs typeface="Calibri"/>
               </a:rPr>
               <a:t>AUTUMN 1  ·  WEEK 4  ·  LESSON A</a:t>
             </a:r>
@@ -7113,27 +8826,33 @@
         </p:nvSpPr>
         <p:spPr>
           <a:xfrm xmlns:a="http://schemas.openxmlformats.org/drawingml/2006/main">
-            <a:off x="11106150" y="6362700"/>
-            <a:ext cx="476250" cy="238125"/>
-          </a:xfrm>
-          <a:prstGeom xmlns:a="http://schemas.openxmlformats.org/drawingml/2006/main" prst="rect">
-            <a:avLst/>
-          </a:prstGeom>
-          <a:noFill xmlns:a="http://schemas.openxmlformats.org/drawingml/2006/main"/>
-          <a:ln xmlns:a="http://schemas.openxmlformats.org/drawingml/2006/main" w="0">
-            <a:noFill/>
-            <a:prstDash val="solid"/>
-          </a:ln>
-        </p:spPr>
-        <p:txBody>
-          <a:bodyPr xmlns:a="http://schemas.openxmlformats.org/drawingml/2006/main" lIns="0" tIns="0" rIns="0" bIns="0" anchor="ctr"/>
-          <a:lstStyle xmlns:a="http://schemas.openxmlformats.org/drawingml/2006/main"/>
-          <a:p xmlns:a="http://schemas.openxmlformats.org/drawingml/2006/main">
-            <a:pPr>
+            <a:off x="11106150" y="6400800"/>
+            <a:ext cx="476250" cy="247650"/>
+          </a:xfrm>
+          <a:prstGeom xmlns:a="http://schemas.openxmlformats.org/drawingml/2006/main" prst="rect">
+            <a:avLst/>
+          </a:prstGeom>
+          <a:noFill xmlns:a="http://schemas.openxmlformats.org/drawingml/2006/main"/>
+          <a:ln xmlns:a="http://schemas.openxmlformats.org/drawingml/2006/main" w="0">
+            <a:noFill/>
+            <a:prstDash val="solid"/>
+          </a:ln>
+        </p:spPr>
+        <p:txBody>
+          <a:bodyPr xmlns:a="http://schemas.openxmlformats.org/drawingml/2006/main" lIns="0" tIns="0" rIns="0" bIns="0" anchor="ctr">
+            <a:noAutofit/>
+          </a:bodyPr>
+          <a:lstStyle xmlns:a="http://schemas.openxmlformats.org/drawingml/2006/main"/>
+          <a:p xmlns:a="http://schemas.openxmlformats.org/drawingml/2006/main">
+            <a:pPr algn="l">
+              <a:buNone/>
               <a:defRPr sz="1350" b="1">
                 <a:solidFill>
                   <a:srgbClr val="28685E"/>
                 </a:solidFill>
+                <a:latin typeface="Calibri"/>
+                <a:ea typeface="Calibri"/>
+                <a:cs typeface="Calibri"/>
               </a:defRPr>
             </a:pPr>
             <a:r>
@@ -7141,6 +8860,9 @@
                 <a:solidFill>
                   <a:srgbClr val="28685E"/>
                 </a:solidFill>
+                <a:latin typeface="Calibri"/>
+                <a:ea typeface="Calibri"/>
+                <a:cs typeface="Calibri"/>
               </a:rPr>
               <a:t>05</a:t>
             </a:r>
@@ -7339,6 +9061,7 @@
           <a:lstStyle xmlns:a="http://schemas.openxmlformats.org/drawingml/2006/main"/>
           <a:p xmlns:a="http://schemas.openxmlformats.org/drawingml/2006/main">
             <a:pPr>
+              <a:buNone/>
               <a:defRPr sz="1875" b="1">
                 <a:solidFill>
                   <a:srgbClr val="152B3A"/>
@@ -7389,6 +9112,7 @@
           <a:lstStyle xmlns:a="http://schemas.openxmlformats.org/drawingml/2006/main"/>
           <a:p xmlns:a="http://schemas.openxmlformats.org/drawingml/2006/main">
             <a:pPr>
+              <a:buNone/>
               <a:defRPr sz="1875" b="1">
                 <a:solidFill>
                   <a:srgbClr val="152B3A"/>
@@ -7439,6 +9163,7 @@
           <a:lstStyle xmlns:a="http://schemas.openxmlformats.org/drawingml/2006/main"/>
           <a:p xmlns:a="http://schemas.openxmlformats.org/drawingml/2006/main">
             <a:pPr>
+              <a:buNone/>
               <a:defRPr sz="1875" b="1">
                 <a:solidFill>
                   <a:srgbClr val="152B3A"/>
@@ -7472,34 +9197,43 @@
         </p:nvSpPr>
         <p:spPr>
           <a:xfrm xmlns:a="http://schemas.openxmlformats.org/drawingml/2006/main">
-            <a:off x="6667500" y="2714625"/>
-            <a:ext cx="4857750" cy="1762125"/>
-          </a:xfrm>
-          <a:prstGeom xmlns:a="http://schemas.openxmlformats.org/drawingml/2006/main" prst="rect">
-            <a:avLst/>
-          </a:prstGeom>
-          <a:noFill xmlns:a="http://schemas.openxmlformats.org/drawingml/2006/main"/>
-          <a:ln xmlns:a="http://schemas.openxmlformats.org/drawingml/2006/main" w="0">
-            <a:noFill/>
-            <a:prstDash val="solid"/>
-          </a:ln>
-        </p:spPr>
-        <p:txBody>
-          <a:bodyPr xmlns:a="http://schemas.openxmlformats.org/drawingml/2006/main" lIns="0" tIns="0" rIns="0" bIns="0" anchor="ctr"/>
-          <a:lstStyle xmlns:a="http://schemas.openxmlformats.org/drawingml/2006/main"/>
-          <a:p xmlns:a="http://schemas.openxmlformats.org/drawingml/2006/main">
-            <a:pPr>
-              <a:defRPr sz="2550" b="1">
+            <a:off x="6667500" y="2476500"/>
+            <a:ext cx="4914900" cy="2095500"/>
+          </a:xfrm>
+          <a:prstGeom xmlns:a="http://schemas.openxmlformats.org/drawingml/2006/main" prst="rect">
+            <a:avLst/>
+          </a:prstGeom>
+          <a:noFill xmlns:a="http://schemas.openxmlformats.org/drawingml/2006/main"/>
+          <a:ln xmlns:a="http://schemas.openxmlformats.org/drawingml/2006/main" w="0">
+            <a:noFill/>
+            <a:prstDash val="solid"/>
+          </a:ln>
+        </p:spPr>
+        <p:txBody>
+          <a:bodyPr xmlns:a="http://schemas.openxmlformats.org/drawingml/2006/main" lIns="0" tIns="0" rIns="0" bIns="0" anchor="ctr">
+            <a:noAutofit/>
+          </a:bodyPr>
+          <a:lstStyle xmlns:a="http://schemas.openxmlformats.org/drawingml/2006/main"/>
+          <a:p xmlns:a="http://schemas.openxmlformats.org/drawingml/2006/main">
+            <a:pPr algn="l">
+              <a:buNone/>
+              <a:defRPr sz="2625" b="1">
                 <a:solidFill>
                   <a:srgbClr val="152B3A"/>
                 </a:solidFill>
-              </a:defRPr>
-            </a:pPr>
-            <a:r>
-              <a:rPr sz="2550" b="1">
+                <a:latin typeface="Calibri"/>
+                <a:ea typeface="Calibri"/>
+                <a:cs typeface="Calibri"/>
+              </a:defRPr>
+            </a:pPr>
+            <a:r>
+              <a:rPr sz="2625" b="1">
                 <a:solidFill>
                   <a:srgbClr val="152B3A"/>
                 </a:solidFill>
+                <a:latin typeface="Calibri"/>
+                <a:ea typeface="Calibri"/>
+                <a:cs typeface="Calibri"/>
               </a:rPr>
               <a:t>The effort pushes one end. The load rises at the other end.</a:t>
             </a:r>
@@ -7522,27 +9256,33 @@
         </p:nvSpPr>
         <p:spPr>
           <a:xfrm xmlns:a="http://schemas.openxmlformats.org/drawingml/2006/main">
-            <a:off x="6667500" y="4714875"/>
-            <a:ext cx="4857750" cy="1000125"/>
-          </a:xfrm>
-          <a:prstGeom xmlns:a="http://schemas.openxmlformats.org/drawingml/2006/main" prst="rect">
-            <a:avLst/>
-          </a:prstGeom>
-          <a:noFill xmlns:a="http://schemas.openxmlformats.org/drawingml/2006/main"/>
-          <a:ln xmlns:a="http://schemas.openxmlformats.org/drawingml/2006/main" w="0">
-            <a:noFill/>
-            <a:prstDash val="solid"/>
-          </a:ln>
-        </p:spPr>
-        <p:txBody>
-          <a:bodyPr xmlns:a="http://schemas.openxmlformats.org/drawingml/2006/main" lIns="0" tIns="0" rIns="0" bIns="0" anchor="ctr"/>
-          <a:lstStyle xmlns:a="http://schemas.openxmlformats.org/drawingml/2006/main"/>
-          <a:p xmlns:a="http://schemas.openxmlformats.org/drawingml/2006/main">
-            <a:pPr>
+            <a:off x="6667500" y="4781550"/>
+            <a:ext cx="4914900" cy="1057275"/>
+          </a:xfrm>
+          <a:prstGeom xmlns:a="http://schemas.openxmlformats.org/drawingml/2006/main" prst="rect">
+            <a:avLst/>
+          </a:prstGeom>
+          <a:noFill xmlns:a="http://schemas.openxmlformats.org/drawingml/2006/main"/>
+          <a:ln xmlns:a="http://schemas.openxmlformats.org/drawingml/2006/main" w="0">
+            <a:noFill/>
+            <a:prstDash val="solid"/>
+          </a:ln>
+        </p:spPr>
+        <p:txBody>
+          <a:bodyPr xmlns:a="http://schemas.openxmlformats.org/drawingml/2006/main" lIns="0" tIns="0" rIns="0" bIns="0" anchor="ctr">
+            <a:noAutofit/>
+          </a:bodyPr>
+          <a:lstStyle xmlns:a="http://schemas.openxmlformats.org/drawingml/2006/main"/>
+          <a:p xmlns:a="http://schemas.openxmlformats.org/drawingml/2006/main">
+            <a:pPr algn="l">
+              <a:buNone/>
               <a:defRPr sz="2175" b="0">
                 <a:solidFill>
                   <a:srgbClr val="28685E"/>
                 </a:solidFill>
+                <a:latin typeface="Calibri"/>
+                <a:ea typeface="Calibri"/>
+                <a:cs typeface="Calibri"/>
               </a:defRPr>
             </a:pPr>
             <a:r>
@@ -7550,6 +9290,9 @@
                 <a:solidFill>
                   <a:srgbClr val="28685E"/>
                 </a:solidFill>
+                <a:latin typeface="Calibri"/>
+                <a:ea typeface="Calibri"/>
+                <a:cs typeface="Calibri"/>
               </a:rPr>
               <a:t>The pivot is the turning point.</a:t>
             </a:r>
@@ -7572,7 +9315,7 @@
     <p:bg>
       <p:bgPr>
         <a:solidFill xmlns:a="http://schemas.openxmlformats.org/drawingml/2006/main">
-          <a:srgbClr val="F5F1E8"/>
+          <a:srgbClr val="FAF9F5"/>
         </a:solidFill>
       </p:bgPr>
     </p:bg>
@@ -7601,8 +9344,8 @@
         </p:nvSpPr>
         <p:spPr>
           <a:xfrm xmlns:a="http://schemas.openxmlformats.org/drawingml/2006/main">
-            <a:off x="609600" y="552450"/>
-            <a:ext cx="781050" cy="57150"/>
+            <a:off x="609600" y="733425"/>
+            <a:ext cx="781050" cy="38100"/>
           </a:xfrm>
           <a:prstGeom xmlns:a="http://schemas.openxmlformats.org/drawingml/2006/main" prst="rect">
             <a:avLst/>
@@ -7632,34 +9375,43 @@
         </p:nvSpPr>
         <p:spPr>
           <a:xfrm xmlns:a="http://schemas.openxmlformats.org/drawingml/2006/main">
-            <a:off x="609600" y="762000"/>
-            <a:ext cx="8572500" cy="285750"/>
-          </a:xfrm>
-          <a:prstGeom xmlns:a="http://schemas.openxmlformats.org/drawingml/2006/main" prst="rect">
-            <a:avLst/>
-          </a:prstGeom>
-          <a:noFill xmlns:a="http://schemas.openxmlformats.org/drawingml/2006/main"/>
-          <a:ln xmlns:a="http://schemas.openxmlformats.org/drawingml/2006/main" w="0">
-            <a:noFill/>
-            <a:prstDash val="solid"/>
-          </a:ln>
-        </p:spPr>
-        <p:txBody>
-          <a:bodyPr xmlns:a="http://schemas.openxmlformats.org/drawingml/2006/main" lIns="0" tIns="0" rIns="0" bIns="0" anchor="ctr"/>
-          <a:lstStyle xmlns:a="http://schemas.openxmlformats.org/drawingml/2006/main"/>
-          <a:p xmlns:a="http://schemas.openxmlformats.org/drawingml/2006/main">
-            <a:pPr>
-              <a:defRPr sz="1500" b="1">
+            <a:off x="609600" y="342900"/>
+            <a:ext cx="9334500" cy="304800"/>
+          </a:xfrm>
+          <a:prstGeom xmlns:a="http://schemas.openxmlformats.org/drawingml/2006/main" prst="rect">
+            <a:avLst/>
+          </a:prstGeom>
+          <a:noFill xmlns:a="http://schemas.openxmlformats.org/drawingml/2006/main"/>
+          <a:ln xmlns:a="http://schemas.openxmlformats.org/drawingml/2006/main" w="0">
+            <a:noFill/>
+            <a:prstDash val="solid"/>
+          </a:ln>
+        </p:spPr>
+        <p:txBody>
+          <a:bodyPr xmlns:a="http://schemas.openxmlformats.org/drawingml/2006/main" lIns="0" tIns="0" rIns="0" bIns="0" anchor="ctr">
+            <a:noAutofit/>
+          </a:bodyPr>
+          <a:lstStyle xmlns:a="http://schemas.openxmlformats.org/drawingml/2006/main"/>
+          <a:p xmlns:a="http://schemas.openxmlformats.org/drawingml/2006/main">
+            <a:pPr algn="l">
+              <a:buNone/>
+              <a:defRPr sz="1350" b="1">
                 <a:solidFill>
                   <a:srgbClr val="28685E"/>
                 </a:solidFill>
-              </a:defRPr>
-            </a:pPr>
-            <a:r>
-              <a:rPr sz="1500" b="1">
+                <a:latin typeface="Calibri"/>
+                <a:ea typeface="Calibri"/>
+                <a:cs typeface="Calibri"/>
+              </a:defRPr>
+            </a:pPr>
+            <a:r>
+              <a:rPr sz="1350" b="1">
                 <a:solidFill>
                   <a:srgbClr val="28685E"/>
                 </a:solidFill>
+                <a:latin typeface="Calibri"/>
+                <a:ea typeface="Calibri"/>
+                <a:cs typeface="Calibri"/>
               </a:rPr>
               <a:t>MADE BY MATT  /  GROW SCIENCE</a:t>
             </a:r>
@@ -7682,34 +9434,43 @@
         </p:nvSpPr>
         <p:spPr>
           <a:xfrm xmlns:a="http://schemas.openxmlformats.org/drawingml/2006/main">
-            <a:off x="609600" y="1352550"/>
-            <a:ext cx="10972800" cy="952500"/>
-          </a:xfrm>
-          <a:prstGeom xmlns:a="http://schemas.openxmlformats.org/drawingml/2006/main" prst="rect">
-            <a:avLst/>
-          </a:prstGeom>
-          <a:noFill xmlns:a="http://schemas.openxmlformats.org/drawingml/2006/main"/>
-          <a:ln xmlns:a="http://schemas.openxmlformats.org/drawingml/2006/main" w="0">
-            <a:noFill/>
-            <a:prstDash val="solid"/>
-          </a:ln>
-        </p:spPr>
-        <p:txBody>
-          <a:bodyPr xmlns:a="http://schemas.openxmlformats.org/drawingml/2006/main" lIns="0" tIns="0" rIns="0" bIns="0" anchor="ctr"/>
-          <a:lstStyle xmlns:a="http://schemas.openxmlformats.org/drawingml/2006/main"/>
-          <a:p xmlns:a="http://schemas.openxmlformats.org/drawingml/2006/main">
-            <a:pPr>
-              <a:defRPr sz="3750" b="1">
+            <a:off x="609600" y="990600"/>
+            <a:ext cx="10972800" cy="1000125"/>
+          </a:xfrm>
+          <a:prstGeom xmlns:a="http://schemas.openxmlformats.org/drawingml/2006/main" prst="rect">
+            <a:avLst/>
+          </a:prstGeom>
+          <a:noFill xmlns:a="http://schemas.openxmlformats.org/drawingml/2006/main"/>
+          <a:ln xmlns:a="http://schemas.openxmlformats.org/drawingml/2006/main" w="0">
+            <a:noFill/>
+            <a:prstDash val="solid"/>
+          </a:ln>
+        </p:spPr>
+        <p:txBody>
+          <a:bodyPr xmlns:a="http://schemas.openxmlformats.org/drawingml/2006/main" lIns="0" tIns="0" rIns="0" bIns="0" anchor="ctr">
+            <a:noAutofit/>
+          </a:bodyPr>
+          <a:lstStyle xmlns:a="http://schemas.openxmlformats.org/drawingml/2006/main"/>
+          <a:p xmlns:a="http://schemas.openxmlformats.org/drawingml/2006/main">
+            <a:pPr algn="l">
+              <a:buNone/>
+              <a:defRPr sz="3675" b="1">
                 <a:solidFill>
                   <a:srgbClr val="152B3A"/>
                 </a:solidFill>
-              </a:defRPr>
-            </a:pPr>
-            <a:r>
-              <a:rPr sz="3750" b="1">
+                <a:latin typeface="Calibri"/>
+                <a:ea typeface="Calibri"/>
+                <a:cs typeface="Calibri"/>
+              </a:defRPr>
+            </a:pPr>
+            <a:r>
+              <a:rPr sz="3675" b="1">
                 <a:solidFill>
                   <a:srgbClr val="152B3A"/>
                 </a:solidFill>
+                <a:latin typeface="Calibri"/>
+                <a:ea typeface="Calibri"/>
+                <a:cs typeface="Calibri"/>
               </a:rPr>
               <a:t>Move the pivot, keep the load</a:t>
             </a:r>
@@ -7732,14 +9493,14 @@
         </p:nvSpPr>
         <p:spPr>
           <a:xfrm xmlns:a="http://schemas.openxmlformats.org/drawingml/2006/main">
-            <a:off x="609600" y="6219825"/>
+            <a:off x="609600" y="6191250"/>
             <a:ext cx="10972800" cy="9525"/>
           </a:xfrm>
           <a:prstGeom xmlns:a="http://schemas.openxmlformats.org/drawingml/2006/main" prst="rect">
             <a:avLst/>
           </a:prstGeom>
           <a:solidFill xmlns:a="http://schemas.openxmlformats.org/drawingml/2006/main">
-            <a:srgbClr val="DCE7DD"/>
+            <a:srgbClr val="CEDBD3"/>
           </a:solidFill>
           <a:ln xmlns:a="http://schemas.openxmlformats.org/drawingml/2006/main" w="0">
             <a:noFill/>
@@ -7763,34 +9524,43 @@
         </p:nvSpPr>
         <p:spPr>
           <a:xfrm xmlns:a="http://schemas.openxmlformats.org/drawingml/2006/main">
-            <a:off x="609600" y="6381750"/>
-            <a:ext cx="9906000" cy="228600"/>
-          </a:xfrm>
-          <a:prstGeom xmlns:a="http://schemas.openxmlformats.org/drawingml/2006/main" prst="rect">
-            <a:avLst/>
-          </a:prstGeom>
-          <a:noFill xmlns:a="http://schemas.openxmlformats.org/drawingml/2006/main"/>
-          <a:ln xmlns:a="http://schemas.openxmlformats.org/drawingml/2006/main" w="0">
-            <a:noFill/>
-            <a:prstDash val="solid"/>
-          </a:ln>
-        </p:spPr>
-        <p:txBody>
-          <a:bodyPr xmlns:a="http://schemas.openxmlformats.org/drawingml/2006/main" lIns="0" tIns="0" rIns="0" bIns="0" anchor="ctr"/>
-          <a:lstStyle xmlns:a="http://schemas.openxmlformats.org/drawingml/2006/main"/>
-          <a:p xmlns:a="http://schemas.openxmlformats.org/drawingml/2006/main">
-            <a:pPr>
-              <a:defRPr sz="1275" b="0">
+            <a:off x="609600" y="6419850"/>
+            <a:ext cx="9525000" cy="219075"/>
+          </a:xfrm>
+          <a:prstGeom xmlns:a="http://schemas.openxmlformats.org/drawingml/2006/main" prst="rect">
+            <a:avLst/>
+          </a:prstGeom>
+          <a:noFill xmlns:a="http://schemas.openxmlformats.org/drawingml/2006/main"/>
+          <a:ln xmlns:a="http://schemas.openxmlformats.org/drawingml/2006/main" w="0">
+            <a:noFill/>
+            <a:prstDash val="solid"/>
+          </a:ln>
+        </p:spPr>
+        <p:txBody>
+          <a:bodyPr xmlns:a="http://schemas.openxmlformats.org/drawingml/2006/main" lIns="0" tIns="0" rIns="0" bIns="0" anchor="ctr">
+            <a:noAutofit/>
+          </a:bodyPr>
+          <a:lstStyle xmlns:a="http://schemas.openxmlformats.org/drawingml/2006/main"/>
+          <a:p xmlns:a="http://schemas.openxmlformats.org/drawingml/2006/main">
+            <a:pPr algn="l">
+              <a:buNone/>
+              <a:defRPr sz="1200" b="0">
                 <a:solidFill>
                   <a:srgbClr val="50616B"/>
                 </a:solidFill>
-              </a:defRPr>
-            </a:pPr>
-            <a:r>
-              <a:rPr sz="1275" b="0">
+                <a:latin typeface="Calibri"/>
+                <a:ea typeface="Calibri"/>
+                <a:cs typeface="Calibri"/>
+              </a:defRPr>
+            </a:pPr>
+            <a:r>
+              <a:rPr sz="1200" b="0">
                 <a:solidFill>
                   <a:srgbClr val="50616B"/>
                 </a:solidFill>
+                <a:latin typeface="Calibri"/>
+                <a:ea typeface="Calibri"/>
+                <a:cs typeface="Calibri"/>
               </a:rPr>
               <a:t>AUTUMN 1  ·  WEEK 4  ·  LESSON A</a:t>
             </a:r>
@@ -7813,27 +9583,33 @@
         </p:nvSpPr>
         <p:spPr>
           <a:xfrm xmlns:a="http://schemas.openxmlformats.org/drawingml/2006/main">
-            <a:off x="11106150" y="6362700"/>
-            <a:ext cx="476250" cy="238125"/>
-          </a:xfrm>
-          <a:prstGeom xmlns:a="http://schemas.openxmlformats.org/drawingml/2006/main" prst="rect">
-            <a:avLst/>
-          </a:prstGeom>
-          <a:noFill xmlns:a="http://schemas.openxmlformats.org/drawingml/2006/main"/>
-          <a:ln xmlns:a="http://schemas.openxmlformats.org/drawingml/2006/main" w="0">
-            <a:noFill/>
-            <a:prstDash val="solid"/>
-          </a:ln>
-        </p:spPr>
-        <p:txBody>
-          <a:bodyPr xmlns:a="http://schemas.openxmlformats.org/drawingml/2006/main" lIns="0" tIns="0" rIns="0" bIns="0" anchor="ctr"/>
-          <a:lstStyle xmlns:a="http://schemas.openxmlformats.org/drawingml/2006/main"/>
-          <a:p xmlns:a="http://schemas.openxmlformats.org/drawingml/2006/main">
-            <a:pPr>
+            <a:off x="11106150" y="6400800"/>
+            <a:ext cx="476250" cy="247650"/>
+          </a:xfrm>
+          <a:prstGeom xmlns:a="http://schemas.openxmlformats.org/drawingml/2006/main" prst="rect">
+            <a:avLst/>
+          </a:prstGeom>
+          <a:noFill xmlns:a="http://schemas.openxmlformats.org/drawingml/2006/main"/>
+          <a:ln xmlns:a="http://schemas.openxmlformats.org/drawingml/2006/main" w="0">
+            <a:noFill/>
+            <a:prstDash val="solid"/>
+          </a:ln>
+        </p:spPr>
+        <p:txBody>
+          <a:bodyPr xmlns:a="http://schemas.openxmlformats.org/drawingml/2006/main" lIns="0" tIns="0" rIns="0" bIns="0" anchor="ctr">
+            <a:noAutofit/>
+          </a:bodyPr>
+          <a:lstStyle xmlns:a="http://schemas.openxmlformats.org/drawingml/2006/main"/>
+          <a:p xmlns:a="http://schemas.openxmlformats.org/drawingml/2006/main">
+            <a:pPr algn="l">
+              <a:buNone/>
               <a:defRPr sz="1350" b="1">
                 <a:solidFill>
                   <a:srgbClr val="28685E"/>
                 </a:solidFill>
+                <a:latin typeface="Calibri"/>
+                <a:ea typeface="Calibri"/>
+                <a:cs typeface="Calibri"/>
               </a:defRPr>
             </a:pPr>
             <a:r>
@@ -7841,6 +9617,9 @@
                 <a:solidFill>
                   <a:srgbClr val="28685E"/>
                 </a:solidFill>
+                <a:latin typeface="Calibri"/>
+                <a:ea typeface="Calibri"/>
+                <a:cs typeface="Calibri"/>
               </a:rPr>
               <a:t>06</a:t>
             </a:r>
@@ -7863,34 +9642,43 @@
         </p:nvSpPr>
         <p:spPr>
           <a:xfrm xmlns:a="http://schemas.openxmlformats.org/drawingml/2006/main">
-            <a:off x="609600" y="2619375"/>
-            <a:ext cx="10972800" cy="714375"/>
-          </a:xfrm>
-          <a:prstGeom xmlns:a="http://schemas.openxmlformats.org/drawingml/2006/main" prst="rect">
-            <a:avLst/>
-          </a:prstGeom>
-          <a:noFill xmlns:a="http://schemas.openxmlformats.org/drawingml/2006/main"/>
-          <a:ln xmlns:a="http://schemas.openxmlformats.org/drawingml/2006/main" w="0">
-            <a:noFill/>
-            <a:prstDash val="solid"/>
-          </a:ln>
-        </p:spPr>
-        <p:txBody>
-          <a:bodyPr xmlns:a="http://schemas.openxmlformats.org/drawingml/2006/main" lIns="0" tIns="0" rIns="0" bIns="0" anchor="ctr"/>
-          <a:lstStyle xmlns:a="http://schemas.openxmlformats.org/drawingml/2006/main"/>
-          <a:p xmlns:a="http://schemas.openxmlformats.org/drawingml/2006/main">
-            <a:pPr>
-              <a:defRPr sz="2550" b="0">
+            <a:off x="1000125" y="2333625"/>
+            <a:ext cx="10382250" cy="792956"/>
+          </a:xfrm>
+          <a:prstGeom xmlns:a="http://schemas.openxmlformats.org/drawingml/2006/main" prst="rect">
+            <a:avLst/>
+          </a:prstGeom>
+          <a:noFill xmlns:a="http://schemas.openxmlformats.org/drawingml/2006/main"/>
+          <a:ln xmlns:a="http://schemas.openxmlformats.org/drawingml/2006/main" w="0">
+            <a:noFill/>
+            <a:prstDash val="solid"/>
+          </a:ln>
+        </p:spPr>
+        <p:txBody>
+          <a:bodyPr xmlns:a="http://schemas.openxmlformats.org/drawingml/2006/main" lIns="0" tIns="0" rIns="0" bIns="0" anchor="ctr">
+            <a:noAutofit/>
+          </a:bodyPr>
+          <a:lstStyle xmlns:a="http://schemas.openxmlformats.org/drawingml/2006/main"/>
+          <a:p xmlns:a="http://schemas.openxmlformats.org/drawingml/2006/main">
+            <a:pPr algn="l">
+              <a:buNone/>
+              <a:defRPr sz="2400" b="0">
                 <a:solidFill>
                   <a:srgbClr val="152B3A"/>
                 </a:solidFill>
-              </a:defRPr>
-            </a:pPr>
-            <a:r>
-              <a:rPr sz="2550" b="0">
+                <a:latin typeface="Calibri"/>
+                <a:ea typeface="Calibri"/>
+                <a:cs typeface="Calibri"/>
+              </a:defRPr>
+            </a:pPr>
+            <a:r>
+              <a:rPr sz="2400" b="0">
                 <a:solidFill>
                   <a:srgbClr val="152B3A"/>
                 </a:solidFill>
+                <a:latin typeface="Calibri"/>
+                <a:ea typeface="Calibri"/>
+                <a:cs typeface="Calibri"/>
               </a:rPr>
               <a:t>Watch the adult use the middle pivot.</a:t>
             </a:r>
@@ -7913,34 +9701,43 @@
         </p:nvSpPr>
         <p:spPr>
           <a:xfrm xmlns:a="http://schemas.openxmlformats.org/drawingml/2006/main">
-            <a:off x="609600" y="3409950"/>
-            <a:ext cx="10972800" cy="714375"/>
-          </a:xfrm>
-          <a:prstGeom xmlns:a="http://schemas.openxmlformats.org/drawingml/2006/main" prst="rect">
-            <a:avLst/>
-          </a:prstGeom>
-          <a:noFill xmlns:a="http://schemas.openxmlformats.org/drawingml/2006/main"/>
-          <a:ln xmlns:a="http://schemas.openxmlformats.org/drawingml/2006/main" w="0">
-            <a:noFill/>
-            <a:prstDash val="solid"/>
-          </a:ln>
-        </p:spPr>
-        <p:txBody>
-          <a:bodyPr xmlns:a="http://schemas.openxmlformats.org/drawingml/2006/main" lIns="0" tIns="0" rIns="0" bIns="0" anchor="ctr"/>
-          <a:lstStyle xmlns:a="http://schemas.openxmlformats.org/drawingml/2006/main"/>
-          <a:p xmlns:a="http://schemas.openxmlformats.org/drawingml/2006/main">
-            <a:pPr>
-              <a:defRPr sz="2550" b="0">
+            <a:off x="1000125" y="3183731"/>
+            <a:ext cx="10382250" cy="792956"/>
+          </a:xfrm>
+          <a:prstGeom xmlns:a="http://schemas.openxmlformats.org/drawingml/2006/main" prst="rect">
+            <a:avLst/>
+          </a:prstGeom>
+          <a:noFill xmlns:a="http://schemas.openxmlformats.org/drawingml/2006/main"/>
+          <a:ln xmlns:a="http://schemas.openxmlformats.org/drawingml/2006/main" w="0">
+            <a:noFill/>
+            <a:prstDash val="solid"/>
+          </a:ln>
+        </p:spPr>
+        <p:txBody>
+          <a:bodyPr xmlns:a="http://schemas.openxmlformats.org/drawingml/2006/main" lIns="0" tIns="0" rIns="0" bIns="0" anchor="ctr">
+            <a:noAutofit/>
+          </a:bodyPr>
+          <a:lstStyle xmlns:a="http://schemas.openxmlformats.org/drawingml/2006/main"/>
+          <a:p xmlns:a="http://schemas.openxmlformats.org/drawingml/2006/main">
+            <a:pPr algn="l">
+              <a:buNone/>
+              <a:defRPr sz="2400" b="0">
                 <a:solidFill>
                   <a:srgbClr val="152B3A"/>
                 </a:solidFill>
-              </a:defRPr>
-            </a:pPr>
-            <a:r>
-              <a:rPr sz="2550" b="0">
+                <a:latin typeface="Calibri"/>
+                <a:ea typeface="Calibri"/>
+                <a:cs typeface="Calibri"/>
+              </a:defRPr>
+            </a:pPr>
+            <a:r>
+              <a:rPr sz="2400" b="0">
                 <a:solidFill>
                   <a:srgbClr val="152B3A"/>
                 </a:solidFill>
+                <a:latin typeface="Calibri"/>
+                <a:ea typeface="Calibri"/>
+                <a:cs typeface="Calibri"/>
               </a:rPr>
               <a:t>Predict what changes when it moves near the load.</a:t>
             </a:r>
@@ -7963,34 +9760,43 @@
         </p:nvSpPr>
         <p:spPr>
           <a:xfrm xmlns:a="http://schemas.openxmlformats.org/drawingml/2006/main">
-            <a:off x="609600" y="4200525"/>
-            <a:ext cx="10972800" cy="714375"/>
-          </a:xfrm>
-          <a:prstGeom xmlns:a="http://schemas.openxmlformats.org/drawingml/2006/main" prst="rect">
-            <a:avLst/>
-          </a:prstGeom>
-          <a:noFill xmlns:a="http://schemas.openxmlformats.org/drawingml/2006/main"/>
-          <a:ln xmlns:a="http://schemas.openxmlformats.org/drawingml/2006/main" w="0">
-            <a:noFill/>
-            <a:prstDash val="solid"/>
-          </a:ln>
-        </p:spPr>
-        <p:txBody>
-          <a:bodyPr xmlns:a="http://schemas.openxmlformats.org/drawingml/2006/main" lIns="0" tIns="0" rIns="0" bIns="0" anchor="ctr"/>
-          <a:lstStyle xmlns:a="http://schemas.openxmlformats.org/drawingml/2006/main"/>
-          <a:p xmlns:a="http://schemas.openxmlformats.org/drawingml/2006/main">
-            <a:pPr>
-              <a:defRPr sz="2550" b="0">
+            <a:off x="1000125" y="4033838"/>
+            <a:ext cx="10382250" cy="792956"/>
+          </a:xfrm>
+          <a:prstGeom xmlns:a="http://schemas.openxmlformats.org/drawingml/2006/main" prst="rect">
+            <a:avLst/>
+          </a:prstGeom>
+          <a:noFill xmlns:a="http://schemas.openxmlformats.org/drawingml/2006/main"/>
+          <a:ln xmlns:a="http://schemas.openxmlformats.org/drawingml/2006/main" w="0">
+            <a:noFill/>
+            <a:prstDash val="solid"/>
+          </a:ln>
+        </p:spPr>
+        <p:txBody>
+          <a:bodyPr xmlns:a="http://schemas.openxmlformats.org/drawingml/2006/main" lIns="0" tIns="0" rIns="0" bIns="0" anchor="ctr">
+            <a:noAutofit/>
+          </a:bodyPr>
+          <a:lstStyle xmlns:a="http://schemas.openxmlformats.org/drawingml/2006/main"/>
+          <a:p xmlns:a="http://schemas.openxmlformats.org/drawingml/2006/main">
+            <a:pPr algn="l">
+              <a:buNone/>
+              <a:defRPr sz="2400" b="0">
                 <a:solidFill>
                   <a:srgbClr val="152B3A"/>
                 </a:solidFill>
-              </a:defRPr>
-            </a:pPr>
-            <a:r>
-              <a:rPr sz="2550" b="0">
+                <a:latin typeface="Calibri"/>
+                <a:ea typeface="Calibri"/>
+                <a:cs typeface="Calibri"/>
+              </a:defRPr>
+            </a:pPr>
+            <a:r>
+              <a:rPr sz="2400" b="0">
                 <a:solidFill>
                   <a:srgbClr val="152B3A"/>
                 </a:solidFill>
+                <a:latin typeface="Calibri"/>
+                <a:ea typeface="Calibri"/>
+                <a:cs typeface="Calibri"/>
               </a:rPr>
               <a:t>Keep the effort point and small load rise the same.</a:t>
             </a:r>
@@ -8013,36 +9819,363 @@
         </p:nvSpPr>
         <p:spPr>
           <a:xfrm xmlns:a="http://schemas.openxmlformats.org/drawingml/2006/main">
-            <a:off x="609600" y="4991100"/>
-            <a:ext cx="10972800" cy="714375"/>
-          </a:xfrm>
-          <a:prstGeom xmlns:a="http://schemas.openxmlformats.org/drawingml/2006/main" prst="rect">
-            <a:avLst/>
-          </a:prstGeom>
-          <a:noFill xmlns:a="http://schemas.openxmlformats.org/drawingml/2006/main"/>
-          <a:ln xmlns:a="http://schemas.openxmlformats.org/drawingml/2006/main" w="0">
-            <a:noFill/>
-            <a:prstDash val="solid"/>
-          </a:ln>
-        </p:spPr>
-        <p:txBody>
-          <a:bodyPr xmlns:a="http://schemas.openxmlformats.org/drawingml/2006/main" lIns="0" tIns="0" rIns="0" bIns="0" anchor="ctr"/>
-          <a:lstStyle xmlns:a="http://schemas.openxmlformats.org/drawingml/2006/main"/>
-          <a:p xmlns:a="http://schemas.openxmlformats.org/drawingml/2006/main">
-            <a:pPr>
-              <a:defRPr sz="2550" b="0">
+            <a:off x="1000125" y="4883944"/>
+            <a:ext cx="10382250" cy="792956"/>
+          </a:xfrm>
+          <a:prstGeom xmlns:a="http://schemas.openxmlformats.org/drawingml/2006/main" prst="rect">
+            <a:avLst/>
+          </a:prstGeom>
+          <a:noFill xmlns:a="http://schemas.openxmlformats.org/drawingml/2006/main"/>
+          <a:ln xmlns:a="http://schemas.openxmlformats.org/drawingml/2006/main" w="0">
+            <a:noFill/>
+            <a:prstDash val="solid"/>
+          </a:ln>
+        </p:spPr>
+        <p:txBody>
+          <a:bodyPr xmlns:a="http://schemas.openxmlformats.org/drawingml/2006/main" lIns="0" tIns="0" rIns="0" bIns="0" anchor="ctr">
+            <a:noAutofit/>
+          </a:bodyPr>
+          <a:lstStyle xmlns:a="http://schemas.openxmlformats.org/drawingml/2006/main"/>
+          <a:p xmlns:a="http://schemas.openxmlformats.org/drawingml/2006/main">
+            <a:pPr algn="l">
+              <a:buNone/>
+              <a:defRPr sz="2400" b="0">
                 <a:solidFill>
                   <a:srgbClr val="152B3A"/>
                 </a:solidFill>
-              </a:defRPr>
-            </a:pPr>
-            <a:r>
-              <a:rPr sz="2550" b="0">
+                <a:latin typeface="Calibri"/>
+                <a:ea typeface="Calibri"/>
+                <a:cs typeface="Calibri"/>
+              </a:defRPr>
+            </a:pPr>
+            <a:r>
+              <a:rPr sz="2400" b="0">
                 <a:solidFill>
                   <a:srgbClr val="152B3A"/>
                 </a:solidFill>
+                <a:latin typeface="Calibri"/>
+                <a:ea typeface="Calibri"/>
+                <a:cs typeface="Calibri"/>
               </a:rPr>
               <a:t>Compare the effort and the hand’s travel.</a:t>
+            </a:r>
+          </a:p>
+        </p:txBody>
+      </p:sp>
+      <p:sp>
+        <p:nvSpPr>
+          <p:cNvPr id="12" name="cue-0">
+            <a:extLst xmlns:a="http://schemas.openxmlformats.org/drawingml/2006/main">
+              <a:ext uri="{FF2B5EF4-FFF2-40B4-BE49-F238E27FC236}">
+                <a16:creationId xmlns:a16="http://schemas.microsoft.com/office/drawing/2014/main" id="{69D77134-EAF3-4300-AE71-0DA676A039A2}"/>
+              </a:ext>
+            </a:extLst>
+          </p:cNvPr>
+          <p:cNvSpPr>
+            <a:spLocks xmlns:a="http://schemas.openxmlformats.org/drawingml/2006/main" noGrp="1"/>
+          </p:cNvSpPr>
+          <p:nvPr/>
+        </p:nvSpPr>
+        <p:spPr>
+          <a:xfrm xmlns:a="http://schemas.openxmlformats.org/drawingml/2006/main">
+            <a:off x="609600" y="2362200"/>
+            <a:ext cx="323850" cy="323850"/>
+          </a:xfrm>
+          <a:prstGeom xmlns:a="http://schemas.openxmlformats.org/drawingml/2006/main" prst="rect">
+            <a:avLst/>
+          </a:prstGeom>
+          <a:noFill xmlns:a="http://schemas.openxmlformats.org/drawingml/2006/main"/>
+          <a:ln xmlns:a="http://schemas.openxmlformats.org/drawingml/2006/main" w="0">
+            <a:noFill/>
+          </a:ln>
+        </p:spPr>
+        <p:txBody>
+          <a:bodyPr xmlns:a="http://schemas.openxmlformats.org/drawingml/2006/main" lIns="0" tIns="0" rIns="0" bIns="0" anchor="ctr">
+            <a:noAutofit/>
+          </a:bodyPr>
+          <a:lstStyle xmlns:a="http://schemas.openxmlformats.org/drawingml/2006/main"/>
+          <a:p xmlns:a="http://schemas.openxmlformats.org/drawingml/2006/main">
+            <a:pPr algn="l">
+              <a:defRPr sz="1350" b="1">
+                <a:solidFill>
+                  <a:srgbClr val="28685E"/>
+                </a:solidFill>
+                <a:latin typeface="Calibri"/>
+                <a:ea typeface="Calibri"/>
+                <a:cs typeface="Calibri"/>
+              </a:defRPr>
+            </a:pPr>
+            <a:r>
+              <a:rPr sz="1350" b="1">
+                <a:solidFill>
+                  <a:srgbClr val="28685E"/>
+                </a:solidFill>
+                <a:latin typeface="Calibri"/>
+                <a:ea typeface="Calibri"/>
+                <a:cs typeface="Calibri"/>
+              </a:rPr>
+              <a:t>01</a:t>
+            </a:r>
+          </a:p>
+        </p:txBody>
+      </p:sp>
+      <p:sp>
+        <p:nvSpPr>
+          <p:cNvPr id="13" name="row-rule-0">
+            <a:extLst xmlns:a="http://schemas.openxmlformats.org/drawingml/2006/main">
+              <a:ext uri="{FF2B5EF4-FFF2-40B4-BE49-F238E27FC236}">
+                <a16:creationId xmlns:a16="http://schemas.microsoft.com/office/drawing/2014/main" id="{28E97622-4A91-4942-A869-E0DB700CE2CF}"/>
+              </a:ext>
+            </a:extLst>
+          </p:cNvPr>
+          <p:cNvSpPr>
+            <a:spLocks xmlns:a="http://schemas.openxmlformats.org/drawingml/2006/main" noGrp="1"/>
+          </p:cNvSpPr>
+          <p:nvPr/>
+        </p:nvSpPr>
+        <p:spPr>
+          <a:xfrm xmlns:a="http://schemas.openxmlformats.org/drawingml/2006/main">
+            <a:off x="1000125" y="3136106"/>
+            <a:ext cx="10334625" cy="0"/>
+          </a:xfrm>
+          <a:prstGeom xmlns:a="http://schemas.openxmlformats.org/drawingml/2006/main" prst="line">
+            <a:avLst/>
+          </a:prstGeom>
+          <a:noFill xmlns:a="http://schemas.openxmlformats.org/drawingml/2006/main"/>
+          <a:ln xmlns:a="http://schemas.openxmlformats.org/drawingml/2006/main" w="9525">
+            <a:solidFill>
+              <a:srgbClr val="CEDBD3"/>
+            </a:solidFill>
+          </a:ln>
+        </p:spPr>
+      </p:sp>
+      <p:sp>
+        <p:nvSpPr>
+          <p:cNvPr id="14" name="cue-1">
+            <a:extLst xmlns:a="http://schemas.openxmlformats.org/drawingml/2006/main">
+              <a:ext uri="{FF2B5EF4-FFF2-40B4-BE49-F238E27FC236}">
+                <a16:creationId xmlns:a16="http://schemas.microsoft.com/office/drawing/2014/main" id="{C9357371-522A-4ACC-8C95-9412DC774E53}"/>
+              </a:ext>
+            </a:extLst>
+          </p:cNvPr>
+          <p:cNvSpPr>
+            <a:spLocks xmlns:a="http://schemas.openxmlformats.org/drawingml/2006/main" noGrp="1"/>
+          </p:cNvSpPr>
+          <p:nvPr/>
+        </p:nvSpPr>
+        <p:spPr>
+          <a:xfrm xmlns:a="http://schemas.openxmlformats.org/drawingml/2006/main">
+            <a:off x="609600" y="3212306"/>
+            <a:ext cx="323850" cy="323850"/>
+          </a:xfrm>
+          <a:prstGeom xmlns:a="http://schemas.openxmlformats.org/drawingml/2006/main" prst="rect">
+            <a:avLst/>
+          </a:prstGeom>
+          <a:noFill xmlns:a="http://schemas.openxmlformats.org/drawingml/2006/main"/>
+          <a:ln xmlns:a="http://schemas.openxmlformats.org/drawingml/2006/main" w="0">
+            <a:noFill/>
+          </a:ln>
+        </p:spPr>
+        <p:txBody>
+          <a:bodyPr xmlns:a="http://schemas.openxmlformats.org/drawingml/2006/main" lIns="0" tIns="0" rIns="0" bIns="0" anchor="ctr">
+            <a:noAutofit/>
+          </a:bodyPr>
+          <a:lstStyle xmlns:a="http://schemas.openxmlformats.org/drawingml/2006/main"/>
+          <a:p xmlns:a="http://schemas.openxmlformats.org/drawingml/2006/main">
+            <a:pPr algn="l">
+              <a:defRPr sz="1350" b="1">
+                <a:solidFill>
+                  <a:srgbClr val="28685E"/>
+                </a:solidFill>
+                <a:latin typeface="Calibri"/>
+                <a:ea typeface="Calibri"/>
+                <a:cs typeface="Calibri"/>
+              </a:defRPr>
+            </a:pPr>
+            <a:r>
+              <a:rPr sz="1350" b="1">
+                <a:solidFill>
+                  <a:srgbClr val="28685E"/>
+                </a:solidFill>
+                <a:latin typeface="Calibri"/>
+                <a:ea typeface="Calibri"/>
+                <a:cs typeface="Calibri"/>
+              </a:rPr>
+              <a:t>02</a:t>
+            </a:r>
+          </a:p>
+        </p:txBody>
+      </p:sp>
+      <p:sp>
+        <p:nvSpPr>
+          <p:cNvPr id="15" name="row-rule-1">
+            <a:extLst xmlns:a="http://schemas.openxmlformats.org/drawingml/2006/main">
+              <a:ext uri="{FF2B5EF4-FFF2-40B4-BE49-F238E27FC236}">
+                <a16:creationId xmlns:a16="http://schemas.microsoft.com/office/drawing/2014/main" id="{B28CC911-F2F3-4860-A1CC-53E0C23DEBCB}"/>
+              </a:ext>
+            </a:extLst>
+          </p:cNvPr>
+          <p:cNvSpPr>
+            <a:spLocks xmlns:a="http://schemas.openxmlformats.org/drawingml/2006/main" noGrp="1"/>
+          </p:cNvSpPr>
+          <p:nvPr/>
+        </p:nvSpPr>
+        <p:spPr>
+          <a:xfrm xmlns:a="http://schemas.openxmlformats.org/drawingml/2006/main">
+            <a:off x="1000125" y="3986213"/>
+            <a:ext cx="10334625" cy="0"/>
+          </a:xfrm>
+          <a:prstGeom xmlns:a="http://schemas.openxmlformats.org/drawingml/2006/main" prst="line">
+            <a:avLst/>
+          </a:prstGeom>
+          <a:noFill xmlns:a="http://schemas.openxmlformats.org/drawingml/2006/main"/>
+          <a:ln xmlns:a="http://schemas.openxmlformats.org/drawingml/2006/main" w="9525">
+            <a:solidFill>
+              <a:srgbClr val="CEDBD3"/>
+            </a:solidFill>
+          </a:ln>
+        </p:spPr>
+      </p:sp>
+      <p:sp>
+        <p:nvSpPr>
+          <p:cNvPr id="16" name="cue-2">
+            <a:extLst xmlns:a="http://schemas.openxmlformats.org/drawingml/2006/main">
+              <a:ext uri="{FF2B5EF4-FFF2-40B4-BE49-F238E27FC236}">
+                <a16:creationId xmlns:a16="http://schemas.microsoft.com/office/drawing/2014/main" id="{B24DF8BE-A05B-4168-B08E-4988EDF90F4A}"/>
+              </a:ext>
+            </a:extLst>
+          </p:cNvPr>
+          <p:cNvSpPr>
+            <a:spLocks xmlns:a="http://schemas.openxmlformats.org/drawingml/2006/main" noGrp="1"/>
+          </p:cNvSpPr>
+          <p:nvPr/>
+        </p:nvSpPr>
+        <p:spPr>
+          <a:xfrm xmlns:a="http://schemas.openxmlformats.org/drawingml/2006/main">
+            <a:off x="609600" y="4062413"/>
+            <a:ext cx="323850" cy="323850"/>
+          </a:xfrm>
+          <a:prstGeom xmlns:a="http://schemas.openxmlformats.org/drawingml/2006/main" prst="rect">
+            <a:avLst/>
+          </a:prstGeom>
+          <a:noFill xmlns:a="http://schemas.openxmlformats.org/drawingml/2006/main"/>
+          <a:ln xmlns:a="http://schemas.openxmlformats.org/drawingml/2006/main" w="0">
+            <a:noFill/>
+          </a:ln>
+        </p:spPr>
+        <p:txBody>
+          <a:bodyPr xmlns:a="http://schemas.openxmlformats.org/drawingml/2006/main" lIns="0" tIns="0" rIns="0" bIns="0" anchor="ctr">
+            <a:noAutofit/>
+          </a:bodyPr>
+          <a:lstStyle xmlns:a="http://schemas.openxmlformats.org/drawingml/2006/main"/>
+          <a:p xmlns:a="http://schemas.openxmlformats.org/drawingml/2006/main">
+            <a:pPr algn="l">
+              <a:defRPr sz="1350" b="1">
+                <a:solidFill>
+                  <a:srgbClr val="28685E"/>
+                </a:solidFill>
+                <a:latin typeface="Calibri"/>
+                <a:ea typeface="Calibri"/>
+                <a:cs typeface="Calibri"/>
+              </a:defRPr>
+            </a:pPr>
+            <a:r>
+              <a:rPr sz="1350" b="1">
+                <a:solidFill>
+                  <a:srgbClr val="28685E"/>
+                </a:solidFill>
+                <a:latin typeface="Calibri"/>
+                <a:ea typeface="Calibri"/>
+                <a:cs typeface="Calibri"/>
+              </a:rPr>
+              <a:t>03</a:t>
+            </a:r>
+          </a:p>
+        </p:txBody>
+      </p:sp>
+      <p:sp>
+        <p:nvSpPr>
+          <p:cNvPr id="17" name="row-rule-2">
+            <a:extLst xmlns:a="http://schemas.openxmlformats.org/drawingml/2006/main">
+              <a:ext uri="{FF2B5EF4-FFF2-40B4-BE49-F238E27FC236}">
+                <a16:creationId xmlns:a16="http://schemas.microsoft.com/office/drawing/2014/main" id="{9E9E5B5B-62DB-427C-A0BB-47CF2889692C}"/>
+              </a:ext>
+            </a:extLst>
+          </p:cNvPr>
+          <p:cNvSpPr>
+            <a:spLocks xmlns:a="http://schemas.openxmlformats.org/drawingml/2006/main" noGrp="1"/>
+          </p:cNvSpPr>
+          <p:nvPr/>
+        </p:nvSpPr>
+        <p:spPr>
+          <a:xfrm xmlns:a="http://schemas.openxmlformats.org/drawingml/2006/main">
+            <a:off x="1000125" y="4836319"/>
+            <a:ext cx="10334625" cy="0"/>
+          </a:xfrm>
+          <a:prstGeom xmlns:a="http://schemas.openxmlformats.org/drawingml/2006/main" prst="line">
+            <a:avLst/>
+          </a:prstGeom>
+          <a:noFill xmlns:a="http://schemas.openxmlformats.org/drawingml/2006/main"/>
+          <a:ln xmlns:a="http://schemas.openxmlformats.org/drawingml/2006/main" w="9525">
+            <a:solidFill>
+              <a:srgbClr val="CEDBD3"/>
+            </a:solidFill>
+          </a:ln>
+        </p:spPr>
+      </p:sp>
+      <p:sp>
+        <p:nvSpPr>
+          <p:cNvPr id="18" name="cue-3">
+            <a:extLst xmlns:a="http://schemas.openxmlformats.org/drawingml/2006/main">
+              <a:ext uri="{FF2B5EF4-FFF2-40B4-BE49-F238E27FC236}">
+                <a16:creationId xmlns:a16="http://schemas.microsoft.com/office/drawing/2014/main" id="{3FF07EAF-196B-404A-BE95-F7D32788649B}"/>
+              </a:ext>
+            </a:extLst>
+          </p:cNvPr>
+          <p:cNvSpPr>
+            <a:spLocks xmlns:a="http://schemas.openxmlformats.org/drawingml/2006/main" noGrp="1"/>
+          </p:cNvSpPr>
+          <p:nvPr/>
+        </p:nvSpPr>
+        <p:spPr>
+          <a:xfrm xmlns:a="http://schemas.openxmlformats.org/drawingml/2006/main">
+            <a:off x="609600" y="4912519"/>
+            <a:ext cx="323850" cy="323850"/>
+          </a:xfrm>
+          <a:prstGeom xmlns:a="http://schemas.openxmlformats.org/drawingml/2006/main" prst="rect">
+            <a:avLst/>
+          </a:prstGeom>
+          <a:noFill xmlns:a="http://schemas.openxmlformats.org/drawingml/2006/main"/>
+          <a:ln xmlns:a="http://schemas.openxmlformats.org/drawingml/2006/main" w="0">
+            <a:noFill/>
+          </a:ln>
+        </p:spPr>
+        <p:txBody>
+          <a:bodyPr xmlns:a="http://schemas.openxmlformats.org/drawingml/2006/main" lIns="0" tIns="0" rIns="0" bIns="0" anchor="ctr">
+            <a:noAutofit/>
+          </a:bodyPr>
+          <a:lstStyle xmlns:a="http://schemas.openxmlformats.org/drawingml/2006/main"/>
+          <a:p xmlns:a="http://schemas.openxmlformats.org/drawingml/2006/main">
+            <a:pPr algn="l">
+              <a:defRPr sz="1350" b="1">
+                <a:solidFill>
+                  <a:srgbClr val="28685E"/>
+                </a:solidFill>
+                <a:latin typeface="Calibri"/>
+                <a:ea typeface="Calibri"/>
+                <a:cs typeface="Calibri"/>
+              </a:defRPr>
+            </a:pPr>
+            <a:r>
+              <a:rPr sz="1350" b="1">
+                <a:solidFill>
+                  <a:srgbClr val="28685E"/>
+                </a:solidFill>
+                <a:latin typeface="Calibri"/>
+                <a:ea typeface="Calibri"/>
+                <a:cs typeface="Calibri"/>
+              </a:rPr>
+              <a:t>04</a:t>
             </a:r>
           </a:p>
         </p:txBody>
@@ -8063,7 +10196,7 @@
     <p:bg>
       <p:bgPr>
         <a:solidFill xmlns:a="http://schemas.openxmlformats.org/drawingml/2006/main">
-          <a:srgbClr val="F5F1E8"/>
+          <a:srgbClr val="FAF9F5"/>
         </a:solidFill>
       </p:bgPr>
     </p:bg>
@@ -8092,8 +10225,8 @@
         </p:nvSpPr>
         <p:spPr>
           <a:xfrm xmlns:a="http://schemas.openxmlformats.org/drawingml/2006/main">
-            <a:off x="609600" y="552450"/>
-            <a:ext cx="781050" cy="57150"/>
+            <a:off x="609600" y="733425"/>
+            <a:ext cx="781050" cy="38100"/>
           </a:xfrm>
           <a:prstGeom xmlns:a="http://schemas.openxmlformats.org/drawingml/2006/main" prst="rect">
             <a:avLst/>
@@ -8123,34 +10256,43 @@
         </p:nvSpPr>
         <p:spPr>
           <a:xfrm xmlns:a="http://schemas.openxmlformats.org/drawingml/2006/main">
-            <a:off x="609600" y="762000"/>
-            <a:ext cx="8572500" cy="285750"/>
-          </a:xfrm>
-          <a:prstGeom xmlns:a="http://schemas.openxmlformats.org/drawingml/2006/main" prst="rect">
-            <a:avLst/>
-          </a:prstGeom>
-          <a:noFill xmlns:a="http://schemas.openxmlformats.org/drawingml/2006/main"/>
-          <a:ln xmlns:a="http://schemas.openxmlformats.org/drawingml/2006/main" w="0">
-            <a:noFill/>
-            <a:prstDash val="solid"/>
-          </a:ln>
-        </p:spPr>
-        <p:txBody>
-          <a:bodyPr xmlns:a="http://schemas.openxmlformats.org/drawingml/2006/main" lIns="0" tIns="0" rIns="0" bIns="0" anchor="ctr"/>
-          <a:lstStyle xmlns:a="http://schemas.openxmlformats.org/drawingml/2006/main"/>
-          <a:p xmlns:a="http://schemas.openxmlformats.org/drawingml/2006/main">
-            <a:pPr>
-              <a:defRPr sz="1500" b="1">
+            <a:off x="609600" y="342900"/>
+            <a:ext cx="9334500" cy="304800"/>
+          </a:xfrm>
+          <a:prstGeom xmlns:a="http://schemas.openxmlformats.org/drawingml/2006/main" prst="rect">
+            <a:avLst/>
+          </a:prstGeom>
+          <a:noFill xmlns:a="http://schemas.openxmlformats.org/drawingml/2006/main"/>
+          <a:ln xmlns:a="http://schemas.openxmlformats.org/drawingml/2006/main" w="0">
+            <a:noFill/>
+            <a:prstDash val="solid"/>
+          </a:ln>
+        </p:spPr>
+        <p:txBody>
+          <a:bodyPr xmlns:a="http://schemas.openxmlformats.org/drawingml/2006/main" lIns="0" tIns="0" rIns="0" bIns="0" anchor="ctr">
+            <a:noAutofit/>
+          </a:bodyPr>
+          <a:lstStyle xmlns:a="http://schemas.openxmlformats.org/drawingml/2006/main"/>
+          <a:p xmlns:a="http://schemas.openxmlformats.org/drawingml/2006/main">
+            <a:pPr algn="l">
+              <a:buNone/>
+              <a:defRPr sz="1350" b="1">
                 <a:solidFill>
                   <a:srgbClr val="28685E"/>
                 </a:solidFill>
-              </a:defRPr>
-            </a:pPr>
-            <a:r>
-              <a:rPr sz="1500" b="1">
+                <a:latin typeface="Calibri"/>
+                <a:ea typeface="Calibri"/>
+                <a:cs typeface="Calibri"/>
+              </a:defRPr>
+            </a:pPr>
+            <a:r>
+              <a:rPr sz="1350" b="1">
                 <a:solidFill>
                   <a:srgbClr val="28685E"/>
                 </a:solidFill>
+                <a:latin typeface="Calibri"/>
+                <a:ea typeface="Calibri"/>
+                <a:cs typeface="Calibri"/>
               </a:rPr>
               <a:t>MADE BY MATT  /  GROW SCIENCE</a:t>
             </a:r>
@@ -8173,34 +10315,43 @@
         </p:nvSpPr>
         <p:spPr>
           <a:xfrm xmlns:a="http://schemas.openxmlformats.org/drawingml/2006/main">
-            <a:off x="609600" y="1352550"/>
-            <a:ext cx="10972800" cy="952500"/>
-          </a:xfrm>
-          <a:prstGeom xmlns:a="http://schemas.openxmlformats.org/drawingml/2006/main" prst="rect">
-            <a:avLst/>
-          </a:prstGeom>
-          <a:noFill xmlns:a="http://schemas.openxmlformats.org/drawingml/2006/main"/>
-          <a:ln xmlns:a="http://schemas.openxmlformats.org/drawingml/2006/main" w="0">
-            <a:noFill/>
-            <a:prstDash val="solid"/>
-          </a:ln>
-        </p:spPr>
-        <p:txBody>
-          <a:bodyPr xmlns:a="http://schemas.openxmlformats.org/drawingml/2006/main" lIns="0" tIns="0" rIns="0" bIns="0" anchor="ctr"/>
-          <a:lstStyle xmlns:a="http://schemas.openxmlformats.org/drawingml/2006/main"/>
-          <a:p xmlns:a="http://schemas.openxmlformats.org/drawingml/2006/main">
-            <a:pPr>
-              <a:defRPr sz="3750" b="1">
+            <a:off x="609600" y="990600"/>
+            <a:ext cx="10972800" cy="1000125"/>
+          </a:xfrm>
+          <a:prstGeom xmlns:a="http://schemas.openxmlformats.org/drawingml/2006/main" prst="rect">
+            <a:avLst/>
+          </a:prstGeom>
+          <a:noFill xmlns:a="http://schemas.openxmlformats.org/drawingml/2006/main"/>
+          <a:ln xmlns:a="http://schemas.openxmlformats.org/drawingml/2006/main" w="0">
+            <a:noFill/>
+            <a:prstDash val="solid"/>
+          </a:ln>
+        </p:spPr>
+        <p:txBody>
+          <a:bodyPr xmlns:a="http://schemas.openxmlformats.org/drawingml/2006/main" lIns="0" tIns="0" rIns="0" bIns="0" anchor="ctr">
+            <a:noAutofit/>
+          </a:bodyPr>
+          <a:lstStyle xmlns:a="http://schemas.openxmlformats.org/drawingml/2006/main"/>
+          <a:p xmlns:a="http://schemas.openxmlformats.org/drawingml/2006/main">
+            <a:pPr algn="l">
+              <a:buNone/>
+              <a:defRPr sz="3675" b="1">
                 <a:solidFill>
                   <a:srgbClr val="152B3A"/>
                 </a:solidFill>
-              </a:defRPr>
-            </a:pPr>
-            <a:r>
-              <a:rPr sz="3750" b="1">
+                <a:latin typeface="Calibri"/>
+                <a:ea typeface="Calibri"/>
+                <a:cs typeface="Calibri"/>
+              </a:defRPr>
+            </a:pPr>
+            <a:r>
+              <a:rPr sz="3675" b="1">
                 <a:solidFill>
                   <a:srgbClr val="152B3A"/>
                 </a:solidFill>
+                <a:latin typeface="Calibri"/>
+                <a:ea typeface="Calibri"/>
+                <a:cs typeface="Calibri"/>
               </a:rPr>
               <a:t>Which objects are levers?</a:t>
             </a:r>
@@ -8223,14 +10374,14 @@
         </p:nvSpPr>
         <p:spPr>
           <a:xfrm xmlns:a="http://schemas.openxmlformats.org/drawingml/2006/main">
-            <a:off x="609600" y="6219825"/>
+            <a:off x="609600" y="6191250"/>
             <a:ext cx="10972800" cy="9525"/>
           </a:xfrm>
           <a:prstGeom xmlns:a="http://schemas.openxmlformats.org/drawingml/2006/main" prst="rect">
             <a:avLst/>
           </a:prstGeom>
           <a:solidFill xmlns:a="http://schemas.openxmlformats.org/drawingml/2006/main">
-            <a:srgbClr val="DCE7DD"/>
+            <a:srgbClr val="CEDBD3"/>
           </a:solidFill>
           <a:ln xmlns:a="http://schemas.openxmlformats.org/drawingml/2006/main" w="0">
             <a:noFill/>
@@ -8254,34 +10405,43 @@
         </p:nvSpPr>
         <p:spPr>
           <a:xfrm xmlns:a="http://schemas.openxmlformats.org/drawingml/2006/main">
-            <a:off x="609600" y="6381750"/>
-            <a:ext cx="9906000" cy="228600"/>
-          </a:xfrm>
-          <a:prstGeom xmlns:a="http://schemas.openxmlformats.org/drawingml/2006/main" prst="rect">
-            <a:avLst/>
-          </a:prstGeom>
-          <a:noFill xmlns:a="http://schemas.openxmlformats.org/drawingml/2006/main"/>
-          <a:ln xmlns:a="http://schemas.openxmlformats.org/drawingml/2006/main" w="0">
-            <a:noFill/>
-            <a:prstDash val="solid"/>
-          </a:ln>
-        </p:spPr>
-        <p:txBody>
-          <a:bodyPr xmlns:a="http://schemas.openxmlformats.org/drawingml/2006/main" lIns="0" tIns="0" rIns="0" bIns="0" anchor="ctr"/>
-          <a:lstStyle xmlns:a="http://schemas.openxmlformats.org/drawingml/2006/main"/>
-          <a:p xmlns:a="http://schemas.openxmlformats.org/drawingml/2006/main">
-            <a:pPr>
-              <a:defRPr sz="1275" b="0">
+            <a:off x="609600" y="6419850"/>
+            <a:ext cx="9525000" cy="219075"/>
+          </a:xfrm>
+          <a:prstGeom xmlns:a="http://schemas.openxmlformats.org/drawingml/2006/main" prst="rect">
+            <a:avLst/>
+          </a:prstGeom>
+          <a:noFill xmlns:a="http://schemas.openxmlformats.org/drawingml/2006/main"/>
+          <a:ln xmlns:a="http://schemas.openxmlformats.org/drawingml/2006/main" w="0">
+            <a:noFill/>
+            <a:prstDash val="solid"/>
+          </a:ln>
+        </p:spPr>
+        <p:txBody>
+          <a:bodyPr xmlns:a="http://schemas.openxmlformats.org/drawingml/2006/main" lIns="0" tIns="0" rIns="0" bIns="0" anchor="ctr">
+            <a:noAutofit/>
+          </a:bodyPr>
+          <a:lstStyle xmlns:a="http://schemas.openxmlformats.org/drawingml/2006/main"/>
+          <a:p xmlns:a="http://schemas.openxmlformats.org/drawingml/2006/main">
+            <a:pPr algn="l">
+              <a:buNone/>
+              <a:defRPr sz="1200" b="0">
                 <a:solidFill>
                   <a:srgbClr val="50616B"/>
                 </a:solidFill>
-              </a:defRPr>
-            </a:pPr>
-            <a:r>
-              <a:rPr sz="1275" b="0">
+                <a:latin typeface="Calibri"/>
+                <a:ea typeface="Calibri"/>
+                <a:cs typeface="Calibri"/>
+              </a:defRPr>
+            </a:pPr>
+            <a:r>
+              <a:rPr sz="1200" b="0">
                 <a:solidFill>
                   <a:srgbClr val="50616B"/>
                 </a:solidFill>
+                <a:latin typeface="Calibri"/>
+                <a:ea typeface="Calibri"/>
+                <a:cs typeface="Calibri"/>
               </a:rPr>
               <a:t>AUTUMN 1  ·  WEEK 4  ·  LESSON A</a:t>
             </a:r>
@@ -8304,27 +10464,33 @@
         </p:nvSpPr>
         <p:spPr>
           <a:xfrm xmlns:a="http://schemas.openxmlformats.org/drawingml/2006/main">
-            <a:off x="11106150" y="6362700"/>
-            <a:ext cx="476250" cy="238125"/>
-          </a:xfrm>
-          <a:prstGeom xmlns:a="http://schemas.openxmlformats.org/drawingml/2006/main" prst="rect">
-            <a:avLst/>
-          </a:prstGeom>
-          <a:noFill xmlns:a="http://schemas.openxmlformats.org/drawingml/2006/main"/>
-          <a:ln xmlns:a="http://schemas.openxmlformats.org/drawingml/2006/main" w="0">
-            <a:noFill/>
-            <a:prstDash val="solid"/>
-          </a:ln>
-        </p:spPr>
-        <p:txBody>
-          <a:bodyPr xmlns:a="http://schemas.openxmlformats.org/drawingml/2006/main" lIns="0" tIns="0" rIns="0" bIns="0" anchor="ctr"/>
-          <a:lstStyle xmlns:a="http://schemas.openxmlformats.org/drawingml/2006/main"/>
-          <a:p xmlns:a="http://schemas.openxmlformats.org/drawingml/2006/main">
-            <a:pPr>
+            <a:off x="11106150" y="6400800"/>
+            <a:ext cx="476250" cy="247650"/>
+          </a:xfrm>
+          <a:prstGeom xmlns:a="http://schemas.openxmlformats.org/drawingml/2006/main" prst="rect">
+            <a:avLst/>
+          </a:prstGeom>
+          <a:noFill xmlns:a="http://schemas.openxmlformats.org/drawingml/2006/main"/>
+          <a:ln xmlns:a="http://schemas.openxmlformats.org/drawingml/2006/main" w="0">
+            <a:noFill/>
+            <a:prstDash val="solid"/>
+          </a:ln>
+        </p:spPr>
+        <p:txBody>
+          <a:bodyPr xmlns:a="http://schemas.openxmlformats.org/drawingml/2006/main" lIns="0" tIns="0" rIns="0" bIns="0" anchor="ctr">
+            <a:noAutofit/>
+          </a:bodyPr>
+          <a:lstStyle xmlns:a="http://schemas.openxmlformats.org/drawingml/2006/main"/>
+          <a:p xmlns:a="http://schemas.openxmlformats.org/drawingml/2006/main">
+            <a:pPr algn="l">
+              <a:buNone/>
               <a:defRPr sz="1350" b="1">
                 <a:solidFill>
                   <a:srgbClr val="28685E"/>
                 </a:solidFill>
+                <a:latin typeface="Calibri"/>
+                <a:ea typeface="Calibri"/>
+                <a:cs typeface="Calibri"/>
               </a:defRPr>
             </a:pPr>
             <a:r>
@@ -8332,6 +10498,9 @@
                 <a:solidFill>
                   <a:srgbClr val="28685E"/>
                 </a:solidFill>
+                <a:latin typeface="Calibri"/>
+                <a:ea typeface="Calibri"/>
+                <a:cs typeface="Calibri"/>
               </a:rPr>
               <a:t>07</a:t>
             </a:r>
@@ -8354,34 +10523,43 @@
         </p:nvSpPr>
         <p:spPr>
           <a:xfrm xmlns:a="http://schemas.openxmlformats.org/drawingml/2006/main">
-            <a:off x="609600" y="2524125"/>
-            <a:ext cx="10972800" cy="781050"/>
-          </a:xfrm>
-          <a:prstGeom xmlns:a="http://schemas.openxmlformats.org/drawingml/2006/main" prst="rect">
-            <a:avLst/>
-          </a:prstGeom>
-          <a:noFill xmlns:a="http://schemas.openxmlformats.org/drawingml/2006/main"/>
-          <a:ln xmlns:a="http://schemas.openxmlformats.org/drawingml/2006/main" w="0">
-            <a:noFill/>
-            <a:prstDash val="solid"/>
-          </a:ln>
-        </p:spPr>
-        <p:txBody>
-          <a:bodyPr xmlns:a="http://schemas.openxmlformats.org/drawingml/2006/main" lIns="0" tIns="0" rIns="0" bIns="0" anchor="ctr"/>
-          <a:lstStyle xmlns:a="http://schemas.openxmlformats.org/drawingml/2006/main"/>
-          <a:p xmlns:a="http://schemas.openxmlformats.org/drawingml/2006/main">
-            <a:pPr>
-              <a:defRPr sz="2550" b="0">
+            <a:off x="1000125" y="2333625"/>
+            <a:ext cx="10382250" cy="1076325"/>
+          </a:xfrm>
+          <a:prstGeom xmlns:a="http://schemas.openxmlformats.org/drawingml/2006/main" prst="rect">
+            <a:avLst/>
+          </a:prstGeom>
+          <a:noFill xmlns:a="http://schemas.openxmlformats.org/drawingml/2006/main"/>
+          <a:ln xmlns:a="http://schemas.openxmlformats.org/drawingml/2006/main" w="0">
+            <a:noFill/>
+            <a:prstDash val="solid"/>
+          </a:ln>
+        </p:spPr>
+        <p:txBody>
+          <a:bodyPr xmlns:a="http://schemas.openxmlformats.org/drawingml/2006/main" lIns="0" tIns="0" rIns="0" bIns="0" anchor="ctr">
+            <a:noAutofit/>
+          </a:bodyPr>
+          <a:lstStyle xmlns:a="http://schemas.openxmlformats.org/drawingml/2006/main"/>
+          <a:p xmlns:a="http://schemas.openxmlformats.org/drawingml/2006/main">
+            <a:pPr algn="l">
+              <a:buNone/>
+              <a:defRPr sz="2625" b="0">
                 <a:solidFill>
                   <a:srgbClr val="152B3A"/>
                 </a:solidFill>
-              </a:defRPr>
-            </a:pPr>
-            <a:r>
-              <a:rPr sz="2550" b="0">
+                <a:latin typeface="Calibri"/>
+                <a:ea typeface="Calibri"/>
+                <a:cs typeface="Calibri"/>
+              </a:defRPr>
+            </a:pPr>
+            <a:r>
+              <a:rPr sz="2625" b="0">
                 <a:solidFill>
                   <a:srgbClr val="152B3A"/>
                 </a:solidFill>
+                <a:latin typeface="Calibri"/>
+                <a:ea typeface="Calibri"/>
+                <a:cs typeface="Calibri"/>
               </a:rPr>
               <a:t>Wheelbarrow</a:t>
             </a:r>
@@ -8404,34 +10582,43 @@
         </p:nvSpPr>
         <p:spPr>
           <a:xfrm xmlns:a="http://schemas.openxmlformats.org/drawingml/2006/main">
-            <a:off x="609600" y="3381375"/>
-            <a:ext cx="10972800" cy="781050"/>
-          </a:xfrm>
-          <a:prstGeom xmlns:a="http://schemas.openxmlformats.org/drawingml/2006/main" prst="rect">
-            <a:avLst/>
-          </a:prstGeom>
-          <a:noFill xmlns:a="http://schemas.openxmlformats.org/drawingml/2006/main"/>
-          <a:ln xmlns:a="http://schemas.openxmlformats.org/drawingml/2006/main" w="0">
-            <a:noFill/>
-            <a:prstDash val="solid"/>
-          </a:ln>
-        </p:spPr>
-        <p:txBody>
-          <a:bodyPr xmlns:a="http://schemas.openxmlformats.org/drawingml/2006/main" lIns="0" tIns="0" rIns="0" bIns="0" anchor="ctr"/>
-          <a:lstStyle xmlns:a="http://schemas.openxmlformats.org/drawingml/2006/main"/>
-          <a:p xmlns:a="http://schemas.openxmlformats.org/drawingml/2006/main">
-            <a:pPr>
-              <a:defRPr sz="2550" b="0">
+            <a:off x="1000125" y="3467100"/>
+            <a:ext cx="10382250" cy="1076325"/>
+          </a:xfrm>
+          <a:prstGeom xmlns:a="http://schemas.openxmlformats.org/drawingml/2006/main" prst="rect">
+            <a:avLst/>
+          </a:prstGeom>
+          <a:noFill xmlns:a="http://schemas.openxmlformats.org/drawingml/2006/main"/>
+          <a:ln xmlns:a="http://schemas.openxmlformats.org/drawingml/2006/main" w="0">
+            <a:noFill/>
+            <a:prstDash val="solid"/>
+          </a:ln>
+        </p:spPr>
+        <p:txBody>
+          <a:bodyPr xmlns:a="http://schemas.openxmlformats.org/drawingml/2006/main" lIns="0" tIns="0" rIns="0" bIns="0" anchor="ctr">
+            <a:noAutofit/>
+          </a:bodyPr>
+          <a:lstStyle xmlns:a="http://schemas.openxmlformats.org/drawingml/2006/main"/>
+          <a:p xmlns:a="http://schemas.openxmlformats.org/drawingml/2006/main">
+            <a:pPr algn="l">
+              <a:buNone/>
+              <a:defRPr sz="2625" b="0">
                 <a:solidFill>
                   <a:srgbClr val="152B3A"/>
                 </a:solidFill>
-              </a:defRPr>
-            </a:pPr>
-            <a:r>
-              <a:rPr sz="2550" b="0">
+                <a:latin typeface="Calibri"/>
+                <a:ea typeface="Calibri"/>
+                <a:cs typeface="Calibri"/>
+              </a:defRPr>
+            </a:pPr>
+            <a:r>
+              <a:rPr sz="2625" b="0">
                 <a:solidFill>
                   <a:srgbClr val="152B3A"/>
                 </a:solidFill>
+                <a:latin typeface="Calibri"/>
+                <a:ea typeface="Calibri"/>
+                <a:cs typeface="Calibri"/>
               </a:rPr>
               <a:t>Scissors</a:t>
             </a:r>
@@ -8454,34 +10641,43 @@
         </p:nvSpPr>
         <p:spPr>
           <a:xfrm xmlns:a="http://schemas.openxmlformats.org/drawingml/2006/main">
-            <a:off x="609600" y="4238625"/>
-            <a:ext cx="10972800" cy="781050"/>
-          </a:xfrm>
-          <a:prstGeom xmlns:a="http://schemas.openxmlformats.org/drawingml/2006/main" prst="rect">
-            <a:avLst/>
-          </a:prstGeom>
-          <a:noFill xmlns:a="http://schemas.openxmlformats.org/drawingml/2006/main"/>
-          <a:ln xmlns:a="http://schemas.openxmlformats.org/drawingml/2006/main" w="0">
-            <a:noFill/>
-            <a:prstDash val="solid"/>
-          </a:ln>
-        </p:spPr>
-        <p:txBody>
-          <a:bodyPr xmlns:a="http://schemas.openxmlformats.org/drawingml/2006/main" lIns="0" tIns="0" rIns="0" bIns="0" anchor="ctr"/>
-          <a:lstStyle xmlns:a="http://schemas.openxmlformats.org/drawingml/2006/main"/>
-          <a:p xmlns:a="http://schemas.openxmlformats.org/drawingml/2006/main">
-            <a:pPr>
-              <a:defRPr sz="2550" b="0">
+            <a:off x="1000125" y="4600575"/>
+            <a:ext cx="10382250" cy="1076325"/>
+          </a:xfrm>
+          <a:prstGeom xmlns:a="http://schemas.openxmlformats.org/drawingml/2006/main" prst="rect">
+            <a:avLst/>
+          </a:prstGeom>
+          <a:noFill xmlns:a="http://schemas.openxmlformats.org/drawingml/2006/main"/>
+          <a:ln xmlns:a="http://schemas.openxmlformats.org/drawingml/2006/main" w="0">
+            <a:noFill/>
+            <a:prstDash val="solid"/>
+          </a:ln>
+        </p:spPr>
+        <p:txBody>
+          <a:bodyPr xmlns:a="http://schemas.openxmlformats.org/drawingml/2006/main" lIns="0" tIns="0" rIns="0" bIns="0" anchor="ctr">
+            <a:noAutofit/>
+          </a:bodyPr>
+          <a:lstStyle xmlns:a="http://schemas.openxmlformats.org/drawingml/2006/main"/>
+          <a:p xmlns:a="http://schemas.openxmlformats.org/drawingml/2006/main">
+            <a:pPr algn="l">
+              <a:buNone/>
+              <a:defRPr sz="2625" b="0">
                 <a:solidFill>
                   <a:srgbClr val="152B3A"/>
                 </a:solidFill>
-              </a:defRPr>
-            </a:pPr>
-            <a:r>
-              <a:rPr sz="2550" b="0">
+                <a:latin typeface="Calibri"/>
+                <a:ea typeface="Calibri"/>
+                <a:cs typeface="Calibri"/>
+              </a:defRPr>
+            </a:pPr>
+            <a:r>
+              <a:rPr sz="2625" b="0">
                 <a:solidFill>
                   <a:srgbClr val="152B3A"/>
                 </a:solidFill>
+                <a:latin typeface="Calibri"/>
+                <a:ea typeface="Calibri"/>
+                <a:cs typeface="Calibri"/>
               </a:rPr>
               <a:t>Spanner on a bolt</a:t>
             </a:r>
@@ -8521,6 +10717,7 @@
           <a:lstStyle xmlns:a="http://schemas.openxmlformats.org/drawingml/2006/main"/>
           <a:p xmlns:a="http://schemas.openxmlformats.org/drawingml/2006/main">
             <a:pPr>
+              <a:buNone/>
               <a:defRPr sz="2100" b="1">
                 <a:solidFill>
                   <a:srgbClr val="28685E"/>
@@ -8534,6 +10731,237 @@
                 </a:solidFill>
               </a:rPr>
               <a:t>Point to a turning point before naming it.</a:t>
+            </a:r>
+          </a:p>
+        </p:txBody>
+      </p:sp>
+      <p:sp>
+        <p:nvSpPr>
+          <p:cNvPr id="12" name="cue-0">
+            <a:extLst xmlns:a="http://schemas.openxmlformats.org/drawingml/2006/main">
+              <a:ext uri="{FF2B5EF4-FFF2-40B4-BE49-F238E27FC236}">
+                <a16:creationId xmlns:a16="http://schemas.microsoft.com/office/drawing/2014/main" id="{90990B9A-E4B2-44DD-8253-3CC716E5BB5A}"/>
+              </a:ext>
+            </a:extLst>
+          </p:cNvPr>
+          <p:cNvSpPr>
+            <a:spLocks xmlns:a="http://schemas.openxmlformats.org/drawingml/2006/main" noGrp="1"/>
+          </p:cNvSpPr>
+          <p:nvPr/>
+        </p:nvSpPr>
+        <p:spPr>
+          <a:xfrm xmlns:a="http://schemas.openxmlformats.org/drawingml/2006/main">
+            <a:off x="609600" y="2362200"/>
+            <a:ext cx="323850" cy="323850"/>
+          </a:xfrm>
+          <a:prstGeom xmlns:a="http://schemas.openxmlformats.org/drawingml/2006/main" prst="rect">
+            <a:avLst/>
+          </a:prstGeom>
+          <a:noFill xmlns:a="http://schemas.openxmlformats.org/drawingml/2006/main"/>
+          <a:ln xmlns:a="http://schemas.openxmlformats.org/drawingml/2006/main" w="0">
+            <a:noFill/>
+          </a:ln>
+        </p:spPr>
+        <p:txBody>
+          <a:bodyPr xmlns:a="http://schemas.openxmlformats.org/drawingml/2006/main" lIns="0" tIns="0" rIns="0" bIns="0" anchor="ctr">
+            <a:noAutofit/>
+          </a:bodyPr>
+          <a:lstStyle xmlns:a="http://schemas.openxmlformats.org/drawingml/2006/main"/>
+          <a:p xmlns:a="http://schemas.openxmlformats.org/drawingml/2006/main">
+            <a:pPr algn="l">
+              <a:defRPr sz="1350" b="1">
+                <a:solidFill>
+                  <a:srgbClr val="28685E"/>
+                </a:solidFill>
+                <a:latin typeface="Calibri"/>
+                <a:ea typeface="Calibri"/>
+                <a:cs typeface="Calibri"/>
+              </a:defRPr>
+            </a:pPr>
+            <a:r>
+              <a:rPr sz="1350" b="1">
+                <a:solidFill>
+                  <a:srgbClr val="28685E"/>
+                </a:solidFill>
+                <a:latin typeface="Calibri"/>
+                <a:ea typeface="Calibri"/>
+                <a:cs typeface="Calibri"/>
+              </a:rPr>
+              <a:t>01</a:t>
+            </a:r>
+          </a:p>
+        </p:txBody>
+      </p:sp>
+      <p:sp>
+        <p:nvSpPr>
+          <p:cNvPr id="13" name="row-rule-0">
+            <a:extLst xmlns:a="http://schemas.openxmlformats.org/drawingml/2006/main">
+              <a:ext uri="{FF2B5EF4-FFF2-40B4-BE49-F238E27FC236}">
+                <a16:creationId xmlns:a16="http://schemas.microsoft.com/office/drawing/2014/main" id="{E2BD1944-0348-4F5D-941F-D8D13FA0394B}"/>
+              </a:ext>
+            </a:extLst>
+          </p:cNvPr>
+          <p:cNvSpPr>
+            <a:spLocks xmlns:a="http://schemas.openxmlformats.org/drawingml/2006/main" noGrp="1"/>
+          </p:cNvSpPr>
+          <p:nvPr/>
+        </p:nvSpPr>
+        <p:spPr>
+          <a:xfrm xmlns:a="http://schemas.openxmlformats.org/drawingml/2006/main">
+            <a:off x="1000125" y="3419475"/>
+            <a:ext cx="10334625" cy="0"/>
+          </a:xfrm>
+          <a:prstGeom xmlns:a="http://schemas.openxmlformats.org/drawingml/2006/main" prst="line">
+            <a:avLst/>
+          </a:prstGeom>
+          <a:noFill xmlns:a="http://schemas.openxmlformats.org/drawingml/2006/main"/>
+          <a:ln xmlns:a="http://schemas.openxmlformats.org/drawingml/2006/main" w="9525">
+            <a:solidFill>
+              <a:srgbClr val="CEDBD3"/>
+            </a:solidFill>
+          </a:ln>
+        </p:spPr>
+      </p:sp>
+      <p:sp>
+        <p:nvSpPr>
+          <p:cNvPr id="14" name="cue-1">
+            <a:extLst xmlns:a="http://schemas.openxmlformats.org/drawingml/2006/main">
+              <a:ext uri="{FF2B5EF4-FFF2-40B4-BE49-F238E27FC236}">
+                <a16:creationId xmlns:a16="http://schemas.microsoft.com/office/drawing/2014/main" id="{C05C380F-8967-41C2-AAE5-4A4A0615C56C}"/>
+              </a:ext>
+            </a:extLst>
+          </p:cNvPr>
+          <p:cNvSpPr>
+            <a:spLocks xmlns:a="http://schemas.openxmlformats.org/drawingml/2006/main" noGrp="1"/>
+          </p:cNvSpPr>
+          <p:nvPr/>
+        </p:nvSpPr>
+        <p:spPr>
+          <a:xfrm xmlns:a="http://schemas.openxmlformats.org/drawingml/2006/main">
+            <a:off x="609600" y="3495675"/>
+            <a:ext cx="323850" cy="323850"/>
+          </a:xfrm>
+          <a:prstGeom xmlns:a="http://schemas.openxmlformats.org/drawingml/2006/main" prst="rect">
+            <a:avLst/>
+          </a:prstGeom>
+          <a:noFill xmlns:a="http://schemas.openxmlformats.org/drawingml/2006/main"/>
+          <a:ln xmlns:a="http://schemas.openxmlformats.org/drawingml/2006/main" w="0">
+            <a:noFill/>
+          </a:ln>
+        </p:spPr>
+        <p:txBody>
+          <a:bodyPr xmlns:a="http://schemas.openxmlformats.org/drawingml/2006/main" lIns="0" tIns="0" rIns="0" bIns="0" anchor="ctr">
+            <a:noAutofit/>
+          </a:bodyPr>
+          <a:lstStyle xmlns:a="http://schemas.openxmlformats.org/drawingml/2006/main"/>
+          <a:p xmlns:a="http://schemas.openxmlformats.org/drawingml/2006/main">
+            <a:pPr algn="l">
+              <a:defRPr sz="1350" b="1">
+                <a:solidFill>
+                  <a:srgbClr val="28685E"/>
+                </a:solidFill>
+                <a:latin typeface="Calibri"/>
+                <a:ea typeface="Calibri"/>
+                <a:cs typeface="Calibri"/>
+              </a:defRPr>
+            </a:pPr>
+            <a:r>
+              <a:rPr sz="1350" b="1">
+                <a:solidFill>
+                  <a:srgbClr val="28685E"/>
+                </a:solidFill>
+                <a:latin typeface="Calibri"/>
+                <a:ea typeface="Calibri"/>
+                <a:cs typeface="Calibri"/>
+              </a:rPr>
+              <a:t>02</a:t>
+            </a:r>
+          </a:p>
+        </p:txBody>
+      </p:sp>
+      <p:sp>
+        <p:nvSpPr>
+          <p:cNvPr id="15" name="row-rule-1">
+            <a:extLst xmlns:a="http://schemas.openxmlformats.org/drawingml/2006/main">
+              <a:ext uri="{FF2B5EF4-FFF2-40B4-BE49-F238E27FC236}">
+                <a16:creationId xmlns:a16="http://schemas.microsoft.com/office/drawing/2014/main" id="{CF18B34C-A9A6-447E-930E-B12D6ECB8FCD}"/>
+              </a:ext>
+            </a:extLst>
+          </p:cNvPr>
+          <p:cNvSpPr>
+            <a:spLocks xmlns:a="http://schemas.openxmlformats.org/drawingml/2006/main" noGrp="1"/>
+          </p:cNvSpPr>
+          <p:nvPr/>
+        </p:nvSpPr>
+        <p:spPr>
+          <a:xfrm xmlns:a="http://schemas.openxmlformats.org/drawingml/2006/main">
+            <a:off x="1000125" y="4552950"/>
+            <a:ext cx="10334625" cy="0"/>
+          </a:xfrm>
+          <a:prstGeom xmlns:a="http://schemas.openxmlformats.org/drawingml/2006/main" prst="line">
+            <a:avLst/>
+          </a:prstGeom>
+          <a:noFill xmlns:a="http://schemas.openxmlformats.org/drawingml/2006/main"/>
+          <a:ln xmlns:a="http://schemas.openxmlformats.org/drawingml/2006/main" w="9525">
+            <a:solidFill>
+              <a:srgbClr val="CEDBD3"/>
+            </a:solidFill>
+          </a:ln>
+        </p:spPr>
+      </p:sp>
+      <p:sp>
+        <p:nvSpPr>
+          <p:cNvPr id="16" name="cue-2">
+            <a:extLst xmlns:a="http://schemas.openxmlformats.org/drawingml/2006/main">
+              <a:ext uri="{FF2B5EF4-FFF2-40B4-BE49-F238E27FC236}">
+                <a16:creationId xmlns:a16="http://schemas.microsoft.com/office/drawing/2014/main" id="{55C752F2-1E27-465B-97F1-BCD81066AFB0}"/>
+              </a:ext>
+            </a:extLst>
+          </p:cNvPr>
+          <p:cNvSpPr>
+            <a:spLocks xmlns:a="http://schemas.openxmlformats.org/drawingml/2006/main" noGrp="1"/>
+          </p:cNvSpPr>
+          <p:nvPr/>
+        </p:nvSpPr>
+        <p:spPr>
+          <a:xfrm xmlns:a="http://schemas.openxmlformats.org/drawingml/2006/main">
+            <a:off x="609600" y="4629150"/>
+            <a:ext cx="323850" cy="323850"/>
+          </a:xfrm>
+          <a:prstGeom xmlns:a="http://schemas.openxmlformats.org/drawingml/2006/main" prst="rect">
+            <a:avLst/>
+          </a:prstGeom>
+          <a:noFill xmlns:a="http://schemas.openxmlformats.org/drawingml/2006/main"/>
+          <a:ln xmlns:a="http://schemas.openxmlformats.org/drawingml/2006/main" w="0">
+            <a:noFill/>
+          </a:ln>
+        </p:spPr>
+        <p:txBody>
+          <a:bodyPr xmlns:a="http://schemas.openxmlformats.org/drawingml/2006/main" lIns="0" tIns="0" rIns="0" bIns="0" anchor="ctr">
+            <a:noAutofit/>
+          </a:bodyPr>
+          <a:lstStyle xmlns:a="http://schemas.openxmlformats.org/drawingml/2006/main"/>
+          <a:p xmlns:a="http://schemas.openxmlformats.org/drawingml/2006/main">
+            <a:pPr algn="l">
+              <a:defRPr sz="1350" b="1">
+                <a:solidFill>
+                  <a:srgbClr val="28685E"/>
+                </a:solidFill>
+                <a:latin typeface="Calibri"/>
+                <a:ea typeface="Calibri"/>
+                <a:cs typeface="Calibri"/>
+              </a:defRPr>
+            </a:pPr>
+            <a:r>
+              <a:rPr sz="1350" b="1">
+                <a:solidFill>
+                  <a:srgbClr val="28685E"/>
+                </a:solidFill>
+                <a:latin typeface="Calibri"/>
+                <a:ea typeface="Calibri"/>
+                <a:cs typeface="Calibri"/>
+              </a:rPr>
+              <a:t>03</a:t>
             </a:r>
           </a:p>
         </p:txBody>
@@ -8554,7 +10982,7 @@
     <p:bg>
       <p:bgPr>
         <a:solidFill xmlns:a="http://schemas.openxmlformats.org/drawingml/2006/main">
-          <a:srgbClr val="F5F1E8"/>
+          <a:srgbClr val="FAF9F5"/>
         </a:solidFill>
       </p:bgPr>
     </p:bg>
@@ -8583,8 +11011,8 @@
         </p:nvSpPr>
         <p:spPr>
           <a:xfrm xmlns:a="http://schemas.openxmlformats.org/drawingml/2006/main">
-            <a:off x="609600" y="552450"/>
-            <a:ext cx="781050" cy="57150"/>
+            <a:off x="609600" y="733425"/>
+            <a:ext cx="781050" cy="38100"/>
           </a:xfrm>
           <a:prstGeom xmlns:a="http://schemas.openxmlformats.org/drawingml/2006/main" prst="rect">
             <a:avLst/>
@@ -8614,34 +11042,43 @@
         </p:nvSpPr>
         <p:spPr>
           <a:xfrm xmlns:a="http://schemas.openxmlformats.org/drawingml/2006/main">
-            <a:off x="609600" y="762000"/>
-            <a:ext cx="8572500" cy="285750"/>
-          </a:xfrm>
-          <a:prstGeom xmlns:a="http://schemas.openxmlformats.org/drawingml/2006/main" prst="rect">
-            <a:avLst/>
-          </a:prstGeom>
-          <a:noFill xmlns:a="http://schemas.openxmlformats.org/drawingml/2006/main"/>
-          <a:ln xmlns:a="http://schemas.openxmlformats.org/drawingml/2006/main" w="0">
-            <a:noFill/>
-            <a:prstDash val="solid"/>
-          </a:ln>
-        </p:spPr>
-        <p:txBody>
-          <a:bodyPr xmlns:a="http://schemas.openxmlformats.org/drawingml/2006/main" lIns="0" tIns="0" rIns="0" bIns="0" anchor="ctr"/>
-          <a:lstStyle xmlns:a="http://schemas.openxmlformats.org/drawingml/2006/main"/>
-          <a:p xmlns:a="http://schemas.openxmlformats.org/drawingml/2006/main">
-            <a:pPr>
-              <a:defRPr sz="1500" b="1">
+            <a:off x="609600" y="342900"/>
+            <a:ext cx="9334500" cy="304800"/>
+          </a:xfrm>
+          <a:prstGeom xmlns:a="http://schemas.openxmlformats.org/drawingml/2006/main" prst="rect">
+            <a:avLst/>
+          </a:prstGeom>
+          <a:noFill xmlns:a="http://schemas.openxmlformats.org/drawingml/2006/main"/>
+          <a:ln xmlns:a="http://schemas.openxmlformats.org/drawingml/2006/main" w="0">
+            <a:noFill/>
+            <a:prstDash val="solid"/>
+          </a:ln>
+        </p:spPr>
+        <p:txBody>
+          <a:bodyPr xmlns:a="http://schemas.openxmlformats.org/drawingml/2006/main" lIns="0" tIns="0" rIns="0" bIns="0" anchor="ctr">
+            <a:noAutofit/>
+          </a:bodyPr>
+          <a:lstStyle xmlns:a="http://schemas.openxmlformats.org/drawingml/2006/main"/>
+          <a:p xmlns:a="http://schemas.openxmlformats.org/drawingml/2006/main">
+            <a:pPr algn="l">
+              <a:buNone/>
+              <a:defRPr sz="1350" b="1">
                 <a:solidFill>
                   <a:srgbClr val="28685E"/>
                 </a:solidFill>
-              </a:defRPr>
-            </a:pPr>
-            <a:r>
-              <a:rPr sz="1500" b="1">
+                <a:latin typeface="Calibri"/>
+                <a:ea typeface="Calibri"/>
+                <a:cs typeface="Calibri"/>
+              </a:defRPr>
+            </a:pPr>
+            <a:r>
+              <a:rPr sz="1350" b="1">
                 <a:solidFill>
                   <a:srgbClr val="28685E"/>
                 </a:solidFill>
+                <a:latin typeface="Calibri"/>
+                <a:ea typeface="Calibri"/>
+                <a:cs typeface="Calibri"/>
               </a:rPr>
               <a:t>MADE BY MATT  /  GROW SCIENCE</a:t>
             </a:r>
@@ -8664,34 +11101,43 @@
         </p:nvSpPr>
         <p:spPr>
           <a:xfrm xmlns:a="http://schemas.openxmlformats.org/drawingml/2006/main">
-            <a:off x="609600" y="1352550"/>
-            <a:ext cx="10972800" cy="952500"/>
-          </a:xfrm>
-          <a:prstGeom xmlns:a="http://schemas.openxmlformats.org/drawingml/2006/main" prst="rect">
-            <a:avLst/>
-          </a:prstGeom>
-          <a:noFill xmlns:a="http://schemas.openxmlformats.org/drawingml/2006/main"/>
-          <a:ln xmlns:a="http://schemas.openxmlformats.org/drawingml/2006/main" w="0">
-            <a:noFill/>
-            <a:prstDash val="solid"/>
-          </a:ln>
-        </p:spPr>
-        <p:txBody>
-          <a:bodyPr xmlns:a="http://schemas.openxmlformats.org/drawingml/2006/main" lIns="0" tIns="0" rIns="0" bIns="0" anchor="ctr"/>
-          <a:lstStyle xmlns:a="http://schemas.openxmlformats.org/drawingml/2006/main"/>
-          <a:p xmlns:a="http://schemas.openxmlformats.org/drawingml/2006/main">
-            <a:pPr>
-              <a:defRPr sz="3750" b="1">
+            <a:off x="609600" y="990600"/>
+            <a:ext cx="10972800" cy="1000125"/>
+          </a:xfrm>
+          <a:prstGeom xmlns:a="http://schemas.openxmlformats.org/drawingml/2006/main" prst="rect">
+            <a:avLst/>
+          </a:prstGeom>
+          <a:noFill xmlns:a="http://schemas.openxmlformats.org/drawingml/2006/main"/>
+          <a:ln xmlns:a="http://schemas.openxmlformats.org/drawingml/2006/main" w="0">
+            <a:noFill/>
+            <a:prstDash val="solid"/>
+          </a:ln>
+        </p:spPr>
+        <p:txBody>
+          <a:bodyPr xmlns:a="http://schemas.openxmlformats.org/drawingml/2006/main" lIns="0" tIns="0" rIns="0" bIns="0" anchor="ctr">
+            <a:noAutofit/>
+          </a:bodyPr>
+          <a:lstStyle xmlns:a="http://schemas.openxmlformats.org/drawingml/2006/main"/>
+          <a:p xmlns:a="http://schemas.openxmlformats.org/drawingml/2006/main">
+            <a:pPr algn="l">
+              <a:buNone/>
+              <a:defRPr sz="3675" b="1">
                 <a:solidFill>
                   <a:srgbClr val="152B3A"/>
                 </a:solidFill>
-              </a:defRPr>
-            </a:pPr>
-            <a:r>
-              <a:rPr sz="3750" b="1">
+                <a:latin typeface="Calibri"/>
+                <a:ea typeface="Calibri"/>
+                <a:cs typeface="Calibri"/>
+              </a:defRPr>
+            </a:pPr>
+            <a:r>
+              <a:rPr sz="3675" b="1">
                 <a:solidFill>
                   <a:srgbClr val="152B3A"/>
                 </a:solidFill>
+                <a:latin typeface="Calibri"/>
+                <a:ea typeface="Calibri"/>
+                <a:cs typeface="Calibri"/>
               </a:rPr>
               <a:t>A fixed pulley changes direction</a:t>
             </a:r>
@@ -8714,14 +11160,14 @@
         </p:nvSpPr>
         <p:spPr>
           <a:xfrm xmlns:a="http://schemas.openxmlformats.org/drawingml/2006/main">
-            <a:off x="609600" y="6219825"/>
+            <a:off x="609600" y="6191250"/>
             <a:ext cx="10972800" cy="9525"/>
           </a:xfrm>
           <a:prstGeom xmlns:a="http://schemas.openxmlformats.org/drawingml/2006/main" prst="rect">
             <a:avLst/>
           </a:prstGeom>
           <a:solidFill xmlns:a="http://schemas.openxmlformats.org/drawingml/2006/main">
-            <a:srgbClr val="DCE7DD"/>
+            <a:srgbClr val="CEDBD3"/>
           </a:solidFill>
           <a:ln xmlns:a="http://schemas.openxmlformats.org/drawingml/2006/main" w="0">
             <a:noFill/>
@@ -8745,34 +11191,43 @@
         </p:nvSpPr>
         <p:spPr>
           <a:xfrm xmlns:a="http://schemas.openxmlformats.org/drawingml/2006/main">
-            <a:off x="609600" y="6381750"/>
-            <a:ext cx="9906000" cy="228600"/>
-          </a:xfrm>
-          <a:prstGeom xmlns:a="http://schemas.openxmlformats.org/drawingml/2006/main" prst="rect">
-            <a:avLst/>
-          </a:prstGeom>
-          <a:noFill xmlns:a="http://schemas.openxmlformats.org/drawingml/2006/main"/>
-          <a:ln xmlns:a="http://schemas.openxmlformats.org/drawingml/2006/main" w="0">
-            <a:noFill/>
-            <a:prstDash val="solid"/>
-          </a:ln>
-        </p:spPr>
-        <p:txBody>
-          <a:bodyPr xmlns:a="http://schemas.openxmlformats.org/drawingml/2006/main" lIns="0" tIns="0" rIns="0" bIns="0" anchor="ctr"/>
-          <a:lstStyle xmlns:a="http://schemas.openxmlformats.org/drawingml/2006/main"/>
-          <a:p xmlns:a="http://schemas.openxmlformats.org/drawingml/2006/main">
-            <a:pPr>
-              <a:defRPr sz="1275" b="0">
+            <a:off x="609600" y="6419850"/>
+            <a:ext cx="9525000" cy="219075"/>
+          </a:xfrm>
+          <a:prstGeom xmlns:a="http://schemas.openxmlformats.org/drawingml/2006/main" prst="rect">
+            <a:avLst/>
+          </a:prstGeom>
+          <a:noFill xmlns:a="http://schemas.openxmlformats.org/drawingml/2006/main"/>
+          <a:ln xmlns:a="http://schemas.openxmlformats.org/drawingml/2006/main" w="0">
+            <a:noFill/>
+            <a:prstDash val="solid"/>
+          </a:ln>
+        </p:spPr>
+        <p:txBody>
+          <a:bodyPr xmlns:a="http://schemas.openxmlformats.org/drawingml/2006/main" lIns="0" tIns="0" rIns="0" bIns="0" anchor="ctr">
+            <a:noAutofit/>
+          </a:bodyPr>
+          <a:lstStyle xmlns:a="http://schemas.openxmlformats.org/drawingml/2006/main"/>
+          <a:p xmlns:a="http://schemas.openxmlformats.org/drawingml/2006/main">
+            <a:pPr algn="l">
+              <a:buNone/>
+              <a:defRPr sz="1200" b="0">
                 <a:solidFill>
                   <a:srgbClr val="50616B"/>
                 </a:solidFill>
-              </a:defRPr>
-            </a:pPr>
-            <a:r>
-              <a:rPr sz="1275" b="0">
+                <a:latin typeface="Calibri"/>
+                <a:ea typeface="Calibri"/>
+                <a:cs typeface="Calibri"/>
+              </a:defRPr>
+            </a:pPr>
+            <a:r>
+              <a:rPr sz="1200" b="0">
                 <a:solidFill>
                   <a:srgbClr val="50616B"/>
                 </a:solidFill>
+                <a:latin typeface="Calibri"/>
+                <a:ea typeface="Calibri"/>
+                <a:cs typeface="Calibri"/>
               </a:rPr>
               <a:t>AUTUMN 1  ·  WEEK 4  ·  LESSON A</a:t>
             </a:r>
@@ -8795,27 +11250,33 @@
         </p:nvSpPr>
         <p:spPr>
           <a:xfrm xmlns:a="http://schemas.openxmlformats.org/drawingml/2006/main">
-            <a:off x="11106150" y="6362700"/>
-            <a:ext cx="476250" cy="238125"/>
-          </a:xfrm>
-          <a:prstGeom xmlns:a="http://schemas.openxmlformats.org/drawingml/2006/main" prst="rect">
-            <a:avLst/>
-          </a:prstGeom>
-          <a:noFill xmlns:a="http://schemas.openxmlformats.org/drawingml/2006/main"/>
-          <a:ln xmlns:a="http://schemas.openxmlformats.org/drawingml/2006/main" w="0">
-            <a:noFill/>
-            <a:prstDash val="solid"/>
-          </a:ln>
-        </p:spPr>
-        <p:txBody>
-          <a:bodyPr xmlns:a="http://schemas.openxmlformats.org/drawingml/2006/main" lIns="0" tIns="0" rIns="0" bIns="0" anchor="ctr"/>
-          <a:lstStyle xmlns:a="http://schemas.openxmlformats.org/drawingml/2006/main"/>
-          <a:p xmlns:a="http://schemas.openxmlformats.org/drawingml/2006/main">
-            <a:pPr>
+            <a:off x="11106150" y="6400800"/>
+            <a:ext cx="476250" cy="247650"/>
+          </a:xfrm>
+          <a:prstGeom xmlns:a="http://schemas.openxmlformats.org/drawingml/2006/main" prst="rect">
+            <a:avLst/>
+          </a:prstGeom>
+          <a:noFill xmlns:a="http://schemas.openxmlformats.org/drawingml/2006/main"/>
+          <a:ln xmlns:a="http://schemas.openxmlformats.org/drawingml/2006/main" w="0">
+            <a:noFill/>
+            <a:prstDash val="solid"/>
+          </a:ln>
+        </p:spPr>
+        <p:txBody>
+          <a:bodyPr xmlns:a="http://schemas.openxmlformats.org/drawingml/2006/main" lIns="0" tIns="0" rIns="0" bIns="0" anchor="ctr">
+            <a:noAutofit/>
+          </a:bodyPr>
+          <a:lstStyle xmlns:a="http://schemas.openxmlformats.org/drawingml/2006/main"/>
+          <a:p xmlns:a="http://schemas.openxmlformats.org/drawingml/2006/main">
+            <a:pPr algn="l">
+              <a:buNone/>
               <a:defRPr sz="1350" b="1">
                 <a:solidFill>
                   <a:srgbClr val="28685E"/>
                 </a:solidFill>
+                <a:latin typeface="Calibri"/>
+                <a:ea typeface="Calibri"/>
+                <a:cs typeface="Calibri"/>
               </a:defRPr>
             </a:pPr>
             <a:r>
@@ -8823,6 +11284,9 @@
                 <a:solidFill>
                   <a:srgbClr val="28685E"/>
                 </a:solidFill>
+                <a:latin typeface="Calibri"/>
+                <a:ea typeface="Calibri"/>
+                <a:cs typeface="Calibri"/>
               </a:rPr>
               <a:t>08</a:t>
             </a:r>
@@ -8845,34 +11309,45 @@
         </p:nvSpPr>
         <p:spPr>
           <a:xfrm xmlns:a="http://schemas.openxmlformats.org/drawingml/2006/main">
-            <a:off x="609600" y="2686050"/>
-            <a:ext cx="10858500" cy="1524000"/>
-          </a:xfrm>
-          <a:prstGeom xmlns:a="http://schemas.openxmlformats.org/drawingml/2006/main" prst="rect">
-            <a:avLst/>
-          </a:prstGeom>
-          <a:noFill xmlns:a="http://schemas.openxmlformats.org/drawingml/2006/main"/>
-          <a:ln xmlns:a="http://schemas.openxmlformats.org/drawingml/2006/main" w="0">
-            <a:noFill/>
-            <a:prstDash val="solid"/>
-          </a:ln>
-        </p:spPr>
-        <p:txBody>
-          <a:bodyPr xmlns:a="http://schemas.openxmlformats.org/drawingml/2006/main" lIns="0" tIns="0" rIns="0" bIns="0" anchor="ctr"/>
-          <a:lstStyle xmlns:a="http://schemas.openxmlformats.org/drawingml/2006/main"/>
-          <a:p xmlns:a="http://schemas.openxmlformats.org/drawingml/2006/main">
-            <a:pPr>
-              <a:defRPr sz="2925" b="1">
+            <a:off x="457200" y="2181225"/>
+            <a:ext cx="5734050" cy="2409825"/>
+          </a:xfrm>
+          <a:prstGeom xmlns:a="http://schemas.openxmlformats.org/drawingml/2006/main" prst="rect">
+            <a:avLst/>
+          </a:prstGeom>
+          <a:solidFill xmlns:a="http://schemas.openxmlformats.org/drawingml/2006/main">
+            <a:srgbClr val="E7EFE9"/>
+          </a:solidFill>
+          <a:ln xmlns:a="http://schemas.openxmlformats.org/drawingml/2006/main" w="0">
+            <a:noFill/>
+            <a:prstDash val="solid"/>
+          </a:ln>
+        </p:spPr>
+        <p:txBody>
+          <a:bodyPr xmlns:a="http://schemas.openxmlformats.org/drawingml/2006/main" lIns="152400" tIns="114300" rIns="152400" bIns="114300" anchor="ctr">
+            <a:noAutofit/>
+          </a:bodyPr>
+          <a:lstStyle xmlns:a="http://schemas.openxmlformats.org/drawingml/2006/main"/>
+          <a:p xmlns:a="http://schemas.openxmlformats.org/drawingml/2006/main">
+            <a:pPr algn="l">
+              <a:buNone/>
+              <a:defRPr sz="2775" b="1">
                 <a:solidFill>
                   <a:srgbClr val="28685E"/>
                 </a:solidFill>
-              </a:defRPr>
-            </a:pPr>
-            <a:r>
-              <a:rPr sz="2925" b="1">
+                <a:latin typeface="Calibri"/>
+                <a:ea typeface="Calibri"/>
+                <a:cs typeface="Calibri"/>
+              </a:defRPr>
+            </a:pPr>
+            <a:r>
+              <a:rPr sz="2775" b="1">
                 <a:solidFill>
                   <a:srgbClr val="28685E"/>
                 </a:solidFill>
+                <a:latin typeface="Calibri"/>
+                <a:ea typeface="Calibri"/>
+                <a:cs typeface="Calibri"/>
               </a:rPr>
               <a:t>At a flagpole, pull the rope down and the flag goes up.</a:t>
             </a:r>
@@ -8895,36 +11370,431 @@
         </p:nvSpPr>
         <p:spPr>
           <a:xfrm xmlns:a="http://schemas.openxmlformats.org/drawingml/2006/main">
-            <a:off x="609600" y="4552950"/>
-            <a:ext cx="10858500" cy="1285875"/>
-          </a:xfrm>
-          <a:prstGeom xmlns:a="http://schemas.openxmlformats.org/drawingml/2006/main" prst="rect">
-            <a:avLst/>
-          </a:prstGeom>
-          <a:noFill xmlns:a="http://schemas.openxmlformats.org/drawingml/2006/main"/>
-          <a:ln xmlns:a="http://schemas.openxmlformats.org/drawingml/2006/main" w="0">
-            <a:noFill/>
-            <a:prstDash val="solid"/>
-          </a:ln>
-        </p:spPr>
-        <p:txBody>
-          <a:bodyPr xmlns:a="http://schemas.openxmlformats.org/drawingml/2006/main" lIns="0" tIns="0" rIns="0" bIns="0" anchor="ctr"/>
-          <a:lstStyle xmlns:a="http://schemas.openxmlformats.org/drawingml/2006/main"/>
-          <a:p xmlns:a="http://schemas.openxmlformats.org/drawingml/2006/main">
-            <a:pPr>
-              <a:defRPr sz="2700" b="0">
+            <a:off x="609600" y="4533900"/>
+            <a:ext cx="5429250" cy="1409700"/>
+          </a:xfrm>
+          <a:prstGeom xmlns:a="http://schemas.openxmlformats.org/drawingml/2006/main" prst="rect">
+            <a:avLst/>
+          </a:prstGeom>
+          <a:noFill xmlns:a="http://schemas.openxmlformats.org/drawingml/2006/main"/>
+          <a:ln xmlns:a="http://schemas.openxmlformats.org/drawingml/2006/main" w="0">
+            <a:noFill/>
+            <a:prstDash val="solid"/>
+          </a:ln>
+        </p:spPr>
+        <p:txBody>
+          <a:bodyPr xmlns:a="http://schemas.openxmlformats.org/drawingml/2006/main" lIns="0" tIns="0" rIns="0" bIns="0" anchor="ctr">
+            <a:noAutofit/>
+          </a:bodyPr>
+          <a:lstStyle xmlns:a="http://schemas.openxmlformats.org/drawingml/2006/main"/>
+          <a:p xmlns:a="http://schemas.openxmlformats.org/drawingml/2006/main">
+            <a:pPr algn="l">
+              <a:buNone/>
+              <a:defRPr sz="2250" b="0">
                 <a:solidFill>
                   <a:srgbClr val="152B3A"/>
                 </a:solidFill>
-              </a:defRPr>
-            </a:pPr>
-            <a:r>
-              <a:rPr sz="2700" b="0">
+                <a:latin typeface="Calibri"/>
+                <a:ea typeface="Calibri"/>
+                <a:cs typeface="Calibri"/>
+              </a:defRPr>
+            </a:pPr>
+            <a:r>
+              <a:rPr sz="2250" b="0">
                 <a:solidFill>
                   <a:srgbClr val="152B3A"/>
                 </a:solidFill>
+                <a:latin typeface="Calibri"/>
+                <a:ea typeface="Calibri"/>
+                <a:cs typeface="Calibri"/>
               </a:rPr>
               <a:t>One fixed pulley changes the pull’s direction. It does not give free lifting force.</a:t>
+            </a:r>
+          </a:p>
+        </p:txBody>
+      </p:sp>
+      <p:sp>
+        <p:nvSpPr>
+          <p:cNvPr id="11" name="pulley-support">
+            <a:extLst xmlns:a="http://schemas.openxmlformats.org/drawingml/2006/main">
+              <a:ext uri="{FF2B5EF4-FFF2-40B4-BE49-F238E27FC236}">
+                <a16:creationId xmlns:a16="http://schemas.microsoft.com/office/drawing/2014/main" id="{2B8B5058-876C-4E54-87C6-72E2C3683699}"/>
+              </a:ext>
+            </a:extLst>
+          </p:cNvPr>
+          <p:cNvSpPr>
+            <a:spLocks xmlns:a="http://schemas.openxmlformats.org/drawingml/2006/main" noGrp="1"/>
+          </p:cNvSpPr>
+          <p:nvPr/>
+        </p:nvSpPr>
+        <p:spPr>
+          <a:xfrm xmlns:a="http://schemas.openxmlformats.org/drawingml/2006/main">
+            <a:off x="7639050" y="2676525"/>
+            <a:ext cx="1714500" cy="0"/>
+          </a:xfrm>
+          <a:prstGeom xmlns:a="http://schemas.openxmlformats.org/drawingml/2006/main" prst="line">
+            <a:avLst/>
+          </a:prstGeom>
+          <a:noFill xmlns:a="http://schemas.openxmlformats.org/drawingml/2006/main"/>
+          <a:ln xmlns:a="http://schemas.openxmlformats.org/drawingml/2006/main" w="47625">
+            <a:solidFill>
+              <a:srgbClr val="50616B"/>
+            </a:solidFill>
+          </a:ln>
+        </p:spPr>
+      </p:sp>
+      <p:sp>
+        <p:nvSpPr>
+          <p:cNvPr id="12" name="pulley-pin">
+            <a:extLst xmlns:a="http://schemas.openxmlformats.org/drawingml/2006/main">
+              <a:ext uri="{FF2B5EF4-FFF2-40B4-BE49-F238E27FC236}">
+                <a16:creationId xmlns:a16="http://schemas.microsoft.com/office/drawing/2014/main" id="{A8D66494-9979-4E3B-B4C8-00BAEF254049}"/>
+              </a:ext>
+            </a:extLst>
+          </p:cNvPr>
+          <p:cNvSpPr>
+            <a:spLocks xmlns:a="http://schemas.openxmlformats.org/drawingml/2006/main" noGrp="1"/>
+          </p:cNvSpPr>
+          <p:nvPr/>
+        </p:nvSpPr>
+        <p:spPr>
+          <a:xfrm xmlns:a="http://schemas.openxmlformats.org/drawingml/2006/main">
+            <a:off x="8420100" y="2686050"/>
+            <a:ext cx="0" cy="428625"/>
+          </a:xfrm>
+          <a:prstGeom xmlns:a="http://schemas.openxmlformats.org/drawingml/2006/main" prst="line">
+            <a:avLst/>
+          </a:prstGeom>
+          <a:noFill xmlns:a="http://schemas.openxmlformats.org/drawingml/2006/main"/>
+          <a:ln xmlns:a="http://schemas.openxmlformats.org/drawingml/2006/main" w="47625">
+            <a:solidFill>
+              <a:srgbClr val="50616B"/>
+            </a:solidFill>
+          </a:ln>
+        </p:spPr>
+      </p:sp>
+      <p:sp>
+        <p:nvSpPr>
+          <p:cNvPr id="13" name="pulley-wheel">
+            <a:extLst xmlns:a="http://schemas.openxmlformats.org/drawingml/2006/main">
+              <a:ext uri="{FF2B5EF4-FFF2-40B4-BE49-F238E27FC236}">
+                <a16:creationId xmlns:a16="http://schemas.microsoft.com/office/drawing/2014/main" id="{961121FF-E209-4B2A-BA29-5DB02535E90B}"/>
+              </a:ext>
+            </a:extLst>
+          </p:cNvPr>
+          <p:cNvSpPr>
+            <a:spLocks xmlns:a="http://schemas.openxmlformats.org/drawingml/2006/main" noGrp="1"/>
+          </p:cNvSpPr>
+          <p:nvPr/>
+        </p:nvSpPr>
+        <p:spPr>
+          <a:xfrm xmlns:a="http://schemas.openxmlformats.org/drawingml/2006/main">
+            <a:off x="7905750" y="3114675"/>
+            <a:ext cx="1028700" cy="1028700"/>
+          </a:xfrm>
+          <a:prstGeom xmlns:a="http://schemas.openxmlformats.org/drawingml/2006/main" prst="ellipse">
+            <a:avLst/>
+          </a:prstGeom>
+          <a:solidFill xmlns:a="http://schemas.openxmlformats.org/drawingml/2006/main">
+            <a:srgbClr val="E7EFE9"/>
+          </a:solidFill>
+          <a:ln xmlns:a="http://schemas.openxmlformats.org/drawingml/2006/main" w="38100">
+            <a:solidFill>
+              <a:srgbClr val="152B3A"/>
+            </a:solidFill>
+          </a:ln>
+        </p:spPr>
+      </p:sp>
+      <p:sp>
+        <p:nvSpPr>
+          <p:cNvPr id="14" name="pulley-axle">
+            <a:extLst xmlns:a="http://schemas.openxmlformats.org/drawingml/2006/main">
+              <a:ext uri="{FF2B5EF4-FFF2-40B4-BE49-F238E27FC236}">
+                <a16:creationId xmlns:a16="http://schemas.microsoft.com/office/drawing/2014/main" id="{25E3C4CD-0FA1-4FF0-B1C2-7664F38E37CF}"/>
+              </a:ext>
+            </a:extLst>
+          </p:cNvPr>
+          <p:cNvSpPr>
+            <a:spLocks xmlns:a="http://schemas.openxmlformats.org/drawingml/2006/main" noGrp="1"/>
+          </p:cNvSpPr>
+          <p:nvPr/>
+        </p:nvSpPr>
+        <p:spPr>
+          <a:xfrm xmlns:a="http://schemas.openxmlformats.org/drawingml/2006/main">
+            <a:off x="8334375" y="3543300"/>
+            <a:ext cx="171450" cy="171450"/>
+          </a:xfrm>
+          <a:prstGeom xmlns:a="http://schemas.openxmlformats.org/drawingml/2006/main" prst="ellipse">
+            <a:avLst/>
+          </a:prstGeom>
+          <a:solidFill xmlns:a="http://schemas.openxmlformats.org/drawingml/2006/main">
+            <a:srgbClr val="152B3A"/>
+          </a:solidFill>
+          <a:ln xmlns:a="http://schemas.openxmlformats.org/drawingml/2006/main" w="0">
+            <a:noFill/>
+          </a:ln>
+        </p:spPr>
+      </p:sp>
+      <p:sp>
+        <p:nvSpPr>
+          <p:cNvPr id="15" name="rope-left">
+            <a:extLst xmlns:a="http://schemas.openxmlformats.org/drawingml/2006/main">
+              <a:ext uri="{FF2B5EF4-FFF2-40B4-BE49-F238E27FC236}">
+                <a16:creationId xmlns:a16="http://schemas.microsoft.com/office/drawing/2014/main" id="{7708803D-BA27-4987-A979-95C6162681B9}"/>
+              </a:ext>
+            </a:extLst>
+          </p:cNvPr>
+          <p:cNvSpPr>
+            <a:spLocks xmlns:a="http://schemas.openxmlformats.org/drawingml/2006/main" noGrp="1"/>
+          </p:cNvSpPr>
+          <p:nvPr/>
+        </p:nvSpPr>
+        <p:spPr>
+          <a:xfrm xmlns:a="http://schemas.openxmlformats.org/drawingml/2006/main">
+            <a:off x="7905750" y="3629025"/>
+            <a:ext cx="0" cy="1752600"/>
+          </a:xfrm>
+          <a:prstGeom xmlns:a="http://schemas.openxmlformats.org/drawingml/2006/main" prst="line">
+            <a:avLst/>
+          </a:prstGeom>
+          <a:noFill xmlns:a="http://schemas.openxmlformats.org/drawingml/2006/main"/>
+          <a:ln xmlns:a="http://schemas.openxmlformats.org/drawingml/2006/main" w="47625">
+            <a:solidFill>
+              <a:srgbClr val="28685E"/>
+            </a:solidFill>
+          </a:ln>
+        </p:spPr>
+      </p:sp>
+      <p:sp>
+        <p:nvSpPr>
+          <p:cNvPr id="16" name="rope-right">
+            <a:extLst xmlns:a="http://schemas.openxmlformats.org/drawingml/2006/main">
+              <a:ext uri="{FF2B5EF4-FFF2-40B4-BE49-F238E27FC236}">
+                <a16:creationId xmlns:a16="http://schemas.microsoft.com/office/drawing/2014/main" id="{F4F7C3BF-E84A-4E71-B605-A6CA3DD3040C}"/>
+              </a:ext>
+            </a:extLst>
+          </p:cNvPr>
+          <p:cNvSpPr>
+            <a:spLocks xmlns:a="http://schemas.openxmlformats.org/drawingml/2006/main" noGrp="1"/>
+          </p:cNvSpPr>
+          <p:nvPr/>
+        </p:nvSpPr>
+        <p:spPr>
+          <a:xfrm xmlns:a="http://schemas.openxmlformats.org/drawingml/2006/main">
+            <a:off x="8934450" y="3629025"/>
+            <a:ext cx="0" cy="1371600"/>
+          </a:xfrm>
+          <a:prstGeom xmlns:a="http://schemas.openxmlformats.org/drawingml/2006/main" prst="line">
+            <a:avLst/>
+          </a:prstGeom>
+          <a:noFill xmlns:a="http://schemas.openxmlformats.org/drawingml/2006/main"/>
+          <a:ln xmlns:a="http://schemas.openxmlformats.org/drawingml/2006/main" w="47625">
+            <a:solidFill>
+              <a:srgbClr val="28685E"/>
+            </a:solidFill>
+          </a:ln>
+        </p:spPr>
+      </p:sp>
+      <p:sp>
+        <p:nvSpPr>
+          <p:cNvPr id="17" name="pulley-load">
+            <a:extLst xmlns:a="http://schemas.openxmlformats.org/drawingml/2006/main">
+              <a:ext uri="{FF2B5EF4-FFF2-40B4-BE49-F238E27FC236}">
+                <a16:creationId xmlns:a16="http://schemas.microsoft.com/office/drawing/2014/main" id="{C955E383-9306-44A1-A5D9-7D981800C913}"/>
+              </a:ext>
+            </a:extLst>
+          </p:cNvPr>
+          <p:cNvSpPr>
+            <a:spLocks xmlns:a="http://schemas.openxmlformats.org/drawingml/2006/main" noGrp="1"/>
+          </p:cNvSpPr>
+          <p:nvPr/>
+        </p:nvSpPr>
+        <p:spPr>
+          <a:xfrm xmlns:a="http://schemas.openxmlformats.org/drawingml/2006/main">
+            <a:off x="8639175" y="5000625"/>
+            <a:ext cx="590550" cy="457200"/>
+          </a:xfrm>
+          <a:prstGeom xmlns:a="http://schemas.openxmlformats.org/drawingml/2006/main" prst="rect">
+            <a:avLst/>
+          </a:prstGeom>
+          <a:solidFill xmlns:a="http://schemas.openxmlformats.org/drawingml/2006/main">
+            <a:srgbClr val="152B3A"/>
+          </a:solidFill>
+          <a:ln xmlns:a="http://schemas.openxmlformats.org/drawingml/2006/main" w="0">
+            <a:noFill/>
+          </a:ln>
+        </p:spPr>
+      </p:sp>
+      <p:sp>
+        <p:nvSpPr>
+          <p:cNvPr id="18" name="pull-direction">
+            <a:extLst xmlns:a="http://schemas.openxmlformats.org/drawingml/2006/main">
+              <a:ext uri="{FF2B5EF4-FFF2-40B4-BE49-F238E27FC236}">
+                <a16:creationId xmlns:a16="http://schemas.microsoft.com/office/drawing/2014/main" id="{5B81CB4D-90A0-40D5-B9FE-2080C595B3E7}"/>
+              </a:ext>
+            </a:extLst>
+          </p:cNvPr>
+          <p:cNvSpPr>
+            <a:spLocks xmlns:a="http://schemas.openxmlformats.org/drawingml/2006/main" noGrp="1"/>
+          </p:cNvSpPr>
+          <p:nvPr/>
+        </p:nvSpPr>
+        <p:spPr>
+          <a:xfrm xmlns:a="http://schemas.openxmlformats.org/drawingml/2006/main" rot="5400000">
+            <a:off x="7324725" y="4610100"/>
+            <a:ext cx="819150" cy="238125"/>
+          </a:xfrm>
+          <a:prstGeom xmlns:a="http://schemas.openxmlformats.org/drawingml/2006/main" prst="rightArrow">
+            <a:avLst/>
+          </a:prstGeom>
+          <a:solidFill xmlns:a="http://schemas.openxmlformats.org/drawingml/2006/main">
+            <a:srgbClr val="A95D21"/>
+          </a:solidFill>
+          <a:ln xmlns:a="http://schemas.openxmlformats.org/drawingml/2006/main" w="0">
+            <a:noFill/>
+          </a:ln>
+        </p:spPr>
+      </p:sp>
+      <p:sp>
+        <p:nvSpPr>
+          <p:cNvPr id="19" name="load-direction">
+            <a:extLst xmlns:a="http://schemas.openxmlformats.org/drawingml/2006/main">
+              <a:ext uri="{FF2B5EF4-FFF2-40B4-BE49-F238E27FC236}">
+                <a16:creationId xmlns:a16="http://schemas.microsoft.com/office/drawing/2014/main" id="{43D8A094-679D-40F7-8BB2-FA24F4ECD938}"/>
+              </a:ext>
+            </a:extLst>
+          </p:cNvPr>
+          <p:cNvSpPr>
+            <a:spLocks xmlns:a="http://schemas.openxmlformats.org/drawingml/2006/main" noGrp="1"/>
+          </p:cNvSpPr>
+          <p:nvPr/>
+        </p:nvSpPr>
+        <p:spPr>
+          <a:xfrm xmlns:a="http://schemas.openxmlformats.org/drawingml/2006/main" rot="16200000">
+            <a:off x="9534525" y="4448175"/>
+            <a:ext cx="819150" cy="238125"/>
+          </a:xfrm>
+          <a:prstGeom xmlns:a="http://schemas.openxmlformats.org/drawingml/2006/main" prst="rightArrow">
+            <a:avLst/>
+          </a:prstGeom>
+          <a:solidFill xmlns:a="http://schemas.openxmlformats.org/drawingml/2006/main">
+            <a:srgbClr val="28685E"/>
+          </a:solidFill>
+          <a:ln xmlns:a="http://schemas.openxmlformats.org/drawingml/2006/main" w="0">
+            <a:noFill/>
+          </a:ln>
+        </p:spPr>
+      </p:sp>
+      <p:sp>
+        <p:nvSpPr>
+          <p:cNvPr id="20" name="pull-label">
+            <a:extLst xmlns:a="http://schemas.openxmlformats.org/drawingml/2006/main">
+              <a:ext uri="{FF2B5EF4-FFF2-40B4-BE49-F238E27FC236}">
+                <a16:creationId xmlns:a16="http://schemas.microsoft.com/office/drawing/2014/main" id="{F1526D9D-81A4-48BB-B046-036D72544731}"/>
+              </a:ext>
+            </a:extLst>
+          </p:cNvPr>
+          <p:cNvSpPr>
+            <a:spLocks xmlns:a="http://schemas.openxmlformats.org/drawingml/2006/main" noGrp="1"/>
+          </p:cNvSpPr>
+          <p:nvPr/>
+        </p:nvSpPr>
+        <p:spPr>
+          <a:xfrm xmlns:a="http://schemas.openxmlformats.org/drawingml/2006/main">
+            <a:off x="6858000" y="5334000"/>
+            <a:ext cx="1905000" cy="400050"/>
+          </a:xfrm>
+          <a:prstGeom xmlns:a="http://schemas.openxmlformats.org/drawingml/2006/main" prst="rect">
+            <a:avLst/>
+          </a:prstGeom>
+          <a:noFill xmlns:a="http://schemas.openxmlformats.org/drawingml/2006/main"/>
+          <a:ln xmlns:a="http://schemas.openxmlformats.org/drawingml/2006/main" w="0">
+            <a:noFill/>
+          </a:ln>
+        </p:spPr>
+        <p:txBody>
+          <a:bodyPr xmlns:a="http://schemas.openxmlformats.org/drawingml/2006/main" lIns="0" tIns="0" rIns="0" bIns="0" anchor="ctr">
+            <a:noAutofit/>
+          </a:bodyPr>
+          <a:lstStyle xmlns:a="http://schemas.openxmlformats.org/drawingml/2006/main"/>
+          <a:p xmlns:a="http://schemas.openxmlformats.org/drawingml/2006/main">
+            <a:pPr algn="l">
+              <a:defRPr sz="1875" b="1">
+                <a:solidFill>
+                  <a:srgbClr val="A95D21"/>
+                </a:solidFill>
+                <a:latin typeface="Calibri"/>
+                <a:ea typeface="Calibri"/>
+                <a:cs typeface="Calibri"/>
+              </a:defRPr>
+            </a:pPr>
+            <a:r>
+              <a:rPr sz="1875" b="1">
+                <a:solidFill>
+                  <a:srgbClr val="A95D21"/>
+                </a:solidFill>
+                <a:latin typeface="Calibri"/>
+                <a:ea typeface="Calibri"/>
+                <a:cs typeface="Calibri"/>
+              </a:rPr>
+              <a:t>pull down</a:t>
+            </a:r>
+          </a:p>
+        </p:txBody>
+      </p:sp>
+      <p:sp>
+        <p:nvSpPr>
+          <p:cNvPr id="21" name="load-label">
+            <a:extLst xmlns:a="http://schemas.openxmlformats.org/drawingml/2006/main">
+              <a:ext uri="{FF2B5EF4-FFF2-40B4-BE49-F238E27FC236}">
+                <a16:creationId xmlns:a16="http://schemas.microsoft.com/office/drawing/2014/main" id="{54E03556-8147-44D2-807A-69004C3598F7}"/>
+              </a:ext>
+            </a:extLst>
+          </p:cNvPr>
+          <p:cNvSpPr>
+            <a:spLocks xmlns:a="http://schemas.openxmlformats.org/drawingml/2006/main" noGrp="1"/>
+          </p:cNvSpPr>
+          <p:nvPr/>
+        </p:nvSpPr>
+        <p:spPr>
+          <a:xfrm xmlns:a="http://schemas.openxmlformats.org/drawingml/2006/main">
+            <a:off x="9239250" y="5334000"/>
+            <a:ext cx="2095500" cy="400050"/>
+          </a:xfrm>
+          <a:prstGeom xmlns:a="http://schemas.openxmlformats.org/drawingml/2006/main" prst="rect">
+            <a:avLst/>
+          </a:prstGeom>
+          <a:noFill xmlns:a="http://schemas.openxmlformats.org/drawingml/2006/main"/>
+          <a:ln xmlns:a="http://schemas.openxmlformats.org/drawingml/2006/main" w="0">
+            <a:noFill/>
+          </a:ln>
+        </p:spPr>
+        <p:txBody>
+          <a:bodyPr xmlns:a="http://schemas.openxmlformats.org/drawingml/2006/main" lIns="0" tIns="0" rIns="0" bIns="0" anchor="ctr">
+            <a:noAutofit/>
+          </a:bodyPr>
+          <a:lstStyle xmlns:a="http://schemas.openxmlformats.org/drawingml/2006/main"/>
+          <a:p xmlns:a="http://schemas.openxmlformats.org/drawingml/2006/main">
+            <a:pPr algn="l">
+              <a:defRPr sz="1875" b="1">
+                <a:solidFill>
+                  <a:srgbClr val="28685E"/>
+                </a:solidFill>
+                <a:latin typeface="Calibri"/>
+                <a:ea typeface="Calibri"/>
+                <a:cs typeface="Calibri"/>
+              </a:defRPr>
+            </a:pPr>
+            <a:r>
+              <a:rPr sz="1875" b="1">
+                <a:solidFill>
+                  <a:srgbClr val="28685E"/>
+                </a:solidFill>
+                <a:latin typeface="Calibri"/>
+                <a:ea typeface="Calibri"/>
+                <a:cs typeface="Calibri"/>
+              </a:rPr>
+              <a:t>load rises</a:t>
             </a:r>
           </a:p>
         </p:txBody>
@@ -8945,7 +11815,7 @@
     <p:bg>
       <p:bgPr>
         <a:solidFill xmlns:a="http://schemas.openxmlformats.org/drawingml/2006/main">
-          <a:srgbClr val="F5F1E8"/>
+          <a:srgbClr val="FAF9F5"/>
         </a:solidFill>
       </p:bgPr>
     </p:bg>
@@ -8974,8 +11844,8 @@
         </p:nvSpPr>
         <p:spPr>
           <a:xfrm xmlns:a="http://schemas.openxmlformats.org/drawingml/2006/main">
-            <a:off x="609600" y="552450"/>
-            <a:ext cx="781050" cy="57150"/>
+            <a:off x="609600" y="733425"/>
+            <a:ext cx="781050" cy="38100"/>
           </a:xfrm>
           <a:prstGeom xmlns:a="http://schemas.openxmlformats.org/drawingml/2006/main" prst="rect">
             <a:avLst/>
@@ -9005,34 +11875,43 @@
         </p:nvSpPr>
         <p:spPr>
           <a:xfrm xmlns:a="http://schemas.openxmlformats.org/drawingml/2006/main">
-            <a:off x="609600" y="762000"/>
-            <a:ext cx="8572500" cy="285750"/>
-          </a:xfrm>
-          <a:prstGeom xmlns:a="http://schemas.openxmlformats.org/drawingml/2006/main" prst="rect">
-            <a:avLst/>
-          </a:prstGeom>
-          <a:noFill xmlns:a="http://schemas.openxmlformats.org/drawingml/2006/main"/>
-          <a:ln xmlns:a="http://schemas.openxmlformats.org/drawingml/2006/main" w="0">
-            <a:noFill/>
-            <a:prstDash val="solid"/>
-          </a:ln>
-        </p:spPr>
-        <p:txBody>
-          <a:bodyPr xmlns:a="http://schemas.openxmlformats.org/drawingml/2006/main" lIns="0" tIns="0" rIns="0" bIns="0" anchor="ctr"/>
-          <a:lstStyle xmlns:a="http://schemas.openxmlformats.org/drawingml/2006/main"/>
-          <a:p xmlns:a="http://schemas.openxmlformats.org/drawingml/2006/main">
-            <a:pPr>
-              <a:defRPr sz="1500" b="1">
+            <a:off x="609600" y="342900"/>
+            <a:ext cx="9334500" cy="304800"/>
+          </a:xfrm>
+          <a:prstGeom xmlns:a="http://schemas.openxmlformats.org/drawingml/2006/main" prst="rect">
+            <a:avLst/>
+          </a:prstGeom>
+          <a:noFill xmlns:a="http://schemas.openxmlformats.org/drawingml/2006/main"/>
+          <a:ln xmlns:a="http://schemas.openxmlformats.org/drawingml/2006/main" w="0">
+            <a:noFill/>
+            <a:prstDash val="solid"/>
+          </a:ln>
+        </p:spPr>
+        <p:txBody>
+          <a:bodyPr xmlns:a="http://schemas.openxmlformats.org/drawingml/2006/main" lIns="0" tIns="0" rIns="0" bIns="0" anchor="ctr">
+            <a:noAutofit/>
+          </a:bodyPr>
+          <a:lstStyle xmlns:a="http://schemas.openxmlformats.org/drawingml/2006/main"/>
+          <a:p xmlns:a="http://schemas.openxmlformats.org/drawingml/2006/main">
+            <a:pPr algn="l">
+              <a:buNone/>
+              <a:defRPr sz="1350" b="1">
                 <a:solidFill>
                   <a:srgbClr val="28685E"/>
                 </a:solidFill>
-              </a:defRPr>
-            </a:pPr>
-            <a:r>
-              <a:rPr sz="1500" b="1">
+                <a:latin typeface="Calibri"/>
+                <a:ea typeface="Calibri"/>
+                <a:cs typeface="Calibri"/>
+              </a:defRPr>
+            </a:pPr>
+            <a:r>
+              <a:rPr sz="1350" b="1">
                 <a:solidFill>
                   <a:srgbClr val="28685E"/>
                 </a:solidFill>
+                <a:latin typeface="Calibri"/>
+                <a:ea typeface="Calibri"/>
+                <a:cs typeface="Calibri"/>
               </a:rPr>
               <a:t>MADE BY MATT  /  GROW SCIENCE</a:t>
             </a:r>
@@ -9055,34 +11934,43 @@
         </p:nvSpPr>
         <p:spPr>
           <a:xfrm xmlns:a="http://schemas.openxmlformats.org/drawingml/2006/main">
-            <a:off x="609600" y="1352550"/>
-            <a:ext cx="10972800" cy="952500"/>
-          </a:xfrm>
-          <a:prstGeom xmlns:a="http://schemas.openxmlformats.org/drawingml/2006/main" prst="rect">
-            <a:avLst/>
-          </a:prstGeom>
-          <a:noFill xmlns:a="http://schemas.openxmlformats.org/drawingml/2006/main"/>
-          <a:ln xmlns:a="http://schemas.openxmlformats.org/drawingml/2006/main" w="0">
-            <a:noFill/>
-            <a:prstDash val="solid"/>
-          </a:ln>
-        </p:spPr>
-        <p:txBody>
-          <a:bodyPr xmlns:a="http://schemas.openxmlformats.org/drawingml/2006/main" lIns="0" tIns="0" rIns="0" bIns="0" anchor="ctr"/>
-          <a:lstStyle xmlns:a="http://schemas.openxmlformats.org/drawingml/2006/main"/>
-          <a:p xmlns:a="http://schemas.openxmlformats.org/drawingml/2006/main">
-            <a:pPr>
-              <a:defRPr sz="3750" b="1">
+            <a:off x="609600" y="990600"/>
+            <a:ext cx="10972800" cy="1000125"/>
+          </a:xfrm>
+          <a:prstGeom xmlns:a="http://schemas.openxmlformats.org/drawingml/2006/main" prst="rect">
+            <a:avLst/>
+          </a:prstGeom>
+          <a:noFill xmlns:a="http://schemas.openxmlformats.org/drawingml/2006/main"/>
+          <a:ln xmlns:a="http://schemas.openxmlformats.org/drawingml/2006/main" w="0">
+            <a:noFill/>
+            <a:prstDash val="solid"/>
+          </a:ln>
+        </p:spPr>
+        <p:txBody>
+          <a:bodyPr xmlns:a="http://schemas.openxmlformats.org/drawingml/2006/main" lIns="0" tIns="0" rIns="0" bIns="0" anchor="ctr">
+            <a:noAutofit/>
+          </a:bodyPr>
+          <a:lstStyle xmlns:a="http://schemas.openxmlformats.org/drawingml/2006/main"/>
+          <a:p xmlns:a="http://schemas.openxmlformats.org/drawingml/2006/main">
+            <a:pPr algn="l">
+              <a:buNone/>
+              <a:defRPr sz="3675" b="1">
                 <a:solidFill>
                   <a:srgbClr val="152B3A"/>
                 </a:solidFill>
-              </a:defRPr>
-            </a:pPr>
-            <a:r>
-              <a:rPr sz="3750" b="1">
+                <a:latin typeface="Calibri"/>
+                <a:ea typeface="Calibri"/>
+                <a:cs typeface="Calibri"/>
+              </a:defRPr>
+            </a:pPr>
+            <a:r>
+              <a:rPr sz="3675" b="1">
                 <a:solidFill>
                   <a:srgbClr val="152B3A"/>
                 </a:solidFill>
+                <a:latin typeface="Calibri"/>
+                <a:ea typeface="Calibri"/>
+                <a:cs typeface="Calibri"/>
               </a:rPr>
               <a:t>Gears trade speed for turning effect</a:t>
             </a:r>
@@ -9105,14 +11993,14 @@
         </p:nvSpPr>
         <p:spPr>
           <a:xfrm xmlns:a="http://schemas.openxmlformats.org/drawingml/2006/main">
-            <a:off x="609600" y="6219825"/>
+            <a:off x="609600" y="6191250"/>
             <a:ext cx="10972800" cy="9525"/>
           </a:xfrm>
           <a:prstGeom xmlns:a="http://schemas.openxmlformats.org/drawingml/2006/main" prst="rect">
             <a:avLst/>
           </a:prstGeom>
           <a:solidFill xmlns:a="http://schemas.openxmlformats.org/drawingml/2006/main">
-            <a:srgbClr val="DCE7DD"/>
+            <a:srgbClr val="CEDBD3"/>
           </a:solidFill>
           <a:ln xmlns:a="http://schemas.openxmlformats.org/drawingml/2006/main" w="0">
             <a:noFill/>
@@ -9136,34 +12024,43 @@
         </p:nvSpPr>
         <p:spPr>
           <a:xfrm xmlns:a="http://schemas.openxmlformats.org/drawingml/2006/main">
-            <a:off x="609600" y="6381750"/>
-            <a:ext cx="9906000" cy="228600"/>
-          </a:xfrm>
-          <a:prstGeom xmlns:a="http://schemas.openxmlformats.org/drawingml/2006/main" prst="rect">
-            <a:avLst/>
-          </a:prstGeom>
-          <a:noFill xmlns:a="http://schemas.openxmlformats.org/drawingml/2006/main"/>
-          <a:ln xmlns:a="http://schemas.openxmlformats.org/drawingml/2006/main" w="0">
-            <a:noFill/>
-            <a:prstDash val="solid"/>
-          </a:ln>
-        </p:spPr>
-        <p:txBody>
-          <a:bodyPr xmlns:a="http://schemas.openxmlformats.org/drawingml/2006/main" lIns="0" tIns="0" rIns="0" bIns="0" anchor="ctr"/>
-          <a:lstStyle xmlns:a="http://schemas.openxmlformats.org/drawingml/2006/main"/>
-          <a:p xmlns:a="http://schemas.openxmlformats.org/drawingml/2006/main">
-            <a:pPr>
-              <a:defRPr sz="1275" b="0">
+            <a:off x="609600" y="6419850"/>
+            <a:ext cx="9525000" cy="219075"/>
+          </a:xfrm>
+          <a:prstGeom xmlns:a="http://schemas.openxmlformats.org/drawingml/2006/main" prst="rect">
+            <a:avLst/>
+          </a:prstGeom>
+          <a:noFill xmlns:a="http://schemas.openxmlformats.org/drawingml/2006/main"/>
+          <a:ln xmlns:a="http://schemas.openxmlformats.org/drawingml/2006/main" w="0">
+            <a:noFill/>
+            <a:prstDash val="solid"/>
+          </a:ln>
+        </p:spPr>
+        <p:txBody>
+          <a:bodyPr xmlns:a="http://schemas.openxmlformats.org/drawingml/2006/main" lIns="0" tIns="0" rIns="0" bIns="0" anchor="ctr">
+            <a:noAutofit/>
+          </a:bodyPr>
+          <a:lstStyle xmlns:a="http://schemas.openxmlformats.org/drawingml/2006/main"/>
+          <a:p xmlns:a="http://schemas.openxmlformats.org/drawingml/2006/main">
+            <a:pPr algn="l">
+              <a:buNone/>
+              <a:defRPr sz="1200" b="0">
                 <a:solidFill>
                   <a:srgbClr val="50616B"/>
                 </a:solidFill>
-              </a:defRPr>
-            </a:pPr>
-            <a:r>
-              <a:rPr sz="1275" b="0">
+                <a:latin typeface="Calibri"/>
+                <a:ea typeface="Calibri"/>
+                <a:cs typeface="Calibri"/>
+              </a:defRPr>
+            </a:pPr>
+            <a:r>
+              <a:rPr sz="1200" b="0">
                 <a:solidFill>
                   <a:srgbClr val="50616B"/>
                 </a:solidFill>
+                <a:latin typeface="Calibri"/>
+                <a:ea typeface="Calibri"/>
+                <a:cs typeface="Calibri"/>
               </a:rPr>
               <a:t>AUTUMN 1  ·  WEEK 4  ·  LESSON A</a:t>
             </a:r>
@@ -9186,27 +12083,33 @@
         </p:nvSpPr>
         <p:spPr>
           <a:xfrm xmlns:a="http://schemas.openxmlformats.org/drawingml/2006/main">
-            <a:off x="11106150" y="6362700"/>
-            <a:ext cx="476250" cy="238125"/>
-          </a:xfrm>
-          <a:prstGeom xmlns:a="http://schemas.openxmlformats.org/drawingml/2006/main" prst="rect">
-            <a:avLst/>
-          </a:prstGeom>
-          <a:noFill xmlns:a="http://schemas.openxmlformats.org/drawingml/2006/main"/>
-          <a:ln xmlns:a="http://schemas.openxmlformats.org/drawingml/2006/main" w="0">
-            <a:noFill/>
-            <a:prstDash val="solid"/>
-          </a:ln>
-        </p:spPr>
-        <p:txBody>
-          <a:bodyPr xmlns:a="http://schemas.openxmlformats.org/drawingml/2006/main" lIns="0" tIns="0" rIns="0" bIns="0" anchor="ctr"/>
-          <a:lstStyle xmlns:a="http://schemas.openxmlformats.org/drawingml/2006/main"/>
-          <a:p xmlns:a="http://schemas.openxmlformats.org/drawingml/2006/main">
-            <a:pPr>
+            <a:off x="11106150" y="6400800"/>
+            <a:ext cx="476250" cy="247650"/>
+          </a:xfrm>
+          <a:prstGeom xmlns:a="http://schemas.openxmlformats.org/drawingml/2006/main" prst="rect">
+            <a:avLst/>
+          </a:prstGeom>
+          <a:noFill xmlns:a="http://schemas.openxmlformats.org/drawingml/2006/main"/>
+          <a:ln xmlns:a="http://schemas.openxmlformats.org/drawingml/2006/main" w="0">
+            <a:noFill/>
+            <a:prstDash val="solid"/>
+          </a:ln>
+        </p:spPr>
+        <p:txBody>
+          <a:bodyPr xmlns:a="http://schemas.openxmlformats.org/drawingml/2006/main" lIns="0" tIns="0" rIns="0" bIns="0" anchor="ctr">
+            <a:noAutofit/>
+          </a:bodyPr>
+          <a:lstStyle xmlns:a="http://schemas.openxmlformats.org/drawingml/2006/main"/>
+          <a:p xmlns:a="http://schemas.openxmlformats.org/drawingml/2006/main">
+            <a:pPr algn="l">
+              <a:buNone/>
               <a:defRPr sz="1350" b="1">
                 <a:solidFill>
                   <a:srgbClr val="28685E"/>
                 </a:solidFill>
+                <a:latin typeface="Calibri"/>
+                <a:ea typeface="Calibri"/>
+                <a:cs typeface="Calibri"/>
               </a:defRPr>
             </a:pPr>
             <a:r>
@@ -9214,6 +12117,9 @@
                 <a:solidFill>
                   <a:srgbClr val="28685E"/>
                 </a:solidFill>
+                <a:latin typeface="Calibri"/>
+                <a:ea typeface="Calibri"/>
+                <a:cs typeface="Calibri"/>
               </a:rPr>
               <a:t>09</a:t>
             </a:r>
@@ -9236,34 +12142,43 @@
         </p:nvSpPr>
         <p:spPr>
           <a:xfrm xmlns:a="http://schemas.openxmlformats.org/drawingml/2006/main">
-            <a:off x="609600" y="2619375"/>
-            <a:ext cx="10972800" cy="714375"/>
-          </a:xfrm>
-          <a:prstGeom xmlns:a="http://schemas.openxmlformats.org/drawingml/2006/main" prst="rect">
-            <a:avLst/>
-          </a:prstGeom>
-          <a:noFill xmlns:a="http://schemas.openxmlformats.org/drawingml/2006/main"/>
-          <a:ln xmlns:a="http://schemas.openxmlformats.org/drawingml/2006/main" w="0">
-            <a:noFill/>
-            <a:prstDash val="solid"/>
-          </a:ln>
-        </p:spPr>
-        <p:txBody>
-          <a:bodyPr xmlns:a="http://schemas.openxmlformats.org/drawingml/2006/main" lIns="0" tIns="0" rIns="0" bIns="0" anchor="ctr"/>
-          <a:lstStyle xmlns:a="http://schemas.openxmlformats.org/drawingml/2006/main"/>
-          <a:p xmlns:a="http://schemas.openxmlformats.org/drawingml/2006/main">
-            <a:pPr>
-              <a:defRPr sz="2550" b="0">
+            <a:off x="1000125" y="2333625"/>
+            <a:ext cx="10382250" cy="792956"/>
+          </a:xfrm>
+          <a:prstGeom xmlns:a="http://schemas.openxmlformats.org/drawingml/2006/main" prst="rect">
+            <a:avLst/>
+          </a:prstGeom>
+          <a:noFill xmlns:a="http://schemas.openxmlformats.org/drawingml/2006/main"/>
+          <a:ln xmlns:a="http://schemas.openxmlformats.org/drawingml/2006/main" w="0">
+            <a:noFill/>
+            <a:prstDash val="solid"/>
+          </a:ln>
+        </p:spPr>
+        <p:txBody>
+          <a:bodyPr xmlns:a="http://schemas.openxmlformats.org/drawingml/2006/main" lIns="0" tIns="0" rIns="0" bIns="0" anchor="ctr">
+            <a:noAutofit/>
+          </a:bodyPr>
+          <a:lstStyle xmlns:a="http://schemas.openxmlformats.org/drawingml/2006/main"/>
+          <a:p xmlns:a="http://schemas.openxmlformats.org/drawingml/2006/main">
+            <a:pPr algn="l">
+              <a:buNone/>
+              <a:defRPr sz="2400" b="0">
                 <a:solidFill>
                   <a:srgbClr val="152B3A"/>
                 </a:solidFill>
-              </a:defRPr>
-            </a:pPr>
-            <a:r>
-              <a:rPr sz="2550" b="0">
+                <a:latin typeface="Calibri"/>
+                <a:ea typeface="Calibri"/>
+                <a:cs typeface="Calibri"/>
+              </a:defRPr>
+            </a:pPr>
+            <a:r>
+              <a:rPr sz="2400" b="0">
                 <a:solidFill>
                   <a:srgbClr val="152B3A"/>
                 </a:solidFill>
+                <a:latin typeface="Calibri"/>
+                <a:ea typeface="Calibri"/>
+                <a:cs typeface="Calibri"/>
               </a:rPr>
               <a:t>Gears have teeth and pass on turning movement.</a:t>
             </a:r>
@@ -9286,34 +12201,43 @@
         </p:nvSpPr>
         <p:spPr>
           <a:xfrm xmlns:a="http://schemas.openxmlformats.org/drawingml/2006/main">
-            <a:off x="609600" y="3409950"/>
-            <a:ext cx="10972800" cy="714375"/>
-          </a:xfrm>
-          <a:prstGeom xmlns:a="http://schemas.openxmlformats.org/drawingml/2006/main" prst="rect">
-            <a:avLst/>
-          </a:prstGeom>
-          <a:noFill xmlns:a="http://schemas.openxmlformats.org/drawingml/2006/main"/>
-          <a:ln xmlns:a="http://schemas.openxmlformats.org/drawingml/2006/main" w="0">
-            <a:noFill/>
-            <a:prstDash val="solid"/>
-          </a:ln>
-        </p:spPr>
-        <p:txBody>
-          <a:bodyPr xmlns:a="http://schemas.openxmlformats.org/drawingml/2006/main" lIns="0" tIns="0" rIns="0" bIns="0" anchor="ctr"/>
-          <a:lstStyle xmlns:a="http://schemas.openxmlformats.org/drawingml/2006/main"/>
-          <a:p xmlns:a="http://schemas.openxmlformats.org/drawingml/2006/main">
-            <a:pPr>
-              <a:defRPr sz="2550" b="0">
+            <a:off x="1000125" y="3183731"/>
+            <a:ext cx="10382250" cy="792956"/>
+          </a:xfrm>
+          <a:prstGeom xmlns:a="http://schemas.openxmlformats.org/drawingml/2006/main" prst="rect">
+            <a:avLst/>
+          </a:prstGeom>
+          <a:noFill xmlns:a="http://schemas.openxmlformats.org/drawingml/2006/main"/>
+          <a:ln xmlns:a="http://schemas.openxmlformats.org/drawingml/2006/main" w="0">
+            <a:noFill/>
+            <a:prstDash val="solid"/>
+          </a:ln>
+        </p:spPr>
+        <p:txBody>
+          <a:bodyPr xmlns:a="http://schemas.openxmlformats.org/drawingml/2006/main" lIns="0" tIns="0" rIns="0" bIns="0" anchor="ctr">
+            <a:noAutofit/>
+          </a:bodyPr>
+          <a:lstStyle xmlns:a="http://schemas.openxmlformats.org/drawingml/2006/main"/>
+          <a:p xmlns:a="http://schemas.openxmlformats.org/drawingml/2006/main">
+            <a:pPr algn="l">
+              <a:buNone/>
+              <a:defRPr sz="2400" b="0">
                 <a:solidFill>
                   <a:srgbClr val="152B3A"/>
                 </a:solidFill>
-              </a:defRPr>
-            </a:pPr>
-            <a:r>
-              <a:rPr sz="2550" b="0">
+                <a:latin typeface="Calibri"/>
+                <a:ea typeface="Calibri"/>
+                <a:cs typeface="Calibri"/>
+              </a:defRPr>
+            </a:pPr>
+            <a:r>
+              <a:rPr sz="2400" b="0">
                 <a:solidFill>
                   <a:srgbClr val="152B3A"/>
                 </a:solidFill>
+                <a:latin typeface="Calibri"/>
+                <a:ea typeface="Calibri"/>
+                <a:cs typeface="Calibri"/>
               </a:rPr>
               <a:t>A bicycle uses chainrings, a chain and sprockets.</a:t>
             </a:r>
@@ -9336,34 +12260,43 @@
         </p:nvSpPr>
         <p:spPr>
           <a:xfrm xmlns:a="http://schemas.openxmlformats.org/drawingml/2006/main">
-            <a:off x="609600" y="4200525"/>
-            <a:ext cx="10972800" cy="714375"/>
-          </a:xfrm>
-          <a:prstGeom xmlns:a="http://schemas.openxmlformats.org/drawingml/2006/main" prst="rect">
-            <a:avLst/>
-          </a:prstGeom>
-          <a:noFill xmlns:a="http://schemas.openxmlformats.org/drawingml/2006/main"/>
-          <a:ln xmlns:a="http://schemas.openxmlformats.org/drawingml/2006/main" w="0">
-            <a:noFill/>
-            <a:prstDash val="solid"/>
-          </a:ln>
-        </p:spPr>
-        <p:txBody>
-          <a:bodyPr xmlns:a="http://schemas.openxmlformats.org/drawingml/2006/main" lIns="0" tIns="0" rIns="0" bIns="0" anchor="ctr"/>
-          <a:lstStyle xmlns:a="http://schemas.openxmlformats.org/drawingml/2006/main"/>
-          <a:p xmlns:a="http://schemas.openxmlformats.org/drawingml/2006/main">
-            <a:pPr>
-              <a:defRPr sz="2550" b="0">
+            <a:off x="1000125" y="4033838"/>
+            <a:ext cx="10382250" cy="792956"/>
+          </a:xfrm>
+          <a:prstGeom xmlns:a="http://schemas.openxmlformats.org/drawingml/2006/main" prst="rect">
+            <a:avLst/>
+          </a:prstGeom>
+          <a:noFill xmlns:a="http://schemas.openxmlformats.org/drawingml/2006/main"/>
+          <a:ln xmlns:a="http://schemas.openxmlformats.org/drawingml/2006/main" w="0">
+            <a:noFill/>
+            <a:prstDash val="solid"/>
+          </a:ln>
+        </p:spPr>
+        <p:txBody>
+          <a:bodyPr xmlns:a="http://schemas.openxmlformats.org/drawingml/2006/main" lIns="0" tIns="0" rIns="0" bIns="0" anchor="ctr">
+            <a:noAutofit/>
+          </a:bodyPr>
+          <a:lstStyle xmlns:a="http://schemas.openxmlformats.org/drawingml/2006/main"/>
+          <a:p xmlns:a="http://schemas.openxmlformats.org/drawingml/2006/main">
+            <a:pPr algn="l">
+              <a:buNone/>
+              <a:defRPr sz="2400" b="0">
                 <a:solidFill>
                   <a:srgbClr val="152B3A"/>
                 </a:solidFill>
-              </a:defRPr>
-            </a:pPr>
-            <a:r>
-              <a:rPr sz="2550" b="0">
+                <a:latin typeface="Calibri"/>
+                <a:ea typeface="Calibri"/>
+                <a:cs typeface="Calibri"/>
+              </a:defRPr>
+            </a:pPr>
+            <a:r>
+              <a:rPr sz="2400" b="0">
                 <a:solidFill>
                   <a:srgbClr val="152B3A"/>
                 </a:solidFill>
+                <a:latin typeface="Calibri"/>
+                <a:ea typeface="Calibri"/>
+                <a:cs typeface="Calibri"/>
               </a:rPr>
               <a:t>A lower gear can help turn the wheel against a load.</a:t>
             </a:r>
@@ -9386,36 +12319,363 @@
         </p:nvSpPr>
         <p:spPr>
           <a:xfrm xmlns:a="http://schemas.openxmlformats.org/drawingml/2006/main">
-            <a:off x="609600" y="4991100"/>
-            <a:ext cx="10972800" cy="714375"/>
-          </a:xfrm>
-          <a:prstGeom xmlns:a="http://schemas.openxmlformats.org/drawingml/2006/main" prst="rect">
-            <a:avLst/>
-          </a:prstGeom>
-          <a:noFill xmlns:a="http://schemas.openxmlformats.org/drawingml/2006/main"/>
-          <a:ln xmlns:a="http://schemas.openxmlformats.org/drawingml/2006/main" w="0">
-            <a:noFill/>
-            <a:prstDash val="solid"/>
-          </a:ln>
-        </p:spPr>
-        <p:txBody>
-          <a:bodyPr xmlns:a="http://schemas.openxmlformats.org/drawingml/2006/main" lIns="0" tIns="0" rIns="0" bIns="0" anchor="ctr"/>
-          <a:lstStyle xmlns:a="http://schemas.openxmlformats.org/drawingml/2006/main"/>
-          <a:p xmlns:a="http://schemas.openxmlformats.org/drawingml/2006/main">
-            <a:pPr>
-              <a:defRPr sz="2550" b="0">
+            <a:off x="1000125" y="4883944"/>
+            <a:ext cx="10382250" cy="792956"/>
+          </a:xfrm>
+          <a:prstGeom xmlns:a="http://schemas.openxmlformats.org/drawingml/2006/main" prst="rect">
+            <a:avLst/>
+          </a:prstGeom>
+          <a:noFill xmlns:a="http://schemas.openxmlformats.org/drawingml/2006/main"/>
+          <a:ln xmlns:a="http://schemas.openxmlformats.org/drawingml/2006/main" w="0">
+            <a:noFill/>
+            <a:prstDash val="solid"/>
+          </a:ln>
+        </p:spPr>
+        <p:txBody>
+          <a:bodyPr xmlns:a="http://schemas.openxmlformats.org/drawingml/2006/main" lIns="0" tIns="0" rIns="0" bIns="0" anchor="ctr">
+            <a:noAutofit/>
+          </a:bodyPr>
+          <a:lstStyle xmlns:a="http://schemas.openxmlformats.org/drawingml/2006/main"/>
+          <a:p xmlns:a="http://schemas.openxmlformats.org/drawingml/2006/main">
+            <a:pPr algn="l">
+              <a:buNone/>
+              <a:defRPr sz="2400" b="0">
                 <a:solidFill>
                   <a:srgbClr val="152B3A"/>
                 </a:solidFill>
-              </a:defRPr>
-            </a:pPr>
-            <a:r>
-              <a:rPr sz="2550" b="0">
+                <a:latin typeface="Calibri"/>
+                <a:ea typeface="Calibri"/>
+                <a:cs typeface="Calibri"/>
+              </a:defRPr>
+            </a:pPr>
+            <a:r>
+              <a:rPr sz="2400" b="0">
                 <a:solidFill>
                   <a:srgbClr val="152B3A"/>
                 </a:solidFill>
+                <a:latin typeface="Calibri"/>
+                <a:ea typeface="Calibri"/>
+                <a:cs typeface="Calibri"/>
               </a:rPr>
               <a:t>The wheel turns fewer times per pedal turn.</a:t>
+            </a:r>
+          </a:p>
+        </p:txBody>
+      </p:sp>
+      <p:sp>
+        <p:nvSpPr>
+          <p:cNvPr id="12" name="cue-0">
+            <a:extLst xmlns:a="http://schemas.openxmlformats.org/drawingml/2006/main">
+              <a:ext uri="{FF2B5EF4-FFF2-40B4-BE49-F238E27FC236}">
+                <a16:creationId xmlns:a16="http://schemas.microsoft.com/office/drawing/2014/main" id="{156341F3-40D1-444E-AE55-DA2F2E7D566A}"/>
+              </a:ext>
+            </a:extLst>
+          </p:cNvPr>
+          <p:cNvSpPr>
+            <a:spLocks xmlns:a="http://schemas.openxmlformats.org/drawingml/2006/main" noGrp="1"/>
+          </p:cNvSpPr>
+          <p:nvPr/>
+        </p:nvSpPr>
+        <p:spPr>
+          <a:xfrm xmlns:a="http://schemas.openxmlformats.org/drawingml/2006/main">
+            <a:off x="609600" y="2362200"/>
+            <a:ext cx="323850" cy="323850"/>
+          </a:xfrm>
+          <a:prstGeom xmlns:a="http://schemas.openxmlformats.org/drawingml/2006/main" prst="rect">
+            <a:avLst/>
+          </a:prstGeom>
+          <a:noFill xmlns:a="http://schemas.openxmlformats.org/drawingml/2006/main"/>
+          <a:ln xmlns:a="http://schemas.openxmlformats.org/drawingml/2006/main" w="0">
+            <a:noFill/>
+          </a:ln>
+        </p:spPr>
+        <p:txBody>
+          <a:bodyPr xmlns:a="http://schemas.openxmlformats.org/drawingml/2006/main" lIns="0" tIns="0" rIns="0" bIns="0" anchor="ctr">
+            <a:noAutofit/>
+          </a:bodyPr>
+          <a:lstStyle xmlns:a="http://schemas.openxmlformats.org/drawingml/2006/main"/>
+          <a:p xmlns:a="http://schemas.openxmlformats.org/drawingml/2006/main">
+            <a:pPr algn="l">
+              <a:defRPr sz="1350" b="1">
+                <a:solidFill>
+                  <a:srgbClr val="28685E"/>
+                </a:solidFill>
+                <a:latin typeface="Calibri"/>
+                <a:ea typeface="Calibri"/>
+                <a:cs typeface="Calibri"/>
+              </a:defRPr>
+            </a:pPr>
+            <a:r>
+              <a:rPr sz="1350" b="1">
+                <a:solidFill>
+                  <a:srgbClr val="28685E"/>
+                </a:solidFill>
+                <a:latin typeface="Calibri"/>
+                <a:ea typeface="Calibri"/>
+                <a:cs typeface="Calibri"/>
+              </a:rPr>
+              <a:t>01</a:t>
+            </a:r>
+          </a:p>
+        </p:txBody>
+      </p:sp>
+      <p:sp>
+        <p:nvSpPr>
+          <p:cNvPr id="13" name="row-rule-0">
+            <a:extLst xmlns:a="http://schemas.openxmlformats.org/drawingml/2006/main">
+              <a:ext uri="{FF2B5EF4-FFF2-40B4-BE49-F238E27FC236}">
+                <a16:creationId xmlns:a16="http://schemas.microsoft.com/office/drawing/2014/main" id="{0A6E9EB6-A3EF-43EA-B7DC-24CE74F20635}"/>
+              </a:ext>
+            </a:extLst>
+          </p:cNvPr>
+          <p:cNvSpPr>
+            <a:spLocks xmlns:a="http://schemas.openxmlformats.org/drawingml/2006/main" noGrp="1"/>
+          </p:cNvSpPr>
+          <p:nvPr/>
+        </p:nvSpPr>
+        <p:spPr>
+          <a:xfrm xmlns:a="http://schemas.openxmlformats.org/drawingml/2006/main">
+            <a:off x="1000125" y="3136106"/>
+            <a:ext cx="10334625" cy="0"/>
+          </a:xfrm>
+          <a:prstGeom xmlns:a="http://schemas.openxmlformats.org/drawingml/2006/main" prst="line">
+            <a:avLst/>
+          </a:prstGeom>
+          <a:noFill xmlns:a="http://schemas.openxmlformats.org/drawingml/2006/main"/>
+          <a:ln xmlns:a="http://schemas.openxmlformats.org/drawingml/2006/main" w="9525">
+            <a:solidFill>
+              <a:srgbClr val="CEDBD3"/>
+            </a:solidFill>
+          </a:ln>
+        </p:spPr>
+      </p:sp>
+      <p:sp>
+        <p:nvSpPr>
+          <p:cNvPr id="14" name="cue-1">
+            <a:extLst xmlns:a="http://schemas.openxmlformats.org/drawingml/2006/main">
+              <a:ext uri="{FF2B5EF4-FFF2-40B4-BE49-F238E27FC236}">
+                <a16:creationId xmlns:a16="http://schemas.microsoft.com/office/drawing/2014/main" id="{B8DCD65A-004D-470F-907A-E20719D02562}"/>
+              </a:ext>
+            </a:extLst>
+          </p:cNvPr>
+          <p:cNvSpPr>
+            <a:spLocks xmlns:a="http://schemas.openxmlformats.org/drawingml/2006/main" noGrp="1"/>
+          </p:cNvSpPr>
+          <p:nvPr/>
+        </p:nvSpPr>
+        <p:spPr>
+          <a:xfrm xmlns:a="http://schemas.openxmlformats.org/drawingml/2006/main">
+            <a:off x="609600" y="3212306"/>
+            <a:ext cx="323850" cy="323850"/>
+          </a:xfrm>
+          <a:prstGeom xmlns:a="http://schemas.openxmlformats.org/drawingml/2006/main" prst="rect">
+            <a:avLst/>
+          </a:prstGeom>
+          <a:noFill xmlns:a="http://schemas.openxmlformats.org/drawingml/2006/main"/>
+          <a:ln xmlns:a="http://schemas.openxmlformats.org/drawingml/2006/main" w="0">
+            <a:noFill/>
+          </a:ln>
+        </p:spPr>
+        <p:txBody>
+          <a:bodyPr xmlns:a="http://schemas.openxmlformats.org/drawingml/2006/main" lIns="0" tIns="0" rIns="0" bIns="0" anchor="ctr">
+            <a:noAutofit/>
+          </a:bodyPr>
+          <a:lstStyle xmlns:a="http://schemas.openxmlformats.org/drawingml/2006/main"/>
+          <a:p xmlns:a="http://schemas.openxmlformats.org/drawingml/2006/main">
+            <a:pPr algn="l">
+              <a:defRPr sz="1350" b="1">
+                <a:solidFill>
+                  <a:srgbClr val="28685E"/>
+                </a:solidFill>
+                <a:latin typeface="Calibri"/>
+                <a:ea typeface="Calibri"/>
+                <a:cs typeface="Calibri"/>
+              </a:defRPr>
+            </a:pPr>
+            <a:r>
+              <a:rPr sz="1350" b="1">
+                <a:solidFill>
+                  <a:srgbClr val="28685E"/>
+                </a:solidFill>
+                <a:latin typeface="Calibri"/>
+                <a:ea typeface="Calibri"/>
+                <a:cs typeface="Calibri"/>
+              </a:rPr>
+              <a:t>02</a:t>
+            </a:r>
+          </a:p>
+        </p:txBody>
+      </p:sp>
+      <p:sp>
+        <p:nvSpPr>
+          <p:cNvPr id="15" name="row-rule-1">
+            <a:extLst xmlns:a="http://schemas.openxmlformats.org/drawingml/2006/main">
+              <a:ext uri="{FF2B5EF4-FFF2-40B4-BE49-F238E27FC236}">
+                <a16:creationId xmlns:a16="http://schemas.microsoft.com/office/drawing/2014/main" id="{503D606F-DFEC-4E42-AFA1-8295EB47583F}"/>
+              </a:ext>
+            </a:extLst>
+          </p:cNvPr>
+          <p:cNvSpPr>
+            <a:spLocks xmlns:a="http://schemas.openxmlformats.org/drawingml/2006/main" noGrp="1"/>
+          </p:cNvSpPr>
+          <p:nvPr/>
+        </p:nvSpPr>
+        <p:spPr>
+          <a:xfrm xmlns:a="http://schemas.openxmlformats.org/drawingml/2006/main">
+            <a:off x="1000125" y="3986213"/>
+            <a:ext cx="10334625" cy="0"/>
+          </a:xfrm>
+          <a:prstGeom xmlns:a="http://schemas.openxmlformats.org/drawingml/2006/main" prst="line">
+            <a:avLst/>
+          </a:prstGeom>
+          <a:noFill xmlns:a="http://schemas.openxmlformats.org/drawingml/2006/main"/>
+          <a:ln xmlns:a="http://schemas.openxmlformats.org/drawingml/2006/main" w="9525">
+            <a:solidFill>
+              <a:srgbClr val="CEDBD3"/>
+            </a:solidFill>
+          </a:ln>
+        </p:spPr>
+      </p:sp>
+      <p:sp>
+        <p:nvSpPr>
+          <p:cNvPr id="16" name="cue-2">
+            <a:extLst xmlns:a="http://schemas.openxmlformats.org/drawingml/2006/main">
+              <a:ext uri="{FF2B5EF4-FFF2-40B4-BE49-F238E27FC236}">
+                <a16:creationId xmlns:a16="http://schemas.microsoft.com/office/drawing/2014/main" id="{F5BFFEEA-B8BE-4BBE-A5A0-7ABEA9A40F73}"/>
+              </a:ext>
+            </a:extLst>
+          </p:cNvPr>
+          <p:cNvSpPr>
+            <a:spLocks xmlns:a="http://schemas.openxmlformats.org/drawingml/2006/main" noGrp="1"/>
+          </p:cNvSpPr>
+          <p:nvPr/>
+        </p:nvSpPr>
+        <p:spPr>
+          <a:xfrm xmlns:a="http://schemas.openxmlformats.org/drawingml/2006/main">
+            <a:off x="609600" y="4062413"/>
+            <a:ext cx="323850" cy="323850"/>
+          </a:xfrm>
+          <a:prstGeom xmlns:a="http://schemas.openxmlformats.org/drawingml/2006/main" prst="rect">
+            <a:avLst/>
+          </a:prstGeom>
+          <a:noFill xmlns:a="http://schemas.openxmlformats.org/drawingml/2006/main"/>
+          <a:ln xmlns:a="http://schemas.openxmlformats.org/drawingml/2006/main" w="0">
+            <a:noFill/>
+          </a:ln>
+        </p:spPr>
+        <p:txBody>
+          <a:bodyPr xmlns:a="http://schemas.openxmlformats.org/drawingml/2006/main" lIns="0" tIns="0" rIns="0" bIns="0" anchor="ctr">
+            <a:noAutofit/>
+          </a:bodyPr>
+          <a:lstStyle xmlns:a="http://schemas.openxmlformats.org/drawingml/2006/main"/>
+          <a:p xmlns:a="http://schemas.openxmlformats.org/drawingml/2006/main">
+            <a:pPr algn="l">
+              <a:defRPr sz="1350" b="1">
+                <a:solidFill>
+                  <a:srgbClr val="28685E"/>
+                </a:solidFill>
+                <a:latin typeface="Calibri"/>
+                <a:ea typeface="Calibri"/>
+                <a:cs typeface="Calibri"/>
+              </a:defRPr>
+            </a:pPr>
+            <a:r>
+              <a:rPr sz="1350" b="1">
+                <a:solidFill>
+                  <a:srgbClr val="28685E"/>
+                </a:solidFill>
+                <a:latin typeface="Calibri"/>
+                <a:ea typeface="Calibri"/>
+                <a:cs typeface="Calibri"/>
+              </a:rPr>
+              <a:t>03</a:t>
+            </a:r>
+          </a:p>
+        </p:txBody>
+      </p:sp>
+      <p:sp>
+        <p:nvSpPr>
+          <p:cNvPr id="17" name="row-rule-2">
+            <a:extLst xmlns:a="http://schemas.openxmlformats.org/drawingml/2006/main">
+              <a:ext uri="{FF2B5EF4-FFF2-40B4-BE49-F238E27FC236}">
+                <a16:creationId xmlns:a16="http://schemas.microsoft.com/office/drawing/2014/main" id="{BBA954F0-7599-4B6C-A2AF-57495D7973D5}"/>
+              </a:ext>
+            </a:extLst>
+          </p:cNvPr>
+          <p:cNvSpPr>
+            <a:spLocks xmlns:a="http://schemas.openxmlformats.org/drawingml/2006/main" noGrp="1"/>
+          </p:cNvSpPr>
+          <p:nvPr/>
+        </p:nvSpPr>
+        <p:spPr>
+          <a:xfrm xmlns:a="http://schemas.openxmlformats.org/drawingml/2006/main">
+            <a:off x="1000125" y="4836319"/>
+            <a:ext cx="10334625" cy="0"/>
+          </a:xfrm>
+          <a:prstGeom xmlns:a="http://schemas.openxmlformats.org/drawingml/2006/main" prst="line">
+            <a:avLst/>
+          </a:prstGeom>
+          <a:noFill xmlns:a="http://schemas.openxmlformats.org/drawingml/2006/main"/>
+          <a:ln xmlns:a="http://schemas.openxmlformats.org/drawingml/2006/main" w="9525">
+            <a:solidFill>
+              <a:srgbClr val="CEDBD3"/>
+            </a:solidFill>
+          </a:ln>
+        </p:spPr>
+      </p:sp>
+      <p:sp>
+        <p:nvSpPr>
+          <p:cNvPr id="18" name="cue-3">
+            <a:extLst xmlns:a="http://schemas.openxmlformats.org/drawingml/2006/main">
+              <a:ext uri="{FF2B5EF4-FFF2-40B4-BE49-F238E27FC236}">
+                <a16:creationId xmlns:a16="http://schemas.microsoft.com/office/drawing/2014/main" id="{CA7E4F72-C02E-4413-8E8F-72842EF9EA1C}"/>
+              </a:ext>
+            </a:extLst>
+          </p:cNvPr>
+          <p:cNvSpPr>
+            <a:spLocks xmlns:a="http://schemas.openxmlformats.org/drawingml/2006/main" noGrp="1"/>
+          </p:cNvSpPr>
+          <p:nvPr/>
+        </p:nvSpPr>
+        <p:spPr>
+          <a:xfrm xmlns:a="http://schemas.openxmlformats.org/drawingml/2006/main">
+            <a:off x="609600" y="4912519"/>
+            <a:ext cx="323850" cy="323850"/>
+          </a:xfrm>
+          <a:prstGeom xmlns:a="http://schemas.openxmlformats.org/drawingml/2006/main" prst="rect">
+            <a:avLst/>
+          </a:prstGeom>
+          <a:noFill xmlns:a="http://schemas.openxmlformats.org/drawingml/2006/main"/>
+          <a:ln xmlns:a="http://schemas.openxmlformats.org/drawingml/2006/main" w="0">
+            <a:noFill/>
+          </a:ln>
+        </p:spPr>
+        <p:txBody>
+          <a:bodyPr xmlns:a="http://schemas.openxmlformats.org/drawingml/2006/main" lIns="0" tIns="0" rIns="0" bIns="0" anchor="ctr">
+            <a:noAutofit/>
+          </a:bodyPr>
+          <a:lstStyle xmlns:a="http://schemas.openxmlformats.org/drawingml/2006/main"/>
+          <a:p xmlns:a="http://schemas.openxmlformats.org/drawingml/2006/main">
+            <a:pPr algn="l">
+              <a:defRPr sz="1350" b="1">
+                <a:solidFill>
+                  <a:srgbClr val="28685E"/>
+                </a:solidFill>
+                <a:latin typeface="Calibri"/>
+                <a:ea typeface="Calibri"/>
+                <a:cs typeface="Calibri"/>
+              </a:defRPr>
+            </a:pPr>
+            <a:r>
+              <a:rPr sz="1350" b="1">
+                <a:solidFill>
+                  <a:srgbClr val="28685E"/>
+                </a:solidFill>
+                <a:latin typeface="Calibri"/>
+                <a:ea typeface="Calibri"/>
+                <a:cs typeface="Calibri"/>
+              </a:rPr>
+              <a:t>04</a:t>
             </a:r>
           </a:p>
         </p:txBody>
